--- a/output/wordlabs-judge-3day.pptx
+++ b/output/wordlabs-judge-3day.pptx
@@ -5622,7 +5622,7 @@
                 <a:ea typeface="Trebuchet MS" pitchFamily="34" charset="-122"/>
                 <a:cs typeface="Trebuchet MS" pitchFamily="34" charset="-120"/>
               </a:rPr>
-              <a:t>0</a:t>
+              <a:t>1</a:t>
             </a:r>
             <a:pPr algn="ctr" indent="0" marL="0">
               <a:buNone/>
@@ -6071,7 +6071,7 @@
                 <a:ea typeface="Calibri" pitchFamily="34" charset="-122"/>
                 <a:cs typeface="Calibri" pitchFamily="34" charset="-120"/>
               </a:rPr>
-              <a:t> explained that making a </a:t>
+              <a:t> announced her </a:t>
             </a:r>
             <a:pPr algn="l" indent="0" marL="0">
               <a:buNone/>
@@ -6088,7 +6088,7 @@
                 <a:ea typeface="Calibri" pitchFamily="34" charset="-122"/>
                 <a:cs typeface="Calibri" pitchFamily="34" charset="-120"/>
               </a:rPr>
-              <a:t>misjudgement</a:t>
+              <a:t>judgement</a:t>
             </a:r>
             <a:pPr algn="l" indent="0" marL="0">
               <a:buNone/>
@@ -6102,7 +6102,7 @@
                 <a:ea typeface="Calibri" pitchFamily="34" charset="-122"/>
                 <a:cs typeface="Calibri" pitchFamily="34" charset="-120"/>
               </a:rPr>
-              <a:t> can have serious consequences for everyone involved.</a:t>
+              <a:t>, and the whole crowd fell silent.</a:t>
             </a:r>
             <a:endParaRPr lang="en-US" sz="1800" dirty="0"/>
           </a:p>
@@ -6385,7 +6385,7 @@
                 <a:ea typeface="Trebuchet MS" pitchFamily="34" charset="-122"/>
                 <a:cs typeface="Trebuchet MS" pitchFamily="34" charset="-120"/>
               </a:rPr>
-              <a:t>misjudgement</a:t>
+              <a:t>judgement</a:t>
             </a:r>
             <a:endParaRPr lang="en-US" sz="1400" dirty="0"/>
           </a:p>
@@ -10553,7 +10553,7 @@
                 <a:ea typeface="Trebuchet MS" pitchFamily="34" charset="-122"/>
                 <a:cs typeface="Trebuchet MS" pitchFamily="34" charset="-120"/>
               </a:rPr>
-              <a:t>misjudgement</a:t>
+              <a:t>judgement</a:t>
             </a:r>
             <a:endParaRPr lang="en-US" sz="2800" dirty="0"/>
           </a:p>
@@ -11380,7 +11380,7 @@
                 <a:ea typeface="Trebuchet MS" pitchFamily="34" charset="-122"/>
                 <a:cs typeface="Trebuchet MS" pitchFamily="34" charset="-120"/>
               </a:rPr>
-              <a:t>misjudgement</a:t>
+              <a:t>judgement</a:t>
             </a:r>
             <a:endParaRPr lang="en-US" sz="2800" dirty="0"/>
           </a:p>
@@ -11460,7 +11460,7 @@
         </p:nvSpPr>
         <p:spPr>
           <a:xfrm>
-            <a:off x="2221992" y="2258568"/>
+            <a:off x="2938272" y="2258568"/>
             <a:ext cx="1828800" cy="292608"/>
           </a:xfrm>
           <a:prstGeom prst="rect">
@@ -11469,11 +11469,11 @@
             </a:avLst>
           </a:prstGeom>
           <a:solidFill>
-            <a:srgbClr val="DDD6FE"/>
+            <a:srgbClr val="CCFBF1"/>
           </a:solidFill>
           <a:ln w="19050">
             <a:solidFill>
-              <a:srgbClr val="7C3AED"/>
+              <a:srgbClr val="0D9488"/>
             </a:solidFill>
             <a:prstDash val="solid"/>
           </a:ln>
@@ -11494,7 +11494,7 @@
         </p:nvSpPr>
         <p:spPr>
           <a:xfrm>
-            <a:off x="2221992" y="2258568"/>
+            <a:off x="2938272" y="2258568"/>
             <a:ext cx="1828800" cy="292608"/>
           </a:xfrm>
           <a:prstGeom prst="rect">
@@ -11513,13 +11513,13 @@
             <a:r>
               <a:rPr lang="en-US" sz="1300" b="1" dirty="0">
                 <a:solidFill>
-                  <a:srgbClr val="4C1D95"/>
+                  <a:srgbClr val="0F766E"/>
                 </a:solidFill>
                 <a:latin typeface="Trebuchet MS" pitchFamily="34" charset="0"/>
                 <a:ea typeface="Trebuchet MS" pitchFamily="34" charset="-122"/>
                 <a:cs typeface="Trebuchet MS" pitchFamily="34" charset="-120"/>
               </a:rPr>
-              <a:t>mis</a:t>
+              <a:t>judge</a:t>
             </a:r>
             <a:endParaRPr lang="en-US" sz="1300" dirty="0"/>
           </a:p>
@@ -11533,7 +11533,7 @@
         </p:nvSpPr>
         <p:spPr>
           <a:xfrm>
-            <a:off x="2221992" y="2569464"/>
+            <a:off x="2938272" y="2569464"/>
             <a:ext cx="1828800" cy="201168"/>
           </a:xfrm>
           <a:prstGeom prst="rect">
@@ -11558,7 +11558,7 @@
                 <a:ea typeface="Calibri" pitchFamily="34" charset="-122"/>
                 <a:cs typeface="Calibri" pitchFamily="34" charset="-120"/>
               </a:rPr>
-              <a:t>wrongly or badly</a:t>
+              <a:t>to decide or form an opinion</a:t>
             </a:r>
             <a:endParaRPr lang="en-US" sz="850" dirty="0"/>
           </a:p>
@@ -11572,7 +11572,7 @@
         </p:nvSpPr>
         <p:spPr>
           <a:xfrm>
-            <a:off x="4370832" y="2258568"/>
+            <a:off x="5803392" y="2258568"/>
             <a:ext cx="1828800" cy="292608"/>
           </a:xfrm>
           <a:prstGeom prst="rect">
@@ -11581,11 +11581,11 @@
             </a:avLst>
           </a:prstGeom>
           <a:solidFill>
-            <a:srgbClr val="CCFBF1"/>
+            <a:srgbClr val="FCE7F3"/>
           </a:solidFill>
           <a:ln w="19050">
             <a:solidFill>
-              <a:srgbClr val="0D9488"/>
+              <a:srgbClr val="DB2777"/>
             </a:solidFill>
             <a:prstDash val="solid"/>
           </a:ln>
@@ -11606,7 +11606,7 @@
         </p:nvSpPr>
         <p:spPr>
           <a:xfrm>
-            <a:off x="4370832" y="2258568"/>
+            <a:off x="5803392" y="2258568"/>
             <a:ext cx="1828800" cy="292608"/>
           </a:xfrm>
           <a:prstGeom prst="rect">
@@ -11625,13 +11625,13 @@
             <a:r>
               <a:rPr lang="en-US" sz="1300" b="1" dirty="0">
                 <a:solidFill>
-                  <a:srgbClr val="0F766E"/>
+                  <a:srgbClr val="9D174D"/>
                 </a:solidFill>
                 <a:latin typeface="Trebuchet MS" pitchFamily="34" charset="0"/>
                 <a:ea typeface="Trebuchet MS" pitchFamily="34" charset="-122"/>
                 <a:cs typeface="Trebuchet MS" pitchFamily="34" charset="-120"/>
               </a:rPr>
-              <a:t>judge</a:t>
+              <a:t>ment</a:t>
             </a:r>
             <a:endParaRPr lang="en-US" sz="1300" dirty="0"/>
           </a:p>
@@ -11645,7 +11645,7 @@
         </p:nvSpPr>
         <p:spPr>
           <a:xfrm>
-            <a:off x="4370832" y="2569464"/>
+            <a:off x="5803392" y="2569464"/>
             <a:ext cx="1828800" cy="201168"/>
           </a:xfrm>
           <a:prstGeom prst="rect">
@@ -11670,7 +11670,7 @@
                 <a:ea typeface="Calibri" pitchFamily="34" charset="-122"/>
                 <a:cs typeface="Calibri" pitchFamily="34" charset="-120"/>
               </a:rPr>
-              <a:t>to decide or form an opinion</a:t>
+              <a:t>result or state of</a:t>
             </a:r>
             <a:endParaRPr lang="en-US" sz="850" dirty="0"/>
           </a:p>
@@ -11684,30 +11684,23 @@
         </p:nvSpPr>
         <p:spPr>
           <a:xfrm>
-            <a:off x="6519672" y="2258568"/>
-            <a:ext cx="1828800" cy="292608"/>
+            <a:off x="365760" y="3273552"/>
+            <a:ext cx="1371600" cy="658368"/>
           </a:xfrm>
           <a:prstGeom prst="rect">
             <a:avLst>
-              <a:gd name="adj" fmla="val 25000"/>
+              <a:gd name="adj" fmla="val 8333"/>
             </a:avLst>
           </a:prstGeom>
           <a:solidFill>
-            <a:srgbClr val="FCE7F3"/>
-          </a:solidFill>
-          <a:ln w="19050">
-            <a:solidFill>
-              <a:srgbClr val="DB2777"/>
-            </a:solidFill>
-            <a:prstDash val="solid"/>
-          </a:ln>
-          <a:effectLst>
-            <a:outerShdw sx="100000" sy="100000" kx="0" ky="0" algn="bl" rotWithShape="0" blurRad="101600" dist="38100" dir="8100000">
-              <a:srgbClr val="000000">
-                <a:alpha val="12000"/>
-              </a:srgbClr>
-            </a:outerShdw>
-          </a:effectLst>
+            <a:srgbClr val="E2E8F0"/>
+          </a:solidFill>
+          <a:ln w="12700">
+            <a:solidFill>
+              <a:srgbClr val="E2E8F0"/>
+            </a:solidFill>
+            <a:prstDash val="solid"/>
+          </a:ln>
         </p:spPr>
       </p:sp>
       <p:sp>
@@ -11718,8 +11711,8 @@
         </p:nvSpPr>
         <p:spPr>
           <a:xfrm>
-            <a:off x="6519672" y="2258568"/>
-            <a:ext cx="1828800" cy="292608"/>
+            <a:off x="365760" y="3273552"/>
+            <a:ext cx="1371600" cy="658368"/>
           </a:xfrm>
           <a:prstGeom prst="rect">
             <a:avLst/>
@@ -11735,73 +11728,100 @@
               <a:buNone/>
             </a:pPr>
             <a:r>
-              <a:rPr lang="en-US" sz="1300" b="1" dirty="0">
-                <a:solidFill>
-                  <a:srgbClr val="9D174D"/>
+              <a:rPr lang="en-US" sz="1100" b="1" dirty="0">
+                <a:solidFill>
+                  <a:srgbClr val="475569"/>
                 </a:solidFill>
                 <a:latin typeface="Trebuchet MS" pitchFamily="34" charset="0"/>
                 <a:ea typeface="Trebuchet MS" pitchFamily="34" charset="-122"/>
                 <a:cs typeface="Trebuchet MS" pitchFamily="34" charset="-120"/>
               </a:rPr>
-              <a:t>ment</a:t>
-            </a:r>
-            <a:endParaRPr lang="en-US" sz="1300" dirty="0"/>
-          </a:p>
-        </p:txBody>
-      </p:sp>
-      <p:sp>
-        <p:nvSpPr>
-          <p:cNvPr id="24" name="Text 22"/>
-          <p:cNvSpPr/>
-          <p:nvPr/>
-        </p:nvSpPr>
-        <p:spPr>
-          <a:xfrm>
-            <a:off x="6519672" y="2569464"/>
-            <a:ext cx="1828800" cy="201168"/>
-          </a:xfrm>
-          <a:prstGeom prst="rect">
-            <a:avLst/>
-          </a:prstGeom>
-          <a:noFill/>
-          <a:ln/>
-        </p:spPr>
-        <p:txBody>
-          <a:bodyPr wrap="square" lIns="0" tIns="0" rIns="0" bIns="0" rtlCol="0" anchor="t"/>
-          <a:lstStyle/>
-          <a:p>
-            <a:pPr algn="ctr" indent="0" marL="0">
-              <a:buNone/>
-            </a:pPr>
-            <a:r>
-              <a:rPr lang="en-US" sz="850" dirty="0">
-                <a:solidFill>
-                  <a:srgbClr val="475569"/>
+              <a:t>Syllables</a:t>
+            </a:r>
+            <a:endParaRPr lang="en-US" sz="1100" dirty="0"/>
+          </a:p>
+        </p:txBody>
+      </p:sp>
+      <p:sp>
+        <p:nvSpPr>
+          <p:cNvPr id="24" name="Shape 22"/>
+          <p:cNvSpPr/>
+          <p:nvPr/>
+        </p:nvSpPr>
+        <p:spPr>
+          <a:xfrm>
+            <a:off x="1874520" y="3273552"/>
+            <a:ext cx="6903720" cy="658368"/>
+          </a:xfrm>
+          <a:prstGeom prst="rect">
+            <a:avLst>
+              <a:gd name="adj" fmla="val 8333"/>
+            </a:avLst>
+          </a:prstGeom>
+          <a:solidFill>
+            <a:srgbClr val="F8FAFC"/>
+          </a:solidFill>
+          <a:ln w="12700">
+            <a:solidFill>
+              <a:srgbClr val="E2E8F0"/>
+            </a:solidFill>
+            <a:prstDash val="dash"/>
+          </a:ln>
+        </p:spPr>
+      </p:sp>
+      <p:sp>
+        <p:nvSpPr>
+          <p:cNvPr id="25" name="Text 23"/>
+          <p:cNvSpPr/>
+          <p:nvPr/>
+        </p:nvSpPr>
+        <p:spPr>
+          <a:xfrm>
+            <a:off x="1874520" y="3273552"/>
+            <a:ext cx="6903720" cy="658368"/>
+          </a:xfrm>
+          <a:prstGeom prst="rect">
+            <a:avLst/>
+          </a:prstGeom>
+          <a:noFill/>
+          <a:ln/>
+        </p:spPr>
+        <p:txBody>
+          <a:bodyPr wrap="square" rtlCol="0" anchor="ctr"/>
+          <a:lstStyle/>
+          <a:p>
+            <a:pPr algn="ctr" indent="0" marL="0">
+              <a:buNone/>
+            </a:pPr>
+            <a:r>
+              <a:rPr lang="en-US" sz="1100" i="1" dirty="0">
+                <a:solidFill>
+                  <a:srgbClr val="CBD5E1"/>
                 </a:solidFill>
                 <a:latin typeface="Calibri" pitchFamily="34" charset="0"/>
                 <a:ea typeface="Calibri" pitchFamily="34" charset="-122"/>
                 <a:cs typeface="Calibri" pitchFamily="34" charset="-120"/>
               </a:rPr>
-              <a:t>result or state of</a:t>
-            </a:r>
-            <a:endParaRPr lang="en-US" sz="850" dirty="0"/>
-          </a:p>
-        </p:txBody>
-      </p:sp>
-      <p:sp>
-        <p:nvSpPr>
-          <p:cNvPr id="25" name="Shape 23"/>
-          <p:cNvSpPr/>
-          <p:nvPr/>
-        </p:nvSpPr>
-        <p:spPr>
-          <a:xfrm>
-            <a:off x="365760" y="3273552"/>
-            <a:ext cx="1371600" cy="658368"/>
+              <a:t>Write here...</a:t>
+            </a:r>
+            <a:endParaRPr lang="en-US" sz="1100" dirty="0"/>
+          </a:p>
+        </p:txBody>
+      </p:sp>
+      <p:sp>
+        <p:nvSpPr>
+          <p:cNvPr id="26" name="Shape 24"/>
+          <p:cNvSpPr/>
+          <p:nvPr/>
+        </p:nvSpPr>
+        <p:spPr>
+          <a:xfrm>
+            <a:off x="365760" y="4096512"/>
+            <a:ext cx="1371600" cy="804672"/>
           </a:xfrm>
           <a:prstGeom prst="rect">
             <a:avLst>
-              <a:gd name="adj" fmla="val 8333"/>
+              <a:gd name="adj" fmla="val 6818"/>
             </a:avLst>
           </a:prstGeom>
           <a:solidFill>
@@ -11817,14 +11837,14 @@
       </p:sp>
       <p:sp>
         <p:nvSpPr>
-          <p:cNvPr id="26" name="Text 24"/>
-          <p:cNvSpPr/>
-          <p:nvPr/>
-        </p:nvSpPr>
-        <p:spPr>
-          <a:xfrm>
-            <a:off x="365760" y="3273552"/>
-            <a:ext cx="1371600" cy="658368"/>
+          <p:cNvPr id="27" name="Text 25"/>
+          <p:cNvSpPr/>
+          <p:nvPr/>
+        </p:nvSpPr>
+        <p:spPr>
+          <a:xfrm>
+            <a:off x="365760" y="4096512"/>
+            <a:ext cx="1371600" cy="804672"/>
           </a:xfrm>
           <a:prstGeom prst="rect">
             <a:avLst/>
@@ -11848,7 +11868,7 @@
                 <a:ea typeface="Trebuchet MS" pitchFamily="34" charset="-122"/>
                 <a:cs typeface="Trebuchet MS" pitchFamily="34" charset="-120"/>
               </a:rPr>
-              <a:t>Syllables</a:t>
+              <a:t>Phonemes</a:t>
             </a:r>
             <a:endParaRPr lang="en-US" sz="1100" dirty="0"/>
           </a:p>
@@ -11856,80 +11876,14 @@
       </p:sp>
       <p:sp>
         <p:nvSpPr>
-          <p:cNvPr id="27" name="Shape 25"/>
-          <p:cNvSpPr/>
-          <p:nvPr/>
-        </p:nvSpPr>
-        <p:spPr>
-          <a:xfrm>
-            <a:off x="1874520" y="3273552"/>
-            <a:ext cx="6903720" cy="658368"/>
-          </a:xfrm>
-          <a:prstGeom prst="rect">
-            <a:avLst>
-              <a:gd name="adj" fmla="val 8333"/>
-            </a:avLst>
-          </a:prstGeom>
-          <a:solidFill>
-            <a:srgbClr val="F8FAFC"/>
-          </a:solidFill>
-          <a:ln w="12700">
-            <a:solidFill>
-              <a:srgbClr val="E2E8F0"/>
-            </a:solidFill>
-            <a:prstDash val="dash"/>
-          </a:ln>
-        </p:spPr>
-      </p:sp>
-      <p:sp>
-        <p:nvSpPr>
-          <p:cNvPr id="28" name="Text 26"/>
-          <p:cNvSpPr/>
-          <p:nvPr/>
-        </p:nvSpPr>
-        <p:spPr>
-          <a:xfrm>
-            <a:off x="1874520" y="3273552"/>
-            <a:ext cx="6903720" cy="658368"/>
-          </a:xfrm>
-          <a:prstGeom prst="rect">
-            <a:avLst/>
-          </a:prstGeom>
-          <a:noFill/>
-          <a:ln/>
-        </p:spPr>
-        <p:txBody>
-          <a:bodyPr wrap="square" rtlCol="0" anchor="ctr"/>
-          <a:lstStyle/>
-          <a:p>
-            <a:pPr algn="ctr" indent="0" marL="0">
-              <a:buNone/>
-            </a:pPr>
-            <a:r>
-              <a:rPr lang="en-US" sz="1100" i="1" dirty="0">
-                <a:solidFill>
-                  <a:srgbClr val="CBD5E1"/>
-                </a:solidFill>
-                <a:latin typeface="Calibri" pitchFamily="34" charset="0"/>
-                <a:ea typeface="Calibri" pitchFamily="34" charset="-122"/>
-                <a:cs typeface="Calibri" pitchFamily="34" charset="-120"/>
-              </a:rPr>
-              <a:t>Write here...</a:t>
-            </a:r>
-            <a:endParaRPr lang="en-US" sz="1100" dirty="0"/>
-          </a:p>
-        </p:txBody>
-      </p:sp>
-      <p:sp>
-        <p:nvSpPr>
-          <p:cNvPr id="29" name="Shape 27"/>
-          <p:cNvSpPr/>
-          <p:nvPr/>
-        </p:nvSpPr>
-        <p:spPr>
-          <a:xfrm>
-            <a:off x="365760" y="4096512"/>
-            <a:ext cx="1371600" cy="804672"/>
+          <p:cNvPr id="28" name="Shape 26"/>
+          <p:cNvSpPr/>
+          <p:nvPr/>
+        </p:nvSpPr>
+        <p:spPr>
+          <a:xfrm>
+            <a:off x="1874520" y="4096512"/>
+            <a:ext cx="6903720" cy="804672"/>
           </a:xfrm>
           <a:prstGeom prst="rect">
             <a:avLst>
@@ -11937,85 +11891,19 @@
             </a:avLst>
           </a:prstGeom>
           <a:solidFill>
-            <a:srgbClr val="E2E8F0"/>
+            <a:srgbClr val="F8FAFC"/>
           </a:solidFill>
           <a:ln w="12700">
             <a:solidFill>
               <a:srgbClr val="E2E8F0"/>
             </a:solidFill>
-            <a:prstDash val="solid"/>
-          </a:ln>
-        </p:spPr>
-      </p:sp>
-      <p:sp>
-        <p:nvSpPr>
-          <p:cNvPr id="30" name="Text 28"/>
-          <p:cNvSpPr/>
-          <p:nvPr/>
-        </p:nvSpPr>
-        <p:spPr>
-          <a:xfrm>
-            <a:off x="365760" y="4096512"/>
-            <a:ext cx="1371600" cy="804672"/>
-          </a:xfrm>
-          <a:prstGeom prst="rect">
-            <a:avLst/>
-          </a:prstGeom>
-          <a:noFill/>
-          <a:ln/>
-        </p:spPr>
-        <p:txBody>
-          <a:bodyPr wrap="square" lIns="0" tIns="0" rIns="0" bIns="0" rtlCol="0" anchor="ctr"/>
-          <a:lstStyle/>
-          <a:p>
-            <a:pPr algn="ctr" indent="0" marL="0">
-              <a:buNone/>
-            </a:pPr>
-            <a:r>
-              <a:rPr lang="en-US" sz="1100" b="1" dirty="0">
-                <a:solidFill>
-                  <a:srgbClr val="475569"/>
-                </a:solidFill>
-                <a:latin typeface="Trebuchet MS" pitchFamily="34" charset="0"/>
-                <a:ea typeface="Trebuchet MS" pitchFamily="34" charset="-122"/>
-                <a:cs typeface="Trebuchet MS" pitchFamily="34" charset="-120"/>
-              </a:rPr>
-              <a:t>Phonemes</a:t>
-            </a:r>
-            <a:endParaRPr lang="en-US" sz="1100" dirty="0"/>
-          </a:p>
-        </p:txBody>
-      </p:sp>
-      <p:sp>
-        <p:nvSpPr>
-          <p:cNvPr id="31" name="Shape 29"/>
-          <p:cNvSpPr/>
-          <p:nvPr/>
-        </p:nvSpPr>
-        <p:spPr>
-          <a:xfrm>
-            <a:off x="1874520" y="4096512"/>
-            <a:ext cx="6903720" cy="804672"/>
-          </a:xfrm>
-          <a:prstGeom prst="rect">
-            <a:avLst>
-              <a:gd name="adj" fmla="val 6818"/>
-            </a:avLst>
-          </a:prstGeom>
-          <a:solidFill>
-            <a:srgbClr val="F8FAFC"/>
-          </a:solidFill>
-          <a:ln w="12700">
-            <a:solidFill>
-              <a:srgbClr val="E2E8F0"/>
-            </a:solidFill>
             <a:prstDash val="dash"/>
           </a:ln>
         </p:spPr>
       </p:sp>
       <p:sp>
         <p:nvSpPr>
-          <p:cNvPr id="32" name="Text 30"/>
+          <p:cNvPr id="29" name="Text 27"/>
           <p:cNvSpPr/>
           <p:nvPr/>
         </p:nvSpPr>
@@ -12477,7 +12365,7 @@
                 <a:ea typeface="Trebuchet MS" pitchFamily="34" charset="-122"/>
                 <a:cs typeface="Trebuchet MS" pitchFamily="34" charset="-120"/>
               </a:rPr>
-              <a:t>misjudgement</a:t>
+              <a:t>judgement</a:t>
             </a:r>
             <a:endParaRPr lang="en-US" sz="2800" dirty="0"/>
           </a:p>
@@ -12557,7 +12445,7 @@
         </p:nvSpPr>
         <p:spPr>
           <a:xfrm>
-            <a:off x="2221992" y="2258568"/>
+            <a:off x="2938272" y="2258568"/>
             <a:ext cx="1828800" cy="292608"/>
           </a:xfrm>
           <a:prstGeom prst="rect">
@@ -12566,11 +12454,11 @@
             </a:avLst>
           </a:prstGeom>
           <a:solidFill>
-            <a:srgbClr val="DDD6FE"/>
+            <a:srgbClr val="CCFBF1"/>
           </a:solidFill>
           <a:ln w="19050">
             <a:solidFill>
-              <a:srgbClr val="7C3AED"/>
+              <a:srgbClr val="0D9488"/>
             </a:solidFill>
             <a:prstDash val="solid"/>
           </a:ln>
@@ -12591,7 +12479,7 @@
         </p:nvSpPr>
         <p:spPr>
           <a:xfrm>
-            <a:off x="2221992" y="2258568"/>
+            <a:off x="2938272" y="2258568"/>
             <a:ext cx="1828800" cy="292608"/>
           </a:xfrm>
           <a:prstGeom prst="rect">
@@ -12610,13 +12498,13 @@
             <a:r>
               <a:rPr lang="en-US" sz="1300" b="1" dirty="0">
                 <a:solidFill>
-                  <a:srgbClr val="4C1D95"/>
+                  <a:srgbClr val="0F766E"/>
                 </a:solidFill>
                 <a:latin typeface="Trebuchet MS" pitchFamily="34" charset="0"/>
                 <a:ea typeface="Trebuchet MS" pitchFamily="34" charset="-122"/>
                 <a:cs typeface="Trebuchet MS" pitchFamily="34" charset="-120"/>
               </a:rPr>
-              <a:t>mis</a:t>
+              <a:t>judge</a:t>
             </a:r>
             <a:endParaRPr lang="en-US" sz="1300" dirty="0"/>
           </a:p>
@@ -12630,7 +12518,7 @@
         </p:nvSpPr>
         <p:spPr>
           <a:xfrm>
-            <a:off x="2221992" y="2569464"/>
+            <a:off x="2938272" y="2569464"/>
             <a:ext cx="1828800" cy="201168"/>
           </a:xfrm>
           <a:prstGeom prst="rect">
@@ -12655,7 +12543,7 @@
                 <a:ea typeface="Calibri" pitchFamily="34" charset="-122"/>
                 <a:cs typeface="Calibri" pitchFamily="34" charset="-120"/>
               </a:rPr>
-              <a:t>wrongly or badly</a:t>
+              <a:t>to decide or form an opinion</a:t>
             </a:r>
             <a:endParaRPr lang="en-US" sz="850" dirty="0"/>
           </a:p>
@@ -12669,7 +12557,7 @@
         </p:nvSpPr>
         <p:spPr>
           <a:xfrm>
-            <a:off x="4370832" y="2258568"/>
+            <a:off x="5803392" y="2258568"/>
             <a:ext cx="1828800" cy="292608"/>
           </a:xfrm>
           <a:prstGeom prst="rect">
@@ -12678,11 +12566,11 @@
             </a:avLst>
           </a:prstGeom>
           <a:solidFill>
-            <a:srgbClr val="CCFBF1"/>
+            <a:srgbClr val="FCE7F3"/>
           </a:solidFill>
           <a:ln w="19050">
             <a:solidFill>
-              <a:srgbClr val="0D9488"/>
+              <a:srgbClr val="DB2777"/>
             </a:solidFill>
             <a:prstDash val="solid"/>
           </a:ln>
@@ -12703,7 +12591,7 @@
         </p:nvSpPr>
         <p:spPr>
           <a:xfrm>
-            <a:off x="4370832" y="2258568"/>
+            <a:off x="5803392" y="2258568"/>
             <a:ext cx="1828800" cy="292608"/>
           </a:xfrm>
           <a:prstGeom prst="rect">
@@ -12722,13 +12610,13 @@
             <a:r>
               <a:rPr lang="en-US" sz="1300" b="1" dirty="0">
                 <a:solidFill>
-                  <a:srgbClr val="0F766E"/>
+                  <a:srgbClr val="9D174D"/>
                 </a:solidFill>
                 <a:latin typeface="Trebuchet MS" pitchFamily="34" charset="0"/>
                 <a:ea typeface="Trebuchet MS" pitchFamily="34" charset="-122"/>
                 <a:cs typeface="Trebuchet MS" pitchFamily="34" charset="-120"/>
               </a:rPr>
-              <a:t>judge</a:t>
+              <a:t>ment</a:t>
             </a:r>
             <a:endParaRPr lang="en-US" sz="1300" dirty="0"/>
           </a:p>
@@ -12742,7 +12630,7 @@
         </p:nvSpPr>
         <p:spPr>
           <a:xfrm>
-            <a:off x="4370832" y="2569464"/>
+            <a:off x="5803392" y="2569464"/>
             <a:ext cx="1828800" cy="201168"/>
           </a:xfrm>
           <a:prstGeom prst="rect">
@@ -12767,7 +12655,7 @@
                 <a:ea typeface="Calibri" pitchFamily="34" charset="-122"/>
                 <a:cs typeface="Calibri" pitchFamily="34" charset="-120"/>
               </a:rPr>
-              <a:t>to decide or form an opinion</a:t>
+              <a:t>result or state of</a:t>
             </a:r>
             <a:endParaRPr lang="en-US" sz="850" dirty="0"/>
           </a:p>
@@ -12781,30 +12669,23 @@
         </p:nvSpPr>
         <p:spPr>
           <a:xfrm>
-            <a:off x="6519672" y="2258568"/>
-            <a:ext cx="1828800" cy="292608"/>
+            <a:off x="365760" y="3273552"/>
+            <a:ext cx="1371600" cy="658368"/>
           </a:xfrm>
           <a:prstGeom prst="rect">
             <a:avLst>
-              <a:gd name="adj" fmla="val 25000"/>
+              <a:gd name="adj" fmla="val 8333"/>
             </a:avLst>
           </a:prstGeom>
           <a:solidFill>
-            <a:srgbClr val="FCE7F3"/>
-          </a:solidFill>
-          <a:ln w="19050">
-            <a:solidFill>
-              <a:srgbClr val="DB2777"/>
-            </a:solidFill>
-            <a:prstDash val="solid"/>
-          </a:ln>
-          <a:effectLst>
-            <a:outerShdw sx="100000" sy="100000" kx="0" ky="0" algn="bl" rotWithShape="0" blurRad="101600" dist="38100" dir="8100000">
-              <a:srgbClr val="000000">
-                <a:alpha val="12000"/>
-              </a:srgbClr>
-            </a:outerShdw>
-          </a:effectLst>
+            <a:srgbClr val="E2E8F0"/>
+          </a:solidFill>
+          <a:ln w="12700">
+            <a:solidFill>
+              <a:srgbClr val="E2E8F0"/>
+            </a:solidFill>
+            <a:prstDash val="solid"/>
+          </a:ln>
         </p:spPr>
       </p:sp>
       <p:sp>
@@ -12815,8 +12696,8 @@
         </p:nvSpPr>
         <p:spPr>
           <a:xfrm>
-            <a:off x="6519672" y="2258568"/>
-            <a:ext cx="1828800" cy="292608"/>
+            <a:off x="365760" y="3273552"/>
+            <a:ext cx="1371600" cy="658368"/>
           </a:xfrm>
           <a:prstGeom prst="rect">
             <a:avLst/>
@@ -12832,69 +12713,30 @@
               <a:buNone/>
             </a:pPr>
             <a:r>
-              <a:rPr lang="en-US" sz="1300" b="1" dirty="0">
-                <a:solidFill>
-                  <a:srgbClr val="9D174D"/>
+              <a:rPr lang="en-US" sz="1100" b="1" dirty="0">
+                <a:solidFill>
+                  <a:srgbClr val="475569"/>
                 </a:solidFill>
                 <a:latin typeface="Trebuchet MS" pitchFamily="34" charset="0"/>
                 <a:ea typeface="Trebuchet MS" pitchFamily="34" charset="-122"/>
                 <a:cs typeface="Trebuchet MS" pitchFamily="34" charset="-120"/>
               </a:rPr>
-              <a:t>ment</a:t>
-            </a:r>
-            <a:endParaRPr lang="en-US" sz="1300" dirty="0"/>
-          </a:p>
-        </p:txBody>
-      </p:sp>
-      <p:sp>
-        <p:nvSpPr>
-          <p:cNvPr id="24" name="Text 22"/>
-          <p:cNvSpPr/>
-          <p:nvPr/>
-        </p:nvSpPr>
-        <p:spPr>
-          <a:xfrm>
-            <a:off x="6519672" y="2569464"/>
-            <a:ext cx="1828800" cy="201168"/>
-          </a:xfrm>
-          <a:prstGeom prst="rect">
-            <a:avLst/>
-          </a:prstGeom>
-          <a:noFill/>
-          <a:ln/>
-        </p:spPr>
-        <p:txBody>
-          <a:bodyPr wrap="square" lIns="0" tIns="0" rIns="0" bIns="0" rtlCol="0" anchor="t"/>
-          <a:lstStyle/>
-          <a:p>
-            <a:pPr algn="ctr" indent="0" marL="0">
-              <a:buNone/>
-            </a:pPr>
-            <a:r>
-              <a:rPr lang="en-US" sz="850" dirty="0">
-                <a:solidFill>
-                  <a:srgbClr val="475569"/>
-                </a:solidFill>
-                <a:latin typeface="Calibri" pitchFamily="34" charset="0"/>
-                <a:ea typeface="Calibri" pitchFamily="34" charset="-122"/>
-                <a:cs typeface="Calibri" pitchFamily="34" charset="-120"/>
-              </a:rPr>
-              <a:t>result or state of</a:t>
-            </a:r>
-            <a:endParaRPr lang="en-US" sz="850" dirty="0"/>
-          </a:p>
-        </p:txBody>
-      </p:sp>
-      <p:sp>
-        <p:nvSpPr>
-          <p:cNvPr id="25" name="Shape 23"/>
-          <p:cNvSpPr/>
-          <p:nvPr/>
-        </p:nvSpPr>
-        <p:spPr>
-          <a:xfrm>
-            <a:off x="365760" y="3273552"/>
-            <a:ext cx="1371600" cy="658368"/>
+              <a:t>Syllables</a:t>
+            </a:r>
+            <a:endParaRPr lang="en-US" sz="1100" dirty="0"/>
+          </a:p>
+        </p:txBody>
+      </p:sp>
+      <p:sp>
+        <p:nvSpPr>
+          <p:cNvPr id="24" name="Shape 22"/>
+          <p:cNvSpPr/>
+          <p:nvPr/>
+        </p:nvSpPr>
+        <p:spPr>
+          <a:xfrm>
+            <a:off x="1874520" y="3273552"/>
+            <a:ext cx="6903720" cy="658368"/>
           </a:xfrm>
           <a:prstGeom prst="rect">
             <a:avLst>
@@ -12902,11 +12744,38 @@
             </a:avLst>
           </a:prstGeom>
           <a:solidFill>
-            <a:srgbClr val="E2E8F0"/>
-          </a:solidFill>
-          <a:ln w="12700">
-            <a:solidFill>
-              <a:srgbClr val="E2E8F0"/>
+            <a:srgbClr val="CCFBF1"/>
+          </a:solidFill>
+          <a:ln w="12700">
+            <a:solidFill>
+              <a:srgbClr val="0D9488"/>
+            </a:solidFill>
+            <a:prstDash val="solid"/>
+          </a:ln>
+        </p:spPr>
+      </p:sp>
+      <p:sp>
+        <p:nvSpPr>
+          <p:cNvPr id="25" name="Shape 23"/>
+          <p:cNvSpPr/>
+          <p:nvPr/>
+        </p:nvSpPr>
+        <p:spPr>
+          <a:xfrm>
+            <a:off x="2999232" y="3364992"/>
+            <a:ext cx="1645920" cy="475488"/>
+          </a:xfrm>
+          <a:prstGeom prst="rect">
+            <a:avLst>
+              <a:gd name="adj" fmla="val 9615"/>
+            </a:avLst>
+          </a:prstGeom>
+          <a:solidFill>
+            <a:srgbClr val="FFFFFF"/>
+          </a:solidFill>
+          <a:ln w="12700">
+            <a:solidFill>
+              <a:srgbClr val="0D9488"/>
             </a:solidFill>
             <a:prstDash val="solid"/>
           </a:ln>
@@ -12920,8 +12789,8 @@
         </p:nvSpPr>
         <p:spPr>
           <a:xfrm>
-            <a:off x="365760" y="3273552"/>
-            <a:ext cx="1371600" cy="658368"/>
+            <a:off x="2999232" y="3364992"/>
+            <a:ext cx="1645920" cy="475488"/>
           </a:xfrm>
           <a:prstGeom prst="rect">
             <a:avLst/>
@@ -12937,46 +12806,58 @@
               <a:buNone/>
             </a:pPr>
             <a:r>
-              <a:rPr lang="en-US" sz="1100" b="1" dirty="0">
-                <a:solidFill>
-                  <a:srgbClr val="475569"/>
+              <a:rPr lang="en-US" sz="1400" b="1" dirty="0">
+                <a:solidFill>
+                  <a:srgbClr val="0D9488"/>
                 </a:solidFill>
                 <a:latin typeface="Trebuchet MS" pitchFamily="34" charset="0"/>
                 <a:ea typeface="Trebuchet MS" pitchFamily="34" charset="-122"/>
                 <a:cs typeface="Trebuchet MS" pitchFamily="34" charset="-120"/>
               </a:rPr>
-              <a:t>Syllables</a:t>
-            </a:r>
-            <a:endParaRPr lang="en-US" sz="1100" dirty="0"/>
-          </a:p>
-        </p:txBody>
-      </p:sp>
-      <p:sp>
-        <p:nvSpPr>
-          <p:cNvPr id="27" name="Shape 25"/>
-          <p:cNvSpPr/>
-          <p:nvPr/>
-        </p:nvSpPr>
-        <p:spPr>
-          <a:xfrm>
-            <a:off x="1874520" y="3273552"/>
-            <a:ext cx="6903720" cy="658368"/>
-          </a:xfrm>
-          <a:prstGeom prst="rect">
-            <a:avLst>
-              <a:gd name="adj" fmla="val 8333"/>
-            </a:avLst>
-          </a:prstGeom>
-          <a:solidFill>
-            <a:srgbClr val="CCFBF1"/>
-          </a:solidFill>
-          <a:ln w="12700">
-            <a:solidFill>
-              <a:srgbClr val="0D9488"/>
-            </a:solidFill>
-            <a:prstDash val="solid"/>
-          </a:ln>
-        </p:spPr>
+              <a:t>judge</a:t>
+            </a:r>
+            <a:endParaRPr lang="en-US" sz="1400" dirty="0"/>
+          </a:p>
+        </p:txBody>
+      </p:sp>
+      <p:sp>
+        <p:nvSpPr>
+          <p:cNvPr id="27" name="Text 25"/>
+          <p:cNvSpPr/>
+          <p:nvPr/>
+        </p:nvSpPr>
+        <p:spPr>
+          <a:xfrm>
+            <a:off x="4645152" y="3364992"/>
+            <a:ext cx="1097280" cy="475488"/>
+          </a:xfrm>
+          <a:prstGeom prst="rect">
+            <a:avLst/>
+          </a:prstGeom>
+          <a:noFill/>
+          <a:ln/>
+        </p:spPr>
+        <p:txBody>
+          <a:bodyPr wrap="square" lIns="0" tIns="0" rIns="0" bIns="0" rtlCol="0" anchor="ctr"/>
+          <a:lstStyle/>
+          <a:p>
+            <a:pPr algn="ctr" indent="0" marL="0">
+              <a:buNone/>
+            </a:pPr>
+            <a:r>
+              <a:rPr lang="en-US" sz="1600" b="1" dirty="0">
+                <a:solidFill>
+                  <a:srgbClr val="0D9488"/>
+                </a:solidFill>
+                <a:latin typeface="Trebuchet MS" pitchFamily="34" charset="0"/>
+                <a:ea typeface="Trebuchet MS" pitchFamily="34" charset="-122"/>
+                <a:cs typeface="Trebuchet MS" pitchFamily="34" charset="-120"/>
+              </a:rPr>
+              <a:t>·</a:t>
+            </a:r>
+            <a:endParaRPr lang="en-US" sz="1600" dirty="0"/>
+          </a:p>
+        </p:txBody>
       </p:sp>
       <p:sp>
         <p:nvSpPr>
@@ -12986,7 +12867,7 @@
         </p:nvSpPr>
         <p:spPr>
           <a:xfrm>
-            <a:off x="2313432" y="3364992"/>
+            <a:off x="5742432" y="3364992"/>
             <a:ext cx="1645920" cy="475488"/>
           </a:xfrm>
           <a:prstGeom prst="rect">
@@ -13013,7 +12894,7 @@
         </p:nvSpPr>
         <p:spPr>
           <a:xfrm>
-            <a:off x="2313432" y="3364992"/>
+            <a:off x="5742432" y="3364992"/>
             <a:ext cx="1645920" cy="475488"/>
           </a:xfrm>
           <a:prstGeom prst="rect">
@@ -13038,7 +12919,7 @@
                 <a:ea typeface="Trebuchet MS" pitchFamily="34" charset="-122"/>
                 <a:cs typeface="Trebuchet MS" pitchFamily="34" charset="-120"/>
               </a:rPr>
-              <a:t>mis</a:t>
+              <a:t>ment</a:t>
             </a:r>
             <a:endParaRPr lang="en-US" sz="1400" dirty="0"/>
           </a:p>
@@ -13046,14 +12927,41 @@
       </p:sp>
       <p:sp>
         <p:nvSpPr>
-          <p:cNvPr id="30" name="Text 28"/>
-          <p:cNvSpPr/>
-          <p:nvPr/>
-        </p:nvSpPr>
-        <p:spPr>
-          <a:xfrm>
-            <a:off x="3959352" y="3364992"/>
-            <a:ext cx="411480" cy="475488"/>
+          <p:cNvPr id="30" name="Shape 28"/>
+          <p:cNvSpPr/>
+          <p:nvPr/>
+        </p:nvSpPr>
+        <p:spPr>
+          <a:xfrm>
+            <a:off x="365760" y="4096512"/>
+            <a:ext cx="1371600" cy="804672"/>
+          </a:xfrm>
+          <a:prstGeom prst="rect">
+            <a:avLst>
+              <a:gd name="adj" fmla="val 6818"/>
+            </a:avLst>
+          </a:prstGeom>
+          <a:solidFill>
+            <a:srgbClr val="E2E8F0"/>
+          </a:solidFill>
+          <a:ln w="12700">
+            <a:solidFill>
+              <a:srgbClr val="E2E8F0"/>
+            </a:solidFill>
+            <a:prstDash val="solid"/>
+          </a:ln>
+        </p:spPr>
+      </p:sp>
+      <p:sp>
+        <p:nvSpPr>
+          <p:cNvPr id="31" name="Text 29"/>
+          <p:cNvSpPr/>
+          <p:nvPr/>
+        </p:nvSpPr>
+        <p:spPr>
+          <a:xfrm>
+            <a:off x="365760" y="4096512"/>
+            <a:ext cx="1371600" cy="804672"/>
           </a:xfrm>
           <a:prstGeom prst="rect">
             <a:avLst/>
@@ -13069,201 +12977,30 @@
               <a:buNone/>
             </a:pPr>
             <a:r>
-              <a:rPr lang="en-US" sz="1600" b="1" dirty="0">
-                <a:solidFill>
-                  <a:srgbClr val="0D9488"/>
+              <a:rPr lang="en-US" sz="1100" b="1" dirty="0">
+                <a:solidFill>
+                  <a:srgbClr val="475569"/>
                 </a:solidFill>
                 <a:latin typeface="Trebuchet MS" pitchFamily="34" charset="0"/>
                 <a:ea typeface="Trebuchet MS" pitchFamily="34" charset="-122"/>
                 <a:cs typeface="Trebuchet MS" pitchFamily="34" charset="-120"/>
               </a:rPr>
-              <a:t>·</a:t>
-            </a:r>
-            <a:endParaRPr lang="en-US" sz="1600" dirty="0"/>
-          </a:p>
-        </p:txBody>
-      </p:sp>
-      <p:sp>
-        <p:nvSpPr>
-          <p:cNvPr id="31" name="Shape 29"/>
-          <p:cNvSpPr/>
-          <p:nvPr/>
-        </p:nvSpPr>
-        <p:spPr>
-          <a:xfrm>
-            <a:off x="4370832" y="3364992"/>
-            <a:ext cx="1645920" cy="475488"/>
-          </a:xfrm>
-          <a:prstGeom prst="rect">
-            <a:avLst>
-              <a:gd name="adj" fmla="val 9615"/>
-            </a:avLst>
-          </a:prstGeom>
-          <a:solidFill>
-            <a:srgbClr val="FFFFFF"/>
-          </a:solidFill>
-          <a:ln w="12700">
-            <a:solidFill>
-              <a:srgbClr val="0D9488"/>
-            </a:solidFill>
-            <a:prstDash val="solid"/>
-          </a:ln>
-        </p:spPr>
-      </p:sp>
-      <p:sp>
-        <p:nvSpPr>
-          <p:cNvPr id="32" name="Text 30"/>
-          <p:cNvSpPr/>
-          <p:nvPr/>
-        </p:nvSpPr>
-        <p:spPr>
-          <a:xfrm>
-            <a:off x="4370832" y="3364992"/>
-            <a:ext cx="1645920" cy="475488"/>
-          </a:xfrm>
-          <a:prstGeom prst="rect">
-            <a:avLst/>
-          </a:prstGeom>
-          <a:noFill/>
-          <a:ln/>
-        </p:spPr>
-        <p:txBody>
-          <a:bodyPr wrap="square" lIns="0" tIns="0" rIns="0" bIns="0" rtlCol="0" anchor="ctr"/>
-          <a:lstStyle/>
-          <a:p>
-            <a:pPr algn="ctr" indent="0" marL="0">
-              <a:buNone/>
-            </a:pPr>
-            <a:r>
-              <a:rPr lang="en-US" sz="1400" b="1" dirty="0">
-                <a:solidFill>
-                  <a:srgbClr val="0D9488"/>
-                </a:solidFill>
-                <a:latin typeface="Trebuchet MS" pitchFamily="34" charset="0"/>
-                <a:ea typeface="Trebuchet MS" pitchFamily="34" charset="-122"/>
-                <a:cs typeface="Trebuchet MS" pitchFamily="34" charset="-120"/>
-              </a:rPr>
-              <a:t>judge</a:t>
-            </a:r>
-            <a:endParaRPr lang="en-US" sz="1400" dirty="0"/>
-          </a:p>
-        </p:txBody>
-      </p:sp>
-      <p:sp>
-        <p:nvSpPr>
-          <p:cNvPr id="33" name="Text 31"/>
-          <p:cNvSpPr/>
-          <p:nvPr/>
-        </p:nvSpPr>
-        <p:spPr>
-          <a:xfrm>
-            <a:off x="6016752" y="3364992"/>
-            <a:ext cx="411480" cy="475488"/>
-          </a:xfrm>
-          <a:prstGeom prst="rect">
-            <a:avLst/>
-          </a:prstGeom>
-          <a:noFill/>
-          <a:ln/>
-        </p:spPr>
-        <p:txBody>
-          <a:bodyPr wrap="square" lIns="0" tIns="0" rIns="0" bIns="0" rtlCol="0" anchor="ctr"/>
-          <a:lstStyle/>
-          <a:p>
-            <a:pPr algn="ctr" indent="0" marL="0">
-              <a:buNone/>
-            </a:pPr>
-            <a:r>
-              <a:rPr lang="en-US" sz="1600" b="1" dirty="0">
-                <a:solidFill>
-                  <a:srgbClr val="0D9488"/>
-                </a:solidFill>
-                <a:latin typeface="Trebuchet MS" pitchFamily="34" charset="0"/>
-                <a:ea typeface="Trebuchet MS" pitchFamily="34" charset="-122"/>
-                <a:cs typeface="Trebuchet MS" pitchFamily="34" charset="-120"/>
-              </a:rPr>
-              <a:t>·</a:t>
-            </a:r>
-            <a:endParaRPr lang="en-US" sz="1600" dirty="0"/>
-          </a:p>
-        </p:txBody>
-      </p:sp>
-      <p:sp>
-        <p:nvSpPr>
-          <p:cNvPr id="34" name="Shape 32"/>
-          <p:cNvSpPr/>
-          <p:nvPr/>
-        </p:nvSpPr>
-        <p:spPr>
-          <a:xfrm>
-            <a:off x="6428232" y="3364992"/>
-            <a:ext cx="1645920" cy="475488"/>
-          </a:xfrm>
-          <a:prstGeom prst="rect">
-            <a:avLst>
-              <a:gd name="adj" fmla="val 9615"/>
-            </a:avLst>
-          </a:prstGeom>
-          <a:solidFill>
-            <a:srgbClr val="FFFFFF"/>
-          </a:solidFill>
-          <a:ln w="12700">
-            <a:solidFill>
-              <a:srgbClr val="0D9488"/>
-            </a:solidFill>
-            <a:prstDash val="solid"/>
-          </a:ln>
-        </p:spPr>
-      </p:sp>
-      <p:sp>
-        <p:nvSpPr>
-          <p:cNvPr id="35" name="Text 33"/>
-          <p:cNvSpPr/>
-          <p:nvPr/>
-        </p:nvSpPr>
-        <p:spPr>
-          <a:xfrm>
-            <a:off x="6428232" y="3364992"/>
-            <a:ext cx="1645920" cy="475488"/>
-          </a:xfrm>
-          <a:prstGeom prst="rect">
-            <a:avLst/>
-          </a:prstGeom>
-          <a:noFill/>
-          <a:ln/>
-        </p:spPr>
-        <p:txBody>
-          <a:bodyPr wrap="square" lIns="0" tIns="0" rIns="0" bIns="0" rtlCol="0" anchor="ctr"/>
-          <a:lstStyle/>
-          <a:p>
-            <a:pPr algn="ctr" indent="0" marL="0">
-              <a:buNone/>
-            </a:pPr>
-            <a:r>
-              <a:rPr lang="en-US" sz="1400" b="1" dirty="0">
-                <a:solidFill>
-                  <a:srgbClr val="0D9488"/>
-                </a:solidFill>
-                <a:latin typeface="Trebuchet MS" pitchFamily="34" charset="0"/>
-                <a:ea typeface="Trebuchet MS" pitchFamily="34" charset="-122"/>
-                <a:cs typeface="Trebuchet MS" pitchFamily="34" charset="-120"/>
-              </a:rPr>
-              <a:t>ment</a:t>
-            </a:r>
-            <a:endParaRPr lang="en-US" sz="1400" dirty="0"/>
-          </a:p>
-        </p:txBody>
-      </p:sp>
-      <p:sp>
-        <p:nvSpPr>
-          <p:cNvPr id="36" name="Shape 34"/>
-          <p:cNvSpPr/>
-          <p:nvPr/>
-        </p:nvSpPr>
-        <p:spPr>
-          <a:xfrm>
-            <a:off x="365760" y="4096512"/>
-            <a:ext cx="1371600" cy="804672"/>
+              <a:t>Phonemes</a:t>
+            </a:r>
+            <a:endParaRPr lang="en-US" sz="1100" dirty="0"/>
+          </a:p>
+        </p:txBody>
+      </p:sp>
+      <p:sp>
+        <p:nvSpPr>
+          <p:cNvPr id="32" name="Shape 30"/>
+          <p:cNvSpPr/>
+          <p:nvPr/>
+        </p:nvSpPr>
+        <p:spPr>
+          <a:xfrm>
+            <a:off x="1874520" y="4096512"/>
+            <a:ext cx="6903720" cy="804672"/>
           </a:xfrm>
           <a:prstGeom prst="rect">
             <a:avLst>
@@ -13271,85 +13008,19 @@
             </a:avLst>
           </a:prstGeom>
           <a:solidFill>
-            <a:srgbClr val="E2E8F0"/>
+            <a:srgbClr val="F8FAFC"/>
           </a:solidFill>
           <a:ln w="12700">
             <a:solidFill>
               <a:srgbClr val="E2E8F0"/>
             </a:solidFill>
-            <a:prstDash val="solid"/>
-          </a:ln>
-        </p:spPr>
-      </p:sp>
-      <p:sp>
-        <p:nvSpPr>
-          <p:cNvPr id="37" name="Text 35"/>
-          <p:cNvSpPr/>
-          <p:nvPr/>
-        </p:nvSpPr>
-        <p:spPr>
-          <a:xfrm>
-            <a:off x="365760" y="4096512"/>
-            <a:ext cx="1371600" cy="804672"/>
-          </a:xfrm>
-          <a:prstGeom prst="rect">
-            <a:avLst/>
-          </a:prstGeom>
-          <a:noFill/>
-          <a:ln/>
-        </p:spPr>
-        <p:txBody>
-          <a:bodyPr wrap="square" lIns="0" tIns="0" rIns="0" bIns="0" rtlCol="0" anchor="ctr"/>
-          <a:lstStyle/>
-          <a:p>
-            <a:pPr algn="ctr" indent="0" marL="0">
-              <a:buNone/>
-            </a:pPr>
-            <a:r>
-              <a:rPr lang="en-US" sz="1100" b="1" dirty="0">
-                <a:solidFill>
-                  <a:srgbClr val="475569"/>
-                </a:solidFill>
-                <a:latin typeface="Trebuchet MS" pitchFamily="34" charset="0"/>
-                <a:ea typeface="Trebuchet MS" pitchFamily="34" charset="-122"/>
-                <a:cs typeface="Trebuchet MS" pitchFamily="34" charset="-120"/>
-              </a:rPr>
-              <a:t>Phonemes</a:t>
-            </a:r>
-            <a:endParaRPr lang="en-US" sz="1100" dirty="0"/>
-          </a:p>
-        </p:txBody>
-      </p:sp>
-      <p:sp>
-        <p:nvSpPr>
-          <p:cNvPr id="38" name="Shape 36"/>
-          <p:cNvSpPr/>
-          <p:nvPr/>
-        </p:nvSpPr>
-        <p:spPr>
-          <a:xfrm>
-            <a:off x="1874520" y="4096512"/>
-            <a:ext cx="6903720" cy="804672"/>
-          </a:xfrm>
-          <a:prstGeom prst="rect">
-            <a:avLst>
-              <a:gd name="adj" fmla="val 6818"/>
-            </a:avLst>
-          </a:prstGeom>
-          <a:solidFill>
-            <a:srgbClr val="F8FAFC"/>
-          </a:solidFill>
-          <a:ln w="12700">
-            <a:solidFill>
-              <a:srgbClr val="E2E8F0"/>
-            </a:solidFill>
             <a:prstDash val="dash"/>
           </a:ln>
         </p:spPr>
       </p:sp>
       <p:sp>
         <p:nvSpPr>
-          <p:cNvPr id="39" name="Text 37"/>
+          <p:cNvPr id="33" name="Text 31"/>
           <p:cNvSpPr/>
           <p:nvPr/>
         </p:nvSpPr>
@@ -14076,7 +13747,7 @@
                 <a:ea typeface="Trebuchet MS" pitchFamily="34" charset="-122"/>
                 <a:cs typeface="Trebuchet MS" pitchFamily="34" charset="-120"/>
               </a:rPr>
-              <a:t>misjudgement</a:t>
+              <a:t>judgement</a:t>
             </a:r>
             <a:endParaRPr lang="en-US" sz="2800" dirty="0"/>
           </a:p>
@@ -14156,7 +13827,7 @@
         </p:nvSpPr>
         <p:spPr>
           <a:xfrm>
-            <a:off x="2221992" y="2258568"/>
+            <a:off x="2938272" y="2258568"/>
             <a:ext cx="1828800" cy="292608"/>
           </a:xfrm>
           <a:prstGeom prst="rect">
@@ -14165,11 +13836,11 @@
             </a:avLst>
           </a:prstGeom>
           <a:solidFill>
-            <a:srgbClr val="DDD6FE"/>
+            <a:srgbClr val="CCFBF1"/>
           </a:solidFill>
           <a:ln w="19050">
             <a:solidFill>
-              <a:srgbClr val="7C3AED"/>
+              <a:srgbClr val="0D9488"/>
             </a:solidFill>
             <a:prstDash val="solid"/>
           </a:ln>
@@ -14190,7 +13861,7 @@
         </p:nvSpPr>
         <p:spPr>
           <a:xfrm>
-            <a:off x="2221992" y="2258568"/>
+            <a:off x="2938272" y="2258568"/>
             <a:ext cx="1828800" cy="292608"/>
           </a:xfrm>
           <a:prstGeom prst="rect">
@@ -14209,13 +13880,13 @@
             <a:r>
               <a:rPr lang="en-US" sz="1300" b="1" dirty="0">
                 <a:solidFill>
-                  <a:srgbClr val="4C1D95"/>
+                  <a:srgbClr val="0F766E"/>
                 </a:solidFill>
                 <a:latin typeface="Trebuchet MS" pitchFamily="34" charset="0"/>
                 <a:ea typeface="Trebuchet MS" pitchFamily="34" charset="-122"/>
                 <a:cs typeface="Trebuchet MS" pitchFamily="34" charset="-120"/>
               </a:rPr>
-              <a:t>mis</a:t>
+              <a:t>judge</a:t>
             </a:r>
             <a:endParaRPr lang="en-US" sz="1300" dirty="0"/>
           </a:p>
@@ -14229,7 +13900,7 @@
         </p:nvSpPr>
         <p:spPr>
           <a:xfrm>
-            <a:off x="2221992" y="2569464"/>
+            <a:off x="2938272" y="2569464"/>
             <a:ext cx="1828800" cy="201168"/>
           </a:xfrm>
           <a:prstGeom prst="rect">
@@ -14254,7 +13925,7 @@
                 <a:ea typeface="Calibri" pitchFamily="34" charset="-122"/>
                 <a:cs typeface="Calibri" pitchFamily="34" charset="-120"/>
               </a:rPr>
-              <a:t>wrongly or badly</a:t>
+              <a:t>to decide or form an opinion</a:t>
             </a:r>
             <a:endParaRPr lang="en-US" sz="850" dirty="0"/>
           </a:p>
@@ -14268,7 +13939,7 @@
         </p:nvSpPr>
         <p:spPr>
           <a:xfrm>
-            <a:off x="4370832" y="2258568"/>
+            <a:off x="5803392" y="2258568"/>
             <a:ext cx="1828800" cy="292608"/>
           </a:xfrm>
           <a:prstGeom prst="rect">
@@ -14277,11 +13948,11 @@
             </a:avLst>
           </a:prstGeom>
           <a:solidFill>
-            <a:srgbClr val="CCFBF1"/>
+            <a:srgbClr val="FCE7F3"/>
           </a:solidFill>
           <a:ln w="19050">
             <a:solidFill>
-              <a:srgbClr val="0D9488"/>
+              <a:srgbClr val="DB2777"/>
             </a:solidFill>
             <a:prstDash val="solid"/>
           </a:ln>
@@ -14302,7 +13973,7 @@
         </p:nvSpPr>
         <p:spPr>
           <a:xfrm>
-            <a:off x="4370832" y="2258568"/>
+            <a:off x="5803392" y="2258568"/>
             <a:ext cx="1828800" cy="292608"/>
           </a:xfrm>
           <a:prstGeom prst="rect">
@@ -14321,13 +13992,13 @@
             <a:r>
               <a:rPr lang="en-US" sz="1300" b="1" dirty="0">
                 <a:solidFill>
-                  <a:srgbClr val="0F766E"/>
+                  <a:srgbClr val="9D174D"/>
                 </a:solidFill>
                 <a:latin typeface="Trebuchet MS" pitchFamily="34" charset="0"/>
                 <a:ea typeface="Trebuchet MS" pitchFamily="34" charset="-122"/>
                 <a:cs typeface="Trebuchet MS" pitchFamily="34" charset="-120"/>
               </a:rPr>
-              <a:t>judge</a:t>
+              <a:t>ment</a:t>
             </a:r>
             <a:endParaRPr lang="en-US" sz="1300" dirty="0"/>
           </a:p>
@@ -14341,7 +14012,7 @@
         </p:nvSpPr>
         <p:spPr>
           <a:xfrm>
-            <a:off x="4370832" y="2569464"/>
+            <a:off x="5803392" y="2569464"/>
             <a:ext cx="1828800" cy="201168"/>
           </a:xfrm>
           <a:prstGeom prst="rect">
@@ -14366,7 +14037,7 @@
                 <a:ea typeface="Calibri" pitchFamily="34" charset="-122"/>
                 <a:cs typeface="Calibri" pitchFamily="34" charset="-120"/>
               </a:rPr>
-              <a:t>to decide or form an opinion</a:t>
+              <a:t>result or state of</a:t>
             </a:r>
             <a:endParaRPr lang="en-US" sz="850" dirty="0"/>
           </a:p>
@@ -14380,30 +14051,23 @@
         </p:nvSpPr>
         <p:spPr>
           <a:xfrm>
-            <a:off x="6519672" y="2258568"/>
-            <a:ext cx="1828800" cy="292608"/>
+            <a:off x="365760" y="3273552"/>
+            <a:ext cx="1371600" cy="658368"/>
           </a:xfrm>
           <a:prstGeom prst="rect">
             <a:avLst>
-              <a:gd name="adj" fmla="val 25000"/>
+              <a:gd name="adj" fmla="val 8333"/>
             </a:avLst>
           </a:prstGeom>
           <a:solidFill>
-            <a:srgbClr val="FCE7F3"/>
-          </a:solidFill>
-          <a:ln w="19050">
-            <a:solidFill>
-              <a:srgbClr val="DB2777"/>
-            </a:solidFill>
-            <a:prstDash val="solid"/>
-          </a:ln>
-          <a:effectLst>
-            <a:outerShdw sx="100000" sy="100000" kx="0" ky="0" algn="bl" rotWithShape="0" blurRad="101600" dist="38100" dir="8100000">
-              <a:srgbClr val="000000">
-                <a:alpha val="12000"/>
-              </a:srgbClr>
-            </a:outerShdw>
-          </a:effectLst>
+            <a:srgbClr val="E2E8F0"/>
+          </a:solidFill>
+          <a:ln w="12700">
+            <a:solidFill>
+              <a:srgbClr val="E2E8F0"/>
+            </a:solidFill>
+            <a:prstDash val="solid"/>
+          </a:ln>
         </p:spPr>
       </p:sp>
       <p:sp>
@@ -14414,8 +14078,8 @@
         </p:nvSpPr>
         <p:spPr>
           <a:xfrm>
-            <a:off x="6519672" y="2258568"/>
-            <a:ext cx="1828800" cy="292608"/>
+            <a:off x="365760" y="3273552"/>
+            <a:ext cx="1371600" cy="658368"/>
           </a:xfrm>
           <a:prstGeom prst="rect">
             <a:avLst/>
@@ -14431,30 +14095,519 @@
               <a:buNone/>
             </a:pPr>
             <a:r>
-              <a:rPr lang="en-US" sz="1300" b="1" dirty="0">
-                <a:solidFill>
-                  <a:srgbClr val="9D174D"/>
+              <a:rPr lang="en-US" sz="1100" b="1" dirty="0">
+                <a:solidFill>
+                  <a:srgbClr val="475569"/>
                 </a:solidFill>
                 <a:latin typeface="Trebuchet MS" pitchFamily="34" charset="0"/>
                 <a:ea typeface="Trebuchet MS" pitchFamily="34" charset="-122"/>
                 <a:cs typeface="Trebuchet MS" pitchFamily="34" charset="-120"/>
               </a:rPr>
+              <a:t>Syllables</a:t>
+            </a:r>
+            <a:endParaRPr lang="en-US" sz="1100" dirty="0"/>
+          </a:p>
+        </p:txBody>
+      </p:sp>
+      <p:sp>
+        <p:nvSpPr>
+          <p:cNvPr id="24" name="Shape 22"/>
+          <p:cNvSpPr/>
+          <p:nvPr/>
+        </p:nvSpPr>
+        <p:spPr>
+          <a:xfrm>
+            <a:off x="1874520" y="3273552"/>
+            <a:ext cx="6903720" cy="658368"/>
+          </a:xfrm>
+          <a:prstGeom prst="rect">
+            <a:avLst>
+              <a:gd name="adj" fmla="val 8333"/>
+            </a:avLst>
+          </a:prstGeom>
+          <a:solidFill>
+            <a:srgbClr val="CCFBF1"/>
+          </a:solidFill>
+          <a:ln w="12700">
+            <a:solidFill>
+              <a:srgbClr val="0D9488"/>
+            </a:solidFill>
+            <a:prstDash val="solid"/>
+          </a:ln>
+        </p:spPr>
+      </p:sp>
+      <p:sp>
+        <p:nvSpPr>
+          <p:cNvPr id="25" name="Shape 23"/>
+          <p:cNvSpPr/>
+          <p:nvPr/>
+        </p:nvSpPr>
+        <p:spPr>
+          <a:xfrm>
+            <a:off x="2999232" y="3364992"/>
+            <a:ext cx="1645920" cy="475488"/>
+          </a:xfrm>
+          <a:prstGeom prst="rect">
+            <a:avLst>
+              <a:gd name="adj" fmla="val 9615"/>
+            </a:avLst>
+          </a:prstGeom>
+          <a:solidFill>
+            <a:srgbClr val="FFFFFF"/>
+          </a:solidFill>
+          <a:ln w="12700">
+            <a:solidFill>
+              <a:srgbClr val="0D9488"/>
+            </a:solidFill>
+            <a:prstDash val="solid"/>
+          </a:ln>
+        </p:spPr>
+      </p:sp>
+      <p:sp>
+        <p:nvSpPr>
+          <p:cNvPr id="26" name="Text 24"/>
+          <p:cNvSpPr/>
+          <p:nvPr/>
+        </p:nvSpPr>
+        <p:spPr>
+          <a:xfrm>
+            <a:off x="2999232" y="3364992"/>
+            <a:ext cx="1645920" cy="475488"/>
+          </a:xfrm>
+          <a:prstGeom prst="rect">
+            <a:avLst/>
+          </a:prstGeom>
+          <a:noFill/>
+          <a:ln/>
+        </p:spPr>
+        <p:txBody>
+          <a:bodyPr wrap="square" lIns="0" tIns="0" rIns="0" bIns="0" rtlCol="0" anchor="ctr"/>
+          <a:lstStyle/>
+          <a:p>
+            <a:pPr algn="ctr" indent="0" marL="0">
+              <a:buNone/>
+            </a:pPr>
+            <a:r>
+              <a:rPr lang="en-US" sz="1400" b="1" dirty="0">
+                <a:solidFill>
+                  <a:srgbClr val="0D9488"/>
+                </a:solidFill>
+                <a:latin typeface="Trebuchet MS" pitchFamily="34" charset="0"/>
+                <a:ea typeface="Trebuchet MS" pitchFamily="34" charset="-122"/>
+                <a:cs typeface="Trebuchet MS" pitchFamily="34" charset="-120"/>
+              </a:rPr>
+              <a:t>judge</a:t>
+            </a:r>
+            <a:endParaRPr lang="en-US" sz="1400" dirty="0"/>
+          </a:p>
+        </p:txBody>
+      </p:sp>
+      <p:sp>
+        <p:nvSpPr>
+          <p:cNvPr id="27" name="Text 25"/>
+          <p:cNvSpPr/>
+          <p:nvPr/>
+        </p:nvSpPr>
+        <p:spPr>
+          <a:xfrm>
+            <a:off x="4645152" y="3364992"/>
+            <a:ext cx="1097280" cy="475488"/>
+          </a:xfrm>
+          <a:prstGeom prst="rect">
+            <a:avLst/>
+          </a:prstGeom>
+          <a:noFill/>
+          <a:ln/>
+        </p:spPr>
+        <p:txBody>
+          <a:bodyPr wrap="square" lIns="0" tIns="0" rIns="0" bIns="0" rtlCol="0" anchor="ctr"/>
+          <a:lstStyle/>
+          <a:p>
+            <a:pPr algn="ctr" indent="0" marL="0">
+              <a:buNone/>
+            </a:pPr>
+            <a:r>
+              <a:rPr lang="en-US" sz="1600" b="1" dirty="0">
+                <a:solidFill>
+                  <a:srgbClr val="0D9488"/>
+                </a:solidFill>
+                <a:latin typeface="Trebuchet MS" pitchFamily="34" charset="0"/>
+                <a:ea typeface="Trebuchet MS" pitchFamily="34" charset="-122"/>
+                <a:cs typeface="Trebuchet MS" pitchFamily="34" charset="-120"/>
+              </a:rPr>
+              <a:t>·</a:t>
+            </a:r>
+            <a:endParaRPr lang="en-US" sz="1600" dirty="0"/>
+          </a:p>
+        </p:txBody>
+      </p:sp>
+      <p:sp>
+        <p:nvSpPr>
+          <p:cNvPr id="28" name="Shape 26"/>
+          <p:cNvSpPr/>
+          <p:nvPr/>
+        </p:nvSpPr>
+        <p:spPr>
+          <a:xfrm>
+            <a:off x="5742432" y="3364992"/>
+            <a:ext cx="1645920" cy="475488"/>
+          </a:xfrm>
+          <a:prstGeom prst="rect">
+            <a:avLst>
+              <a:gd name="adj" fmla="val 9615"/>
+            </a:avLst>
+          </a:prstGeom>
+          <a:solidFill>
+            <a:srgbClr val="FFFFFF"/>
+          </a:solidFill>
+          <a:ln w="12700">
+            <a:solidFill>
+              <a:srgbClr val="0D9488"/>
+            </a:solidFill>
+            <a:prstDash val="solid"/>
+          </a:ln>
+        </p:spPr>
+      </p:sp>
+      <p:sp>
+        <p:nvSpPr>
+          <p:cNvPr id="29" name="Text 27"/>
+          <p:cNvSpPr/>
+          <p:nvPr/>
+        </p:nvSpPr>
+        <p:spPr>
+          <a:xfrm>
+            <a:off x="5742432" y="3364992"/>
+            <a:ext cx="1645920" cy="475488"/>
+          </a:xfrm>
+          <a:prstGeom prst="rect">
+            <a:avLst/>
+          </a:prstGeom>
+          <a:noFill/>
+          <a:ln/>
+        </p:spPr>
+        <p:txBody>
+          <a:bodyPr wrap="square" lIns="0" tIns="0" rIns="0" bIns="0" rtlCol="0" anchor="ctr"/>
+          <a:lstStyle/>
+          <a:p>
+            <a:pPr algn="ctr" indent="0" marL="0">
+              <a:buNone/>
+            </a:pPr>
+            <a:r>
+              <a:rPr lang="en-US" sz="1400" b="1" dirty="0">
+                <a:solidFill>
+                  <a:srgbClr val="0D9488"/>
+                </a:solidFill>
+                <a:latin typeface="Trebuchet MS" pitchFamily="34" charset="0"/>
+                <a:ea typeface="Trebuchet MS" pitchFamily="34" charset="-122"/>
+                <a:cs typeface="Trebuchet MS" pitchFamily="34" charset="-120"/>
+              </a:rPr>
               <a:t>ment</a:t>
             </a:r>
-            <a:endParaRPr lang="en-US" sz="1300" dirty="0"/>
-          </a:p>
-        </p:txBody>
-      </p:sp>
-      <p:sp>
-        <p:nvSpPr>
-          <p:cNvPr id="24" name="Text 22"/>
-          <p:cNvSpPr/>
-          <p:nvPr/>
-        </p:nvSpPr>
-        <p:spPr>
-          <a:xfrm>
-            <a:off x="6519672" y="2569464"/>
-            <a:ext cx="1828800" cy="201168"/>
+            <a:endParaRPr lang="en-US" sz="1400" dirty="0"/>
+          </a:p>
+        </p:txBody>
+      </p:sp>
+      <p:sp>
+        <p:nvSpPr>
+          <p:cNvPr id="30" name="Shape 28"/>
+          <p:cNvSpPr/>
+          <p:nvPr/>
+        </p:nvSpPr>
+        <p:spPr>
+          <a:xfrm>
+            <a:off x="365760" y="4096512"/>
+            <a:ext cx="1371600" cy="804672"/>
+          </a:xfrm>
+          <a:prstGeom prst="rect">
+            <a:avLst>
+              <a:gd name="adj" fmla="val 6818"/>
+            </a:avLst>
+          </a:prstGeom>
+          <a:solidFill>
+            <a:srgbClr val="E2E8F0"/>
+          </a:solidFill>
+          <a:ln w="12700">
+            <a:solidFill>
+              <a:srgbClr val="E2E8F0"/>
+            </a:solidFill>
+            <a:prstDash val="solid"/>
+          </a:ln>
+        </p:spPr>
+      </p:sp>
+      <p:sp>
+        <p:nvSpPr>
+          <p:cNvPr id="31" name="Text 29"/>
+          <p:cNvSpPr/>
+          <p:nvPr/>
+        </p:nvSpPr>
+        <p:spPr>
+          <a:xfrm>
+            <a:off x="365760" y="4096512"/>
+            <a:ext cx="1371600" cy="804672"/>
+          </a:xfrm>
+          <a:prstGeom prst="rect">
+            <a:avLst/>
+          </a:prstGeom>
+          <a:noFill/>
+          <a:ln/>
+        </p:spPr>
+        <p:txBody>
+          <a:bodyPr wrap="square" lIns="0" tIns="0" rIns="0" bIns="0" rtlCol="0" anchor="ctr"/>
+          <a:lstStyle/>
+          <a:p>
+            <a:pPr algn="ctr" indent="0" marL="0">
+              <a:buNone/>
+            </a:pPr>
+            <a:r>
+              <a:rPr lang="en-US" sz="1100" b="1" dirty="0">
+                <a:solidFill>
+                  <a:srgbClr val="475569"/>
+                </a:solidFill>
+                <a:latin typeface="Trebuchet MS" pitchFamily="34" charset="0"/>
+                <a:ea typeface="Trebuchet MS" pitchFamily="34" charset="-122"/>
+                <a:cs typeface="Trebuchet MS" pitchFamily="34" charset="-120"/>
+              </a:rPr>
+              <a:t>Phonemes</a:t>
+            </a:r>
+            <a:endParaRPr lang="en-US" sz="1100" dirty="0"/>
+          </a:p>
+        </p:txBody>
+      </p:sp>
+      <p:sp>
+        <p:nvSpPr>
+          <p:cNvPr id="32" name="Shape 30"/>
+          <p:cNvSpPr/>
+          <p:nvPr/>
+        </p:nvSpPr>
+        <p:spPr>
+          <a:xfrm>
+            <a:off x="1874520" y="4096512"/>
+            <a:ext cx="6903720" cy="804672"/>
+          </a:xfrm>
+          <a:prstGeom prst="rect">
+            <a:avLst>
+              <a:gd name="adj" fmla="val 6818"/>
+            </a:avLst>
+          </a:prstGeom>
+          <a:solidFill>
+            <a:srgbClr val="FCE7F3"/>
+          </a:solidFill>
+          <a:ln w="12700">
+            <a:solidFill>
+              <a:srgbClr val="DB2777"/>
+            </a:solidFill>
+            <a:prstDash val="solid"/>
+          </a:ln>
+        </p:spPr>
+      </p:sp>
+      <p:sp>
+        <p:nvSpPr>
+          <p:cNvPr id="33" name="Shape 31"/>
+          <p:cNvSpPr/>
+          <p:nvPr/>
+        </p:nvSpPr>
+        <p:spPr>
+          <a:xfrm>
+            <a:off x="2124837" y="4169664"/>
+            <a:ext cx="685800" cy="384048"/>
+          </a:xfrm>
+          <a:prstGeom prst="rect">
+            <a:avLst>
+              <a:gd name="adj" fmla="val 9524"/>
+            </a:avLst>
+          </a:prstGeom>
+          <a:solidFill>
+            <a:srgbClr val="FFFFFF"/>
+          </a:solidFill>
+          <a:ln w="12700">
+            <a:solidFill>
+              <a:srgbClr val="DB2777"/>
+            </a:solidFill>
+            <a:prstDash val="solid"/>
+          </a:ln>
+        </p:spPr>
+      </p:sp>
+      <p:sp>
+        <p:nvSpPr>
+          <p:cNvPr id="34" name="Text 32"/>
+          <p:cNvSpPr/>
+          <p:nvPr/>
+        </p:nvSpPr>
+        <p:spPr>
+          <a:xfrm>
+            <a:off x="2124837" y="4169664"/>
+            <a:ext cx="685800" cy="384048"/>
+          </a:xfrm>
+          <a:prstGeom prst="rect">
+            <a:avLst/>
+          </a:prstGeom>
+          <a:noFill/>
+          <a:ln/>
+        </p:spPr>
+        <p:txBody>
+          <a:bodyPr wrap="square" lIns="0" tIns="0" rIns="0" bIns="0" rtlCol="0" anchor="ctr"/>
+          <a:lstStyle/>
+          <a:p>
+            <a:pPr algn="ctr" indent="0" marL="0">
+              <a:buNone/>
+            </a:pPr>
+            <a:r>
+              <a:rPr lang="en-US" sz="900" b="1" dirty="0">
+                <a:solidFill>
+                  <a:srgbClr val="9D174D"/>
+                </a:solidFill>
+                <a:latin typeface="Trebuchet MS" pitchFamily="34" charset="0"/>
+                <a:ea typeface="Trebuchet MS" pitchFamily="34" charset="-122"/>
+                <a:cs typeface="Trebuchet MS" pitchFamily="34" charset="-120"/>
+              </a:rPr>
+              <a:t>j</a:t>
+            </a:r>
+            <a:endParaRPr lang="en-US" sz="900" dirty="0"/>
+          </a:p>
+        </p:txBody>
+      </p:sp>
+      <p:sp>
+        <p:nvSpPr>
+          <p:cNvPr id="35" name="Shape 33"/>
+          <p:cNvSpPr/>
+          <p:nvPr/>
+        </p:nvSpPr>
+        <p:spPr>
+          <a:xfrm>
+            <a:off x="3033522" y="4169664"/>
+            <a:ext cx="685800" cy="384048"/>
+          </a:xfrm>
+          <a:prstGeom prst="rect">
+            <a:avLst>
+              <a:gd name="adj" fmla="val 9524"/>
+            </a:avLst>
+          </a:prstGeom>
+          <a:solidFill>
+            <a:srgbClr val="FFFFFF"/>
+          </a:solidFill>
+          <a:ln w="12700">
+            <a:solidFill>
+              <a:srgbClr val="DB2777"/>
+            </a:solidFill>
+            <a:prstDash val="solid"/>
+          </a:ln>
+        </p:spPr>
+      </p:sp>
+      <p:sp>
+        <p:nvSpPr>
+          <p:cNvPr id="36" name="Text 34"/>
+          <p:cNvSpPr/>
+          <p:nvPr/>
+        </p:nvSpPr>
+        <p:spPr>
+          <a:xfrm>
+            <a:off x="3033522" y="4169664"/>
+            <a:ext cx="685800" cy="384048"/>
+          </a:xfrm>
+          <a:prstGeom prst="rect">
+            <a:avLst/>
+          </a:prstGeom>
+          <a:noFill/>
+          <a:ln/>
+        </p:spPr>
+        <p:txBody>
+          <a:bodyPr wrap="square" lIns="0" tIns="0" rIns="0" bIns="0" rtlCol="0" anchor="ctr"/>
+          <a:lstStyle/>
+          <a:p>
+            <a:pPr algn="ctr" indent="0" marL="0">
+              <a:buNone/>
+            </a:pPr>
+            <a:r>
+              <a:rPr lang="en-US" sz="900" b="1" dirty="0">
+                <a:solidFill>
+                  <a:srgbClr val="9D174D"/>
+                </a:solidFill>
+                <a:latin typeface="Trebuchet MS" pitchFamily="34" charset="0"/>
+                <a:ea typeface="Trebuchet MS" pitchFamily="34" charset="-122"/>
+                <a:cs typeface="Trebuchet MS" pitchFamily="34" charset="-120"/>
+              </a:rPr>
+              <a:t>u</a:t>
+            </a:r>
+            <a:endParaRPr lang="en-US" sz="900" dirty="0"/>
+          </a:p>
+        </p:txBody>
+      </p:sp>
+      <p:sp>
+        <p:nvSpPr>
+          <p:cNvPr id="37" name="Shape 35"/>
+          <p:cNvSpPr/>
+          <p:nvPr/>
+        </p:nvSpPr>
+        <p:spPr>
+          <a:xfrm>
+            <a:off x="3942207" y="4169664"/>
+            <a:ext cx="685800" cy="384048"/>
+          </a:xfrm>
+          <a:prstGeom prst="rect">
+            <a:avLst>
+              <a:gd name="adj" fmla="val 9524"/>
+            </a:avLst>
+          </a:prstGeom>
+          <a:solidFill>
+            <a:srgbClr val="FFFFFF"/>
+          </a:solidFill>
+          <a:ln w="12700">
+            <a:solidFill>
+              <a:srgbClr val="DB2777"/>
+            </a:solidFill>
+            <a:prstDash val="solid"/>
+          </a:ln>
+        </p:spPr>
+      </p:sp>
+      <p:sp>
+        <p:nvSpPr>
+          <p:cNvPr id="38" name="Text 36"/>
+          <p:cNvSpPr/>
+          <p:nvPr/>
+        </p:nvSpPr>
+        <p:spPr>
+          <a:xfrm>
+            <a:off x="3942207" y="4169664"/>
+            <a:ext cx="685800" cy="384048"/>
+          </a:xfrm>
+          <a:prstGeom prst="rect">
+            <a:avLst/>
+          </a:prstGeom>
+          <a:noFill/>
+          <a:ln/>
+        </p:spPr>
+        <p:txBody>
+          <a:bodyPr wrap="square" lIns="0" tIns="0" rIns="0" bIns="0" rtlCol="0" anchor="ctr"/>
+          <a:lstStyle/>
+          <a:p>
+            <a:pPr algn="ctr" indent="0" marL="0">
+              <a:buNone/>
+            </a:pPr>
+            <a:r>
+              <a:rPr lang="en-US" sz="900" b="1" dirty="0">
+                <a:solidFill>
+                  <a:srgbClr val="9D174D"/>
+                </a:solidFill>
+                <a:latin typeface="Trebuchet MS" pitchFamily="34" charset="0"/>
+                <a:ea typeface="Trebuchet MS" pitchFamily="34" charset="-122"/>
+                <a:cs typeface="Trebuchet MS" pitchFamily="34" charset="-120"/>
+              </a:rPr>
+              <a:t>dge</a:t>
+            </a:r>
+            <a:endParaRPr lang="en-US" sz="900" dirty="0"/>
+          </a:p>
+        </p:txBody>
+      </p:sp>
+      <p:sp>
+        <p:nvSpPr>
+          <p:cNvPr id="39" name="Text 37"/>
+          <p:cNvSpPr/>
+          <p:nvPr/>
+        </p:nvSpPr>
+        <p:spPr>
+          <a:xfrm>
+            <a:off x="3942207" y="4572000"/>
+            <a:ext cx="685800" cy="219456"/>
           </a:xfrm>
           <a:prstGeom prst="rect">
             <a:avLst/>
@@ -14470,57 +14623,57 @@
               <a:buNone/>
             </a:pPr>
             <a:r>
-              <a:rPr lang="en-US" sz="850" dirty="0">
-                <a:solidFill>
-                  <a:srgbClr val="475569"/>
+              <a:rPr lang="en-US" sz="750" i="1" dirty="0">
+                <a:solidFill>
+                  <a:srgbClr val="94A3B8"/>
                 </a:solidFill>
                 <a:latin typeface="Calibri" pitchFamily="34" charset="0"/>
                 <a:ea typeface="Calibri" pitchFamily="34" charset="-122"/>
                 <a:cs typeface="Calibri" pitchFamily="34" charset="-120"/>
               </a:rPr>
-              <a:t>result or state of</a:t>
-            </a:r>
-            <a:endParaRPr lang="en-US" sz="850" dirty="0"/>
-          </a:p>
-        </p:txBody>
-      </p:sp>
-      <p:sp>
-        <p:nvSpPr>
-          <p:cNvPr id="25" name="Shape 23"/>
-          <p:cNvSpPr/>
-          <p:nvPr/>
-        </p:nvSpPr>
-        <p:spPr>
-          <a:xfrm>
-            <a:off x="365760" y="3273552"/>
-            <a:ext cx="1371600" cy="658368"/>
+              <a:t>/j/</a:t>
+            </a:r>
+            <a:endParaRPr lang="en-US" sz="750" dirty="0"/>
+          </a:p>
+        </p:txBody>
+      </p:sp>
+      <p:sp>
+        <p:nvSpPr>
+          <p:cNvPr id="40" name="Shape 38"/>
+          <p:cNvSpPr/>
+          <p:nvPr/>
+        </p:nvSpPr>
+        <p:spPr>
+          <a:xfrm>
+            <a:off x="4850892" y="4169664"/>
+            <a:ext cx="685800" cy="384048"/>
           </a:xfrm>
           <a:prstGeom prst="rect">
             <a:avLst>
-              <a:gd name="adj" fmla="val 8333"/>
+              <a:gd name="adj" fmla="val 9524"/>
             </a:avLst>
           </a:prstGeom>
           <a:solidFill>
-            <a:srgbClr val="E2E8F0"/>
-          </a:solidFill>
-          <a:ln w="12700">
-            <a:solidFill>
-              <a:srgbClr val="E2E8F0"/>
-            </a:solidFill>
-            <a:prstDash val="solid"/>
-          </a:ln>
-        </p:spPr>
-      </p:sp>
-      <p:sp>
-        <p:nvSpPr>
-          <p:cNvPr id="26" name="Text 24"/>
-          <p:cNvSpPr/>
-          <p:nvPr/>
-        </p:nvSpPr>
-        <p:spPr>
-          <a:xfrm>
-            <a:off x="365760" y="3273552"/>
-            <a:ext cx="1371600" cy="658368"/>
+            <a:srgbClr val="FFFFFF"/>
+          </a:solidFill>
+          <a:ln w="12700">
+            <a:solidFill>
+              <a:srgbClr val="DB2777"/>
+            </a:solidFill>
+            <a:prstDash val="solid"/>
+          </a:ln>
+        </p:spPr>
+      </p:sp>
+      <p:sp>
+        <p:nvSpPr>
+          <p:cNvPr id="41" name="Text 39"/>
+          <p:cNvSpPr/>
+          <p:nvPr/>
+        </p:nvSpPr>
+        <p:spPr>
+          <a:xfrm>
+            <a:off x="4850892" y="4169664"/>
+            <a:ext cx="685800" cy="384048"/>
           </a:xfrm>
           <a:prstGeom prst="rect">
             <a:avLst/>
@@ -14536,84 +14689,57 @@
               <a:buNone/>
             </a:pPr>
             <a:r>
-              <a:rPr lang="en-US" sz="1100" b="1" dirty="0">
-                <a:solidFill>
-                  <a:srgbClr val="475569"/>
+              <a:rPr lang="en-US" sz="900" b="1" dirty="0">
+                <a:solidFill>
+                  <a:srgbClr val="9D174D"/>
                 </a:solidFill>
                 <a:latin typeface="Trebuchet MS" pitchFamily="34" charset="0"/>
                 <a:ea typeface="Trebuchet MS" pitchFamily="34" charset="-122"/>
                 <a:cs typeface="Trebuchet MS" pitchFamily="34" charset="-120"/>
               </a:rPr>
-              <a:t>Syllables</a:t>
-            </a:r>
-            <a:endParaRPr lang="en-US" sz="1100" dirty="0"/>
-          </a:p>
-        </p:txBody>
-      </p:sp>
-      <p:sp>
-        <p:nvSpPr>
-          <p:cNvPr id="27" name="Shape 25"/>
-          <p:cNvSpPr/>
-          <p:nvPr/>
-        </p:nvSpPr>
-        <p:spPr>
-          <a:xfrm>
-            <a:off x="1874520" y="3273552"/>
-            <a:ext cx="6903720" cy="658368"/>
+              <a:t>m</a:t>
+            </a:r>
+            <a:endParaRPr lang="en-US" sz="900" dirty="0"/>
+          </a:p>
+        </p:txBody>
+      </p:sp>
+      <p:sp>
+        <p:nvSpPr>
+          <p:cNvPr id="42" name="Shape 40"/>
+          <p:cNvSpPr/>
+          <p:nvPr/>
+        </p:nvSpPr>
+        <p:spPr>
+          <a:xfrm>
+            <a:off x="5759577" y="4169664"/>
+            <a:ext cx="685800" cy="384048"/>
           </a:xfrm>
           <a:prstGeom prst="rect">
             <a:avLst>
-              <a:gd name="adj" fmla="val 8333"/>
+              <a:gd name="adj" fmla="val 9524"/>
             </a:avLst>
           </a:prstGeom>
           <a:solidFill>
-            <a:srgbClr val="CCFBF1"/>
-          </a:solidFill>
-          <a:ln w="12700">
-            <a:solidFill>
-              <a:srgbClr val="0D9488"/>
-            </a:solidFill>
-            <a:prstDash val="solid"/>
-          </a:ln>
-        </p:spPr>
-      </p:sp>
-      <p:sp>
-        <p:nvSpPr>
-          <p:cNvPr id="28" name="Shape 26"/>
-          <p:cNvSpPr/>
-          <p:nvPr/>
-        </p:nvSpPr>
-        <p:spPr>
-          <a:xfrm>
-            <a:off x="2313432" y="3364992"/>
-            <a:ext cx="1645920" cy="475488"/>
-          </a:xfrm>
-          <a:prstGeom prst="rect">
-            <a:avLst>
-              <a:gd name="adj" fmla="val 9615"/>
-            </a:avLst>
-          </a:prstGeom>
-          <a:solidFill>
             <a:srgbClr val="FFFFFF"/>
           </a:solidFill>
           <a:ln w="12700">
             <a:solidFill>
-              <a:srgbClr val="0D9488"/>
-            </a:solidFill>
-            <a:prstDash val="solid"/>
-          </a:ln>
-        </p:spPr>
-      </p:sp>
-      <p:sp>
-        <p:nvSpPr>
-          <p:cNvPr id="29" name="Text 27"/>
-          <p:cNvSpPr/>
-          <p:nvPr/>
-        </p:nvSpPr>
-        <p:spPr>
-          <a:xfrm>
-            <a:off x="2313432" y="3364992"/>
-            <a:ext cx="1645920" cy="475488"/>
+              <a:srgbClr val="DB2777"/>
+            </a:solidFill>
+            <a:prstDash val="solid"/>
+          </a:ln>
+        </p:spPr>
+      </p:sp>
+      <p:sp>
+        <p:nvSpPr>
+          <p:cNvPr id="43" name="Text 41"/>
+          <p:cNvSpPr/>
+          <p:nvPr/>
+        </p:nvSpPr>
+        <p:spPr>
+          <a:xfrm>
+            <a:off x="5759577" y="4169664"/>
+            <a:ext cx="685800" cy="384048"/>
           </a:xfrm>
           <a:prstGeom prst="rect">
             <a:avLst/>
@@ -14629,30 +14755,57 @@
               <a:buNone/>
             </a:pPr>
             <a:r>
-              <a:rPr lang="en-US" sz="1400" b="1" dirty="0">
-                <a:solidFill>
-                  <a:srgbClr val="0D9488"/>
+              <a:rPr lang="en-US" sz="900" b="1" dirty="0">
+                <a:solidFill>
+                  <a:srgbClr val="9D174D"/>
                 </a:solidFill>
                 <a:latin typeface="Trebuchet MS" pitchFamily="34" charset="0"/>
                 <a:ea typeface="Trebuchet MS" pitchFamily="34" charset="-122"/>
                 <a:cs typeface="Trebuchet MS" pitchFamily="34" charset="-120"/>
               </a:rPr>
-              <a:t>mis</a:t>
-            </a:r>
-            <a:endParaRPr lang="en-US" sz="1400" dirty="0"/>
-          </a:p>
-        </p:txBody>
-      </p:sp>
-      <p:sp>
-        <p:nvSpPr>
-          <p:cNvPr id="30" name="Text 28"/>
-          <p:cNvSpPr/>
-          <p:nvPr/>
-        </p:nvSpPr>
-        <p:spPr>
-          <a:xfrm>
-            <a:off x="3959352" y="3364992"/>
-            <a:ext cx="411480" cy="475488"/>
+              <a:t>e</a:t>
+            </a:r>
+            <a:endParaRPr lang="en-US" sz="900" dirty="0"/>
+          </a:p>
+        </p:txBody>
+      </p:sp>
+      <p:sp>
+        <p:nvSpPr>
+          <p:cNvPr id="44" name="Shape 42"/>
+          <p:cNvSpPr/>
+          <p:nvPr/>
+        </p:nvSpPr>
+        <p:spPr>
+          <a:xfrm>
+            <a:off x="6668262" y="4169664"/>
+            <a:ext cx="685800" cy="384048"/>
+          </a:xfrm>
+          <a:prstGeom prst="rect">
+            <a:avLst>
+              <a:gd name="adj" fmla="val 9524"/>
+            </a:avLst>
+          </a:prstGeom>
+          <a:solidFill>
+            <a:srgbClr val="FFFFFF"/>
+          </a:solidFill>
+          <a:ln w="12700">
+            <a:solidFill>
+              <a:srgbClr val="DB2777"/>
+            </a:solidFill>
+            <a:prstDash val="solid"/>
+          </a:ln>
+        </p:spPr>
+      </p:sp>
+      <p:sp>
+        <p:nvSpPr>
+          <p:cNvPr id="45" name="Text 43"/>
+          <p:cNvSpPr/>
+          <p:nvPr/>
+        </p:nvSpPr>
+        <p:spPr>
+          <a:xfrm>
+            <a:off x="6668262" y="4169664"/>
+            <a:ext cx="685800" cy="384048"/>
           </a:xfrm>
           <a:prstGeom prst="rect">
             <a:avLst/>
@@ -14668,294 +14821,30 @@
               <a:buNone/>
             </a:pPr>
             <a:r>
-              <a:rPr lang="en-US" sz="1600" b="1" dirty="0">
-                <a:solidFill>
-                  <a:srgbClr val="0D9488"/>
+              <a:rPr lang="en-US" sz="900" b="1" dirty="0">
+                <a:solidFill>
+                  <a:srgbClr val="9D174D"/>
                 </a:solidFill>
                 <a:latin typeface="Trebuchet MS" pitchFamily="34" charset="0"/>
                 <a:ea typeface="Trebuchet MS" pitchFamily="34" charset="-122"/>
                 <a:cs typeface="Trebuchet MS" pitchFamily="34" charset="-120"/>
               </a:rPr>
-              <a:t>·</a:t>
-            </a:r>
-            <a:endParaRPr lang="en-US" sz="1600" dirty="0"/>
-          </a:p>
-        </p:txBody>
-      </p:sp>
-      <p:sp>
-        <p:nvSpPr>
-          <p:cNvPr id="31" name="Shape 29"/>
-          <p:cNvSpPr/>
-          <p:nvPr/>
-        </p:nvSpPr>
-        <p:spPr>
-          <a:xfrm>
-            <a:off x="4370832" y="3364992"/>
-            <a:ext cx="1645920" cy="475488"/>
-          </a:xfrm>
-          <a:prstGeom prst="rect">
-            <a:avLst>
-              <a:gd name="adj" fmla="val 9615"/>
-            </a:avLst>
-          </a:prstGeom>
-          <a:solidFill>
-            <a:srgbClr val="FFFFFF"/>
-          </a:solidFill>
-          <a:ln w="12700">
-            <a:solidFill>
-              <a:srgbClr val="0D9488"/>
-            </a:solidFill>
-            <a:prstDash val="solid"/>
-          </a:ln>
-        </p:spPr>
-      </p:sp>
-      <p:sp>
-        <p:nvSpPr>
-          <p:cNvPr id="32" name="Text 30"/>
-          <p:cNvSpPr/>
-          <p:nvPr/>
-        </p:nvSpPr>
-        <p:spPr>
-          <a:xfrm>
-            <a:off x="4370832" y="3364992"/>
-            <a:ext cx="1645920" cy="475488"/>
-          </a:xfrm>
-          <a:prstGeom prst="rect">
-            <a:avLst/>
-          </a:prstGeom>
-          <a:noFill/>
-          <a:ln/>
-        </p:spPr>
-        <p:txBody>
-          <a:bodyPr wrap="square" lIns="0" tIns="0" rIns="0" bIns="0" rtlCol="0" anchor="ctr"/>
-          <a:lstStyle/>
-          <a:p>
-            <a:pPr algn="ctr" indent="0" marL="0">
-              <a:buNone/>
-            </a:pPr>
-            <a:r>
-              <a:rPr lang="en-US" sz="1400" b="1" dirty="0">
-                <a:solidFill>
-                  <a:srgbClr val="0D9488"/>
-                </a:solidFill>
-                <a:latin typeface="Trebuchet MS" pitchFamily="34" charset="0"/>
-                <a:ea typeface="Trebuchet MS" pitchFamily="34" charset="-122"/>
-                <a:cs typeface="Trebuchet MS" pitchFamily="34" charset="-120"/>
-              </a:rPr>
-              <a:t>judge</a:t>
-            </a:r>
-            <a:endParaRPr lang="en-US" sz="1400" dirty="0"/>
-          </a:p>
-        </p:txBody>
-      </p:sp>
-      <p:sp>
-        <p:nvSpPr>
-          <p:cNvPr id="33" name="Text 31"/>
-          <p:cNvSpPr/>
-          <p:nvPr/>
-        </p:nvSpPr>
-        <p:spPr>
-          <a:xfrm>
-            <a:off x="6016752" y="3364992"/>
-            <a:ext cx="411480" cy="475488"/>
-          </a:xfrm>
-          <a:prstGeom prst="rect">
-            <a:avLst/>
-          </a:prstGeom>
-          <a:noFill/>
-          <a:ln/>
-        </p:spPr>
-        <p:txBody>
-          <a:bodyPr wrap="square" lIns="0" tIns="0" rIns="0" bIns="0" rtlCol="0" anchor="ctr"/>
-          <a:lstStyle/>
-          <a:p>
-            <a:pPr algn="ctr" indent="0" marL="0">
-              <a:buNone/>
-            </a:pPr>
-            <a:r>
-              <a:rPr lang="en-US" sz="1600" b="1" dirty="0">
-                <a:solidFill>
-                  <a:srgbClr val="0D9488"/>
-                </a:solidFill>
-                <a:latin typeface="Trebuchet MS" pitchFamily="34" charset="0"/>
-                <a:ea typeface="Trebuchet MS" pitchFamily="34" charset="-122"/>
-                <a:cs typeface="Trebuchet MS" pitchFamily="34" charset="-120"/>
-              </a:rPr>
-              <a:t>·</a:t>
-            </a:r>
-            <a:endParaRPr lang="en-US" sz="1600" dirty="0"/>
-          </a:p>
-        </p:txBody>
-      </p:sp>
-      <p:sp>
-        <p:nvSpPr>
-          <p:cNvPr id="34" name="Shape 32"/>
-          <p:cNvSpPr/>
-          <p:nvPr/>
-        </p:nvSpPr>
-        <p:spPr>
-          <a:xfrm>
-            <a:off x="6428232" y="3364992"/>
-            <a:ext cx="1645920" cy="475488"/>
-          </a:xfrm>
-          <a:prstGeom prst="rect">
-            <a:avLst>
-              <a:gd name="adj" fmla="val 9615"/>
-            </a:avLst>
-          </a:prstGeom>
-          <a:solidFill>
-            <a:srgbClr val="FFFFFF"/>
-          </a:solidFill>
-          <a:ln w="12700">
-            <a:solidFill>
-              <a:srgbClr val="0D9488"/>
-            </a:solidFill>
-            <a:prstDash val="solid"/>
-          </a:ln>
-        </p:spPr>
-      </p:sp>
-      <p:sp>
-        <p:nvSpPr>
-          <p:cNvPr id="35" name="Text 33"/>
-          <p:cNvSpPr/>
-          <p:nvPr/>
-        </p:nvSpPr>
-        <p:spPr>
-          <a:xfrm>
-            <a:off x="6428232" y="3364992"/>
-            <a:ext cx="1645920" cy="475488"/>
-          </a:xfrm>
-          <a:prstGeom prst="rect">
-            <a:avLst/>
-          </a:prstGeom>
-          <a:noFill/>
-          <a:ln/>
-        </p:spPr>
-        <p:txBody>
-          <a:bodyPr wrap="square" lIns="0" tIns="0" rIns="0" bIns="0" rtlCol="0" anchor="ctr"/>
-          <a:lstStyle/>
-          <a:p>
-            <a:pPr algn="ctr" indent="0" marL="0">
-              <a:buNone/>
-            </a:pPr>
-            <a:r>
-              <a:rPr lang="en-US" sz="1400" b="1" dirty="0">
-                <a:solidFill>
-                  <a:srgbClr val="0D9488"/>
-                </a:solidFill>
-                <a:latin typeface="Trebuchet MS" pitchFamily="34" charset="0"/>
-                <a:ea typeface="Trebuchet MS" pitchFamily="34" charset="-122"/>
-                <a:cs typeface="Trebuchet MS" pitchFamily="34" charset="-120"/>
-              </a:rPr>
-              <a:t>ment</a:t>
-            </a:r>
-            <a:endParaRPr lang="en-US" sz="1400" dirty="0"/>
-          </a:p>
-        </p:txBody>
-      </p:sp>
-      <p:sp>
-        <p:nvSpPr>
-          <p:cNvPr id="36" name="Shape 34"/>
-          <p:cNvSpPr/>
-          <p:nvPr/>
-        </p:nvSpPr>
-        <p:spPr>
-          <a:xfrm>
-            <a:off x="365760" y="4096512"/>
-            <a:ext cx="1371600" cy="804672"/>
-          </a:xfrm>
-          <a:prstGeom prst="rect">
-            <a:avLst>
-              <a:gd name="adj" fmla="val 6818"/>
-            </a:avLst>
-          </a:prstGeom>
-          <a:solidFill>
-            <a:srgbClr val="E2E8F0"/>
-          </a:solidFill>
-          <a:ln w="12700">
-            <a:solidFill>
-              <a:srgbClr val="E2E8F0"/>
-            </a:solidFill>
-            <a:prstDash val="solid"/>
-          </a:ln>
-        </p:spPr>
-      </p:sp>
-      <p:sp>
-        <p:nvSpPr>
-          <p:cNvPr id="37" name="Text 35"/>
-          <p:cNvSpPr/>
-          <p:nvPr/>
-        </p:nvSpPr>
-        <p:spPr>
-          <a:xfrm>
-            <a:off x="365760" y="4096512"/>
-            <a:ext cx="1371600" cy="804672"/>
-          </a:xfrm>
-          <a:prstGeom prst="rect">
-            <a:avLst/>
-          </a:prstGeom>
-          <a:noFill/>
-          <a:ln/>
-        </p:spPr>
-        <p:txBody>
-          <a:bodyPr wrap="square" lIns="0" tIns="0" rIns="0" bIns="0" rtlCol="0" anchor="ctr"/>
-          <a:lstStyle/>
-          <a:p>
-            <a:pPr algn="ctr" indent="0" marL="0">
-              <a:buNone/>
-            </a:pPr>
-            <a:r>
-              <a:rPr lang="en-US" sz="1100" b="1" dirty="0">
-                <a:solidFill>
-                  <a:srgbClr val="475569"/>
-                </a:solidFill>
-                <a:latin typeface="Trebuchet MS" pitchFamily="34" charset="0"/>
-                <a:ea typeface="Trebuchet MS" pitchFamily="34" charset="-122"/>
-                <a:cs typeface="Trebuchet MS" pitchFamily="34" charset="-120"/>
-              </a:rPr>
-              <a:t>Phonemes</a:t>
-            </a:r>
-            <a:endParaRPr lang="en-US" sz="1100" dirty="0"/>
-          </a:p>
-        </p:txBody>
-      </p:sp>
-      <p:sp>
-        <p:nvSpPr>
-          <p:cNvPr id="38" name="Shape 36"/>
-          <p:cNvSpPr/>
-          <p:nvPr/>
-        </p:nvSpPr>
-        <p:spPr>
-          <a:xfrm>
-            <a:off x="1874520" y="4096512"/>
-            <a:ext cx="6903720" cy="804672"/>
-          </a:xfrm>
-          <a:prstGeom prst="rect">
-            <a:avLst>
-              <a:gd name="adj" fmla="val 6818"/>
-            </a:avLst>
-          </a:prstGeom>
-          <a:solidFill>
-            <a:srgbClr val="FCE7F3"/>
-          </a:solidFill>
-          <a:ln w="12700">
-            <a:solidFill>
-              <a:srgbClr val="DB2777"/>
-            </a:solidFill>
-            <a:prstDash val="solid"/>
-          </a:ln>
-        </p:spPr>
-      </p:sp>
-      <p:sp>
-        <p:nvSpPr>
-          <p:cNvPr id="39" name="Shape 37"/>
-          <p:cNvSpPr/>
-          <p:nvPr/>
-        </p:nvSpPr>
-        <p:spPr>
-          <a:xfrm>
-            <a:off x="1951828" y="4169664"/>
-            <a:ext cx="603504" cy="384048"/>
+              <a:t>n</a:t>
+            </a:r>
+            <a:endParaRPr lang="en-US" sz="900" dirty="0"/>
+          </a:p>
+        </p:txBody>
+      </p:sp>
+      <p:sp>
+        <p:nvSpPr>
+          <p:cNvPr id="46" name="Shape 44"/>
+          <p:cNvSpPr/>
+          <p:nvPr/>
+        </p:nvSpPr>
+        <p:spPr>
+          <a:xfrm>
+            <a:off x="7576947" y="4169664"/>
+            <a:ext cx="685800" cy="384048"/>
           </a:xfrm>
           <a:prstGeom prst="rect">
             <a:avLst>
@@ -14975,647 +14864,14 @@
       </p:sp>
       <p:sp>
         <p:nvSpPr>
-          <p:cNvPr id="40" name="Text 38"/>
-          <p:cNvSpPr/>
-          <p:nvPr/>
-        </p:nvSpPr>
-        <p:spPr>
-          <a:xfrm>
-            <a:off x="1951828" y="4169664"/>
-            <a:ext cx="603504" cy="384048"/>
-          </a:xfrm>
-          <a:prstGeom prst="rect">
-            <a:avLst/>
-          </a:prstGeom>
-          <a:noFill/>
-          <a:ln/>
-        </p:spPr>
-        <p:txBody>
-          <a:bodyPr wrap="square" lIns="0" tIns="0" rIns="0" bIns="0" rtlCol="0" anchor="ctr"/>
-          <a:lstStyle/>
-          <a:p>
-            <a:pPr algn="ctr" indent="0" marL="0">
-              <a:buNone/>
-            </a:pPr>
-            <a:r>
-              <a:rPr lang="en-US" sz="900" b="1" dirty="0">
-                <a:solidFill>
-                  <a:srgbClr val="9D174D"/>
-                </a:solidFill>
-                <a:latin typeface="Trebuchet MS" pitchFamily="34" charset="0"/>
-                <a:ea typeface="Trebuchet MS" pitchFamily="34" charset="-122"/>
-                <a:cs typeface="Trebuchet MS" pitchFamily="34" charset="-120"/>
-              </a:rPr>
-              <a:t>m</a:t>
-            </a:r>
-            <a:endParaRPr lang="en-US" sz="900" dirty="0"/>
-          </a:p>
-        </p:txBody>
-      </p:sp>
-      <p:sp>
-        <p:nvSpPr>
-          <p:cNvPr id="41" name="Shape 39"/>
-          <p:cNvSpPr/>
-          <p:nvPr/>
-        </p:nvSpPr>
-        <p:spPr>
-          <a:xfrm>
-            <a:off x="2605209" y="4169664"/>
-            <a:ext cx="603504" cy="384048"/>
-          </a:xfrm>
-          <a:prstGeom prst="rect">
-            <a:avLst>
-              <a:gd name="adj" fmla="val 9524"/>
-            </a:avLst>
-          </a:prstGeom>
-          <a:solidFill>
-            <a:srgbClr val="FFFFFF"/>
-          </a:solidFill>
-          <a:ln w="12700">
-            <a:solidFill>
-              <a:srgbClr val="DB2777"/>
-            </a:solidFill>
-            <a:prstDash val="solid"/>
-          </a:ln>
-        </p:spPr>
-      </p:sp>
-      <p:sp>
-        <p:nvSpPr>
-          <p:cNvPr id="42" name="Text 40"/>
-          <p:cNvSpPr/>
-          <p:nvPr/>
-        </p:nvSpPr>
-        <p:spPr>
-          <a:xfrm>
-            <a:off x="2605209" y="4169664"/>
-            <a:ext cx="603504" cy="384048"/>
-          </a:xfrm>
-          <a:prstGeom prst="rect">
-            <a:avLst/>
-          </a:prstGeom>
-          <a:noFill/>
-          <a:ln/>
-        </p:spPr>
-        <p:txBody>
-          <a:bodyPr wrap="square" lIns="0" tIns="0" rIns="0" bIns="0" rtlCol="0" anchor="ctr"/>
-          <a:lstStyle/>
-          <a:p>
-            <a:pPr algn="ctr" indent="0" marL="0">
-              <a:buNone/>
-            </a:pPr>
-            <a:r>
-              <a:rPr lang="en-US" sz="900" b="1" dirty="0">
-                <a:solidFill>
-                  <a:srgbClr val="9D174D"/>
-                </a:solidFill>
-                <a:latin typeface="Trebuchet MS" pitchFamily="34" charset="0"/>
-                <a:ea typeface="Trebuchet MS" pitchFamily="34" charset="-122"/>
-                <a:cs typeface="Trebuchet MS" pitchFamily="34" charset="-120"/>
-              </a:rPr>
-              <a:t>i</a:t>
-            </a:r>
-            <a:endParaRPr lang="en-US" sz="900" dirty="0"/>
-          </a:p>
-        </p:txBody>
-      </p:sp>
-      <p:sp>
-        <p:nvSpPr>
-          <p:cNvPr id="43" name="Shape 41"/>
-          <p:cNvSpPr/>
-          <p:nvPr/>
-        </p:nvSpPr>
-        <p:spPr>
-          <a:xfrm>
-            <a:off x="3258589" y="4169664"/>
-            <a:ext cx="603504" cy="384048"/>
-          </a:xfrm>
-          <a:prstGeom prst="rect">
-            <a:avLst>
-              <a:gd name="adj" fmla="val 9524"/>
-            </a:avLst>
-          </a:prstGeom>
-          <a:solidFill>
-            <a:srgbClr val="FFFFFF"/>
-          </a:solidFill>
-          <a:ln w="12700">
-            <a:solidFill>
-              <a:srgbClr val="DB2777"/>
-            </a:solidFill>
-            <a:prstDash val="solid"/>
-          </a:ln>
-        </p:spPr>
-      </p:sp>
-      <p:sp>
-        <p:nvSpPr>
-          <p:cNvPr id="44" name="Text 42"/>
-          <p:cNvSpPr/>
-          <p:nvPr/>
-        </p:nvSpPr>
-        <p:spPr>
-          <a:xfrm>
-            <a:off x="3258589" y="4169664"/>
-            <a:ext cx="603504" cy="384048"/>
-          </a:xfrm>
-          <a:prstGeom prst="rect">
-            <a:avLst/>
-          </a:prstGeom>
-          <a:noFill/>
-          <a:ln/>
-        </p:spPr>
-        <p:txBody>
-          <a:bodyPr wrap="square" lIns="0" tIns="0" rIns="0" bIns="0" rtlCol="0" anchor="ctr"/>
-          <a:lstStyle/>
-          <a:p>
-            <a:pPr algn="ctr" indent="0" marL="0">
-              <a:buNone/>
-            </a:pPr>
-            <a:r>
-              <a:rPr lang="en-US" sz="900" b="1" dirty="0">
-                <a:solidFill>
-                  <a:srgbClr val="9D174D"/>
-                </a:solidFill>
-                <a:latin typeface="Trebuchet MS" pitchFamily="34" charset="0"/>
-                <a:ea typeface="Trebuchet MS" pitchFamily="34" charset="-122"/>
-                <a:cs typeface="Trebuchet MS" pitchFamily="34" charset="-120"/>
-              </a:rPr>
-              <a:t>s</a:t>
-            </a:r>
-            <a:endParaRPr lang="en-US" sz="900" dirty="0"/>
-          </a:p>
-        </p:txBody>
-      </p:sp>
-      <p:sp>
-        <p:nvSpPr>
-          <p:cNvPr id="45" name="Shape 43"/>
-          <p:cNvSpPr/>
-          <p:nvPr/>
-        </p:nvSpPr>
-        <p:spPr>
-          <a:xfrm>
-            <a:off x="3911969" y="4169664"/>
-            <a:ext cx="603504" cy="384048"/>
-          </a:xfrm>
-          <a:prstGeom prst="rect">
-            <a:avLst>
-              <a:gd name="adj" fmla="val 9524"/>
-            </a:avLst>
-          </a:prstGeom>
-          <a:solidFill>
-            <a:srgbClr val="FFFFFF"/>
-          </a:solidFill>
-          <a:ln w="12700">
-            <a:solidFill>
-              <a:srgbClr val="DB2777"/>
-            </a:solidFill>
-            <a:prstDash val="solid"/>
-          </a:ln>
-        </p:spPr>
-      </p:sp>
-      <p:sp>
-        <p:nvSpPr>
-          <p:cNvPr id="46" name="Text 44"/>
-          <p:cNvSpPr/>
-          <p:nvPr/>
-        </p:nvSpPr>
-        <p:spPr>
-          <a:xfrm>
-            <a:off x="3911969" y="4169664"/>
-            <a:ext cx="603504" cy="384048"/>
-          </a:xfrm>
-          <a:prstGeom prst="rect">
-            <a:avLst/>
-          </a:prstGeom>
-          <a:noFill/>
-          <a:ln/>
-        </p:spPr>
-        <p:txBody>
-          <a:bodyPr wrap="square" lIns="0" tIns="0" rIns="0" bIns="0" rtlCol="0" anchor="ctr"/>
-          <a:lstStyle/>
-          <a:p>
-            <a:pPr algn="ctr" indent="0" marL="0">
-              <a:buNone/>
-            </a:pPr>
-            <a:r>
-              <a:rPr lang="en-US" sz="900" b="1" dirty="0">
-                <a:solidFill>
-                  <a:srgbClr val="9D174D"/>
-                </a:solidFill>
-                <a:latin typeface="Trebuchet MS" pitchFamily="34" charset="0"/>
-                <a:ea typeface="Trebuchet MS" pitchFamily="34" charset="-122"/>
-                <a:cs typeface="Trebuchet MS" pitchFamily="34" charset="-120"/>
-              </a:rPr>
-              <a:t>j</a:t>
-            </a:r>
-            <a:endParaRPr lang="en-US" sz="900" dirty="0"/>
-          </a:p>
-        </p:txBody>
-      </p:sp>
-      <p:sp>
-        <p:nvSpPr>
-          <p:cNvPr id="47" name="Shape 45"/>
-          <p:cNvSpPr/>
-          <p:nvPr/>
-        </p:nvSpPr>
-        <p:spPr>
-          <a:xfrm>
-            <a:off x="4565350" y="4169664"/>
-            <a:ext cx="603504" cy="384048"/>
-          </a:xfrm>
-          <a:prstGeom prst="rect">
-            <a:avLst>
-              <a:gd name="adj" fmla="val 9524"/>
-            </a:avLst>
-          </a:prstGeom>
-          <a:solidFill>
-            <a:srgbClr val="FFFFFF"/>
-          </a:solidFill>
-          <a:ln w="12700">
-            <a:solidFill>
-              <a:srgbClr val="DB2777"/>
-            </a:solidFill>
-            <a:prstDash val="solid"/>
-          </a:ln>
-        </p:spPr>
-      </p:sp>
-      <p:sp>
-        <p:nvSpPr>
-          <p:cNvPr id="48" name="Text 46"/>
-          <p:cNvSpPr/>
-          <p:nvPr/>
-        </p:nvSpPr>
-        <p:spPr>
-          <a:xfrm>
-            <a:off x="4565350" y="4169664"/>
-            <a:ext cx="603504" cy="384048"/>
-          </a:xfrm>
-          <a:prstGeom prst="rect">
-            <a:avLst/>
-          </a:prstGeom>
-          <a:noFill/>
-          <a:ln/>
-        </p:spPr>
-        <p:txBody>
-          <a:bodyPr wrap="square" lIns="0" tIns="0" rIns="0" bIns="0" rtlCol="0" anchor="ctr"/>
-          <a:lstStyle/>
-          <a:p>
-            <a:pPr algn="ctr" indent="0" marL="0">
-              <a:buNone/>
-            </a:pPr>
-            <a:r>
-              <a:rPr lang="en-US" sz="900" b="1" dirty="0">
-                <a:solidFill>
-                  <a:srgbClr val="9D174D"/>
-                </a:solidFill>
-                <a:latin typeface="Trebuchet MS" pitchFamily="34" charset="0"/>
-                <a:ea typeface="Trebuchet MS" pitchFamily="34" charset="-122"/>
-                <a:cs typeface="Trebuchet MS" pitchFamily="34" charset="-120"/>
-              </a:rPr>
-              <a:t>u</a:t>
-            </a:r>
-            <a:endParaRPr lang="en-US" sz="900" dirty="0"/>
-          </a:p>
-        </p:txBody>
-      </p:sp>
-      <p:sp>
-        <p:nvSpPr>
-          <p:cNvPr id="49" name="Shape 47"/>
-          <p:cNvSpPr/>
-          <p:nvPr/>
-        </p:nvSpPr>
-        <p:spPr>
-          <a:xfrm>
-            <a:off x="5218730" y="4169664"/>
-            <a:ext cx="603504" cy="384048"/>
-          </a:xfrm>
-          <a:prstGeom prst="rect">
-            <a:avLst>
-              <a:gd name="adj" fmla="val 9524"/>
-            </a:avLst>
-          </a:prstGeom>
-          <a:solidFill>
-            <a:srgbClr val="FFFFFF"/>
-          </a:solidFill>
-          <a:ln w="12700">
-            <a:solidFill>
-              <a:srgbClr val="DB2777"/>
-            </a:solidFill>
-            <a:prstDash val="solid"/>
-          </a:ln>
-        </p:spPr>
-      </p:sp>
-      <p:sp>
-        <p:nvSpPr>
-          <p:cNvPr id="50" name="Text 48"/>
-          <p:cNvSpPr/>
-          <p:nvPr/>
-        </p:nvSpPr>
-        <p:spPr>
-          <a:xfrm>
-            <a:off x="5218730" y="4169664"/>
-            <a:ext cx="603504" cy="384048"/>
-          </a:xfrm>
-          <a:prstGeom prst="rect">
-            <a:avLst/>
-          </a:prstGeom>
-          <a:noFill/>
-          <a:ln/>
-        </p:spPr>
-        <p:txBody>
-          <a:bodyPr wrap="square" lIns="0" tIns="0" rIns="0" bIns="0" rtlCol="0" anchor="ctr"/>
-          <a:lstStyle/>
-          <a:p>
-            <a:pPr algn="ctr" indent="0" marL="0">
-              <a:buNone/>
-            </a:pPr>
-            <a:r>
-              <a:rPr lang="en-US" sz="900" b="1" dirty="0">
-                <a:solidFill>
-                  <a:srgbClr val="9D174D"/>
-                </a:solidFill>
-                <a:latin typeface="Trebuchet MS" pitchFamily="34" charset="0"/>
-                <a:ea typeface="Trebuchet MS" pitchFamily="34" charset="-122"/>
-                <a:cs typeface="Trebuchet MS" pitchFamily="34" charset="-120"/>
-              </a:rPr>
-              <a:t>dge</a:t>
-            </a:r>
-            <a:endParaRPr lang="en-US" sz="900" dirty="0"/>
-          </a:p>
-        </p:txBody>
-      </p:sp>
-      <p:sp>
-        <p:nvSpPr>
-          <p:cNvPr id="51" name="Text 49"/>
-          <p:cNvSpPr/>
-          <p:nvPr/>
-        </p:nvSpPr>
-        <p:spPr>
-          <a:xfrm>
-            <a:off x="5218730" y="4572000"/>
-            <a:ext cx="603504" cy="219456"/>
-          </a:xfrm>
-          <a:prstGeom prst="rect">
-            <a:avLst/>
-          </a:prstGeom>
-          <a:noFill/>
-          <a:ln/>
-        </p:spPr>
-        <p:txBody>
-          <a:bodyPr wrap="square" lIns="0" tIns="0" rIns="0" bIns="0" rtlCol="0" anchor="t"/>
-          <a:lstStyle/>
-          <a:p>
-            <a:pPr algn="ctr" indent="0" marL="0">
-              <a:buNone/>
-            </a:pPr>
-            <a:r>
-              <a:rPr lang="en-US" sz="750" i="1" dirty="0">
-                <a:solidFill>
-                  <a:srgbClr val="94A3B8"/>
-                </a:solidFill>
-                <a:latin typeface="Calibri" pitchFamily="34" charset="0"/>
-                <a:ea typeface="Calibri" pitchFamily="34" charset="-122"/>
-                <a:cs typeface="Calibri" pitchFamily="34" charset="-120"/>
-              </a:rPr>
-              <a:t>/j/</a:t>
-            </a:r>
-            <a:endParaRPr lang="en-US" sz="750" dirty="0"/>
-          </a:p>
-        </p:txBody>
-      </p:sp>
-      <p:sp>
-        <p:nvSpPr>
-          <p:cNvPr id="52" name="Shape 50"/>
-          <p:cNvSpPr/>
-          <p:nvPr/>
-        </p:nvSpPr>
-        <p:spPr>
-          <a:xfrm>
-            <a:off x="5872111" y="4169664"/>
-            <a:ext cx="603504" cy="384048"/>
-          </a:xfrm>
-          <a:prstGeom prst="rect">
-            <a:avLst>
-              <a:gd name="adj" fmla="val 9524"/>
-            </a:avLst>
-          </a:prstGeom>
-          <a:solidFill>
-            <a:srgbClr val="FFFFFF"/>
-          </a:solidFill>
-          <a:ln w="12700">
-            <a:solidFill>
-              <a:srgbClr val="DB2777"/>
-            </a:solidFill>
-            <a:prstDash val="solid"/>
-          </a:ln>
-        </p:spPr>
-      </p:sp>
-      <p:sp>
-        <p:nvSpPr>
-          <p:cNvPr id="53" name="Text 51"/>
-          <p:cNvSpPr/>
-          <p:nvPr/>
-        </p:nvSpPr>
-        <p:spPr>
-          <a:xfrm>
-            <a:off x="5872111" y="4169664"/>
-            <a:ext cx="603504" cy="384048"/>
-          </a:xfrm>
-          <a:prstGeom prst="rect">
-            <a:avLst/>
-          </a:prstGeom>
-          <a:noFill/>
-          <a:ln/>
-        </p:spPr>
-        <p:txBody>
-          <a:bodyPr wrap="square" lIns="0" tIns="0" rIns="0" bIns="0" rtlCol="0" anchor="ctr"/>
-          <a:lstStyle/>
-          <a:p>
-            <a:pPr algn="ctr" indent="0" marL="0">
-              <a:buNone/>
-            </a:pPr>
-            <a:r>
-              <a:rPr lang="en-US" sz="900" b="1" dirty="0">
-                <a:solidFill>
-                  <a:srgbClr val="9D174D"/>
-                </a:solidFill>
-                <a:latin typeface="Trebuchet MS" pitchFamily="34" charset="0"/>
-                <a:ea typeface="Trebuchet MS" pitchFamily="34" charset="-122"/>
-                <a:cs typeface="Trebuchet MS" pitchFamily="34" charset="-120"/>
-              </a:rPr>
-              <a:t>m</a:t>
-            </a:r>
-            <a:endParaRPr lang="en-US" sz="900" dirty="0"/>
-          </a:p>
-        </p:txBody>
-      </p:sp>
-      <p:sp>
-        <p:nvSpPr>
-          <p:cNvPr id="54" name="Shape 52"/>
-          <p:cNvSpPr/>
-          <p:nvPr/>
-        </p:nvSpPr>
-        <p:spPr>
-          <a:xfrm>
-            <a:off x="6525491" y="4169664"/>
-            <a:ext cx="603504" cy="384048"/>
-          </a:xfrm>
-          <a:prstGeom prst="rect">
-            <a:avLst>
-              <a:gd name="adj" fmla="val 9524"/>
-            </a:avLst>
-          </a:prstGeom>
-          <a:solidFill>
-            <a:srgbClr val="FFFFFF"/>
-          </a:solidFill>
-          <a:ln w="12700">
-            <a:solidFill>
-              <a:srgbClr val="DB2777"/>
-            </a:solidFill>
-            <a:prstDash val="solid"/>
-          </a:ln>
-        </p:spPr>
-      </p:sp>
-      <p:sp>
-        <p:nvSpPr>
-          <p:cNvPr id="55" name="Text 53"/>
-          <p:cNvSpPr/>
-          <p:nvPr/>
-        </p:nvSpPr>
-        <p:spPr>
-          <a:xfrm>
-            <a:off x="6525491" y="4169664"/>
-            <a:ext cx="603504" cy="384048"/>
-          </a:xfrm>
-          <a:prstGeom prst="rect">
-            <a:avLst/>
-          </a:prstGeom>
-          <a:noFill/>
-          <a:ln/>
-        </p:spPr>
-        <p:txBody>
-          <a:bodyPr wrap="square" lIns="0" tIns="0" rIns="0" bIns="0" rtlCol="0" anchor="ctr"/>
-          <a:lstStyle/>
-          <a:p>
-            <a:pPr algn="ctr" indent="0" marL="0">
-              <a:buNone/>
-            </a:pPr>
-            <a:r>
-              <a:rPr lang="en-US" sz="900" b="1" dirty="0">
-                <a:solidFill>
-                  <a:srgbClr val="9D174D"/>
-                </a:solidFill>
-                <a:latin typeface="Trebuchet MS" pitchFamily="34" charset="0"/>
-                <a:ea typeface="Trebuchet MS" pitchFamily="34" charset="-122"/>
-                <a:cs typeface="Trebuchet MS" pitchFamily="34" charset="-120"/>
-              </a:rPr>
-              <a:t>e</a:t>
-            </a:r>
-            <a:endParaRPr lang="en-US" sz="900" dirty="0"/>
-          </a:p>
-        </p:txBody>
-      </p:sp>
-      <p:sp>
-        <p:nvSpPr>
-          <p:cNvPr id="56" name="Shape 54"/>
-          <p:cNvSpPr/>
-          <p:nvPr/>
-        </p:nvSpPr>
-        <p:spPr>
-          <a:xfrm>
-            <a:off x="7178871" y="4169664"/>
-            <a:ext cx="603504" cy="384048"/>
-          </a:xfrm>
-          <a:prstGeom prst="rect">
-            <a:avLst>
-              <a:gd name="adj" fmla="val 9524"/>
-            </a:avLst>
-          </a:prstGeom>
-          <a:solidFill>
-            <a:srgbClr val="FFFFFF"/>
-          </a:solidFill>
-          <a:ln w="12700">
-            <a:solidFill>
-              <a:srgbClr val="DB2777"/>
-            </a:solidFill>
-            <a:prstDash val="solid"/>
-          </a:ln>
-        </p:spPr>
-      </p:sp>
-      <p:sp>
-        <p:nvSpPr>
-          <p:cNvPr id="57" name="Text 55"/>
-          <p:cNvSpPr/>
-          <p:nvPr/>
-        </p:nvSpPr>
-        <p:spPr>
-          <a:xfrm>
-            <a:off x="7178871" y="4169664"/>
-            <a:ext cx="603504" cy="384048"/>
-          </a:xfrm>
-          <a:prstGeom prst="rect">
-            <a:avLst/>
-          </a:prstGeom>
-          <a:noFill/>
-          <a:ln/>
-        </p:spPr>
-        <p:txBody>
-          <a:bodyPr wrap="square" lIns="0" tIns="0" rIns="0" bIns="0" rtlCol="0" anchor="ctr"/>
-          <a:lstStyle/>
-          <a:p>
-            <a:pPr algn="ctr" indent="0" marL="0">
-              <a:buNone/>
-            </a:pPr>
-            <a:r>
-              <a:rPr lang="en-US" sz="900" b="1" dirty="0">
-                <a:solidFill>
-                  <a:srgbClr val="9D174D"/>
-                </a:solidFill>
-                <a:latin typeface="Trebuchet MS" pitchFamily="34" charset="0"/>
-                <a:ea typeface="Trebuchet MS" pitchFamily="34" charset="-122"/>
-                <a:cs typeface="Trebuchet MS" pitchFamily="34" charset="-120"/>
-              </a:rPr>
-              <a:t>n</a:t>
-            </a:r>
-            <a:endParaRPr lang="en-US" sz="900" dirty="0"/>
-          </a:p>
-        </p:txBody>
-      </p:sp>
-      <p:sp>
-        <p:nvSpPr>
-          <p:cNvPr id="58" name="Shape 56"/>
-          <p:cNvSpPr/>
-          <p:nvPr/>
-        </p:nvSpPr>
-        <p:spPr>
-          <a:xfrm>
-            <a:off x="7832252" y="4169664"/>
-            <a:ext cx="603504" cy="384048"/>
-          </a:xfrm>
-          <a:prstGeom prst="rect">
-            <a:avLst>
-              <a:gd name="adj" fmla="val 9524"/>
-            </a:avLst>
-          </a:prstGeom>
-          <a:solidFill>
-            <a:srgbClr val="FFFFFF"/>
-          </a:solidFill>
-          <a:ln w="12700">
-            <a:solidFill>
-              <a:srgbClr val="DB2777"/>
-            </a:solidFill>
-            <a:prstDash val="solid"/>
-          </a:ln>
-        </p:spPr>
-      </p:sp>
-      <p:sp>
-        <p:nvSpPr>
-          <p:cNvPr id="59" name="Text 57"/>
-          <p:cNvSpPr/>
-          <p:nvPr/>
-        </p:nvSpPr>
-        <p:spPr>
-          <a:xfrm>
-            <a:off x="7832252" y="4169664"/>
-            <a:ext cx="603504" cy="384048"/>
+          <p:cNvPr id="47" name="Text 45"/>
+          <p:cNvSpPr/>
+          <p:nvPr/>
+        </p:nvSpPr>
+        <p:spPr>
+          <a:xfrm>
+            <a:off x="7576947" y="4169664"/>
+            <a:ext cx="685800" cy="384048"/>
           </a:xfrm>
           <a:prstGeom prst="rect">
             <a:avLst/>
@@ -16547,7 +15803,7 @@
                 <a:ea typeface="Trebuchet MS" pitchFamily="34" charset="-122"/>
                 <a:cs typeface="Trebuchet MS" pitchFamily="34" charset="-120"/>
               </a:rPr>
-              <a:t>2</a:t>
+              <a:t>1</a:t>
             </a:r>
             <a:pPr algn="ctr" indent="0" marL="0">
               <a:buNone/>
@@ -16561,7 +15817,7 @@
                 <a:ea typeface="Trebuchet MS" pitchFamily="34" charset="-122"/>
                 <a:cs typeface="Trebuchet MS" pitchFamily="34" charset="-120"/>
               </a:rPr>
-              <a:t>  punctuation marks</a:t>
+              <a:t>  punctuation mark</a:t>
             </a:r>
             <a:endParaRPr lang="en-US" sz="2800" dirty="0"/>
           </a:p>
@@ -16965,7 +16221,7 @@
                 <a:ea typeface="Calibri" pitchFamily="34" charset="-122"/>
                 <a:cs typeface="Calibri" pitchFamily="34" charset="-120"/>
               </a:rPr>
-              <a:t>The </a:t>
+              <a:t>She knew it was wrong to </a:t>
             </a:r>
             <a:pPr algn="l" indent="0" marL="0">
               <a:buNone/>
@@ -16982,7 +16238,7 @@
                 <a:ea typeface="Calibri" pitchFamily="34" charset="-122"/>
                 <a:cs typeface="Calibri" pitchFamily="34" charset="-120"/>
               </a:rPr>
-              <a:t>judging</a:t>
+              <a:t>prejudge</a:t>
             </a:r>
             <a:pPr algn="l" indent="0" marL="0">
               <a:buNone/>
@@ -16996,7 +16252,7 @@
                 <a:ea typeface="Calibri" pitchFamily="34" charset="-122"/>
                 <a:cs typeface="Calibri" pitchFamily="34" charset="-120"/>
               </a:rPr>
-              <a:t> panel agreed that, although she had </a:t>
+              <a:t> him, but her </a:t>
             </a:r>
             <a:pPr algn="l" indent="0" marL="0">
               <a:buNone/>
@@ -17013,7 +16269,7 @@
                 <a:ea typeface="Calibri" pitchFamily="34" charset="-122"/>
                 <a:cs typeface="Calibri" pitchFamily="34" charset="-120"/>
               </a:rPr>
-              <a:t>misjudged</a:t>
+              <a:t>misjudgement</a:t>
             </a:r>
             <a:pPr algn="l" indent="0" marL="0">
               <a:buNone/>
@@ -17027,7 +16283,7 @@
                 <a:ea typeface="Calibri" pitchFamily="34" charset="-122"/>
                 <a:cs typeface="Calibri" pitchFamily="34" charset="-120"/>
               </a:rPr>
-              <a:t> the distance, her overall </a:t>
+              <a:t> had already made the situation </a:t>
             </a:r>
             <a:pPr algn="l" indent="0" marL="0">
               <a:buNone/>
@@ -17044,7 +16300,7 @@
                 <a:ea typeface="Calibri" pitchFamily="34" charset="-122"/>
                 <a:cs typeface="Calibri" pitchFamily="34" charset="-120"/>
               </a:rPr>
-              <a:t>judgement</a:t>
+              <a:t>judgemental</a:t>
             </a:r>
             <a:pPr algn="l" indent="0" marL="0">
               <a:buNone/>
@@ -17058,7 +16314,7 @@
                 <a:ea typeface="Calibri" pitchFamily="34" charset="-122"/>
                 <a:cs typeface="Calibri" pitchFamily="34" charset="-120"/>
               </a:rPr>
-              <a:t> of the situation was impressive.</a:t>
+              <a:t>.</a:t>
             </a:r>
             <a:endParaRPr lang="en-US" sz="1800" dirty="0"/>
           </a:p>
@@ -17213,7 +16469,7 @@
                 <a:ea typeface="Trebuchet MS" pitchFamily="34" charset="-122"/>
                 <a:cs typeface="Trebuchet MS" pitchFamily="34" charset="-120"/>
               </a:rPr>
-              <a:t>judging</a:t>
+              <a:t>prejudge</a:t>
             </a:r>
             <a:endParaRPr lang="en-US" sz="1400" dirty="0"/>
           </a:p>
@@ -17341,7 +16597,7 @@
                 <a:ea typeface="Trebuchet MS" pitchFamily="34" charset="-122"/>
                 <a:cs typeface="Trebuchet MS" pitchFamily="34" charset="-120"/>
               </a:rPr>
-              <a:t>misjudged</a:t>
+              <a:t>misjudgement</a:t>
             </a:r>
             <a:endParaRPr lang="en-US" sz="1400" dirty="0"/>
           </a:p>
@@ -17469,7 +16725,7 @@
                 <a:ea typeface="Trebuchet MS" pitchFamily="34" charset="-122"/>
                 <a:cs typeface="Trebuchet MS" pitchFamily="34" charset="-120"/>
               </a:rPr>
-              <a:t>judgement</a:t>
+              <a:t>judgemental</a:t>
             </a:r>
             <a:endParaRPr lang="en-US" sz="1400" dirty="0"/>
           </a:p>
@@ -17939,7 +17195,7 @@
                 <a:ea typeface="Trebuchet MS" pitchFamily="34" charset="-122"/>
                 <a:cs typeface="Trebuchet MS" pitchFamily="34" charset="-120"/>
               </a:rPr>
-              <a:t>judging</a:t>
+              <a:t>prejudge</a:t>
             </a:r>
             <a:endParaRPr lang="en-US" sz="2800" dirty="0"/>
           </a:p>
@@ -18766,7 +18022,7 @@
                 <a:ea typeface="Trebuchet MS" pitchFamily="34" charset="-122"/>
                 <a:cs typeface="Trebuchet MS" pitchFamily="34" charset="-120"/>
               </a:rPr>
-              <a:t>judging</a:t>
+              <a:t>prejudge</a:t>
             </a:r>
             <a:endParaRPr lang="en-US" sz="2800" dirty="0"/>
           </a:p>
@@ -18855,11 +18111,11 @@
             </a:avLst>
           </a:prstGeom>
           <a:solidFill>
-            <a:srgbClr val="CCFBF1"/>
+            <a:srgbClr val="DDD6FE"/>
           </a:solidFill>
           <a:ln w="19050">
             <a:solidFill>
-              <a:srgbClr val="0D9488"/>
+              <a:srgbClr val="7C3AED"/>
             </a:solidFill>
             <a:prstDash val="solid"/>
           </a:ln>
@@ -18899,13 +18155,13 @@
             <a:r>
               <a:rPr lang="en-US" sz="1300" b="1" dirty="0">
                 <a:solidFill>
-                  <a:srgbClr val="0F766E"/>
+                  <a:srgbClr val="4C1D95"/>
                 </a:solidFill>
                 <a:latin typeface="Trebuchet MS" pitchFamily="34" charset="0"/>
                 <a:ea typeface="Trebuchet MS" pitchFamily="34" charset="-122"/>
                 <a:cs typeface="Trebuchet MS" pitchFamily="34" charset="-120"/>
               </a:rPr>
-              <a:t>judge</a:t>
+              <a:t>pre</a:t>
             </a:r>
             <a:endParaRPr lang="en-US" sz="1300" dirty="0"/>
           </a:p>
@@ -18944,7 +18200,7 @@
                 <a:ea typeface="Calibri" pitchFamily="34" charset="-122"/>
                 <a:cs typeface="Calibri" pitchFamily="34" charset="-120"/>
               </a:rPr>
-              <a:t>to decide or form an opinion</a:t>
+              <a:t>before</a:t>
             </a:r>
             <a:endParaRPr lang="en-US" sz="850" dirty="0"/>
           </a:p>
@@ -18952,46 +18208,7 @@
       </p:sp>
       <p:sp>
         <p:nvSpPr>
-          <p:cNvPr id="19" name="Text 17"/>
-          <p:cNvSpPr/>
-          <p:nvPr/>
-        </p:nvSpPr>
-        <p:spPr>
-          <a:xfrm>
-            <a:off x="2938272" y="2752344"/>
-            <a:ext cx="1828800" cy="182880"/>
-          </a:xfrm>
-          <a:prstGeom prst="rect">
-            <a:avLst/>
-          </a:prstGeom>
-          <a:noFill/>
-          <a:ln/>
-        </p:spPr>
-        <p:txBody>
-          <a:bodyPr wrap="square" lIns="0" tIns="0" rIns="0" bIns="0" rtlCol="0" anchor="t"/>
-          <a:lstStyle/>
-          <a:p>
-            <a:pPr algn="ctr" indent="0" marL="0">
-              <a:buNone/>
-            </a:pPr>
-            <a:r>
-              <a:rPr lang="en-US" sz="700" i="1" dirty="0">
-                <a:solidFill>
-                  <a:srgbClr val="94A3B8"/>
-                </a:solidFill>
-                <a:latin typeface="Calibri" pitchFamily="34" charset="0"/>
-                <a:ea typeface="Calibri" pitchFamily="34" charset="-122"/>
-                <a:cs typeface="Calibri" pitchFamily="34" charset="-120"/>
-              </a:rPr>
-              <a:t>'e' dropped before vowel suffix</a:t>
-            </a:r>
-            <a:endParaRPr lang="en-US" sz="700" dirty="0"/>
-          </a:p>
-        </p:txBody>
-      </p:sp>
-      <p:sp>
-        <p:nvSpPr>
-          <p:cNvPr id="20" name="Shape 18"/>
+          <p:cNvPr id="19" name="Shape 17"/>
           <p:cNvSpPr/>
           <p:nvPr/>
         </p:nvSpPr>
@@ -19006,11 +18223,11 @@
             </a:avLst>
           </a:prstGeom>
           <a:solidFill>
-            <a:srgbClr val="FCE7F3"/>
+            <a:srgbClr val="CCFBF1"/>
           </a:solidFill>
           <a:ln w="19050">
             <a:solidFill>
-              <a:srgbClr val="DB2777"/>
+              <a:srgbClr val="0D9488"/>
             </a:solidFill>
             <a:prstDash val="solid"/>
           </a:ln>
@@ -19025,7 +18242,7 @@
       </p:sp>
       <p:sp>
         <p:nvSpPr>
-          <p:cNvPr id="21" name="Text 19"/>
+          <p:cNvPr id="20" name="Text 18"/>
           <p:cNvSpPr/>
           <p:nvPr/>
         </p:nvSpPr>
@@ -19050,13 +18267,13 @@
             <a:r>
               <a:rPr lang="en-US" sz="1300" b="1" dirty="0">
                 <a:solidFill>
-                  <a:srgbClr val="9D174D"/>
+                  <a:srgbClr val="0F766E"/>
                 </a:solidFill>
                 <a:latin typeface="Trebuchet MS" pitchFamily="34" charset="0"/>
                 <a:ea typeface="Trebuchet MS" pitchFamily="34" charset="-122"/>
                 <a:cs typeface="Trebuchet MS" pitchFamily="34" charset="-120"/>
               </a:rPr>
-              <a:t>ing</a:t>
+              <a:t>judge</a:t>
             </a:r>
             <a:endParaRPr lang="en-US" sz="1300" dirty="0"/>
           </a:p>
@@ -19064,7 +18281,7 @@
       </p:sp>
       <p:sp>
         <p:nvSpPr>
-          <p:cNvPr id="22" name="Text 20"/>
+          <p:cNvPr id="21" name="Text 19"/>
           <p:cNvSpPr/>
           <p:nvPr/>
         </p:nvSpPr>
@@ -19095,7 +18312,7 @@
                 <a:ea typeface="Calibri" pitchFamily="34" charset="-122"/>
                 <a:cs typeface="Calibri" pitchFamily="34" charset="-120"/>
               </a:rPr>
-              <a:t>ongoing action</a:t>
+              <a:t>to decide or form an opinion</a:t>
             </a:r>
             <a:endParaRPr lang="en-US" sz="850" dirty="0"/>
           </a:p>
@@ -19103,7 +18320,7 @@
       </p:sp>
       <p:sp>
         <p:nvSpPr>
-          <p:cNvPr id="23" name="Shape 21"/>
+          <p:cNvPr id="22" name="Shape 20"/>
           <p:cNvSpPr/>
           <p:nvPr/>
         </p:nvSpPr>
@@ -19130,7 +18347,7 @@
       </p:sp>
       <p:sp>
         <p:nvSpPr>
-          <p:cNvPr id="24" name="Text 22"/>
+          <p:cNvPr id="23" name="Text 21"/>
           <p:cNvSpPr/>
           <p:nvPr/>
         </p:nvSpPr>
@@ -19169,7 +18386,7 @@
       </p:sp>
       <p:sp>
         <p:nvSpPr>
-          <p:cNvPr id="25" name="Shape 23"/>
+          <p:cNvPr id="24" name="Shape 22"/>
           <p:cNvSpPr/>
           <p:nvPr/>
         </p:nvSpPr>
@@ -19196,7 +18413,7 @@
       </p:sp>
       <p:sp>
         <p:nvSpPr>
-          <p:cNvPr id="26" name="Text 24"/>
+          <p:cNvPr id="25" name="Text 23"/>
           <p:cNvSpPr/>
           <p:nvPr/>
         </p:nvSpPr>
@@ -19235,7 +18452,7 @@
       </p:sp>
       <p:sp>
         <p:nvSpPr>
-          <p:cNvPr id="27" name="Shape 25"/>
+          <p:cNvPr id="26" name="Shape 24"/>
           <p:cNvSpPr/>
           <p:nvPr/>
         </p:nvSpPr>
@@ -19262,7 +18479,7 @@
       </p:sp>
       <p:sp>
         <p:nvSpPr>
-          <p:cNvPr id="28" name="Text 26"/>
+          <p:cNvPr id="27" name="Text 25"/>
           <p:cNvSpPr/>
           <p:nvPr/>
         </p:nvSpPr>
@@ -19301,7 +18518,7 @@
       </p:sp>
       <p:sp>
         <p:nvSpPr>
-          <p:cNvPr id="29" name="Shape 27"/>
+          <p:cNvPr id="28" name="Shape 26"/>
           <p:cNvSpPr/>
           <p:nvPr/>
         </p:nvSpPr>
@@ -19328,7 +18545,7 @@
       </p:sp>
       <p:sp>
         <p:nvSpPr>
-          <p:cNvPr id="30" name="Text 28"/>
+          <p:cNvPr id="29" name="Text 27"/>
           <p:cNvSpPr/>
           <p:nvPr/>
         </p:nvSpPr>
@@ -19790,7 +19007,7 @@
                 <a:ea typeface="Trebuchet MS" pitchFamily="34" charset="-122"/>
                 <a:cs typeface="Trebuchet MS" pitchFamily="34" charset="-120"/>
               </a:rPr>
-              <a:t>judging</a:t>
+              <a:t>prejudge</a:t>
             </a:r>
             <a:endParaRPr lang="en-US" sz="2800" dirty="0"/>
           </a:p>
@@ -19879,11 +19096,11 @@
             </a:avLst>
           </a:prstGeom>
           <a:solidFill>
-            <a:srgbClr val="CCFBF1"/>
+            <a:srgbClr val="DDD6FE"/>
           </a:solidFill>
           <a:ln w="19050">
             <a:solidFill>
-              <a:srgbClr val="0D9488"/>
+              <a:srgbClr val="7C3AED"/>
             </a:solidFill>
             <a:prstDash val="solid"/>
           </a:ln>
@@ -19923,13 +19140,13 @@
             <a:r>
               <a:rPr lang="en-US" sz="1300" b="1" dirty="0">
                 <a:solidFill>
-                  <a:srgbClr val="0F766E"/>
+                  <a:srgbClr val="4C1D95"/>
                 </a:solidFill>
                 <a:latin typeface="Trebuchet MS" pitchFamily="34" charset="0"/>
                 <a:ea typeface="Trebuchet MS" pitchFamily="34" charset="-122"/>
                 <a:cs typeface="Trebuchet MS" pitchFamily="34" charset="-120"/>
               </a:rPr>
-              <a:t>judge</a:t>
+              <a:t>pre</a:t>
             </a:r>
             <a:endParaRPr lang="en-US" sz="1300" dirty="0"/>
           </a:p>
@@ -19968,7 +19185,7 @@
                 <a:ea typeface="Calibri" pitchFamily="34" charset="-122"/>
                 <a:cs typeface="Calibri" pitchFamily="34" charset="-120"/>
               </a:rPr>
-              <a:t>to decide or form an opinion</a:t>
+              <a:t>before</a:t>
             </a:r>
             <a:endParaRPr lang="en-US" sz="850" dirty="0"/>
           </a:p>
@@ -19976,46 +19193,7 @@
       </p:sp>
       <p:sp>
         <p:nvSpPr>
-          <p:cNvPr id="19" name="Text 17"/>
-          <p:cNvSpPr/>
-          <p:nvPr/>
-        </p:nvSpPr>
-        <p:spPr>
-          <a:xfrm>
-            <a:off x="2938272" y="2752344"/>
-            <a:ext cx="1828800" cy="182880"/>
-          </a:xfrm>
-          <a:prstGeom prst="rect">
-            <a:avLst/>
-          </a:prstGeom>
-          <a:noFill/>
-          <a:ln/>
-        </p:spPr>
-        <p:txBody>
-          <a:bodyPr wrap="square" lIns="0" tIns="0" rIns="0" bIns="0" rtlCol="0" anchor="t"/>
-          <a:lstStyle/>
-          <a:p>
-            <a:pPr algn="ctr" indent="0" marL="0">
-              <a:buNone/>
-            </a:pPr>
-            <a:r>
-              <a:rPr lang="en-US" sz="700" i="1" dirty="0">
-                <a:solidFill>
-                  <a:srgbClr val="94A3B8"/>
-                </a:solidFill>
-                <a:latin typeface="Calibri" pitchFamily="34" charset="0"/>
-                <a:ea typeface="Calibri" pitchFamily="34" charset="-122"/>
-                <a:cs typeface="Calibri" pitchFamily="34" charset="-120"/>
-              </a:rPr>
-              <a:t>'e' dropped before vowel suffix</a:t>
-            </a:r>
-            <a:endParaRPr lang="en-US" sz="700" dirty="0"/>
-          </a:p>
-        </p:txBody>
-      </p:sp>
-      <p:sp>
-        <p:nvSpPr>
-          <p:cNvPr id="20" name="Shape 18"/>
+          <p:cNvPr id="19" name="Shape 17"/>
           <p:cNvSpPr/>
           <p:nvPr/>
         </p:nvSpPr>
@@ -20030,11 +19208,11 @@
             </a:avLst>
           </a:prstGeom>
           <a:solidFill>
-            <a:srgbClr val="FCE7F3"/>
+            <a:srgbClr val="CCFBF1"/>
           </a:solidFill>
           <a:ln w="19050">
             <a:solidFill>
-              <a:srgbClr val="DB2777"/>
+              <a:srgbClr val="0D9488"/>
             </a:solidFill>
             <a:prstDash val="solid"/>
           </a:ln>
@@ -20049,7 +19227,7 @@
       </p:sp>
       <p:sp>
         <p:nvSpPr>
-          <p:cNvPr id="21" name="Text 19"/>
+          <p:cNvPr id="20" name="Text 18"/>
           <p:cNvSpPr/>
           <p:nvPr/>
         </p:nvSpPr>
@@ -20074,13 +19252,13 @@
             <a:r>
               <a:rPr lang="en-US" sz="1300" b="1" dirty="0">
                 <a:solidFill>
-                  <a:srgbClr val="9D174D"/>
+                  <a:srgbClr val="0F766E"/>
                 </a:solidFill>
                 <a:latin typeface="Trebuchet MS" pitchFamily="34" charset="0"/>
                 <a:ea typeface="Trebuchet MS" pitchFamily="34" charset="-122"/>
                 <a:cs typeface="Trebuchet MS" pitchFamily="34" charset="-120"/>
               </a:rPr>
-              <a:t>ing</a:t>
+              <a:t>judge</a:t>
             </a:r>
             <a:endParaRPr lang="en-US" sz="1300" dirty="0"/>
           </a:p>
@@ -20088,7 +19266,7 @@
       </p:sp>
       <p:sp>
         <p:nvSpPr>
-          <p:cNvPr id="22" name="Text 20"/>
+          <p:cNvPr id="21" name="Text 19"/>
           <p:cNvSpPr/>
           <p:nvPr/>
         </p:nvSpPr>
@@ -20119,7 +19297,7 @@
                 <a:ea typeface="Calibri" pitchFamily="34" charset="-122"/>
                 <a:cs typeface="Calibri" pitchFamily="34" charset="-120"/>
               </a:rPr>
-              <a:t>ongoing action</a:t>
+              <a:t>to decide or form an opinion</a:t>
             </a:r>
             <a:endParaRPr lang="en-US" sz="850" dirty="0"/>
           </a:p>
@@ -20127,7 +19305,7 @@
       </p:sp>
       <p:sp>
         <p:nvSpPr>
-          <p:cNvPr id="23" name="Shape 21"/>
+          <p:cNvPr id="22" name="Shape 20"/>
           <p:cNvSpPr/>
           <p:nvPr/>
         </p:nvSpPr>
@@ -20154,7 +19332,7 @@
       </p:sp>
       <p:sp>
         <p:nvSpPr>
-          <p:cNvPr id="24" name="Text 22"/>
+          <p:cNvPr id="23" name="Text 21"/>
           <p:cNvSpPr/>
           <p:nvPr/>
         </p:nvSpPr>
@@ -20193,7 +19371,7 @@
       </p:sp>
       <p:sp>
         <p:nvSpPr>
-          <p:cNvPr id="25" name="Shape 23"/>
+          <p:cNvPr id="24" name="Shape 22"/>
           <p:cNvSpPr/>
           <p:nvPr/>
         </p:nvSpPr>
@@ -20220,7 +19398,7 @@
       </p:sp>
       <p:sp>
         <p:nvSpPr>
-          <p:cNvPr id="26" name="Shape 24"/>
+          <p:cNvPr id="25" name="Shape 23"/>
           <p:cNvSpPr/>
           <p:nvPr/>
         </p:nvSpPr>
@@ -20247,7 +19425,7 @@
       </p:sp>
       <p:sp>
         <p:nvSpPr>
-          <p:cNvPr id="27" name="Text 25"/>
+          <p:cNvPr id="26" name="Text 24"/>
           <p:cNvSpPr/>
           <p:nvPr/>
         </p:nvSpPr>
@@ -20278,7 +19456,7 @@
                 <a:ea typeface="Trebuchet MS" pitchFamily="34" charset="-122"/>
                 <a:cs typeface="Trebuchet MS" pitchFamily="34" charset="-120"/>
               </a:rPr>
-              <a:t>judg</a:t>
+              <a:t>pre</a:t>
             </a:r>
             <a:endParaRPr lang="en-US" sz="1400" dirty="0"/>
           </a:p>
@@ -20286,7 +19464,7 @@
       </p:sp>
       <p:sp>
         <p:nvSpPr>
-          <p:cNvPr id="28" name="Text 26"/>
+          <p:cNvPr id="27" name="Text 25"/>
           <p:cNvSpPr/>
           <p:nvPr/>
         </p:nvSpPr>
@@ -20325,7 +19503,7 @@
       </p:sp>
       <p:sp>
         <p:nvSpPr>
-          <p:cNvPr id="29" name="Shape 27"/>
+          <p:cNvPr id="28" name="Shape 26"/>
           <p:cNvSpPr/>
           <p:nvPr/>
         </p:nvSpPr>
@@ -20352,7 +19530,7 @@
       </p:sp>
       <p:sp>
         <p:nvSpPr>
-          <p:cNvPr id="30" name="Text 28"/>
+          <p:cNvPr id="29" name="Text 27"/>
           <p:cNvSpPr/>
           <p:nvPr/>
         </p:nvSpPr>
@@ -20383,7 +19561,7 @@
                 <a:ea typeface="Trebuchet MS" pitchFamily="34" charset="-122"/>
                 <a:cs typeface="Trebuchet MS" pitchFamily="34" charset="-120"/>
               </a:rPr>
-              <a:t>ing</a:t>
+              <a:t>judge</a:t>
             </a:r>
             <a:endParaRPr lang="en-US" sz="1400" dirty="0"/>
           </a:p>
@@ -20391,7 +19569,7 @@
       </p:sp>
       <p:sp>
         <p:nvSpPr>
-          <p:cNvPr id="31" name="Shape 29"/>
+          <p:cNvPr id="30" name="Shape 28"/>
           <p:cNvSpPr/>
           <p:nvPr/>
         </p:nvSpPr>
@@ -20418,7 +19596,7 @@
       </p:sp>
       <p:sp>
         <p:nvSpPr>
-          <p:cNvPr id="32" name="Text 30"/>
+          <p:cNvPr id="31" name="Text 29"/>
           <p:cNvSpPr/>
           <p:nvPr/>
         </p:nvSpPr>
@@ -20457,7 +19635,7 @@
       </p:sp>
       <p:sp>
         <p:nvSpPr>
-          <p:cNvPr id="33" name="Shape 31"/>
+          <p:cNvPr id="32" name="Shape 30"/>
           <p:cNvSpPr/>
           <p:nvPr/>
         </p:nvSpPr>
@@ -20484,7 +19662,7 @@
       </p:sp>
       <p:sp>
         <p:nvSpPr>
-          <p:cNvPr id="34" name="Text 32"/>
+          <p:cNvPr id="33" name="Text 31"/>
           <p:cNvSpPr/>
           <p:nvPr/>
         </p:nvSpPr>
@@ -20946,7 +20124,7 @@
                 <a:ea typeface="Trebuchet MS" pitchFamily="34" charset="-122"/>
                 <a:cs typeface="Trebuchet MS" pitchFamily="34" charset="-120"/>
               </a:rPr>
-              <a:t>judging</a:t>
+              <a:t>prejudge</a:t>
             </a:r>
             <a:endParaRPr lang="en-US" sz="2800" dirty="0"/>
           </a:p>
@@ -21035,11 +20213,11 @@
             </a:avLst>
           </a:prstGeom>
           <a:solidFill>
-            <a:srgbClr val="CCFBF1"/>
+            <a:srgbClr val="DDD6FE"/>
           </a:solidFill>
           <a:ln w="19050">
             <a:solidFill>
-              <a:srgbClr val="0D9488"/>
+              <a:srgbClr val="7C3AED"/>
             </a:solidFill>
             <a:prstDash val="solid"/>
           </a:ln>
@@ -21079,13 +20257,13 @@
             <a:r>
               <a:rPr lang="en-US" sz="1300" b="1" dirty="0">
                 <a:solidFill>
-                  <a:srgbClr val="0F766E"/>
+                  <a:srgbClr val="4C1D95"/>
                 </a:solidFill>
                 <a:latin typeface="Trebuchet MS" pitchFamily="34" charset="0"/>
                 <a:ea typeface="Trebuchet MS" pitchFamily="34" charset="-122"/>
                 <a:cs typeface="Trebuchet MS" pitchFamily="34" charset="-120"/>
               </a:rPr>
-              <a:t>judge</a:t>
+              <a:t>pre</a:t>
             </a:r>
             <a:endParaRPr lang="en-US" sz="1300" dirty="0"/>
           </a:p>
@@ -21124,7 +20302,7 @@
                 <a:ea typeface="Calibri" pitchFamily="34" charset="-122"/>
                 <a:cs typeface="Calibri" pitchFamily="34" charset="-120"/>
               </a:rPr>
-              <a:t>to decide or form an opinion</a:t>
+              <a:t>before</a:t>
             </a:r>
             <a:endParaRPr lang="en-US" sz="850" dirty="0"/>
           </a:p>
@@ -21132,46 +20310,7 @@
       </p:sp>
       <p:sp>
         <p:nvSpPr>
-          <p:cNvPr id="19" name="Text 17"/>
-          <p:cNvSpPr/>
-          <p:nvPr/>
-        </p:nvSpPr>
-        <p:spPr>
-          <a:xfrm>
-            <a:off x="2938272" y="2752344"/>
-            <a:ext cx="1828800" cy="182880"/>
-          </a:xfrm>
-          <a:prstGeom prst="rect">
-            <a:avLst/>
-          </a:prstGeom>
-          <a:noFill/>
-          <a:ln/>
-        </p:spPr>
-        <p:txBody>
-          <a:bodyPr wrap="square" lIns="0" tIns="0" rIns="0" bIns="0" rtlCol="0" anchor="t"/>
-          <a:lstStyle/>
-          <a:p>
-            <a:pPr algn="ctr" indent="0" marL="0">
-              <a:buNone/>
-            </a:pPr>
-            <a:r>
-              <a:rPr lang="en-US" sz="700" i="1" dirty="0">
-                <a:solidFill>
-                  <a:srgbClr val="94A3B8"/>
-                </a:solidFill>
-                <a:latin typeface="Calibri" pitchFamily="34" charset="0"/>
-                <a:ea typeface="Calibri" pitchFamily="34" charset="-122"/>
-                <a:cs typeface="Calibri" pitchFamily="34" charset="-120"/>
-              </a:rPr>
-              <a:t>'e' dropped before vowel suffix</a:t>
-            </a:r>
-            <a:endParaRPr lang="en-US" sz="700" dirty="0"/>
-          </a:p>
-        </p:txBody>
-      </p:sp>
-      <p:sp>
-        <p:nvSpPr>
-          <p:cNvPr id="20" name="Shape 18"/>
+          <p:cNvPr id="19" name="Shape 17"/>
           <p:cNvSpPr/>
           <p:nvPr/>
         </p:nvSpPr>
@@ -21186,11 +20325,11 @@
             </a:avLst>
           </a:prstGeom>
           <a:solidFill>
-            <a:srgbClr val="FCE7F3"/>
+            <a:srgbClr val="CCFBF1"/>
           </a:solidFill>
           <a:ln w="19050">
             <a:solidFill>
-              <a:srgbClr val="DB2777"/>
+              <a:srgbClr val="0D9488"/>
             </a:solidFill>
             <a:prstDash val="solid"/>
           </a:ln>
@@ -21205,7 +20344,7 @@
       </p:sp>
       <p:sp>
         <p:nvSpPr>
-          <p:cNvPr id="21" name="Text 19"/>
+          <p:cNvPr id="20" name="Text 18"/>
           <p:cNvSpPr/>
           <p:nvPr/>
         </p:nvSpPr>
@@ -21230,13 +20369,13 @@
             <a:r>
               <a:rPr lang="en-US" sz="1300" b="1" dirty="0">
                 <a:solidFill>
-                  <a:srgbClr val="9D174D"/>
+                  <a:srgbClr val="0F766E"/>
                 </a:solidFill>
                 <a:latin typeface="Trebuchet MS" pitchFamily="34" charset="0"/>
                 <a:ea typeface="Trebuchet MS" pitchFamily="34" charset="-122"/>
                 <a:cs typeface="Trebuchet MS" pitchFamily="34" charset="-120"/>
               </a:rPr>
-              <a:t>ing</a:t>
+              <a:t>judge</a:t>
             </a:r>
             <a:endParaRPr lang="en-US" sz="1300" dirty="0"/>
           </a:p>
@@ -21244,7 +20383,7 @@
       </p:sp>
       <p:sp>
         <p:nvSpPr>
-          <p:cNvPr id="22" name="Text 20"/>
+          <p:cNvPr id="21" name="Text 19"/>
           <p:cNvSpPr/>
           <p:nvPr/>
         </p:nvSpPr>
@@ -21275,7 +20414,7 @@
                 <a:ea typeface="Calibri" pitchFamily="34" charset="-122"/>
                 <a:cs typeface="Calibri" pitchFamily="34" charset="-120"/>
               </a:rPr>
-              <a:t>ongoing action</a:t>
+              <a:t>to decide or form an opinion</a:t>
             </a:r>
             <a:endParaRPr lang="en-US" sz="850" dirty="0"/>
           </a:p>
@@ -21283,7 +20422,7 @@
       </p:sp>
       <p:sp>
         <p:nvSpPr>
-          <p:cNvPr id="23" name="Shape 21"/>
+          <p:cNvPr id="22" name="Shape 20"/>
           <p:cNvSpPr/>
           <p:nvPr/>
         </p:nvSpPr>
@@ -21310,7 +20449,7 @@
       </p:sp>
       <p:sp>
         <p:nvSpPr>
-          <p:cNvPr id="24" name="Text 22"/>
+          <p:cNvPr id="23" name="Text 21"/>
           <p:cNvSpPr/>
           <p:nvPr/>
         </p:nvSpPr>
@@ -21349,7 +20488,7 @@
       </p:sp>
       <p:sp>
         <p:nvSpPr>
-          <p:cNvPr id="25" name="Shape 23"/>
+          <p:cNvPr id="24" name="Shape 22"/>
           <p:cNvSpPr/>
           <p:nvPr/>
         </p:nvSpPr>
@@ -21376,7 +20515,7 @@
       </p:sp>
       <p:sp>
         <p:nvSpPr>
-          <p:cNvPr id="26" name="Shape 24"/>
+          <p:cNvPr id="25" name="Shape 23"/>
           <p:cNvSpPr/>
           <p:nvPr/>
         </p:nvSpPr>
@@ -21403,7 +20542,7 @@
       </p:sp>
       <p:sp>
         <p:nvSpPr>
-          <p:cNvPr id="27" name="Text 25"/>
+          <p:cNvPr id="26" name="Text 24"/>
           <p:cNvSpPr/>
           <p:nvPr/>
         </p:nvSpPr>
@@ -21434,7 +20573,7 @@
                 <a:ea typeface="Trebuchet MS" pitchFamily="34" charset="-122"/>
                 <a:cs typeface="Trebuchet MS" pitchFamily="34" charset="-120"/>
               </a:rPr>
-              <a:t>judg</a:t>
+              <a:t>pre</a:t>
             </a:r>
             <a:endParaRPr lang="en-US" sz="1400" dirty="0"/>
           </a:p>
@@ -21442,7 +20581,7 @@
       </p:sp>
       <p:sp>
         <p:nvSpPr>
-          <p:cNvPr id="28" name="Text 26"/>
+          <p:cNvPr id="27" name="Text 25"/>
           <p:cNvSpPr/>
           <p:nvPr/>
         </p:nvSpPr>
@@ -21481,7 +20620,7 @@
       </p:sp>
       <p:sp>
         <p:nvSpPr>
-          <p:cNvPr id="29" name="Shape 27"/>
+          <p:cNvPr id="28" name="Shape 26"/>
           <p:cNvSpPr/>
           <p:nvPr/>
         </p:nvSpPr>
@@ -21508,7 +20647,7 @@
       </p:sp>
       <p:sp>
         <p:nvSpPr>
-          <p:cNvPr id="30" name="Text 28"/>
+          <p:cNvPr id="29" name="Text 27"/>
           <p:cNvSpPr/>
           <p:nvPr/>
         </p:nvSpPr>
@@ -21539,7 +20678,7 @@
                 <a:ea typeface="Trebuchet MS" pitchFamily="34" charset="-122"/>
                 <a:cs typeface="Trebuchet MS" pitchFamily="34" charset="-120"/>
               </a:rPr>
-              <a:t>ing</a:t>
+              <a:t>judge</a:t>
             </a:r>
             <a:endParaRPr lang="en-US" sz="1400" dirty="0"/>
           </a:p>
@@ -21547,7 +20686,7 @@
       </p:sp>
       <p:sp>
         <p:nvSpPr>
-          <p:cNvPr id="31" name="Shape 29"/>
+          <p:cNvPr id="30" name="Shape 28"/>
           <p:cNvSpPr/>
           <p:nvPr/>
         </p:nvSpPr>
@@ -21574,7 +20713,7 @@
       </p:sp>
       <p:sp>
         <p:nvSpPr>
-          <p:cNvPr id="32" name="Text 30"/>
+          <p:cNvPr id="31" name="Text 29"/>
           <p:cNvSpPr/>
           <p:nvPr/>
         </p:nvSpPr>
@@ -21613,7 +20752,7 @@
       </p:sp>
       <p:sp>
         <p:nvSpPr>
-          <p:cNvPr id="33" name="Shape 31"/>
+          <p:cNvPr id="32" name="Shape 30"/>
           <p:cNvSpPr/>
           <p:nvPr/>
         </p:nvSpPr>
@@ -21640,13 +20779,13 @@
       </p:sp>
       <p:sp>
         <p:nvSpPr>
-          <p:cNvPr id="34" name="Shape 32"/>
-          <p:cNvSpPr/>
-          <p:nvPr/>
-        </p:nvSpPr>
-        <p:spPr>
-          <a:xfrm>
-            <a:off x="2427732" y="4169664"/>
+          <p:cNvPr id="33" name="Shape 31"/>
+          <p:cNvSpPr/>
+          <p:nvPr/>
+        </p:nvSpPr>
+        <p:spPr>
+          <a:xfrm>
+            <a:off x="2254649" y="4169664"/>
             <a:ext cx="685800" cy="384048"/>
           </a:xfrm>
           <a:prstGeom prst="rect">
@@ -21667,13 +20806,13 @@
       </p:sp>
       <p:sp>
         <p:nvSpPr>
-          <p:cNvPr id="35" name="Text 33"/>
-          <p:cNvSpPr/>
-          <p:nvPr/>
-        </p:nvSpPr>
-        <p:spPr>
-          <a:xfrm>
-            <a:off x="2427732" y="4169664"/>
+          <p:cNvPr id="34" name="Text 32"/>
+          <p:cNvSpPr/>
+          <p:nvPr/>
+        </p:nvSpPr>
+        <p:spPr>
+          <a:xfrm>
+            <a:off x="2254649" y="4169664"/>
             <a:ext cx="685800" cy="384048"/>
           </a:xfrm>
           <a:prstGeom prst="rect">
@@ -21698,7 +20837,7 @@
                 <a:ea typeface="Trebuchet MS" pitchFamily="34" charset="-122"/>
                 <a:cs typeface="Trebuchet MS" pitchFamily="34" charset="-120"/>
               </a:rPr>
-              <a:t>j</a:t>
+              <a:t>p</a:t>
             </a:r>
             <a:endParaRPr lang="en-US" sz="900" dirty="0"/>
           </a:p>
@@ -21706,13 +20845,13 @@
       </p:sp>
       <p:sp>
         <p:nvSpPr>
-          <p:cNvPr id="36" name="Shape 34"/>
-          <p:cNvSpPr/>
-          <p:nvPr/>
-        </p:nvSpPr>
-        <p:spPr>
-          <a:xfrm>
-            <a:off x="3639312" y="4169664"/>
+          <p:cNvPr id="35" name="Shape 33"/>
+          <p:cNvSpPr/>
+          <p:nvPr/>
+        </p:nvSpPr>
+        <p:spPr>
+          <a:xfrm>
+            <a:off x="3293146" y="4169664"/>
             <a:ext cx="685800" cy="384048"/>
           </a:xfrm>
           <a:prstGeom prst="rect">
@@ -21733,13 +20872,13 @@
       </p:sp>
       <p:sp>
         <p:nvSpPr>
-          <p:cNvPr id="37" name="Text 35"/>
-          <p:cNvSpPr/>
-          <p:nvPr/>
-        </p:nvSpPr>
-        <p:spPr>
-          <a:xfrm>
-            <a:off x="3639312" y="4169664"/>
+          <p:cNvPr id="36" name="Text 34"/>
+          <p:cNvSpPr/>
+          <p:nvPr/>
+        </p:nvSpPr>
+        <p:spPr>
+          <a:xfrm>
+            <a:off x="3293146" y="4169664"/>
             <a:ext cx="685800" cy="384048"/>
           </a:xfrm>
           <a:prstGeom prst="rect">
@@ -21764,7 +20903,7 @@
                 <a:ea typeface="Trebuchet MS" pitchFamily="34" charset="-122"/>
                 <a:cs typeface="Trebuchet MS" pitchFamily="34" charset="-120"/>
               </a:rPr>
-              <a:t>u</a:t>
+              <a:t>r</a:t>
             </a:r>
             <a:endParaRPr lang="en-US" sz="900" dirty="0"/>
           </a:p>
@@ -21772,13 +20911,13 @@
       </p:sp>
       <p:sp>
         <p:nvSpPr>
-          <p:cNvPr id="38" name="Shape 36"/>
-          <p:cNvSpPr/>
-          <p:nvPr/>
-        </p:nvSpPr>
-        <p:spPr>
-          <a:xfrm>
-            <a:off x="4850892" y="4169664"/>
+          <p:cNvPr id="37" name="Shape 35"/>
+          <p:cNvSpPr/>
+          <p:nvPr/>
+        </p:nvSpPr>
+        <p:spPr>
+          <a:xfrm>
+            <a:off x="4331643" y="4169664"/>
             <a:ext cx="685800" cy="384048"/>
           </a:xfrm>
           <a:prstGeom prst="rect">
@@ -21799,13 +20938,13 @@
       </p:sp>
       <p:sp>
         <p:nvSpPr>
-          <p:cNvPr id="39" name="Text 37"/>
-          <p:cNvSpPr/>
-          <p:nvPr/>
-        </p:nvSpPr>
-        <p:spPr>
-          <a:xfrm>
-            <a:off x="4850892" y="4169664"/>
+          <p:cNvPr id="38" name="Text 36"/>
+          <p:cNvSpPr/>
+          <p:nvPr/>
+        </p:nvSpPr>
+        <p:spPr>
+          <a:xfrm>
+            <a:off x="4331643" y="4169664"/>
             <a:ext cx="685800" cy="384048"/>
           </a:xfrm>
           <a:prstGeom prst="rect">
@@ -21830,7 +20969,7 @@
                 <a:ea typeface="Trebuchet MS" pitchFamily="34" charset="-122"/>
                 <a:cs typeface="Trebuchet MS" pitchFamily="34" charset="-120"/>
               </a:rPr>
-              <a:t>dg</a:t>
+              <a:t>e</a:t>
             </a:r>
             <a:endParaRPr lang="en-US" sz="900" dirty="0"/>
           </a:p>
@@ -21838,13 +20977,211 @@
       </p:sp>
       <p:sp>
         <p:nvSpPr>
+          <p:cNvPr id="39" name="Shape 37"/>
+          <p:cNvSpPr/>
+          <p:nvPr/>
+        </p:nvSpPr>
+        <p:spPr>
+          <a:xfrm>
+            <a:off x="5370141" y="4169664"/>
+            <a:ext cx="685800" cy="384048"/>
+          </a:xfrm>
+          <a:prstGeom prst="rect">
+            <a:avLst>
+              <a:gd name="adj" fmla="val 9524"/>
+            </a:avLst>
+          </a:prstGeom>
+          <a:solidFill>
+            <a:srgbClr val="FFFFFF"/>
+          </a:solidFill>
+          <a:ln w="12700">
+            <a:solidFill>
+              <a:srgbClr val="DB2777"/>
+            </a:solidFill>
+            <a:prstDash val="solid"/>
+          </a:ln>
+        </p:spPr>
+      </p:sp>
+      <p:sp>
+        <p:nvSpPr>
           <p:cNvPr id="40" name="Text 38"/>
           <p:cNvSpPr/>
           <p:nvPr/>
         </p:nvSpPr>
         <p:spPr>
           <a:xfrm>
-            <a:off x="4850892" y="4572000"/>
+            <a:off x="5370141" y="4169664"/>
+            <a:ext cx="685800" cy="384048"/>
+          </a:xfrm>
+          <a:prstGeom prst="rect">
+            <a:avLst/>
+          </a:prstGeom>
+          <a:noFill/>
+          <a:ln/>
+        </p:spPr>
+        <p:txBody>
+          <a:bodyPr wrap="square" lIns="0" tIns="0" rIns="0" bIns="0" rtlCol="0" anchor="ctr"/>
+          <a:lstStyle/>
+          <a:p>
+            <a:pPr algn="ctr" indent="0" marL="0">
+              <a:buNone/>
+            </a:pPr>
+            <a:r>
+              <a:rPr lang="en-US" sz="900" b="1" dirty="0">
+                <a:solidFill>
+                  <a:srgbClr val="9D174D"/>
+                </a:solidFill>
+                <a:latin typeface="Trebuchet MS" pitchFamily="34" charset="0"/>
+                <a:ea typeface="Trebuchet MS" pitchFamily="34" charset="-122"/>
+                <a:cs typeface="Trebuchet MS" pitchFamily="34" charset="-120"/>
+              </a:rPr>
+              <a:t>j</a:t>
+            </a:r>
+            <a:endParaRPr lang="en-US" sz="900" dirty="0"/>
+          </a:p>
+        </p:txBody>
+      </p:sp>
+      <p:sp>
+        <p:nvSpPr>
+          <p:cNvPr id="41" name="Shape 39"/>
+          <p:cNvSpPr/>
+          <p:nvPr/>
+        </p:nvSpPr>
+        <p:spPr>
+          <a:xfrm>
+            <a:off x="6408638" y="4169664"/>
+            <a:ext cx="685800" cy="384048"/>
+          </a:xfrm>
+          <a:prstGeom prst="rect">
+            <a:avLst>
+              <a:gd name="adj" fmla="val 9524"/>
+            </a:avLst>
+          </a:prstGeom>
+          <a:solidFill>
+            <a:srgbClr val="FFFFFF"/>
+          </a:solidFill>
+          <a:ln w="12700">
+            <a:solidFill>
+              <a:srgbClr val="DB2777"/>
+            </a:solidFill>
+            <a:prstDash val="solid"/>
+          </a:ln>
+        </p:spPr>
+      </p:sp>
+      <p:sp>
+        <p:nvSpPr>
+          <p:cNvPr id="42" name="Text 40"/>
+          <p:cNvSpPr/>
+          <p:nvPr/>
+        </p:nvSpPr>
+        <p:spPr>
+          <a:xfrm>
+            <a:off x="6408638" y="4169664"/>
+            <a:ext cx="685800" cy="384048"/>
+          </a:xfrm>
+          <a:prstGeom prst="rect">
+            <a:avLst/>
+          </a:prstGeom>
+          <a:noFill/>
+          <a:ln/>
+        </p:spPr>
+        <p:txBody>
+          <a:bodyPr wrap="square" lIns="0" tIns="0" rIns="0" bIns="0" rtlCol="0" anchor="ctr"/>
+          <a:lstStyle/>
+          <a:p>
+            <a:pPr algn="ctr" indent="0" marL="0">
+              <a:buNone/>
+            </a:pPr>
+            <a:r>
+              <a:rPr lang="en-US" sz="900" b="1" dirty="0">
+                <a:solidFill>
+                  <a:srgbClr val="9D174D"/>
+                </a:solidFill>
+                <a:latin typeface="Trebuchet MS" pitchFamily="34" charset="0"/>
+                <a:ea typeface="Trebuchet MS" pitchFamily="34" charset="-122"/>
+                <a:cs typeface="Trebuchet MS" pitchFamily="34" charset="-120"/>
+              </a:rPr>
+              <a:t>u</a:t>
+            </a:r>
+            <a:endParaRPr lang="en-US" sz="900" dirty="0"/>
+          </a:p>
+        </p:txBody>
+      </p:sp>
+      <p:sp>
+        <p:nvSpPr>
+          <p:cNvPr id="43" name="Shape 41"/>
+          <p:cNvSpPr/>
+          <p:nvPr/>
+        </p:nvSpPr>
+        <p:spPr>
+          <a:xfrm>
+            <a:off x="7447135" y="4169664"/>
+            <a:ext cx="685800" cy="384048"/>
+          </a:xfrm>
+          <a:prstGeom prst="rect">
+            <a:avLst>
+              <a:gd name="adj" fmla="val 9524"/>
+            </a:avLst>
+          </a:prstGeom>
+          <a:solidFill>
+            <a:srgbClr val="FFFFFF"/>
+          </a:solidFill>
+          <a:ln w="12700">
+            <a:solidFill>
+              <a:srgbClr val="DB2777"/>
+            </a:solidFill>
+            <a:prstDash val="solid"/>
+          </a:ln>
+        </p:spPr>
+      </p:sp>
+      <p:sp>
+        <p:nvSpPr>
+          <p:cNvPr id="44" name="Text 42"/>
+          <p:cNvSpPr/>
+          <p:nvPr/>
+        </p:nvSpPr>
+        <p:spPr>
+          <a:xfrm>
+            <a:off x="7447135" y="4169664"/>
+            <a:ext cx="685800" cy="384048"/>
+          </a:xfrm>
+          <a:prstGeom prst="rect">
+            <a:avLst/>
+          </a:prstGeom>
+          <a:noFill/>
+          <a:ln/>
+        </p:spPr>
+        <p:txBody>
+          <a:bodyPr wrap="square" lIns="0" tIns="0" rIns="0" bIns="0" rtlCol="0" anchor="ctr"/>
+          <a:lstStyle/>
+          <a:p>
+            <a:pPr algn="ctr" indent="0" marL="0">
+              <a:buNone/>
+            </a:pPr>
+            <a:r>
+              <a:rPr lang="en-US" sz="900" b="1" dirty="0">
+                <a:solidFill>
+                  <a:srgbClr val="9D174D"/>
+                </a:solidFill>
+                <a:latin typeface="Trebuchet MS" pitchFamily="34" charset="0"/>
+                <a:ea typeface="Trebuchet MS" pitchFamily="34" charset="-122"/>
+                <a:cs typeface="Trebuchet MS" pitchFamily="34" charset="-120"/>
+              </a:rPr>
+              <a:t>dge</a:t>
+            </a:r>
+            <a:endParaRPr lang="en-US" sz="900" dirty="0"/>
+          </a:p>
+        </p:txBody>
+      </p:sp>
+      <p:sp>
+        <p:nvSpPr>
+          <p:cNvPr id="45" name="Text 43"/>
+          <p:cNvSpPr/>
+          <p:nvPr/>
+        </p:nvSpPr>
+        <p:spPr>
+          <a:xfrm>
+            <a:off x="7447135" y="4572000"/>
             <a:ext cx="685800" cy="219456"/>
           </a:xfrm>
           <a:prstGeom prst="rect">
@@ -21872,138 +21209,6 @@
               <a:t>/j/</a:t>
             </a:r>
             <a:endParaRPr lang="en-US" sz="750" dirty="0"/>
-          </a:p>
-        </p:txBody>
-      </p:sp>
-      <p:sp>
-        <p:nvSpPr>
-          <p:cNvPr id="41" name="Shape 39"/>
-          <p:cNvSpPr/>
-          <p:nvPr/>
-        </p:nvSpPr>
-        <p:spPr>
-          <a:xfrm>
-            <a:off x="6062472" y="4169664"/>
-            <a:ext cx="685800" cy="384048"/>
-          </a:xfrm>
-          <a:prstGeom prst="rect">
-            <a:avLst>
-              <a:gd name="adj" fmla="val 9524"/>
-            </a:avLst>
-          </a:prstGeom>
-          <a:solidFill>
-            <a:srgbClr val="FFFFFF"/>
-          </a:solidFill>
-          <a:ln w="12700">
-            <a:solidFill>
-              <a:srgbClr val="DB2777"/>
-            </a:solidFill>
-            <a:prstDash val="solid"/>
-          </a:ln>
-        </p:spPr>
-      </p:sp>
-      <p:sp>
-        <p:nvSpPr>
-          <p:cNvPr id="42" name="Text 40"/>
-          <p:cNvSpPr/>
-          <p:nvPr/>
-        </p:nvSpPr>
-        <p:spPr>
-          <a:xfrm>
-            <a:off x="6062472" y="4169664"/>
-            <a:ext cx="685800" cy="384048"/>
-          </a:xfrm>
-          <a:prstGeom prst="rect">
-            <a:avLst/>
-          </a:prstGeom>
-          <a:noFill/>
-          <a:ln/>
-        </p:spPr>
-        <p:txBody>
-          <a:bodyPr wrap="square" lIns="0" tIns="0" rIns="0" bIns="0" rtlCol="0" anchor="ctr"/>
-          <a:lstStyle/>
-          <a:p>
-            <a:pPr algn="ctr" indent="0" marL="0">
-              <a:buNone/>
-            </a:pPr>
-            <a:r>
-              <a:rPr lang="en-US" sz="900" b="1" dirty="0">
-                <a:solidFill>
-                  <a:srgbClr val="9D174D"/>
-                </a:solidFill>
-                <a:latin typeface="Trebuchet MS" pitchFamily="34" charset="0"/>
-                <a:ea typeface="Trebuchet MS" pitchFamily="34" charset="-122"/>
-                <a:cs typeface="Trebuchet MS" pitchFamily="34" charset="-120"/>
-              </a:rPr>
-              <a:t>i</a:t>
-            </a:r>
-            <a:endParaRPr lang="en-US" sz="900" dirty="0"/>
-          </a:p>
-        </p:txBody>
-      </p:sp>
-      <p:sp>
-        <p:nvSpPr>
-          <p:cNvPr id="43" name="Shape 41"/>
-          <p:cNvSpPr/>
-          <p:nvPr/>
-        </p:nvSpPr>
-        <p:spPr>
-          <a:xfrm>
-            <a:off x="7274052" y="4169664"/>
-            <a:ext cx="685800" cy="384048"/>
-          </a:xfrm>
-          <a:prstGeom prst="rect">
-            <a:avLst>
-              <a:gd name="adj" fmla="val 9524"/>
-            </a:avLst>
-          </a:prstGeom>
-          <a:solidFill>
-            <a:srgbClr val="FFFFFF"/>
-          </a:solidFill>
-          <a:ln w="12700">
-            <a:solidFill>
-              <a:srgbClr val="DB2777"/>
-            </a:solidFill>
-            <a:prstDash val="solid"/>
-          </a:ln>
-        </p:spPr>
-      </p:sp>
-      <p:sp>
-        <p:nvSpPr>
-          <p:cNvPr id="44" name="Text 42"/>
-          <p:cNvSpPr/>
-          <p:nvPr/>
-        </p:nvSpPr>
-        <p:spPr>
-          <a:xfrm>
-            <a:off x="7274052" y="4169664"/>
-            <a:ext cx="685800" cy="384048"/>
-          </a:xfrm>
-          <a:prstGeom prst="rect">
-            <a:avLst/>
-          </a:prstGeom>
-          <a:noFill/>
-          <a:ln/>
-        </p:spPr>
-        <p:txBody>
-          <a:bodyPr wrap="square" lIns="0" tIns="0" rIns="0" bIns="0" rtlCol="0" anchor="ctr"/>
-          <a:lstStyle/>
-          <a:p>
-            <a:pPr algn="ctr" indent="0" marL="0">
-              <a:buNone/>
-            </a:pPr>
-            <a:r>
-              <a:rPr lang="en-US" sz="900" b="1" dirty="0">
-                <a:solidFill>
-                  <a:srgbClr val="9D174D"/>
-                </a:solidFill>
-                <a:latin typeface="Trebuchet MS" pitchFamily="34" charset="0"/>
-                <a:ea typeface="Trebuchet MS" pitchFamily="34" charset="-122"/>
-                <a:cs typeface="Trebuchet MS" pitchFamily="34" charset="-120"/>
-              </a:rPr>
-              <a:t>ng</a:t>
-            </a:r>
-            <a:endParaRPr lang="en-US" sz="900" dirty="0"/>
           </a:p>
         </p:txBody>
       </p:sp>
@@ -22432,7 +21637,7 @@
                 <a:ea typeface="Trebuchet MS" pitchFamily="34" charset="-122"/>
                 <a:cs typeface="Trebuchet MS" pitchFamily="34" charset="-120"/>
               </a:rPr>
-              <a:t>misjudged</a:t>
+              <a:t>misjudgement</a:t>
             </a:r>
             <a:endParaRPr lang="en-US" sz="2800" dirty="0"/>
           </a:p>
@@ -23259,7 +22464,7 @@
                 <a:ea typeface="Trebuchet MS" pitchFamily="34" charset="-122"/>
                 <a:cs typeface="Trebuchet MS" pitchFamily="34" charset="-120"/>
               </a:rPr>
-              <a:t>misjudged</a:t>
+              <a:t>misjudgement</a:t>
             </a:r>
             <a:endParaRPr lang="en-US" sz="2800" dirty="0"/>
           </a:p>
@@ -23557,46 +22762,7 @@
       </p:sp>
       <p:sp>
         <p:nvSpPr>
-          <p:cNvPr id="22" name="Text 20"/>
-          <p:cNvSpPr/>
-          <p:nvPr/>
-        </p:nvSpPr>
-        <p:spPr>
-          <a:xfrm>
-            <a:off x="4370832" y="2752344"/>
-            <a:ext cx="1828800" cy="182880"/>
-          </a:xfrm>
-          <a:prstGeom prst="rect">
-            <a:avLst/>
-          </a:prstGeom>
-          <a:noFill/>
-          <a:ln/>
-        </p:spPr>
-        <p:txBody>
-          <a:bodyPr wrap="square" lIns="0" tIns="0" rIns="0" bIns="0" rtlCol="0" anchor="t"/>
-          <a:lstStyle/>
-          <a:p>
-            <a:pPr algn="ctr" indent="0" marL="0">
-              <a:buNone/>
-            </a:pPr>
-            <a:r>
-              <a:rPr lang="en-US" sz="700" i="1" dirty="0">
-                <a:solidFill>
-                  <a:srgbClr val="94A3B8"/>
-                </a:solidFill>
-                <a:latin typeface="Calibri" pitchFamily="34" charset="0"/>
-                <a:ea typeface="Calibri" pitchFamily="34" charset="-122"/>
-                <a:cs typeface="Calibri" pitchFamily="34" charset="-120"/>
-              </a:rPr>
-              <a:t>'e' dropped before vowel suffix</a:t>
-            </a:r>
-            <a:endParaRPr lang="en-US" sz="700" dirty="0"/>
-          </a:p>
-        </p:txBody>
-      </p:sp>
-      <p:sp>
-        <p:nvSpPr>
-          <p:cNvPr id="23" name="Shape 21"/>
+          <p:cNvPr id="22" name="Shape 20"/>
           <p:cNvSpPr/>
           <p:nvPr/>
         </p:nvSpPr>
@@ -23630,7 +22796,7 @@
       </p:sp>
       <p:sp>
         <p:nvSpPr>
-          <p:cNvPr id="24" name="Text 22"/>
+          <p:cNvPr id="23" name="Text 21"/>
           <p:cNvSpPr/>
           <p:nvPr/>
         </p:nvSpPr>
@@ -23661,7 +22827,7 @@
                 <a:ea typeface="Trebuchet MS" pitchFamily="34" charset="-122"/>
                 <a:cs typeface="Trebuchet MS" pitchFamily="34" charset="-120"/>
               </a:rPr>
-              <a:t>ed</a:t>
+              <a:t>ment</a:t>
             </a:r>
             <a:endParaRPr lang="en-US" sz="1300" dirty="0"/>
           </a:p>
@@ -23669,7 +22835,7 @@
       </p:sp>
       <p:sp>
         <p:nvSpPr>
-          <p:cNvPr id="25" name="Text 23"/>
+          <p:cNvPr id="24" name="Text 22"/>
           <p:cNvSpPr/>
           <p:nvPr/>
         </p:nvSpPr>
@@ -23700,7 +22866,7 @@
                 <a:ea typeface="Calibri" pitchFamily="34" charset="-122"/>
                 <a:cs typeface="Calibri" pitchFamily="34" charset="-120"/>
               </a:rPr>
-              <a:t>in the past</a:t>
+              <a:t>result or state of</a:t>
             </a:r>
             <a:endParaRPr lang="en-US" sz="850" dirty="0"/>
           </a:p>
@@ -23708,7 +22874,7 @@
       </p:sp>
       <p:sp>
         <p:nvSpPr>
-          <p:cNvPr id="26" name="Shape 24"/>
+          <p:cNvPr id="25" name="Shape 23"/>
           <p:cNvSpPr/>
           <p:nvPr/>
         </p:nvSpPr>
@@ -23735,7 +22901,7 @@
       </p:sp>
       <p:sp>
         <p:nvSpPr>
-          <p:cNvPr id="27" name="Text 25"/>
+          <p:cNvPr id="26" name="Text 24"/>
           <p:cNvSpPr/>
           <p:nvPr/>
         </p:nvSpPr>
@@ -23774,7 +22940,7 @@
       </p:sp>
       <p:sp>
         <p:nvSpPr>
-          <p:cNvPr id="28" name="Shape 26"/>
+          <p:cNvPr id="27" name="Shape 25"/>
           <p:cNvSpPr/>
           <p:nvPr/>
         </p:nvSpPr>
@@ -23801,7 +22967,7 @@
       </p:sp>
       <p:sp>
         <p:nvSpPr>
-          <p:cNvPr id="29" name="Text 27"/>
+          <p:cNvPr id="28" name="Text 26"/>
           <p:cNvSpPr/>
           <p:nvPr/>
         </p:nvSpPr>
@@ -23840,7 +23006,7 @@
       </p:sp>
       <p:sp>
         <p:nvSpPr>
-          <p:cNvPr id="30" name="Shape 28"/>
+          <p:cNvPr id="29" name="Shape 27"/>
           <p:cNvSpPr/>
           <p:nvPr/>
         </p:nvSpPr>
@@ -23867,7 +23033,7 @@
       </p:sp>
       <p:sp>
         <p:nvSpPr>
-          <p:cNvPr id="31" name="Text 29"/>
+          <p:cNvPr id="30" name="Text 28"/>
           <p:cNvSpPr/>
           <p:nvPr/>
         </p:nvSpPr>
@@ -23906,7 +23072,7 @@
       </p:sp>
       <p:sp>
         <p:nvSpPr>
-          <p:cNvPr id="32" name="Shape 30"/>
+          <p:cNvPr id="31" name="Shape 29"/>
           <p:cNvSpPr/>
           <p:nvPr/>
         </p:nvSpPr>
@@ -23933,7 +23099,7 @@
       </p:sp>
       <p:sp>
         <p:nvSpPr>
-          <p:cNvPr id="33" name="Text 31"/>
+          <p:cNvPr id="32" name="Text 30"/>
           <p:cNvSpPr/>
           <p:nvPr/>
         </p:nvSpPr>
@@ -25114,7 +24280,7 @@
                 <a:ea typeface="Trebuchet MS" pitchFamily="34" charset="-122"/>
                 <a:cs typeface="Trebuchet MS" pitchFamily="34" charset="-120"/>
               </a:rPr>
-              <a:t>misjudged</a:t>
+              <a:t>misjudgement</a:t>
             </a:r>
             <a:endParaRPr lang="en-US" sz="2800" dirty="0"/>
           </a:p>
@@ -25412,46 +24578,7 @@
       </p:sp>
       <p:sp>
         <p:nvSpPr>
-          <p:cNvPr id="22" name="Text 20"/>
-          <p:cNvSpPr/>
-          <p:nvPr/>
-        </p:nvSpPr>
-        <p:spPr>
-          <a:xfrm>
-            <a:off x="4370832" y="2752344"/>
-            <a:ext cx="1828800" cy="182880"/>
-          </a:xfrm>
-          <a:prstGeom prst="rect">
-            <a:avLst/>
-          </a:prstGeom>
-          <a:noFill/>
-          <a:ln/>
-        </p:spPr>
-        <p:txBody>
-          <a:bodyPr wrap="square" lIns="0" tIns="0" rIns="0" bIns="0" rtlCol="0" anchor="t"/>
-          <a:lstStyle/>
-          <a:p>
-            <a:pPr algn="ctr" indent="0" marL="0">
-              <a:buNone/>
-            </a:pPr>
-            <a:r>
-              <a:rPr lang="en-US" sz="700" i="1" dirty="0">
-                <a:solidFill>
-                  <a:srgbClr val="94A3B8"/>
-                </a:solidFill>
-                <a:latin typeface="Calibri" pitchFamily="34" charset="0"/>
-                <a:ea typeface="Calibri" pitchFamily="34" charset="-122"/>
-                <a:cs typeface="Calibri" pitchFamily="34" charset="-120"/>
-              </a:rPr>
-              <a:t>'e' dropped before vowel suffix</a:t>
-            </a:r>
-            <a:endParaRPr lang="en-US" sz="700" dirty="0"/>
-          </a:p>
-        </p:txBody>
-      </p:sp>
-      <p:sp>
-        <p:nvSpPr>
-          <p:cNvPr id="23" name="Shape 21"/>
+          <p:cNvPr id="22" name="Shape 20"/>
           <p:cNvSpPr/>
           <p:nvPr/>
         </p:nvSpPr>
@@ -25485,7 +24612,7 @@
       </p:sp>
       <p:sp>
         <p:nvSpPr>
-          <p:cNvPr id="24" name="Text 22"/>
+          <p:cNvPr id="23" name="Text 21"/>
           <p:cNvSpPr/>
           <p:nvPr/>
         </p:nvSpPr>
@@ -25516,7 +24643,7 @@
                 <a:ea typeface="Trebuchet MS" pitchFamily="34" charset="-122"/>
                 <a:cs typeface="Trebuchet MS" pitchFamily="34" charset="-120"/>
               </a:rPr>
-              <a:t>ed</a:t>
+              <a:t>ment</a:t>
             </a:r>
             <a:endParaRPr lang="en-US" sz="1300" dirty="0"/>
           </a:p>
@@ -25524,7 +24651,7 @@
       </p:sp>
       <p:sp>
         <p:nvSpPr>
-          <p:cNvPr id="25" name="Text 23"/>
+          <p:cNvPr id="24" name="Text 22"/>
           <p:cNvSpPr/>
           <p:nvPr/>
         </p:nvSpPr>
@@ -25555,7 +24682,7 @@
                 <a:ea typeface="Calibri" pitchFamily="34" charset="-122"/>
                 <a:cs typeface="Calibri" pitchFamily="34" charset="-120"/>
               </a:rPr>
-              <a:t>in the past</a:t>
+              <a:t>result or state of</a:t>
             </a:r>
             <a:endParaRPr lang="en-US" sz="850" dirty="0"/>
           </a:p>
@@ -25563,7 +24690,7 @@
       </p:sp>
       <p:sp>
         <p:nvSpPr>
-          <p:cNvPr id="26" name="Shape 24"/>
+          <p:cNvPr id="25" name="Shape 23"/>
           <p:cNvSpPr/>
           <p:nvPr/>
         </p:nvSpPr>
@@ -25590,7 +24717,7 @@
       </p:sp>
       <p:sp>
         <p:nvSpPr>
-          <p:cNvPr id="27" name="Text 25"/>
+          <p:cNvPr id="26" name="Text 24"/>
           <p:cNvSpPr/>
           <p:nvPr/>
         </p:nvSpPr>
@@ -25629,7 +24756,7 @@
       </p:sp>
       <p:sp>
         <p:nvSpPr>
-          <p:cNvPr id="28" name="Shape 26"/>
+          <p:cNvPr id="27" name="Shape 25"/>
           <p:cNvSpPr/>
           <p:nvPr/>
         </p:nvSpPr>
@@ -25656,13 +24783,13 @@
       </p:sp>
       <p:sp>
         <p:nvSpPr>
-          <p:cNvPr id="29" name="Shape 27"/>
-          <p:cNvSpPr/>
-          <p:nvPr/>
-        </p:nvSpPr>
-        <p:spPr>
-          <a:xfrm>
-            <a:off x="2999232" y="3364992"/>
+          <p:cNvPr id="28" name="Shape 26"/>
+          <p:cNvSpPr/>
+          <p:nvPr/>
+        </p:nvSpPr>
+        <p:spPr>
+          <a:xfrm>
+            <a:off x="2313432" y="3364992"/>
             <a:ext cx="1645920" cy="475488"/>
           </a:xfrm>
           <a:prstGeom prst="rect">
@@ -25683,13 +24810,13 @@
       </p:sp>
       <p:sp>
         <p:nvSpPr>
-          <p:cNvPr id="30" name="Text 28"/>
-          <p:cNvSpPr/>
-          <p:nvPr/>
-        </p:nvSpPr>
-        <p:spPr>
-          <a:xfrm>
-            <a:off x="2999232" y="3364992"/>
+          <p:cNvPr id="29" name="Text 27"/>
+          <p:cNvSpPr/>
+          <p:nvPr/>
+        </p:nvSpPr>
+        <p:spPr>
+          <a:xfrm>
+            <a:off x="2313432" y="3364992"/>
             <a:ext cx="1645920" cy="475488"/>
           </a:xfrm>
           <a:prstGeom prst="rect">
@@ -25722,14 +24849,14 @@
       </p:sp>
       <p:sp>
         <p:nvSpPr>
-          <p:cNvPr id="31" name="Text 29"/>
-          <p:cNvSpPr/>
-          <p:nvPr/>
-        </p:nvSpPr>
-        <p:spPr>
-          <a:xfrm>
-            <a:off x="4645152" y="3364992"/>
-            <a:ext cx="1097280" cy="475488"/>
+          <p:cNvPr id="30" name="Text 28"/>
+          <p:cNvSpPr/>
+          <p:nvPr/>
+        </p:nvSpPr>
+        <p:spPr>
+          <a:xfrm>
+            <a:off x="3959352" y="3364992"/>
+            <a:ext cx="411480" cy="475488"/>
           </a:xfrm>
           <a:prstGeom prst="rect">
             <a:avLst/>
@@ -25761,13 +24888,13 @@
       </p:sp>
       <p:sp>
         <p:nvSpPr>
-          <p:cNvPr id="32" name="Shape 30"/>
-          <p:cNvSpPr/>
-          <p:nvPr/>
-        </p:nvSpPr>
-        <p:spPr>
-          <a:xfrm>
-            <a:off x="5742432" y="3364992"/>
+          <p:cNvPr id="31" name="Shape 29"/>
+          <p:cNvSpPr/>
+          <p:nvPr/>
+        </p:nvSpPr>
+        <p:spPr>
+          <a:xfrm>
+            <a:off x="4370832" y="3364992"/>
             <a:ext cx="1645920" cy="475488"/>
           </a:xfrm>
           <a:prstGeom prst="rect">
@@ -25788,13 +24915,13 @@
       </p:sp>
       <p:sp>
         <p:nvSpPr>
-          <p:cNvPr id="33" name="Text 31"/>
-          <p:cNvSpPr/>
-          <p:nvPr/>
-        </p:nvSpPr>
-        <p:spPr>
-          <a:xfrm>
-            <a:off x="5742432" y="3364992"/>
+          <p:cNvPr id="32" name="Text 30"/>
+          <p:cNvSpPr/>
+          <p:nvPr/>
+        </p:nvSpPr>
+        <p:spPr>
+          <a:xfrm>
+            <a:off x="4370832" y="3364992"/>
             <a:ext cx="1645920" cy="475488"/>
           </a:xfrm>
           <a:prstGeom prst="rect">
@@ -25819,7 +24946,7 @@
                 <a:ea typeface="Trebuchet MS" pitchFamily="34" charset="-122"/>
                 <a:cs typeface="Trebuchet MS" pitchFamily="34" charset="-120"/>
               </a:rPr>
-              <a:t>judged</a:t>
+              <a:t>judge</a:t>
             </a:r>
             <a:endParaRPr lang="en-US" sz="1400" dirty="0"/>
           </a:p>
@@ -25827,7 +24954,112 @@
       </p:sp>
       <p:sp>
         <p:nvSpPr>
+          <p:cNvPr id="33" name="Text 31"/>
+          <p:cNvSpPr/>
+          <p:nvPr/>
+        </p:nvSpPr>
+        <p:spPr>
+          <a:xfrm>
+            <a:off x="6016752" y="3364992"/>
+            <a:ext cx="411480" cy="475488"/>
+          </a:xfrm>
+          <a:prstGeom prst="rect">
+            <a:avLst/>
+          </a:prstGeom>
+          <a:noFill/>
+          <a:ln/>
+        </p:spPr>
+        <p:txBody>
+          <a:bodyPr wrap="square" lIns="0" tIns="0" rIns="0" bIns="0" rtlCol="0" anchor="ctr"/>
+          <a:lstStyle/>
+          <a:p>
+            <a:pPr algn="ctr" indent="0" marL="0">
+              <a:buNone/>
+            </a:pPr>
+            <a:r>
+              <a:rPr lang="en-US" sz="1600" b="1" dirty="0">
+                <a:solidFill>
+                  <a:srgbClr val="0D9488"/>
+                </a:solidFill>
+                <a:latin typeface="Trebuchet MS" pitchFamily="34" charset="0"/>
+                <a:ea typeface="Trebuchet MS" pitchFamily="34" charset="-122"/>
+                <a:cs typeface="Trebuchet MS" pitchFamily="34" charset="-120"/>
+              </a:rPr>
+              <a:t>·</a:t>
+            </a:r>
+            <a:endParaRPr lang="en-US" sz="1600" dirty="0"/>
+          </a:p>
+        </p:txBody>
+      </p:sp>
+      <p:sp>
+        <p:nvSpPr>
           <p:cNvPr id="34" name="Shape 32"/>
+          <p:cNvSpPr/>
+          <p:nvPr/>
+        </p:nvSpPr>
+        <p:spPr>
+          <a:xfrm>
+            <a:off x="6428232" y="3364992"/>
+            <a:ext cx="1645920" cy="475488"/>
+          </a:xfrm>
+          <a:prstGeom prst="rect">
+            <a:avLst>
+              <a:gd name="adj" fmla="val 9615"/>
+            </a:avLst>
+          </a:prstGeom>
+          <a:solidFill>
+            <a:srgbClr val="FFFFFF"/>
+          </a:solidFill>
+          <a:ln w="12700">
+            <a:solidFill>
+              <a:srgbClr val="0D9488"/>
+            </a:solidFill>
+            <a:prstDash val="solid"/>
+          </a:ln>
+        </p:spPr>
+      </p:sp>
+      <p:sp>
+        <p:nvSpPr>
+          <p:cNvPr id="35" name="Text 33"/>
+          <p:cNvSpPr/>
+          <p:nvPr/>
+        </p:nvSpPr>
+        <p:spPr>
+          <a:xfrm>
+            <a:off x="6428232" y="3364992"/>
+            <a:ext cx="1645920" cy="475488"/>
+          </a:xfrm>
+          <a:prstGeom prst="rect">
+            <a:avLst/>
+          </a:prstGeom>
+          <a:noFill/>
+          <a:ln/>
+        </p:spPr>
+        <p:txBody>
+          <a:bodyPr wrap="square" lIns="0" tIns="0" rIns="0" bIns="0" rtlCol="0" anchor="ctr"/>
+          <a:lstStyle/>
+          <a:p>
+            <a:pPr algn="ctr" indent="0" marL="0">
+              <a:buNone/>
+            </a:pPr>
+            <a:r>
+              <a:rPr lang="en-US" sz="1400" b="1" dirty="0">
+                <a:solidFill>
+                  <a:srgbClr val="0D9488"/>
+                </a:solidFill>
+                <a:latin typeface="Trebuchet MS" pitchFamily="34" charset="0"/>
+                <a:ea typeface="Trebuchet MS" pitchFamily="34" charset="-122"/>
+                <a:cs typeface="Trebuchet MS" pitchFamily="34" charset="-120"/>
+              </a:rPr>
+              <a:t>ment</a:t>
+            </a:r>
+            <a:endParaRPr lang="en-US" sz="1400" dirty="0"/>
+          </a:p>
+        </p:txBody>
+      </p:sp>
+      <p:sp>
+        <p:nvSpPr>
+          <p:cNvPr id="36" name="Shape 34"/>
           <p:cNvSpPr/>
           <p:nvPr/>
         </p:nvSpPr>
@@ -25854,7 +25086,7 @@
       </p:sp>
       <p:sp>
         <p:nvSpPr>
-          <p:cNvPr id="35" name="Text 33"/>
+          <p:cNvPr id="37" name="Text 35"/>
           <p:cNvSpPr/>
           <p:nvPr/>
         </p:nvSpPr>
@@ -25893,7 +25125,7 @@
       </p:sp>
       <p:sp>
         <p:nvSpPr>
-          <p:cNvPr id="36" name="Shape 34"/>
+          <p:cNvPr id="38" name="Shape 36"/>
           <p:cNvSpPr/>
           <p:nvPr/>
         </p:nvSpPr>
@@ -25920,7 +25152,7 @@
       </p:sp>
       <p:sp>
         <p:nvSpPr>
-          <p:cNvPr id="37" name="Text 35"/>
+          <p:cNvPr id="39" name="Text 37"/>
           <p:cNvSpPr/>
           <p:nvPr/>
         </p:nvSpPr>
@@ -26382,7 +25614,7 @@
                 <a:ea typeface="Trebuchet MS" pitchFamily="34" charset="-122"/>
                 <a:cs typeface="Trebuchet MS" pitchFamily="34" charset="-120"/>
               </a:rPr>
-              <a:t>misjudged</a:t>
+              <a:t>misjudgement</a:t>
             </a:r>
             <a:endParaRPr lang="en-US" sz="2800" dirty="0"/>
           </a:p>
@@ -26680,46 +25912,7 @@
       </p:sp>
       <p:sp>
         <p:nvSpPr>
-          <p:cNvPr id="22" name="Text 20"/>
-          <p:cNvSpPr/>
-          <p:nvPr/>
-        </p:nvSpPr>
-        <p:spPr>
-          <a:xfrm>
-            <a:off x="4370832" y="2752344"/>
-            <a:ext cx="1828800" cy="182880"/>
-          </a:xfrm>
-          <a:prstGeom prst="rect">
-            <a:avLst/>
-          </a:prstGeom>
-          <a:noFill/>
-          <a:ln/>
-        </p:spPr>
-        <p:txBody>
-          <a:bodyPr wrap="square" lIns="0" tIns="0" rIns="0" bIns="0" rtlCol="0" anchor="t"/>
-          <a:lstStyle/>
-          <a:p>
-            <a:pPr algn="ctr" indent="0" marL="0">
-              <a:buNone/>
-            </a:pPr>
-            <a:r>
-              <a:rPr lang="en-US" sz="700" i="1" dirty="0">
-                <a:solidFill>
-                  <a:srgbClr val="94A3B8"/>
-                </a:solidFill>
-                <a:latin typeface="Calibri" pitchFamily="34" charset="0"/>
-                <a:ea typeface="Calibri" pitchFamily="34" charset="-122"/>
-                <a:cs typeface="Calibri" pitchFamily="34" charset="-120"/>
-              </a:rPr>
-              <a:t>'e' dropped before vowel suffix</a:t>
-            </a:r>
-            <a:endParaRPr lang="en-US" sz="700" dirty="0"/>
-          </a:p>
-        </p:txBody>
-      </p:sp>
-      <p:sp>
-        <p:nvSpPr>
-          <p:cNvPr id="23" name="Shape 21"/>
+          <p:cNvPr id="22" name="Shape 20"/>
           <p:cNvSpPr/>
           <p:nvPr/>
         </p:nvSpPr>
@@ -26753,7 +25946,7 @@
       </p:sp>
       <p:sp>
         <p:nvSpPr>
-          <p:cNvPr id="24" name="Text 22"/>
+          <p:cNvPr id="23" name="Text 21"/>
           <p:cNvSpPr/>
           <p:nvPr/>
         </p:nvSpPr>
@@ -26784,7 +25977,7 @@
                 <a:ea typeface="Trebuchet MS" pitchFamily="34" charset="-122"/>
                 <a:cs typeface="Trebuchet MS" pitchFamily="34" charset="-120"/>
               </a:rPr>
-              <a:t>ed</a:t>
+              <a:t>ment</a:t>
             </a:r>
             <a:endParaRPr lang="en-US" sz="1300" dirty="0"/>
           </a:p>
@@ -26792,7 +25985,7 @@
       </p:sp>
       <p:sp>
         <p:nvSpPr>
-          <p:cNvPr id="25" name="Text 23"/>
+          <p:cNvPr id="24" name="Text 22"/>
           <p:cNvSpPr/>
           <p:nvPr/>
         </p:nvSpPr>
@@ -26823,7 +26016,7 @@
                 <a:ea typeface="Calibri" pitchFamily="34" charset="-122"/>
                 <a:cs typeface="Calibri" pitchFamily="34" charset="-120"/>
               </a:rPr>
-              <a:t>in the past</a:t>
+              <a:t>result or state of</a:t>
             </a:r>
             <a:endParaRPr lang="en-US" sz="850" dirty="0"/>
           </a:p>
@@ -26831,7 +26024,7 @@
       </p:sp>
       <p:sp>
         <p:nvSpPr>
-          <p:cNvPr id="26" name="Shape 24"/>
+          <p:cNvPr id="25" name="Shape 23"/>
           <p:cNvSpPr/>
           <p:nvPr/>
         </p:nvSpPr>
@@ -26858,7 +26051,7 @@
       </p:sp>
       <p:sp>
         <p:nvSpPr>
-          <p:cNvPr id="27" name="Text 25"/>
+          <p:cNvPr id="26" name="Text 24"/>
           <p:cNvSpPr/>
           <p:nvPr/>
         </p:nvSpPr>
@@ -26897,7 +26090,7 @@
       </p:sp>
       <p:sp>
         <p:nvSpPr>
-          <p:cNvPr id="28" name="Shape 26"/>
+          <p:cNvPr id="27" name="Shape 25"/>
           <p:cNvSpPr/>
           <p:nvPr/>
         </p:nvSpPr>
@@ -26924,13 +26117,13 @@
       </p:sp>
       <p:sp>
         <p:nvSpPr>
-          <p:cNvPr id="29" name="Shape 27"/>
-          <p:cNvSpPr/>
-          <p:nvPr/>
-        </p:nvSpPr>
-        <p:spPr>
-          <a:xfrm>
-            <a:off x="2999232" y="3364992"/>
+          <p:cNvPr id="28" name="Shape 26"/>
+          <p:cNvSpPr/>
+          <p:nvPr/>
+        </p:nvSpPr>
+        <p:spPr>
+          <a:xfrm>
+            <a:off x="2313432" y="3364992"/>
             <a:ext cx="1645920" cy="475488"/>
           </a:xfrm>
           <a:prstGeom prst="rect">
@@ -26951,13 +26144,13 @@
       </p:sp>
       <p:sp>
         <p:nvSpPr>
-          <p:cNvPr id="30" name="Text 28"/>
-          <p:cNvSpPr/>
-          <p:nvPr/>
-        </p:nvSpPr>
-        <p:spPr>
-          <a:xfrm>
-            <a:off x="2999232" y="3364992"/>
+          <p:cNvPr id="29" name="Text 27"/>
+          <p:cNvSpPr/>
+          <p:nvPr/>
+        </p:nvSpPr>
+        <p:spPr>
+          <a:xfrm>
+            <a:off x="2313432" y="3364992"/>
             <a:ext cx="1645920" cy="475488"/>
           </a:xfrm>
           <a:prstGeom prst="rect">
@@ -26990,14 +26183,14 @@
       </p:sp>
       <p:sp>
         <p:nvSpPr>
-          <p:cNvPr id="31" name="Text 29"/>
-          <p:cNvSpPr/>
-          <p:nvPr/>
-        </p:nvSpPr>
-        <p:spPr>
-          <a:xfrm>
-            <a:off x="4645152" y="3364992"/>
-            <a:ext cx="1097280" cy="475488"/>
+          <p:cNvPr id="30" name="Text 28"/>
+          <p:cNvSpPr/>
+          <p:nvPr/>
+        </p:nvSpPr>
+        <p:spPr>
+          <a:xfrm>
+            <a:off x="3959352" y="3364992"/>
+            <a:ext cx="411480" cy="475488"/>
           </a:xfrm>
           <a:prstGeom prst="rect">
             <a:avLst/>
@@ -27029,13 +26222,13 @@
       </p:sp>
       <p:sp>
         <p:nvSpPr>
-          <p:cNvPr id="32" name="Shape 30"/>
-          <p:cNvSpPr/>
-          <p:nvPr/>
-        </p:nvSpPr>
-        <p:spPr>
-          <a:xfrm>
-            <a:off x="5742432" y="3364992"/>
+          <p:cNvPr id="31" name="Shape 29"/>
+          <p:cNvSpPr/>
+          <p:nvPr/>
+        </p:nvSpPr>
+        <p:spPr>
+          <a:xfrm>
+            <a:off x="4370832" y="3364992"/>
             <a:ext cx="1645920" cy="475488"/>
           </a:xfrm>
           <a:prstGeom prst="rect">
@@ -27056,13 +26249,13 @@
       </p:sp>
       <p:sp>
         <p:nvSpPr>
-          <p:cNvPr id="33" name="Text 31"/>
-          <p:cNvSpPr/>
-          <p:nvPr/>
-        </p:nvSpPr>
-        <p:spPr>
-          <a:xfrm>
-            <a:off x="5742432" y="3364992"/>
+          <p:cNvPr id="32" name="Text 30"/>
+          <p:cNvSpPr/>
+          <p:nvPr/>
+        </p:nvSpPr>
+        <p:spPr>
+          <a:xfrm>
+            <a:off x="4370832" y="3364992"/>
             <a:ext cx="1645920" cy="475488"/>
           </a:xfrm>
           <a:prstGeom prst="rect">
@@ -27087,7 +26280,7 @@
                 <a:ea typeface="Trebuchet MS" pitchFamily="34" charset="-122"/>
                 <a:cs typeface="Trebuchet MS" pitchFamily="34" charset="-120"/>
               </a:rPr>
-              <a:t>judged</a:t>
+              <a:t>judge</a:t>
             </a:r>
             <a:endParaRPr lang="en-US" sz="1400" dirty="0"/>
           </a:p>
@@ -27095,7 +26288,112 @@
       </p:sp>
       <p:sp>
         <p:nvSpPr>
+          <p:cNvPr id="33" name="Text 31"/>
+          <p:cNvSpPr/>
+          <p:nvPr/>
+        </p:nvSpPr>
+        <p:spPr>
+          <a:xfrm>
+            <a:off x="6016752" y="3364992"/>
+            <a:ext cx="411480" cy="475488"/>
+          </a:xfrm>
+          <a:prstGeom prst="rect">
+            <a:avLst/>
+          </a:prstGeom>
+          <a:noFill/>
+          <a:ln/>
+        </p:spPr>
+        <p:txBody>
+          <a:bodyPr wrap="square" lIns="0" tIns="0" rIns="0" bIns="0" rtlCol="0" anchor="ctr"/>
+          <a:lstStyle/>
+          <a:p>
+            <a:pPr algn="ctr" indent="0" marL="0">
+              <a:buNone/>
+            </a:pPr>
+            <a:r>
+              <a:rPr lang="en-US" sz="1600" b="1" dirty="0">
+                <a:solidFill>
+                  <a:srgbClr val="0D9488"/>
+                </a:solidFill>
+                <a:latin typeface="Trebuchet MS" pitchFamily="34" charset="0"/>
+                <a:ea typeface="Trebuchet MS" pitchFamily="34" charset="-122"/>
+                <a:cs typeface="Trebuchet MS" pitchFamily="34" charset="-120"/>
+              </a:rPr>
+              <a:t>·</a:t>
+            </a:r>
+            <a:endParaRPr lang="en-US" sz="1600" dirty="0"/>
+          </a:p>
+        </p:txBody>
+      </p:sp>
+      <p:sp>
+        <p:nvSpPr>
           <p:cNvPr id="34" name="Shape 32"/>
+          <p:cNvSpPr/>
+          <p:nvPr/>
+        </p:nvSpPr>
+        <p:spPr>
+          <a:xfrm>
+            <a:off x="6428232" y="3364992"/>
+            <a:ext cx="1645920" cy="475488"/>
+          </a:xfrm>
+          <a:prstGeom prst="rect">
+            <a:avLst>
+              <a:gd name="adj" fmla="val 9615"/>
+            </a:avLst>
+          </a:prstGeom>
+          <a:solidFill>
+            <a:srgbClr val="FFFFFF"/>
+          </a:solidFill>
+          <a:ln w="12700">
+            <a:solidFill>
+              <a:srgbClr val="0D9488"/>
+            </a:solidFill>
+            <a:prstDash val="solid"/>
+          </a:ln>
+        </p:spPr>
+      </p:sp>
+      <p:sp>
+        <p:nvSpPr>
+          <p:cNvPr id="35" name="Text 33"/>
+          <p:cNvSpPr/>
+          <p:nvPr/>
+        </p:nvSpPr>
+        <p:spPr>
+          <a:xfrm>
+            <a:off x="6428232" y="3364992"/>
+            <a:ext cx="1645920" cy="475488"/>
+          </a:xfrm>
+          <a:prstGeom prst="rect">
+            <a:avLst/>
+          </a:prstGeom>
+          <a:noFill/>
+          <a:ln/>
+        </p:spPr>
+        <p:txBody>
+          <a:bodyPr wrap="square" lIns="0" tIns="0" rIns="0" bIns="0" rtlCol="0" anchor="ctr"/>
+          <a:lstStyle/>
+          <a:p>
+            <a:pPr algn="ctr" indent="0" marL="0">
+              <a:buNone/>
+            </a:pPr>
+            <a:r>
+              <a:rPr lang="en-US" sz="1400" b="1" dirty="0">
+                <a:solidFill>
+                  <a:srgbClr val="0D9488"/>
+                </a:solidFill>
+                <a:latin typeface="Trebuchet MS" pitchFamily="34" charset="0"/>
+                <a:ea typeface="Trebuchet MS" pitchFamily="34" charset="-122"/>
+                <a:cs typeface="Trebuchet MS" pitchFamily="34" charset="-120"/>
+              </a:rPr>
+              <a:t>ment</a:t>
+            </a:r>
+            <a:endParaRPr lang="en-US" sz="1400" dirty="0"/>
+          </a:p>
+        </p:txBody>
+      </p:sp>
+      <p:sp>
+        <p:nvSpPr>
+          <p:cNvPr id="36" name="Shape 34"/>
           <p:cNvSpPr/>
           <p:nvPr/>
         </p:nvSpPr>
@@ -27122,7 +26420,7 @@
       </p:sp>
       <p:sp>
         <p:nvSpPr>
-          <p:cNvPr id="35" name="Text 33"/>
+          <p:cNvPr id="37" name="Text 35"/>
           <p:cNvSpPr/>
           <p:nvPr/>
         </p:nvSpPr>
@@ -27161,7 +26459,7 @@
       </p:sp>
       <p:sp>
         <p:nvSpPr>
-          <p:cNvPr id="36" name="Shape 34"/>
+          <p:cNvPr id="38" name="Shape 36"/>
           <p:cNvSpPr/>
           <p:nvPr/>
         </p:nvSpPr>
@@ -27188,14 +26486,14 @@
       </p:sp>
       <p:sp>
         <p:nvSpPr>
-          <p:cNvPr id="37" name="Shape 35"/>
-          <p:cNvSpPr/>
-          <p:nvPr/>
-        </p:nvSpPr>
-        <p:spPr>
-          <a:xfrm>
-            <a:off x="2124837" y="4169664"/>
-            <a:ext cx="685800" cy="384048"/>
+          <p:cNvPr id="39" name="Shape 37"/>
+          <p:cNvSpPr/>
+          <p:nvPr/>
+        </p:nvSpPr>
+        <p:spPr>
+          <a:xfrm>
+            <a:off x="1951828" y="4169664"/>
+            <a:ext cx="603504" cy="384048"/>
           </a:xfrm>
           <a:prstGeom prst="rect">
             <a:avLst>
@@ -27215,14 +26513,14 @@
       </p:sp>
       <p:sp>
         <p:nvSpPr>
-          <p:cNvPr id="38" name="Text 36"/>
-          <p:cNvSpPr/>
-          <p:nvPr/>
-        </p:nvSpPr>
-        <p:spPr>
-          <a:xfrm>
-            <a:off x="2124837" y="4169664"/>
-            <a:ext cx="685800" cy="384048"/>
+          <p:cNvPr id="40" name="Text 38"/>
+          <p:cNvSpPr/>
+          <p:nvPr/>
+        </p:nvSpPr>
+        <p:spPr>
+          <a:xfrm>
+            <a:off x="1951828" y="4169664"/>
+            <a:ext cx="603504" cy="384048"/>
           </a:xfrm>
           <a:prstGeom prst="rect">
             <a:avLst/>
@@ -27254,14 +26552,14 @@
       </p:sp>
       <p:sp>
         <p:nvSpPr>
-          <p:cNvPr id="39" name="Shape 37"/>
-          <p:cNvSpPr/>
-          <p:nvPr/>
-        </p:nvSpPr>
-        <p:spPr>
-          <a:xfrm>
-            <a:off x="3033522" y="4169664"/>
-            <a:ext cx="685800" cy="384048"/>
+          <p:cNvPr id="41" name="Shape 39"/>
+          <p:cNvSpPr/>
+          <p:nvPr/>
+        </p:nvSpPr>
+        <p:spPr>
+          <a:xfrm>
+            <a:off x="2605209" y="4169664"/>
+            <a:ext cx="603504" cy="384048"/>
           </a:xfrm>
           <a:prstGeom prst="rect">
             <a:avLst>
@@ -27281,14 +26579,14 @@
       </p:sp>
       <p:sp>
         <p:nvSpPr>
-          <p:cNvPr id="40" name="Text 38"/>
-          <p:cNvSpPr/>
-          <p:nvPr/>
-        </p:nvSpPr>
-        <p:spPr>
-          <a:xfrm>
-            <a:off x="3033522" y="4169664"/>
-            <a:ext cx="685800" cy="384048"/>
+          <p:cNvPr id="42" name="Text 40"/>
+          <p:cNvSpPr/>
+          <p:nvPr/>
+        </p:nvSpPr>
+        <p:spPr>
+          <a:xfrm>
+            <a:off x="2605209" y="4169664"/>
+            <a:ext cx="603504" cy="384048"/>
           </a:xfrm>
           <a:prstGeom prst="rect">
             <a:avLst/>
@@ -27320,14 +26618,14 @@
       </p:sp>
       <p:sp>
         <p:nvSpPr>
-          <p:cNvPr id="41" name="Shape 39"/>
-          <p:cNvSpPr/>
-          <p:nvPr/>
-        </p:nvSpPr>
-        <p:spPr>
-          <a:xfrm>
-            <a:off x="3942207" y="4169664"/>
-            <a:ext cx="685800" cy="384048"/>
+          <p:cNvPr id="43" name="Shape 41"/>
+          <p:cNvSpPr/>
+          <p:nvPr/>
+        </p:nvSpPr>
+        <p:spPr>
+          <a:xfrm>
+            <a:off x="3258589" y="4169664"/>
+            <a:ext cx="603504" cy="384048"/>
           </a:xfrm>
           <a:prstGeom prst="rect">
             <a:avLst>
@@ -27347,14 +26645,14 @@
       </p:sp>
       <p:sp>
         <p:nvSpPr>
-          <p:cNvPr id="42" name="Text 40"/>
-          <p:cNvSpPr/>
-          <p:nvPr/>
-        </p:nvSpPr>
-        <p:spPr>
-          <a:xfrm>
-            <a:off x="3942207" y="4169664"/>
-            <a:ext cx="685800" cy="384048"/>
+          <p:cNvPr id="44" name="Text 42"/>
+          <p:cNvSpPr/>
+          <p:nvPr/>
+        </p:nvSpPr>
+        <p:spPr>
+          <a:xfrm>
+            <a:off x="3258589" y="4169664"/>
+            <a:ext cx="603504" cy="384048"/>
           </a:xfrm>
           <a:prstGeom prst="rect">
             <a:avLst/>
@@ -27386,14 +26684,14 @@
       </p:sp>
       <p:sp>
         <p:nvSpPr>
-          <p:cNvPr id="43" name="Shape 41"/>
-          <p:cNvSpPr/>
-          <p:nvPr/>
-        </p:nvSpPr>
-        <p:spPr>
-          <a:xfrm>
-            <a:off x="4850892" y="4169664"/>
-            <a:ext cx="685800" cy="384048"/>
+          <p:cNvPr id="45" name="Shape 43"/>
+          <p:cNvSpPr/>
+          <p:nvPr/>
+        </p:nvSpPr>
+        <p:spPr>
+          <a:xfrm>
+            <a:off x="3911969" y="4169664"/>
+            <a:ext cx="603504" cy="384048"/>
           </a:xfrm>
           <a:prstGeom prst="rect">
             <a:avLst>
@@ -27413,14 +26711,14 @@
       </p:sp>
       <p:sp>
         <p:nvSpPr>
-          <p:cNvPr id="44" name="Text 42"/>
-          <p:cNvSpPr/>
-          <p:nvPr/>
-        </p:nvSpPr>
-        <p:spPr>
-          <a:xfrm>
-            <a:off x="4850892" y="4169664"/>
-            <a:ext cx="685800" cy="384048"/>
+          <p:cNvPr id="46" name="Text 44"/>
+          <p:cNvSpPr/>
+          <p:nvPr/>
+        </p:nvSpPr>
+        <p:spPr>
+          <a:xfrm>
+            <a:off x="3911969" y="4169664"/>
+            <a:ext cx="603504" cy="384048"/>
           </a:xfrm>
           <a:prstGeom prst="rect">
             <a:avLst/>
@@ -27452,14 +26750,14 @@
       </p:sp>
       <p:sp>
         <p:nvSpPr>
-          <p:cNvPr id="45" name="Shape 43"/>
-          <p:cNvSpPr/>
-          <p:nvPr/>
-        </p:nvSpPr>
-        <p:spPr>
-          <a:xfrm>
-            <a:off x="5759577" y="4169664"/>
-            <a:ext cx="685800" cy="384048"/>
+          <p:cNvPr id="47" name="Shape 45"/>
+          <p:cNvSpPr/>
+          <p:nvPr/>
+        </p:nvSpPr>
+        <p:spPr>
+          <a:xfrm>
+            <a:off x="4565350" y="4169664"/>
+            <a:ext cx="603504" cy="384048"/>
           </a:xfrm>
           <a:prstGeom prst="rect">
             <a:avLst>
@@ -27479,14 +26777,14 @@
       </p:sp>
       <p:sp>
         <p:nvSpPr>
-          <p:cNvPr id="46" name="Text 44"/>
-          <p:cNvSpPr/>
-          <p:nvPr/>
-        </p:nvSpPr>
-        <p:spPr>
-          <a:xfrm>
-            <a:off x="5759577" y="4169664"/>
-            <a:ext cx="685800" cy="384048"/>
+          <p:cNvPr id="48" name="Text 46"/>
+          <p:cNvSpPr/>
+          <p:nvPr/>
+        </p:nvSpPr>
+        <p:spPr>
+          <a:xfrm>
+            <a:off x="4565350" y="4169664"/>
+            <a:ext cx="603504" cy="384048"/>
           </a:xfrm>
           <a:prstGeom prst="rect">
             <a:avLst/>
@@ -27518,14 +26816,14 @@
       </p:sp>
       <p:sp>
         <p:nvSpPr>
-          <p:cNvPr id="47" name="Shape 45"/>
-          <p:cNvSpPr/>
-          <p:nvPr/>
-        </p:nvSpPr>
-        <p:spPr>
-          <a:xfrm>
-            <a:off x="6668262" y="4169664"/>
-            <a:ext cx="685800" cy="384048"/>
+          <p:cNvPr id="49" name="Shape 47"/>
+          <p:cNvSpPr/>
+          <p:nvPr/>
+        </p:nvSpPr>
+        <p:spPr>
+          <a:xfrm>
+            <a:off x="5218730" y="4169664"/>
+            <a:ext cx="603504" cy="384048"/>
           </a:xfrm>
           <a:prstGeom prst="rect">
             <a:avLst>
@@ -27545,14 +26843,14 @@
       </p:sp>
       <p:sp>
         <p:nvSpPr>
-          <p:cNvPr id="48" name="Text 46"/>
-          <p:cNvSpPr/>
-          <p:nvPr/>
-        </p:nvSpPr>
-        <p:spPr>
-          <a:xfrm>
-            <a:off x="6668262" y="4169664"/>
-            <a:ext cx="685800" cy="384048"/>
+          <p:cNvPr id="50" name="Text 48"/>
+          <p:cNvSpPr/>
+          <p:nvPr/>
+        </p:nvSpPr>
+        <p:spPr>
+          <a:xfrm>
+            <a:off x="5218730" y="4169664"/>
+            <a:ext cx="603504" cy="384048"/>
           </a:xfrm>
           <a:prstGeom prst="rect">
             <a:avLst/>
@@ -27584,14 +26882,14 @@
       </p:sp>
       <p:sp>
         <p:nvSpPr>
-          <p:cNvPr id="49" name="Text 47"/>
-          <p:cNvSpPr/>
-          <p:nvPr/>
-        </p:nvSpPr>
-        <p:spPr>
-          <a:xfrm>
-            <a:off x="6668262" y="4572000"/>
-            <a:ext cx="685800" cy="219456"/>
+          <p:cNvPr id="51" name="Text 49"/>
+          <p:cNvSpPr/>
+          <p:nvPr/>
+        </p:nvSpPr>
+        <p:spPr>
+          <a:xfrm>
+            <a:off x="5218730" y="4572000"/>
+            <a:ext cx="603504" cy="219456"/>
           </a:xfrm>
           <a:prstGeom prst="rect">
             <a:avLst/>
@@ -27623,14 +26921,14 @@
       </p:sp>
       <p:sp>
         <p:nvSpPr>
-          <p:cNvPr id="50" name="Shape 48"/>
-          <p:cNvSpPr/>
-          <p:nvPr/>
-        </p:nvSpPr>
-        <p:spPr>
-          <a:xfrm>
-            <a:off x="7576947" y="4169664"/>
-            <a:ext cx="685800" cy="384048"/>
+          <p:cNvPr id="52" name="Shape 50"/>
+          <p:cNvSpPr/>
+          <p:nvPr/>
+        </p:nvSpPr>
+        <p:spPr>
+          <a:xfrm>
+            <a:off x="5872111" y="4169664"/>
+            <a:ext cx="603504" cy="384048"/>
           </a:xfrm>
           <a:prstGeom prst="rect">
             <a:avLst>
@@ -27650,14 +26948,14 @@
       </p:sp>
       <p:sp>
         <p:nvSpPr>
-          <p:cNvPr id="51" name="Text 49"/>
-          <p:cNvSpPr/>
-          <p:nvPr/>
-        </p:nvSpPr>
-        <p:spPr>
-          <a:xfrm>
-            <a:off x="7576947" y="4169664"/>
-            <a:ext cx="685800" cy="384048"/>
+          <p:cNvPr id="53" name="Text 51"/>
+          <p:cNvSpPr/>
+          <p:nvPr/>
+        </p:nvSpPr>
+        <p:spPr>
+          <a:xfrm>
+            <a:off x="5872111" y="4169664"/>
+            <a:ext cx="603504" cy="384048"/>
           </a:xfrm>
           <a:prstGeom prst="rect">
             <a:avLst/>
@@ -27681,7 +26979,205 @@
                 <a:ea typeface="Trebuchet MS" pitchFamily="34" charset="-122"/>
                 <a:cs typeface="Trebuchet MS" pitchFamily="34" charset="-120"/>
               </a:rPr>
-              <a:t>d</a:t>
+              <a:t>m</a:t>
+            </a:r>
+            <a:endParaRPr lang="en-US" sz="900" dirty="0"/>
+          </a:p>
+        </p:txBody>
+      </p:sp>
+      <p:sp>
+        <p:nvSpPr>
+          <p:cNvPr id="54" name="Shape 52"/>
+          <p:cNvSpPr/>
+          <p:nvPr/>
+        </p:nvSpPr>
+        <p:spPr>
+          <a:xfrm>
+            <a:off x="6525491" y="4169664"/>
+            <a:ext cx="603504" cy="384048"/>
+          </a:xfrm>
+          <a:prstGeom prst="rect">
+            <a:avLst>
+              <a:gd name="adj" fmla="val 9524"/>
+            </a:avLst>
+          </a:prstGeom>
+          <a:solidFill>
+            <a:srgbClr val="FFFFFF"/>
+          </a:solidFill>
+          <a:ln w="12700">
+            <a:solidFill>
+              <a:srgbClr val="DB2777"/>
+            </a:solidFill>
+            <a:prstDash val="solid"/>
+          </a:ln>
+        </p:spPr>
+      </p:sp>
+      <p:sp>
+        <p:nvSpPr>
+          <p:cNvPr id="55" name="Text 53"/>
+          <p:cNvSpPr/>
+          <p:nvPr/>
+        </p:nvSpPr>
+        <p:spPr>
+          <a:xfrm>
+            <a:off x="6525491" y="4169664"/>
+            <a:ext cx="603504" cy="384048"/>
+          </a:xfrm>
+          <a:prstGeom prst="rect">
+            <a:avLst/>
+          </a:prstGeom>
+          <a:noFill/>
+          <a:ln/>
+        </p:spPr>
+        <p:txBody>
+          <a:bodyPr wrap="square" lIns="0" tIns="0" rIns="0" bIns="0" rtlCol="0" anchor="ctr"/>
+          <a:lstStyle/>
+          <a:p>
+            <a:pPr algn="ctr" indent="0" marL="0">
+              <a:buNone/>
+            </a:pPr>
+            <a:r>
+              <a:rPr lang="en-US" sz="900" b="1" dirty="0">
+                <a:solidFill>
+                  <a:srgbClr val="9D174D"/>
+                </a:solidFill>
+                <a:latin typeface="Trebuchet MS" pitchFamily="34" charset="0"/>
+                <a:ea typeface="Trebuchet MS" pitchFamily="34" charset="-122"/>
+                <a:cs typeface="Trebuchet MS" pitchFamily="34" charset="-120"/>
+              </a:rPr>
+              <a:t>e</a:t>
+            </a:r>
+            <a:endParaRPr lang="en-US" sz="900" dirty="0"/>
+          </a:p>
+        </p:txBody>
+      </p:sp>
+      <p:sp>
+        <p:nvSpPr>
+          <p:cNvPr id="56" name="Shape 54"/>
+          <p:cNvSpPr/>
+          <p:nvPr/>
+        </p:nvSpPr>
+        <p:spPr>
+          <a:xfrm>
+            <a:off x="7178871" y="4169664"/>
+            <a:ext cx="603504" cy="384048"/>
+          </a:xfrm>
+          <a:prstGeom prst="rect">
+            <a:avLst>
+              <a:gd name="adj" fmla="val 9524"/>
+            </a:avLst>
+          </a:prstGeom>
+          <a:solidFill>
+            <a:srgbClr val="FFFFFF"/>
+          </a:solidFill>
+          <a:ln w="12700">
+            <a:solidFill>
+              <a:srgbClr val="DB2777"/>
+            </a:solidFill>
+            <a:prstDash val="solid"/>
+          </a:ln>
+        </p:spPr>
+      </p:sp>
+      <p:sp>
+        <p:nvSpPr>
+          <p:cNvPr id="57" name="Text 55"/>
+          <p:cNvSpPr/>
+          <p:nvPr/>
+        </p:nvSpPr>
+        <p:spPr>
+          <a:xfrm>
+            <a:off x="7178871" y="4169664"/>
+            <a:ext cx="603504" cy="384048"/>
+          </a:xfrm>
+          <a:prstGeom prst="rect">
+            <a:avLst/>
+          </a:prstGeom>
+          <a:noFill/>
+          <a:ln/>
+        </p:spPr>
+        <p:txBody>
+          <a:bodyPr wrap="square" lIns="0" tIns="0" rIns="0" bIns="0" rtlCol="0" anchor="ctr"/>
+          <a:lstStyle/>
+          <a:p>
+            <a:pPr algn="ctr" indent="0" marL="0">
+              <a:buNone/>
+            </a:pPr>
+            <a:r>
+              <a:rPr lang="en-US" sz="900" b="1" dirty="0">
+                <a:solidFill>
+                  <a:srgbClr val="9D174D"/>
+                </a:solidFill>
+                <a:latin typeface="Trebuchet MS" pitchFamily="34" charset="0"/>
+                <a:ea typeface="Trebuchet MS" pitchFamily="34" charset="-122"/>
+                <a:cs typeface="Trebuchet MS" pitchFamily="34" charset="-120"/>
+              </a:rPr>
+              <a:t>n</a:t>
+            </a:r>
+            <a:endParaRPr lang="en-US" sz="900" dirty="0"/>
+          </a:p>
+        </p:txBody>
+      </p:sp>
+      <p:sp>
+        <p:nvSpPr>
+          <p:cNvPr id="58" name="Shape 56"/>
+          <p:cNvSpPr/>
+          <p:nvPr/>
+        </p:nvSpPr>
+        <p:spPr>
+          <a:xfrm>
+            <a:off x="7832252" y="4169664"/>
+            <a:ext cx="603504" cy="384048"/>
+          </a:xfrm>
+          <a:prstGeom prst="rect">
+            <a:avLst>
+              <a:gd name="adj" fmla="val 9524"/>
+            </a:avLst>
+          </a:prstGeom>
+          <a:solidFill>
+            <a:srgbClr val="FFFFFF"/>
+          </a:solidFill>
+          <a:ln w="12700">
+            <a:solidFill>
+              <a:srgbClr val="DB2777"/>
+            </a:solidFill>
+            <a:prstDash val="solid"/>
+          </a:ln>
+        </p:spPr>
+      </p:sp>
+      <p:sp>
+        <p:nvSpPr>
+          <p:cNvPr id="59" name="Text 57"/>
+          <p:cNvSpPr/>
+          <p:nvPr/>
+        </p:nvSpPr>
+        <p:spPr>
+          <a:xfrm>
+            <a:off x="7832252" y="4169664"/>
+            <a:ext cx="603504" cy="384048"/>
+          </a:xfrm>
+          <a:prstGeom prst="rect">
+            <a:avLst/>
+          </a:prstGeom>
+          <a:noFill/>
+          <a:ln/>
+        </p:spPr>
+        <p:txBody>
+          <a:bodyPr wrap="square" lIns="0" tIns="0" rIns="0" bIns="0" rtlCol="0" anchor="ctr"/>
+          <a:lstStyle/>
+          <a:p>
+            <a:pPr algn="ctr" indent="0" marL="0">
+              <a:buNone/>
+            </a:pPr>
+            <a:r>
+              <a:rPr lang="en-US" sz="900" b="1" dirty="0">
+                <a:solidFill>
+                  <a:srgbClr val="9D174D"/>
+                </a:solidFill>
+                <a:latin typeface="Trebuchet MS" pitchFamily="34" charset="0"/>
+                <a:ea typeface="Trebuchet MS" pitchFamily="34" charset="-122"/>
+                <a:cs typeface="Trebuchet MS" pitchFamily="34" charset="-120"/>
+              </a:rPr>
+              <a:t>t</a:t>
             </a:r>
             <a:endParaRPr lang="en-US" sz="900" dirty="0"/>
           </a:p>
@@ -28112,7 +27608,7 @@
                 <a:ea typeface="Trebuchet MS" pitchFamily="34" charset="-122"/>
                 <a:cs typeface="Trebuchet MS" pitchFamily="34" charset="-120"/>
               </a:rPr>
-              <a:t>judgement</a:t>
+              <a:t>judgemental</a:t>
             </a:r>
             <a:endParaRPr lang="en-US" sz="2800" dirty="0"/>
           </a:p>
@@ -28939,7 +28435,7 @@
                 <a:ea typeface="Trebuchet MS" pitchFamily="34" charset="-122"/>
                 <a:cs typeface="Trebuchet MS" pitchFamily="34" charset="-120"/>
               </a:rPr>
-              <a:t>judgement</a:t>
+              <a:t>judgemental</a:t>
             </a:r>
             <a:endParaRPr lang="en-US" sz="2800" dirty="0"/>
           </a:p>
@@ -29019,7 +28515,7 @@
         </p:nvSpPr>
         <p:spPr>
           <a:xfrm>
-            <a:off x="2938272" y="2258568"/>
+            <a:off x="2221992" y="2258568"/>
             <a:ext cx="1828800" cy="292608"/>
           </a:xfrm>
           <a:prstGeom prst="rect">
@@ -29053,7 +28549,7 @@
         </p:nvSpPr>
         <p:spPr>
           <a:xfrm>
-            <a:off x="2938272" y="2258568"/>
+            <a:off x="2221992" y="2258568"/>
             <a:ext cx="1828800" cy="292608"/>
           </a:xfrm>
           <a:prstGeom prst="rect">
@@ -29092,7 +28588,7 @@
         </p:nvSpPr>
         <p:spPr>
           <a:xfrm>
-            <a:off x="2938272" y="2569464"/>
+            <a:off x="2221992" y="2569464"/>
             <a:ext cx="1828800" cy="201168"/>
           </a:xfrm>
           <a:prstGeom prst="rect">
@@ -29131,7 +28627,7 @@
         </p:nvSpPr>
         <p:spPr>
           <a:xfrm>
-            <a:off x="5803392" y="2258568"/>
+            <a:off x="4370832" y="2258568"/>
             <a:ext cx="1828800" cy="292608"/>
           </a:xfrm>
           <a:prstGeom prst="rect">
@@ -29165,7 +28661,7 @@
         </p:nvSpPr>
         <p:spPr>
           <a:xfrm>
-            <a:off x="5803392" y="2258568"/>
+            <a:off x="4370832" y="2258568"/>
             <a:ext cx="1828800" cy="292608"/>
           </a:xfrm>
           <a:prstGeom prst="rect">
@@ -29204,7 +28700,7 @@
         </p:nvSpPr>
         <p:spPr>
           <a:xfrm>
-            <a:off x="5803392" y="2569464"/>
+            <a:off x="4370832" y="2569464"/>
             <a:ext cx="1828800" cy="201168"/>
           </a:xfrm>
           <a:prstGeom prst="rect">
@@ -29243,6 +28739,118 @@
         </p:nvSpPr>
         <p:spPr>
           <a:xfrm>
+            <a:off x="6519672" y="2258568"/>
+            <a:ext cx="1828800" cy="292608"/>
+          </a:xfrm>
+          <a:prstGeom prst="rect">
+            <a:avLst>
+              <a:gd name="adj" fmla="val 25000"/>
+            </a:avLst>
+          </a:prstGeom>
+          <a:solidFill>
+            <a:srgbClr val="FCE7F3"/>
+          </a:solidFill>
+          <a:ln w="19050">
+            <a:solidFill>
+              <a:srgbClr val="DB2777"/>
+            </a:solidFill>
+            <a:prstDash val="solid"/>
+          </a:ln>
+          <a:effectLst>
+            <a:outerShdw sx="100000" sy="100000" kx="0" ky="0" algn="bl" rotWithShape="0" blurRad="101600" dist="38100" dir="8100000">
+              <a:srgbClr val="000000">
+                <a:alpha val="12000"/>
+              </a:srgbClr>
+            </a:outerShdw>
+          </a:effectLst>
+        </p:spPr>
+      </p:sp>
+      <p:sp>
+        <p:nvSpPr>
+          <p:cNvPr id="23" name="Text 21"/>
+          <p:cNvSpPr/>
+          <p:nvPr/>
+        </p:nvSpPr>
+        <p:spPr>
+          <a:xfrm>
+            <a:off x="6519672" y="2258568"/>
+            <a:ext cx="1828800" cy="292608"/>
+          </a:xfrm>
+          <a:prstGeom prst="rect">
+            <a:avLst/>
+          </a:prstGeom>
+          <a:noFill/>
+          <a:ln/>
+        </p:spPr>
+        <p:txBody>
+          <a:bodyPr wrap="square" lIns="0" tIns="0" rIns="0" bIns="0" rtlCol="0" anchor="ctr"/>
+          <a:lstStyle/>
+          <a:p>
+            <a:pPr algn="ctr" indent="0" marL="0">
+              <a:buNone/>
+            </a:pPr>
+            <a:r>
+              <a:rPr lang="en-US" sz="1300" b="1" dirty="0">
+                <a:solidFill>
+                  <a:srgbClr val="9D174D"/>
+                </a:solidFill>
+                <a:latin typeface="Trebuchet MS" pitchFamily="34" charset="0"/>
+                <a:ea typeface="Trebuchet MS" pitchFamily="34" charset="-122"/>
+                <a:cs typeface="Trebuchet MS" pitchFamily="34" charset="-120"/>
+              </a:rPr>
+              <a:t>al</a:t>
+            </a:r>
+            <a:endParaRPr lang="en-US" sz="1300" dirty="0"/>
+          </a:p>
+        </p:txBody>
+      </p:sp>
+      <p:sp>
+        <p:nvSpPr>
+          <p:cNvPr id="24" name="Text 22"/>
+          <p:cNvSpPr/>
+          <p:nvPr/>
+        </p:nvSpPr>
+        <p:spPr>
+          <a:xfrm>
+            <a:off x="6519672" y="2569464"/>
+            <a:ext cx="1828800" cy="201168"/>
+          </a:xfrm>
+          <a:prstGeom prst="rect">
+            <a:avLst/>
+          </a:prstGeom>
+          <a:noFill/>
+          <a:ln/>
+        </p:spPr>
+        <p:txBody>
+          <a:bodyPr wrap="square" lIns="0" tIns="0" rIns="0" bIns="0" rtlCol="0" anchor="t"/>
+          <a:lstStyle/>
+          <a:p>
+            <a:pPr algn="ctr" indent="0" marL="0">
+              <a:buNone/>
+            </a:pPr>
+            <a:r>
+              <a:rPr lang="en-US" sz="850" dirty="0">
+                <a:solidFill>
+                  <a:srgbClr val="475569"/>
+                </a:solidFill>
+                <a:latin typeface="Calibri" pitchFamily="34" charset="0"/>
+                <a:ea typeface="Calibri" pitchFamily="34" charset="-122"/>
+                <a:cs typeface="Calibri" pitchFamily="34" charset="-120"/>
+              </a:rPr>
+              <a:t>relating to</a:t>
+            </a:r>
+            <a:endParaRPr lang="en-US" sz="850" dirty="0"/>
+          </a:p>
+        </p:txBody>
+      </p:sp>
+      <p:sp>
+        <p:nvSpPr>
+          <p:cNvPr id="25" name="Shape 23"/>
+          <p:cNvSpPr/>
+          <p:nvPr/>
+        </p:nvSpPr>
+        <p:spPr>
+          <a:xfrm>
             <a:off x="365760" y="3273552"/>
             <a:ext cx="1371600" cy="658368"/>
           </a:xfrm>
@@ -29264,7 +28872,7 @@
       </p:sp>
       <p:sp>
         <p:nvSpPr>
-          <p:cNvPr id="23" name="Text 21"/>
+          <p:cNvPr id="26" name="Text 24"/>
           <p:cNvSpPr/>
           <p:nvPr/>
         </p:nvSpPr>
@@ -29303,7 +28911,7 @@
       </p:sp>
       <p:sp>
         <p:nvSpPr>
-          <p:cNvPr id="24" name="Shape 22"/>
+          <p:cNvPr id="27" name="Shape 25"/>
           <p:cNvSpPr/>
           <p:nvPr/>
         </p:nvSpPr>
@@ -29330,7 +28938,7 @@
       </p:sp>
       <p:sp>
         <p:nvSpPr>
-          <p:cNvPr id="25" name="Text 23"/>
+          <p:cNvPr id="28" name="Text 26"/>
           <p:cNvSpPr/>
           <p:nvPr/>
         </p:nvSpPr>
@@ -29369,7 +28977,7 @@
       </p:sp>
       <p:sp>
         <p:nvSpPr>
-          <p:cNvPr id="26" name="Shape 24"/>
+          <p:cNvPr id="29" name="Shape 27"/>
           <p:cNvSpPr/>
           <p:nvPr/>
         </p:nvSpPr>
@@ -29396,7 +29004,7 @@
       </p:sp>
       <p:sp>
         <p:nvSpPr>
-          <p:cNvPr id="27" name="Text 25"/>
+          <p:cNvPr id="30" name="Text 28"/>
           <p:cNvSpPr/>
           <p:nvPr/>
         </p:nvSpPr>
@@ -29435,7 +29043,7 @@
       </p:sp>
       <p:sp>
         <p:nvSpPr>
-          <p:cNvPr id="28" name="Shape 26"/>
+          <p:cNvPr id="31" name="Shape 29"/>
           <p:cNvSpPr/>
           <p:nvPr/>
         </p:nvSpPr>
@@ -29462,7 +29070,7 @@
       </p:sp>
       <p:sp>
         <p:nvSpPr>
-          <p:cNvPr id="29" name="Text 27"/>
+          <p:cNvPr id="32" name="Text 30"/>
           <p:cNvSpPr/>
           <p:nvPr/>
         </p:nvSpPr>
@@ -29924,7 +29532,7 @@
                 <a:ea typeface="Trebuchet MS" pitchFamily="34" charset="-122"/>
                 <a:cs typeface="Trebuchet MS" pitchFamily="34" charset="-120"/>
               </a:rPr>
-              <a:t>judgement</a:t>
+              <a:t>judgemental</a:t>
             </a:r>
             <a:endParaRPr lang="en-US" sz="2800" dirty="0"/>
           </a:p>
@@ -30004,7 +29612,7 @@
         </p:nvSpPr>
         <p:spPr>
           <a:xfrm>
-            <a:off x="2938272" y="2258568"/>
+            <a:off x="2221992" y="2258568"/>
             <a:ext cx="1828800" cy="292608"/>
           </a:xfrm>
           <a:prstGeom prst="rect">
@@ -30038,7 +29646,7 @@
         </p:nvSpPr>
         <p:spPr>
           <a:xfrm>
-            <a:off x="2938272" y="2258568"/>
+            <a:off x="2221992" y="2258568"/>
             <a:ext cx="1828800" cy="292608"/>
           </a:xfrm>
           <a:prstGeom prst="rect">
@@ -30077,7 +29685,7 @@
         </p:nvSpPr>
         <p:spPr>
           <a:xfrm>
-            <a:off x="2938272" y="2569464"/>
+            <a:off x="2221992" y="2569464"/>
             <a:ext cx="1828800" cy="201168"/>
           </a:xfrm>
           <a:prstGeom prst="rect">
@@ -30116,7 +29724,7 @@
         </p:nvSpPr>
         <p:spPr>
           <a:xfrm>
-            <a:off x="5803392" y="2258568"/>
+            <a:off x="4370832" y="2258568"/>
             <a:ext cx="1828800" cy="292608"/>
           </a:xfrm>
           <a:prstGeom prst="rect">
@@ -30150,7 +29758,7 @@
         </p:nvSpPr>
         <p:spPr>
           <a:xfrm>
-            <a:off x="5803392" y="2258568"/>
+            <a:off x="4370832" y="2258568"/>
             <a:ext cx="1828800" cy="292608"/>
           </a:xfrm>
           <a:prstGeom prst="rect">
@@ -30189,7 +29797,7 @@
         </p:nvSpPr>
         <p:spPr>
           <a:xfrm>
-            <a:off x="5803392" y="2569464"/>
+            <a:off x="4370832" y="2569464"/>
             <a:ext cx="1828800" cy="201168"/>
           </a:xfrm>
           <a:prstGeom prst="rect">
@@ -30228,6 +29836,118 @@
         </p:nvSpPr>
         <p:spPr>
           <a:xfrm>
+            <a:off x="6519672" y="2258568"/>
+            <a:ext cx="1828800" cy="292608"/>
+          </a:xfrm>
+          <a:prstGeom prst="rect">
+            <a:avLst>
+              <a:gd name="adj" fmla="val 25000"/>
+            </a:avLst>
+          </a:prstGeom>
+          <a:solidFill>
+            <a:srgbClr val="FCE7F3"/>
+          </a:solidFill>
+          <a:ln w="19050">
+            <a:solidFill>
+              <a:srgbClr val="DB2777"/>
+            </a:solidFill>
+            <a:prstDash val="solid"/>
+          </a:ln>
+          <a:effectLst>
+            <a:outerShdw sx="100000" sy="100000" kx="0" ky="0" algn="bl" rotWithShape="0" blurRad="101600" dist="38100" dir="8100000">
+              <a:srgbClr val="000000">
+                <a:alpha val="12000"/>
+              </a:srgbClr>
+            </a:outerShdw>
+          </a:effectLst>
+        </p:spPr>
+      </p:sp>
+      <p:sp>
+        <p:nvSpPr>
+          <p:cNvPr id="23" name="Text 21"/>
+          <p:cNvSpPr/>
+          <p:nvPr/>
+        </p:nvSpPr>
+        <p:spPr>
+          <a:xfrm>
+            <a:off x="6519672" y="2258568"/>
+            <a:ext cx="1828800" cy="292608"/>
+          </a:xfrm>
+          <a:prstGeom prst="rect">
+            <a:avLst/>
+          </a:prstGeom>
+          <a:noFill/>
+          <a:ln/>
+        </p:spPr>
+        <p:txBody>
+          <a:bodyPr wrap="square" lIns="0" tIns="0" rIns="0" bIns="0" rtlCol="0" anchor="ctr"/>
+          <a:lstStyle/>
+          <a:p>
+            <a:pPr algn="ctr" indent="0" marL="0">
+              <a:buNone/>
+            </a:pPr>
+            <a:r>
+              <a:rPr lang="en-US" sz="1300" b="1" dirty="0">
+                <a:solidFill>
+                  <a:srgbClr val="9D174D"/>
+                </a:solidFill>
+                <a:latin typeface="Trebuchet MS" pitchFamily="34" charset="0"/>
+                <a:ea typeface="Trebuchet MS" pitchFamily="34" charset="-122"/>
+                <a:cs typeface="Trebuchet MS" pitchFamily="34" charset="-120"/>
+              </a:rPr>
+              <a:t>al</a:t>
+            </a:r>
+            <a:endParaRPr lang="en-US" sz="1300" dirty="0"/>
+          </a:p>
+        </p:txBody>
+      </p:sp>
+      <p:sp>
+        <p:nvSpPr>
+          <p:cNvPr id="24" name="Text 22"/>
+          <p:cNvSpPr/>
+          <p:nvPr/>
+        </p:nvSpPr>
+        <p:spPr>
+          <a:xfrm>
+            <a:off x="6519672" y="2569464"/>
+            <a:ext cx="1828800" cy="201168"/>
+          </a:xfrm>
+          <a:prstGeom prst="rect">
+            <a:avLst/>
+          </a:prstGeom>
+          <a:noFill/>
+          <a:ln/>
+        </p:spPr>
+        <p:txBody>
+          <a:bodyPr wrap="square" lIns="0" tIns="0" rIns="0" bIns="0" rtlCol="0" anchor="t"/>
+          <a:lstStyle/>
+          <a:p>
+            <a:pPr algn="ctr" indent="0" marL="0">
+              <a:buNone/>
+            </a:pPr>
+            <a:r>
+              <a:rPr lang="en-US" sz="850" dirty="0">
+                <a:solidFill>
+                  <a:srgbClr val="475569"/>
+                </a:solidFill>
+                <a:latin typeface="Calibri" pitchFamily="34" charset="0"/>
+                <a:ea typeface="Calibri" pitchFamily="34" charset="-122"/>
+                <a:cs typeface="Calibri" pitchFamily="34" charset="-120"/>
+              </a:rPr>
+              <a:t>relating to</a:t>
+            </a:r>
+            <a:endParaRPr lang="en-US" sz="850" dirty="0"/>
+          </a:p>
+        </p:txBody>
+      </p:sp>
+      <p:sp>
+        <p:nvSpPr>
+          <p:cNvPr id="25" name="Shape 23"/>
+          <p:cNvSpPr/>
+          <p:nvPr/>
+        </p:nvSpPr>
+        <p:spPr>
+          <a:xfrm>
             <a:off x="365760" y="3273552"/>
             <a:ext cx="1371600" cy="658368"/>
           </a:xfrm>
@@ -30249,7 +29969,7 @@
       </p:sp>
       <p:sp>
         <p:nvSpPr>
-          <p:cNvPr id="23" name="Text 21"/>
+          <p:cNvPr id="26" name="Text 24"/>
           <p:cNvSpPr/>
           <p:nvPr/>
         </p:nvSpPr>
@@ -30288,7 +30008,7 @@
       </p:sp>
       <p:sp>
         <p:nvSpPr>
-          <p:cNvPr id="24" name="Shape 22"/>
+          <p:cNvPr id="27" name="Shape 25"/>
           <p:cNvSpPr/>
           <p:nvPr/>
         </p:nvSpPr>
@@ -30315,13 +30035,13 @@
       </p:sp>
       <p:sp>
         <p:nvSpPr>
-          <p:cNvPr id="25" name="Shape 23"/>
-          <p:cNvSpPr/>
-          <p:nvPr/>
-        </p:nvSpPr>
-        <p:spPr>
-          <a:xfrm>
-            <a:off x="2999232" y="3364992"/>
+          <p:cNvPr id="28" name="Shape 26"/>
+          <p:cNvSpPr/>
+          <p:nvPr/>
+        </p:nvSpPr>
+        <p:spPr>
+          <a:xfrm>
+            <a:off x="2313432" y="3364992"/>
             <a:ext cx="1645920" cy="475488"/>
           </a:xfrm>
           <a:prstGeom prst="rect">
@@ -30342,13 +30062,13 @@
       </p:sp>
       <p:sp>
         <p:nvSpPr>
-          <p:cNvPr id="26" name="Text 24"/>
-          <p:cNvSpPr/>
-          <p:nvPr/>
-        </p:nvSpPr>
-        <p:spPr>
-          <a:xfrm>
-            <a:off x="2999232" y="3364992"/>
+          <p:cNvPr id="29" name="Text 27"/>
+          <p:cNvSpPr/>
+          <p:nvPr/>
+        </p:nvSpPr>
+        <p:spPr>
+          <a:xfrm>
+            <a:off x="2313432" y="3364992"/>
             <a:ext cx="1645920" cy="475488"/>
           </a:xfrm>
           <a:prstGeom prst="rect">
@@ -30381,14 +30101,14 @@
       </p:sp>
       <p:sp>
         <p:nvSpPr>
-          <p:cNvPr id="27" name="Text 25"/>
-          <p:cNvSpPr/>
-          <p:nvPr/>
-        </p:nvSpPr>
-        <p:spPr>
-          <a:xfrm>
-            <a:off x="4645152" y="3364992"/>
-            <a:ext cx="1097280" cy="475488"/>
+          <p:cNvPr id="30" name="Text 28"/>
+          <p:cNvSpPr/>
+          <p:nvPr/>
+        </p:nvSpPr>
+        <p:spPr>
+          <a:xfrm>
+            <a:off x="3959352" y="3364992"/>
+            <a:ext cx="411480" cy="475488"/>
           </a:xfrm>
           <a:prstGeom prst="rect">
             <a:avLst/>
@@ -30420,13 +30140,13 @@
       </p:sp>
       <p:sp>
         <p:nvSpPr>
-          <p:cNvPr id="28" name="Shape 26"/>
-          <p:cNvSpPr/>
-          <p:nvPr/>
-        </p:nvSpPr>
-        <p:spPr>
-          <a:xfrm>
-            <a:off x="5742432" y="3364992"/>
+          <p:cNvPr id="31" name="Shape 29"/>
+          <p:cNvSpPr/>
+          <p:nvPr/>
+        </p:nvSpPr>
+        <p:spPr>
+          <a:xfrm>
+            <a:off x="4370832" y="3364992"/>
             <a:ext cx="1645920" cy="475488"/>
           </a:xfrm>
           <a:prstGeom prst="rect">
@@ -30447,13 +30167,13 @@
       </p:sp>
       <p:sp>
         <p:nvSpPr>
-          <p:cNvPr id="29" name="Text 27"/>
-          <p:cNvSpPr/>
-          <p:nvPr/>
-        </p:nvSpPr>
-        <p:spPr>
-          <a:xfrm>
-            <a:off x="5742432" y="3364992"/>
+          <p:cNvPr id="32" name="Text 30"/>
+          <p:cNvSpPr/>
+          <p:nvPr/>
+        </p:nvSpPr>
+        <p:spPr>
+          <a:xfrm>
+            <a:off x="4370832" y="3364992"/>
             <a:ext cx="1645920" cy="475488"/>
           </a:xfrm>
           <a:prstGeom prst="rect">
@@ -30478,7 +30198,7 @@
                 <a:ea typeface="Trebuchet MS" pitchFamily="34" charset="-122"/>
                 <a:cs typeface="Trebuchet MS" pitchFamily="34" charset="-120"/>
               </a:rPr>
-              <a:t>ment</a:t>
+              <a:t>men</a:t>
             </a:r>
             <a:endParaRPr lang="en-US" sz="1400" dirty="0"/>
           </a:p>
@@ -30486,7 +30206,112 @@
       </p:sp>
       <p:sp>
         <p:nvSpPr>
-          <p:cNvPr id="30" name="Shape 28"/>
+          <p:cNvPr id="33" name="Text 31"/>
+          <p:cNvSpPr/>
+          <p:nvPr/>
+        </p:nvSpPr>
+        <p:spPr>
+          <a:xfrm>
+            <a:off x="6016752" y="3364992"/>
+            <a:ext cx="411480" cy="475488"/>
+          </a:xfrm>
+          <a:prstGeom prst="rect">
+            <a:avLst/>
+          </a:prstGeom>
+          <a:noFill/>
+          <a:ln/>
+        </p:spPr>
+        <p:txBody>
+          <a:bodyPr wrap="square" lIns="0" tIns="0" rIns="0" bIns="0" rtlCol="0" anchor="ctr"/>
+          <a:lstStyle/>
+          <a:p>
+            <a:pPr algn="ctr" indent="0" marL="0">
+              <a:buNone/>
+            </a:pPr>
+            <a:r>
+              <a:rPr lang="en-US" sz="1600" b="1" dirty="0">
+                <a:solidFill>
+                  <a:srgbClr val="0D9488"/>
+                </a:solidFill>
+                <a:latin typeface="Trebuchet MS" pitchFamily="34" charset="0"/>
+                <a:ea typeface="Trebuchet MS" pitchFamily="34" charset="-122"/>
+                <a:cs typeface="Trebuchet MS" pitchFamily="34" charset="-120"/>
+              </a:rPr>
+              <a:t>·</a:t>
+            </a:r>
+            <a:endParaRPr lang="en-US" sz="1600" dirty="0"/>
+          </a:p>
+        </p:txBody>
+      </p:sp>
+      <p:sp>
+        <p:nvSpPr>
+          <p:cNvPr id="34" name="Shape 32"/>
+          <p:cNvSpPr/>
+          <p:nvPr/>
+        </p:nvSpPr>
+        <p:spPr>
+          <a:xfrm>
+            <a:off x="6428232" y="3364992"/>
+            <a:ext cx="1645920" cy="475488"/>
+          </a:xfrm>
+          <a:prstGeom prst="rect">
+            <a:avLst>
+              <a:gd name="adj" fmla="val 9615"/>
+            </a:avLst>
+          </a:prstGeom>
+          <a:solidFill>
+            <a:srgbClr val="FFFFFF"/>
+          </a:solidFill>
+          <a:ln w="12700">
+            <a:solidFill>
+              <a:srgbClr val="0D9488"/>
+            </a:solidFill>
+            <a:prstDash val="solid"/>
+          </a:ln>
+        </p:spPr>
+      </p:sp>
+      <p:sp>
+        <p:nvSpPr>
+          <p:cNvPr id="35" name="Text 33"/>
+          <p:cNvSpPr/>
+          <p:nvPr/>
+        </p:nvSpPr>
+        <p:spPr>
+          <a:xfrm>
+            <a:off x="6428232" y="3364992"/>
+            <a:ext cx="1645920" cy="475488"/>
+          </a:xfrm>
+          <a:prstGeom prst="rect">
+            <a:avLst/>
+          </a:prstGeom>
+          <a:noFill/>
+          <a:ln/>
+        </p:spPr>
+        <p:txBody>
+          <a:bodyPr wrap="square" lIns="0" tIns="0" rIns="0" bIns="0" rtlCol="0" anchor="ctr"/>
+          <a:lstStyle/>
+          <a:p>
+            <a:pPr algn="ctr" indent="0" marL="0">
+              <a:buNone/>
+            </a:pPr>
+            <a:r>
+              <a:rPr lang="en-US" sz="1400" b="1" dirty="0">
+                <a:solidFill>
+                  <a:srgbClr val="0D9488"/>
+                </a:solidFill>
+                <a:latin typeface="Trebuchet MS" pitchFamily="34" charset="0"/>
+                <a:ea typeface="Trebuchet MS" pitchFamily="34" charset="-122"/>
+                <a:cs typeface="Trebuchet MS" pitchFamily="34" charset="-120"/>
+              </a:rPr>
+              <a:t>tal</a:t>
+            </a:r>
+            <a:endParaRPr lang="en-US" sz="1400" dirty="0"/>
+          </a:p>
+        </p:txBody>
+      </p:sp>
+      <p:sp>
+        <p:nvSpPr>
+          <p:cNvPr id="36" name="Shape 34"/>
           <p:cNvSpPr/>
           <p:nvPr/>
         </p:nvSpPr>
@@ -30513,7 +30338,7 @@
       </p:sp>
       <p:sp>
         <p:nvSpPr>
-          <p:cNvPr id="31" name="Text 29"/>
+          <p:cNvPr id="37" name="Text 35"/>
           <p:cNvSpPr/>
           <p:nvPr/>
         </p:nvSpPr>
@@ -30552,7 +30377,7 @@
       </p:sp>
       <p:sp>
         <p:nvSpPr>
-          <p:cNvPr id="32" name="Shape 30"/>
+          <p:cNvPr id="38" name="Shape 36"/>
           <p:cNvSpPr/>
           <p:nvPr/>
         </p:nvSpPr>
@@ -30579,7 +30404,7 @@
       </p:sp>
       <p:sp>
         <p:nvSpPr>
-          <p:cNvPr id="33" name="Text 31"/>
+          <p:cNvPr id="39" name="Text 37"/>
           <p:cNvSpPr/>
           <p:nvPr/>
         </p:nvSpPr>
@@ -31041,7 +30866,7 @@
                 <a:ea typeface="Trebuchet MS" pitchFamily="34" charset="-122"/>
                 <a:cs typeface="Trebuchet MS" pitchFamily="34" charset="-120"/>
               </a:rPr>
-              <a:t>judgement</a:t>
+              <a:t>judgemental</a:t>
             </a:r>
             <a:endParaRPr lang="en-US" sz="2800" dirty="0"/>
           </a:p>
@@ -31121,7 +30946,7 @@
         </p:nvSpPr>
         <p:spPr>
           <a:xfrm>
-            <a:off x="2938272" y="2258568"/>
+            <a:off x="2221992" y="2258568"/>
             <a:ext cx="1828800" cy="292608"/>
           </a:xfrm>
           <a:prstGeom prst="rect">
@@ -31155,7 +30980,7 @@
         </p:nvSpPr>
         <p:spPr>
           <a:xfrm>
-            <a:off x="2938272" y="2258568"/>
+            <a:off x="2221992" y="2258568"/>
             <a:ext cx="1828800" cy="292608"/>
           </a:xfrm>
           <a:prstGeom prst="rect">
@@ -31194,7 +31019,7 @@
         </p:nvSpPr>
         <p:spPr>
           <a:xfrm>
-            <a:off x="2938272" y="2569464"/>
+            <a:off x="2221992" y="2569464"/>
             <a:ext cx="1828800" cy="201168"/>
           </a:xfrm>
           <a:prstGeom prst="rect">
@@ -31233,7 +31058,7 @@
         </p:nvSpPr>
         <p:spPr>
           <a:xfrm>
-            <a:off x="5803392" y="2258568"/>
+            <a:off x="4370832" y="2258568"/>
             <a:ext cx="1828800" cy="292608"/>
           </a:xfrm>
           <a:prstGeom prst="rect">
@@ -31267,7 +31092,7 @@
         </p:nvSpPr>
         <p:spPr>
           <a:xfrm>
-            <a:off x="5803392" y="2258568"/>
+            <a:off x="4370832" y="2258568"/>
             <a:ext cx="1828800" cy="292608"/>
           </a:xfrm>
           <a:prstGeom prst="rect">
@@ -31306,7 +31131,7 @@
         </p:nvSpPr>
         <p:spPr>
           <a:xfrm>
-            <a:off x="5803392" y="2569464"/>
+            <a:off x="4370832" y="2569464"/>
             <a:ext cx="1828800" cy="201168"/>
           </a:xfrm>
           <a:prstGeom prst="rect">
@@ -31345,6 +31170,118 @@
         </p:nvSpPr>
         <p:spPr>
           <a:xfrm>
+            <a:off x="6519672" y="2258568"/>
+            <a:ext cx="1828800" cy="292608"/>
+          </a:xfrm>
+          <a:prstGeom prst="rect">
+            <a:avLst>
+              <a:gd name="adj" fmla="val 25000"/>
+            </a:avLst>
+          </a:prstGeom>
+          <a:solidFill>
+            <a:srgbClr val="FCE7F3"/>
+          </a:solidFill>
+          <a:ln w="19050">
+            <a:solidFill>
+              <a:srgbClr val="DB2777"/>
+            </a:solidFill>
+            <a:prstDash val="solid"/>
+          </a:ln>
+          <a:effectLst>
+            <a:outerShdw sx="100000" sy="100000" kx="0" ky="0" algn="bl" rotWithShape="0" blurRad="101600" dist="38100" dir="8100000">
+              <a:srgbClr val="000000">
+                <a:alpha val="12000"/>
+              </a:srgbClr>
+            </a:outerShdw>
+          </a:effectLst>
+        </p:spPr>
+      </p:sp>
+      <p:sp>
+        <p:nvSpPr>
+          <p:cNvPr id="23" name="Text 21"/>
+          <p:cNvSpPr/>
+          <p:nvPr/>
+        </p:nvSpPr>
+        <p:spPr>
+          <a:xfrm>
+            <a:off x="6519672" y="2258568"/>
+            <a:ext cx="1828800" cy="292608"/>
+          </a:xfrm>
+          <a:prstGeom prst="rect">
+            <a:avLst/>
+          </a:prstGeom>
+          <a:noFill/>
+          <a:ln/>
+        </p:spPr>
+        <p:txBody>
+          <a:bodyPr wrap="square" lIns="0" tIns="0" rIns="0" bIns="0" rtlCol="0" anchor="ctr"/>
+          <a:lstStyle/>
+          <a:p>
+            <a:pPr algn="ctr" indent="0" marL="0">
+              <a:buNone/>
+            </a:pPr>
+            <a:r>
+              <a:rPr lang="en-US" sz="1300" b="1" dirty="0">
+                <a:solidFill>
+                  <a:srgbClr val="9D174D"/>
+                </a:solidFill>
+                <a:latin typeface="Trebuchet MS" pitchFamily="34" charset="0"/>
+                <a:ea typeface="Trebuchet MS" pitchFamily="34" charset="-122"/>
+                <a:cs typeface="Trebuchet MS" pitchFamily="34" charset="-120"/>
+              </a:rPr>
+              <a:t>al</a:t>
+            </a:r>
+            <a:endParaRPr lang="en-US" sz="1300" dirty="0"/>
+          </a:p>
+        </p:txBody>
+      </p:sp>
+      <p:sp>
+        <p:nvSpPr>
+          <p:cNvPr id="24" name="Text 22"/>
+          <p:cNvSpPr/>
+          <p:nvPr/>
+        </p:nvSpPr>
+        <p:spPr>
+          <a:xfrm>
+            <a:off x="6519672" y="2569464"/>
+            <a:ext cx="1828800" cy="201168"/>
+          </a:xfrm>
+          <a:prstGeom prst="rect">
+            <a:avLst/>
+          </a:prstGeom>
+          <a:noFill/>
+          <a:ln/>
+        </p:spPr>
+        <p:txBody>
+          <a:bodyPr wrap="square" lIns="0" tIns="0" rIns="0" bIns="0" rtlCol="0" anchor="t"/>
+          <a:lstStyle/>
+          <a:p>
+            <a:pPr algn="ctr" indent="0" marL="0">
+              <a:buNone/>
+            </a:pPr>
+            <a:r>
+              <a:rPr lang="en-US" sz="850" dirty="0">
+                <a:solidFill>
+                  <a:srgbClr val="475569"/>
+                </a:solidFill>
+                <a:latin typeface="Calibri" pitchFamily="34" charset="0"/>
+                <a:ea typeface="Calibri" pitchFamily="34" charset="-122"/>
+                <a:cs typeface="Calibri" pitchFamily="34" charset="-120"/>
+              </a:rPr>
+              <a:t>relating to</a:t>
+            </a:r>
+            <a:endParaRPr lang="en-US" sz="850" dirty="0"/>
+          </a:p>
+        </p:txBody>
+      </p:sp>
+      <p:sp>
+        <p:nvSpPr>
+          <p:cNvPr id="25" name="Shape 23"/>
+          <p:cNvSpPr/>
+          <p:nvPr/>
+        </p:nvSpPr>
+        <p:spPr>
+          <a:xfrm>
             <a:off x="365760" y="3273552"/>
             <a:ext cx="1371600" cy="658368"/>
           </a:xfrm>
@@ -31366,7 +31303,7 @@
       </p:sp>
       <p:sp>
         <p:nvSpPr>
-          <p:cNvPr id="23" name="Text 21"/>
+          <p:cNvPr id="26" name="Text 24"/>
           <p:cNvSpPr/>
           <p:nvPr/>
         </p:nvSpPr>
@@ -31405,7 +31342,7 @@
       </p:sp>
       <p:sp>
         <p:nvSpPr>
-          <p:cNvPr id="24" name="Shape 22"/>
+          <p:cNvPr id="27" name="Shape 25"/>
           <p:cNvSpPr/>
           <p:nvPr/>
         </p:nvSpPr>
@@ -31432,13 +31369,13 @@
       </p:sp>
       <p:sp>
         <p:nvSpPr>
-          <p:cNvPr id="25" name="Shape 23"/>
-          <p:cNvSpPr/>
-          <p:nvPr/>
-        </p:nvSpPr>
-        <p:spPr>
-          <a:xfrm>
-            <a:off x="2999232" y="3364992"/>
+          <p:cNvPr id="28" name="Shape 26"/>
+          <p:cNvSpPr/>
+          <p:nvPr/>
+        </p:nvSpPr>
+        <p:spPr>
+          <a:xfrm>
+            <a:off x="2313432" y="3364992"/>
             <a:ext cx="1645920" cy="475488"/>
           </a:xfrm>
           <a:prstGeom prst="rect">
@@ -31459,13 +31396,13 @@
       </p:sp>
       <p:sp>
         <p:nvSpPr>
-          <p:cNvPr id="26" name="Text 24"/>
-          <p:cNvSpPr/>
-          <p:nvPr/>
-        </p:nvSpPr>
-        <p:spPr>
-          <a:xfrm>
-            <a:off x="2999232" y="3364992"/>
+          <p:cNvPr id="29" name="Text 27"/>
+          <p:cNvSpPr/>
+          <p:nvPr/>
+        </p:nvSpPr>
+        <p:spPr>
+          <a:xfrm>
+            <a:off x="2313432" y="3364992"/>
             <a:ext cx="1645920" cy="475488"/>
           </a:xfrm>
           <a:prstGeom prst="rect">
@@ -31498,14 +31435,14 @@
       </p:sp>
       <p:sp>
         <p:nvSpPr>
-          <p:cNvPr id="27" name="Text 25"/>
-          <p:cNvSpPr/>
-          <p:nvPr/>
-        </p:nvSpPr>
-        <p:spPr>
-          <a:xfrm>
-            <a:off x="4645152" y="3364992"/>
-            <a:ext cx="1097280" cy="475488"/>
+          <p:cNvPr id="30" name="Text 28"/>
+          <p:cNvSpPr/>
+          <p:nvPr/>
+        </p:nvSpPr>
+        <p:spPr>
+          <a:xfrm>
+            <a:off x="3959352" y="3364992"/>
+            <a:ext cx="411480" cy="475488"/>
           </a:xfrm>
           <a:prstGeom prst="rect">
             <a:avLst/>
@@ -31537,13 +31474,13 @@
       </p:sp>
       <p:sp>
         <p:nvSpPr>
-          <p:cNvPr id="28" name="Shape 26"/>
-          <p:cNvSpPr/>
-          <p:nvPr/>
-        </p:nvSpPr>
-        <p:spPr>
-          <a:xfrm>
-            <a:off x="5742432" y="3364992"/>
+          <p:cNvPr id="31" name="Shape 29"/>
+          <p:cNvSpPr/>
+          <p:nvPr/>
+        </p:nvSpPr>
+        <p:spPr>
+          <a:xfrm>
+            <a:off x="4370832" y="3364992"/>
             <a:ext cx="1645920" cy="475488"/>
           </a:xfrm>
           <a:prstGeom prst="rect">
@@ -31564,13 +31501,13 @@
       </p:sp>
       <p:sp>
         <p:nvSpPr>
-          <p:cNvPr id="29" name="Text 27"/>
-          <p:cNvSpPr/>
-          <p:nvPr/>
-        </p:nvSpPr>
-        <p:spPr>
-          <a:xfrm>
-            <a:off x="5742432" y="3364992"/>
+          <p:cNvPr id="32" name="Text 30"/>
+          <p:cNvSpPr/>
+          <p:nvPr/>
+        </p:nvSpPr>
+        <p:spPr>
+          <a:xfrm>
+            <a:off x="4370832" y="3364992"/>
             <a:ext cx="1645920" cy="475488"/>
           </a:xfrm>
           <a:prstGeom prst="rect">
@@ -31595,7 +31532,7 @@
                 <a:ea typeface="Trebuchet MS" pitchFamily="34" charset="-122"/>
                 <a:cs typeface="Trebuchet MS" pitchFamily="34" charset="-120"/>
               </a:rPr>
-              <a:t>ment</a:t>
+              <a:t>men</a:t>
             </a:r>
             <a:endParaRPr lang="en-US" sz="1400" dirty="0"/>
           </a:p>
@@ -31603,7 +31540,112 @@
       </p:sp>
       <p:sp>
         <p:nvSpPr>
-          <p:cNvPr id="30" name="Shape 28"/>
+          <p:cNvPr id="33" name="Text 31"/>
+          <p:cNvSpPr/>
+          <p:nvPr/>
+        </p:nvSpPr>
+        <p:spPr>
+          <a:xfrm>
+            <a:off x="6016752" y="3364992"/>
+            <a:ext cx="411480" cy="475488"/>
+          </a:xfrm>
+          <a:prstGeom prst="rect">
+            <a:avLst/>
+          </a:prstGeom>
+          <a:noFill/>
+          <a:ln/>
+        </p:spPr>
+        <p:txBody>
+          <a:bodyPr wrap="square" lIns="0" tIns="0" rIns="0" bIns="0" rtlCol="0" anchor="ctr"/>
+          <a:lstStyle/>
+          <a:p>
+            <a:pPr algn="ctr" indent="0" marL="0">
+              <a:buNone/>
+            </a:pPr>
+            <a:r>
+              <a:rPr lang="en-US" sz="1600" b="1" dirty="0">
+                <a:solidFill>
+                  <a:srgbClr val="0D9488"/>
+                </a:solidFill>
+                <a:latin typeface="Trebuchet MS" pitchFamily="34" charset="0"/>
+                <a:ea typeface="Trebuchet MS" pitchFamily="34" charset="-122"/>
+                <a:cs typeface="Trebuchet MS" pitchFamily="34" charset="-120"/>
+              </a:rPr>
+              <a:t>·</a:t>
+            </a:r>
+            <a:endParaRPr lang="en-US" sz="1600" dirty="0"/>
+          </a:p>
+        </p:txBody>
+      </p:sp>
+      <p:sp>
+        <p:nvSpPr>
+          <p:cNvPr id="34" name="Shape 32"/>
+          <p:cNvSpPr/>
+          <p:nvPr/>
+        </p:nvSpPr>
+        <p:spPr>
+          <a:xfrm>
+            <a:off x="6428232" y="3364992"/>
+            <a:ext cx="1645920" cy="475488"/>
+          </a:xfrm>
+          <a:prstGeom prst="rect">
+            <a:avLst>
+              <a:gd name="adj" fmla="val 9615"/>
+            </a:avLst>
+          </a:prstGeom>
+          <a:solidFill>
+            <a:srgbClr val="FFFFFF"/>
+          </a:solidFill>
+          <a:ln w="12700">
+            <a:solidFill>
+              <a:srgbClr val="0D9488"/>
+            </a:solidFill>
+            <a:prstDash val="solid"/>
+          </a:ln>
+        </p:spPr>
+      </p:sp>
+      <p:sp>
+        <p:nvSpPr>
+          <p:cNvPr id="35" name="Text 33"/>
+          <p:cNvSpPr/>
+          <p:nvPr/>
+        </p:nvSpPr>
+        <p:spPr>
+          <a:xfrm>
+            <a:off x="6428232" y="3364992"/>
+            <a:ext cx="1645920" cy="475488"/>
+          </a:xfrm>
+          <a:prstGeom prst="rect">
+            <a:avLst/>
+          </a:prstGeom>
+          <a:noFill/>
+          <a:ln/>
+        </p:spPr>
+        <p:txBody>
+          <a:bodyPr wrap="square" lIns="0" tIns="0" rIns="0" bIns="0" rtlCol="0" anchor="ctr"/>
+          <a:lstStyle/>
+          <a:p>
+            <a:pPr algn="ctr" indent="0" marL="0">
+              <a:buNone/>
+            </a:pPr>
+            <a:r>
+              <a:rPr lang="en-US" sz="1400" b="1" dirty="0">
+                <a:solidFill>
+                  <a:srgbClr val="0D9488"/>
+                </a:solidFill>
+                <a:latin typeface="Trebuchet MS" pitchFamily="34" charset="0"/>
+                <a:ea typeface="Trebuchet MS" pitchFamily="34" charset="-122"/>
+                <a:cs typeface="Trebuchet MS" pitchFamily="34" charset="-120"/>
+              </a:rPr>
+              <a:t>tal</a:t>
+            </a:r>
+            <a:endParaRPr lang="en-US" sz="1400" dirty="0"/>
+          </a:p>
+        </p:txBody>
+      </p:sp>
+      <p:sp>
+        <p:nvSpPr>
+          <p:cNvPr id="36" name="Shape 34"/>
           <p:cNvSpPr/>
           <p:nvPr/>
         </p:nvSpPr>
@@ -31630,7 +31672,7 @@
       </p:sp>
       <p:sp>
         <p:nvSpPr>
-          <p:cNvPr id="31" name="Text 29"/>
+          <p:cNvPr id="37" name="Text 35"/>
           <p:cNvSpPr/>
           <p:nvPr/>
         </p:nvSpPr>
@@ -31669,7 +31711,7 @@
       </p:sp>
       <p:sp>
         <p:nvSpPr>
-          <p:cNvPr id="32" name="Shape 30"/>
+          <p:cNvPr id="38" name="Shape 36"/>
           <p:cNvSpPr/>
           <p:nvPr/>
         </p:nvSpPr>
@@ -31696,14 +31738,14 @@
       </p:sp>
       <p:sp>
         <p:nvSpPr>
-          <p:cNvPr id="33" name="Shape 31"/>
-          <p:cNvSpPr/>
-          <p:nvPr/>
-        </p:nvSpPr>
-        <p:spPr>
-          <a:xfrm>
-            <a:off x="2124837" y="4169664"/>
-            <a:ext cx="685800" cy="384048"/>
+          <p:cNvPr id="39" name="Shape 37"/>
+          <p:cNvSpPr/>
+          <p:nvPr/>
+        </p:nvSpPr>
+        <p:spPr>
+          <a:xfrm>
+            <a:off x="1951330" y="4169664"/>
+            <a:ext cx="676656" cy="384048"/>
           </a:xfrm>
           <a:prstGeom prst="rect">
             <a:avLst>
@@ -31723,14 +31765,14 @@
       </p:sp>
       <p:sp>
         <p:nvSpPr>
-          <p:cNvPr id="34" name="Text 32"/>
-          <p:cNvSpPr/>
-          <p:nvPr/>
-        </p:nvSpPr>
-        <p:spPr>
-          <a:xfrm>
-            <a:off x="2124837" y="4169664"/>
-            <a:ext cx="685800" cy="384048"/>
+          <p:cNvPr id="40" name="Text 38"/>
+          <p:cNvSpPr/>
+          <p:nvPr/>
+        </p:nvSpPr>
+        <p:spPr>
+          <a:xfrm>
+            <a:off x="1951330" y="4169664"/>
+            <a:ext cx="676656" cy="384048"/>
           </a:xfrm>
           <a:prstGeom prst="rect">
             <a:avLst/>
@@ -31762,14 +31804,14 @@
       </p:sp>
       <p:sp>
         <p:nvSpPr>
-          <p:cNvPr id="35" name="Shape 33"/>
-          <p:cNvSpPr/>
-          <p:nvPr/>
-        </p:nvSpPr>
-        <p:spPr>
-          <a:xfrm>
-            <a:off x="3033522" y="4169664"/>
-            <a:ext cx="685800" cy="384048"/>
+          <p:cNvPr id="41" name="Shape 39"/>
+          <p:cNvSpPr/>
+          <p:nvPr/>
+        </p:nvSpPr>
+        <p:spPr>
+          <a:xfrm>
+            <a:off x="2677363" y="4169664"/>
+            <a:ext cx="676656" cy="384048"/>
           </a:xfrm>
           <a:prstGeom prst="rect">
             <a:avLst>
@@ -31789,14 +31831,14 @@
       </p:sp>
       <p:sp>
         <p:nvSpPr>
-          <p:cNvPr id="36" name="Text 34"/>
-          <p:cNvSpPr/>
-          <p:nvPr/>
-        </p:nvSpPr>
-        <p:spPr>
-          <a:xfrm>
-            <a:off x="3033522" y="4169664"/>
-            <a:ext cx="685800" cy="384048"/>
+          <p:cNvPr id="42" name="Text 40"/>
+          <p:cNvSpPr/>
+          <p:nvPr/>
+        </p:nvSpPr>
+        <p:spPr>
+          <a:xfrm>
+            <a:off x="2677363" y="4169664"/>
+            <a:ext cx="676656" cy="384048"/>
           </a:xfrm>
           <a:prstGeom prst="rect">
             <a:avLst/>
@@ -31828,14 +31870,14 @@
       </p:sp>
       <p:sp>
         <p:nvSpPr>
-          <p:cNvPr id="37" name="Shape 35"/>
-          <p:cNvSpPr/>
-          <p:nvPr/>
-        </p:nvSpPr>
-        <p:spPr>
-          <a:xfrm>
-            <a:off x="3942207" y="4169664"/>
-            <a:ext cx="685800" cy="384048"/>
+          <p:cNvPr id="43" name="Shape 41"/>
+          <p:cNvSpPr/>
+          <p:nvPr/>
+        </p:nvSpPr>
+        <p:spPr>
+          <a:xfrm>
+            <a:off x="3403397" y="4169664"/>
+            <a:ext cx="676656" cy="384048"/>
           </a:xfrm>
           <a:prstGeom prst="rect">
             <a:avLst>
@@ -31855,14 +31897,14 @@
       </p:sp>
       <p:sp>
         <p:nvSpPr>
-          <p:cNvPr id="38" name="Text 36"/>
-          <p:cNvSpPr/>
-          <p:nvPr/>
-        </p:nvSpPr>
-        <p:spPr>
-          <a:xfrm>
-            <a:off x="3942207" y="4169664"/>
-            <a:ext cx="685800" cy="384048"/>
+          <p:cNvPr id="44" name="Text 42"/>
+          <p:cNvSpPr/>
+          <p:nvPr/>
+        </p:nvSpPr>
+        <p:spPr>
+          <a:xfrm>
+            <a:off x="3403397" y="4169664"/>
+            <a:ext cx="676656" cy="384048"/>
           </a:xfrm>
           <a:prstGeom prst="rect">
             <a:avLst/>
@@ -31894,14 +31936,14 @@
       </p:sp>
       <p:sp>
         <p:nvSpPr>
-          <p:cNvPr id="39" name="Text 37"/>
-          <p:cNvSpPr/>
-          <p:nvPr/>
-        </p:nvSpPr>
-        <p:spPr>
-          <a:xfrm>
-            <a:off x="3942207" y="4572000"/>
-            <a:ext cx="685800" cy="219456"/>
+          <p:cNvPr id="45" name="Text 43"/>
+          <p:cNvSpPr/>
+          <p:nvPr/>
+        </p:nvSpPr>
+        <p:spPr>
+          <a:xfrm>
+            <a:off x="3403397" y="4572000"/>
+            <a:ext cx="676656" cy="219456"/>
           </a:xfrm>
           <a:prstGeom prst="rect">
             <a:avLst/>
@@ -31933,14 +31975,14 @@
       </p:sp>
       <p:sp>
         <p:nvSpPr>
-          <p:cNvPr id="40" name="Shape 38"/>
-          <p:cNvSpPr/>
-          <p:nvPr/>
-        </p:nvSpPr>
-        <p:spPr>
-          <a:xfrm>
-            <a:off x="4850892" y="4169664"/>
-            <a:ext cx="685800" cy="384048"/>
+          <p:cNvPr id="46" name="Shape 44"/>
+          <p:cNvSpPr/>
+          <p:nvPr/>
+        </p:nvSpPr>
+        <p:spPr>
+          <a:xfrm>
+            <a:off x="4129430" y="4169664"/>
+            <a:ext cx="676656" cy="384048"/>
           </a:xfrm>
           <a:prstGeom prst="rect">
             <a:avLst>
@@ -31960,14 +32002,14 @@
       </p:sp>
       <p:sp>
         <p:nvSpPr>
-          <p:cNvPr id="41" name="Text 39"/>
-          <p:cNvSpPr/>
-          <p:nvPr/>
-        </p:nvSpPr>
-        <p:spPr>
-          <a:xfrm>
-            <a:off x="4850892" y="4169664"/>
-            <a:ext cx="685800" cy="384048"/>
+          <p:cNvPr id="47" name="Text 45"/>
+          <p:cNvSpPr/>
+          <p:nvPr/>
+        </p:nvSpPr>
+        <p:spPr>
+          <a:xfrm>
+            <a:off x="4129430" y="4169664"/>
+            <a:ext cx="676656" cy="384048"/>
           </a:xfrm>
           <a:prstGeom prst="rect">
             <a:avLst/>
@@ -31999,14 +32041,14 @@
       </p:sp>
       <p:sp>
         <p:nvSpPr>
-          <p:cNvPr id="42" name="Shape 40"/>
-          <p:cNvSpPr/>
-          <p:nvPr/>
-        </p:nvSpPr>
-        <p:spPr>
-          <a:xfrm>
-            <a:off x="5759577" y="4169664"/>
-            <a:ext cx="685800" cy="384048"/>
+          <p:cNvPr id="48" name="Shape 46"/>
+          <p:cNvSpPr/>
+          <p:nvPr/>
+        </p:nvSpPr>
+        <p:spPr>
+          <a:xfrm>
+            <a:off x="4855464" y="4169664"/>
+            <a:ext cx="676656" cy="384048"/>
           </a:xfrm>
           <a:prstGeom prst="rect">
             <a:avLst>
@@ -32026,14 +32068,14 @@
       </p:sp>
       <p:sp>
         <p:nvSpPr>
-          <p:cNvPr id="43" name="Text 41"/>
-          <p:cNvSpPr/>
-          <p:nvPr/>
-        </p:nvSpPr>
-        <p:spPr>
-          <a:xfrm>
-            <a:off x="5759577" y="4169664"/>
-            <a:ext cx="685800" cy="384048"/>
+          <p:cNvPr id="49" name="Text 47"/>
+          <p:cNvSpPr/>
+          <p:nvPr/>
+        </p:nvSpPr>
+        <p:spPr>
+          <a:xfrm>
+            <a:off x="4855464" y="4169664"/>
+            <a:ext cx="676656" cy="384048"/>
           </a:xfrm>
           <a:prstGeom prst="rect">
             <a:avLst/>
@@ -32065,14 +32107,14 @@
       </p:sp>
       <p:sp>
         <p:nvSpPr>
-          <p:cNvPr id="44" name="Shape 42"/>
-          <p:cNvSpPr/>
-          <p:nvPr/>
-        </p:nvSpPr>
-        <p:spPr>
-          <a:xfrm>
-            <a:off x="6668262" y="4169664"/>
-            <a:ext cx="685800" cy="384048"/>
+          <p:cNvPr id="50" name="Shape 48"/>
+          <p:cNvSpPr/>
+          <p:nvPr/>
+        </p:nvSpPr>
+        <p:spPr>
+          <a:xfrm>
+            <a:off x="5581498" y="4169664"/>
+            <a:ext cx="676656" cy="384048"/>
           </a:xfrm>
           <a:prstGeom prst="rect">
             <a:avLst>
@@ -32092,14 +32134,14 @@
       </p:sp>
       <p:sp>
         <p:nvSpPr>
-          <p:cNvPr id="45" name="Text 43"/>
-          <p:cNvSpPr/>
-          <p:nvPr/>
-        </p:nvSpPr>
-        <p:spPr>
-          <a:xfrm>
-            <a:off x="6668262" y="4169664"/>
-            <a:ext cx="685800" cy="384048"/>
+          <p:cNvPr id="51" name="Text 49"/>
+          <p:cNvSpPr/>
+          <p:nvPr/>
+        </p:nvSpPr>
+        <p:spPr>
+          <a:xfrm>
+            <a:off x="5581498" y="4169664"/>
+            <a:ext cx="676656" cy="384048"/>
           </a:xfrm>
           <a:prstGeom prst="rect">
             <a:avLst/>
@@ -32131,14 +32173,14 @@
       </p:sp>
       <p:sp>
         <p:nvSpPr>
-          <p:cNvPr id="46" name="Shape 44"/>
-          <p:cNvSpPr/>
-          <p:nvPr/>
-        </p:nvSpPr>
-        <p:spPr>
-          <a:xfrm>
-            <a:off x="7576947" y="4169664"/>
-            <a:ext cx="685800" cy="384048"/>
+          <p:cNvPr id="52" name="Shape 50"/>
+          <p:cNvSpPr/>
+          <p:nvPr/>
+        </p:nvSpPr>
+        <p:spPr>
+          <a:xfrm>
+            <a:off x="6307531" y="4169664"/>
+            <a:ext cx="676656" cy="384048"/>
           </a:xfrm>
           <a:prstGeom prst="rect">
             <a:avLst>
@@ -32158,14 +32200,14 @@
       </p:sp>
       <p:sp>
         <p:nvSpPr>
-          <p:cNvPr id="47" name="Text 45"/>
-          <p:cNvSpPr/>
-          <p:nvPr/>
-        </p:nvSpPr>
-        <p:spPr>
-          <a:xfrm>
-            <a:off x="7576947" y="4169664"/>
-            <a:ext cx="685800" cy="384048"/>
+          <p:cNvPr id="53" name="Text 51"/>
+          <p:cNvSpPr/>
+          <p:nvPr/>
+        </p:nvSpPr>
+        <p:spPr>
+          <a:xfrm>
+            <a:off x="6307531" y="4169664"/>
+            <a:ext cx="676656" cy="384048"/>
           </a:xfrm>
           <a:prstGeom prst="rect">
             <a:avLst/>
@@ -32190,6 +32232,138 @@
                 <a:cs typeface="Trebuchet MS" pitchFamily="34" charset="-120"/>
               </a:rPr>
               <a:t>t</a:t>
+            </a:r>
+            <a:endParaRPr lang="en-US" sz="900" dirty="0"/>
+          </a:p>
+        </p:txBody>
+      </p:sp>
+      <p:sp>
+        <p:nvSpPr>
+          <p:cNvPr id="54" name="Shape 52"/>
+          <p:cNvSpPr/>
+          <p:nvPr/>
+        </p:nvSpPr>
+        <p:spPr>
+          <a:xfrm>
+            <a:off x="7033565" y="4169664"/>
+            <a:ext cx="676656" cy="384048"/>
+          </a:xfrm>
+          <a:prstGeom prst="rect">
+            <a:avLst>
+              <a:gd name="adj" fmla="val 9524"/>
+            </a:avLst>
+          </a:prstGeom>
+          <a:solidFill>
+            <a:srgbClr val="FFFFFF"/>
+          </a:solidFill>
+          <a:ln w="12700">
+            <a:solidFill>
+              <a:srgbClr val="DB2777"/>
+            </a:solidFill>
+            <a:prstDash val="solid"/>
+          </a:ln>
+        </p:spPr>
+      </p:sp>
+      <p:sp>
+        <p:nvSpPr>
+          <p:cNvPr id="55" name="Text 53"/>
+          <p:cNvSpPr/>
+          <p:nvPr/>
+        </p:nvSpPr>
+        <p:spPr>
+          <a:xfrm>
+            <a:off x="7033565" y="4169664"/>
+            <a:ext cx="676656" cy="384048"/>
+          </a:xfrm>
+          <a:prstGeom prst="rect">
+            <a:avLst/>
+          </a:prstGeom>
+          <a:noFill/>
+          <a:ln/>
+        </p:spPr>
+        <p:txBody>
+          <a:bodyPr wrap="square" lIns="0" tIns="0" rIns="0" bIns="0" rtlCol="0" anchor="ctr"/>
+          <a:lstStyle/>
+          <a:p>
+            <a:pPr algn="ctr" indent="0" marL="0">
+              <a:buNone/>
+            </a:pPr>
+            <a:r>
+              <a:rPr lang="en-US" sz="900" b="1" dirty="0">
+                <a:solidFill>
+                  <a:srgbClr val="9D174D"/>
+                </a:solidFill>
+                <a:latin typeface="Trebuchet MS" pitchFamily="34" charset="0"/>
+                <a:ea typeface="Trebuchet MS" pitchFamily="34" charset="-122"/>
+                <a:cs typeface="Trebuchet MS" pitchFamily="34" charset="-120"/>
+              </a:rPr>
+              <a:t>a</a:t>
+            </a:r>
+            <a:endParaRPr lang="en-US" sz="900" dirty="0"/>
+          </a:p>
+        </p:txBody>
+      </p:sp>
+      <p:sp>
+        <p:nvSpPr>
+          <p:cNvPr id="56" name="Shape 54"/>
+          <p:cNvSpPr/>
+          <p:nvPr/>
+        </p:nvSpPr>
+        <p:spPr>
+          <a:xfrm>
+            <a:off x="7759598" y="4169664"/>
+            <a:ext cx="676656" cy="384048"/>
+          </a:xfrm>
+          <a:prstGeom prst="rect">
+            <a:avLst>
+              <a:gd name="adj" fmla="val 9524"/>
+            </a:avLst>
+          </a:prstGeom>
+          <a:solidFill>
+            <a:srgbClr val="FFFFFF"/>
+          </a:solidFill>
+          <a:ln w="12700">
+            <a:solidFill>
+              <a:srgbClr val="DB2777"/>
+            </a:solidFill>
+            <a:prstDash val="solid"/>
+          </a:ln>
+        </p:spPr>
+      </p:sp>
+      <p:sp>
+        <p:nvSpPr>
+          <p:cNvPr id="57" name="Text 55"/>
+          <p:cNvSpPr/>
+          <p:nvPr/>
+        </p:nvSpPr>
+        <p:spPr>
+          <a:xfrm>
+            <a:off x="7759598" y="4169664"/>
+            <a:ext cx="676656" cy="384048"/>
+          </a:xfrm>
+          <a:prstGeom prst="rect">
+            <a:avLst/>
+          </a:prstGeom>
+          <a:noFill/>
+          <a:ln/>
+        </p:spPr>
+        <p:txBody>
+          <a:bodyPr wrap="square" lIns="0" tIns="0" rIns="0" bIns="0" rtlCol="0" anchor="ctr"/>
+          <a:lstStyle/>
+          <a:p>
+            <a:pPr algn="ctr" indent="0" marL="0">
+              <a:buNone/>
+            </a:pPr>
+            <a:r>
+              <a:rPr lang="en-US" sz="900" b="1" dirty="0">
+                <a:solidFill>
+                  <a:srgbClr val="9D174D"/>
+                </a:solidFill>
+                <a:latin typeface="Trebuchet MS" pitchFamily="34" charset="0"/>
+                <a:ea typeface="Trebuchet MS" pitchFamily="34" charset="-122"/>
+                <a:cs typeface="Trebuchet MS" pitchFamily="34" charset="-120"/>
+              </a:rPr>
+              <a:t>l</a:t>
             </a:r>
             <a:endParaRPr lang="en-US" sz="900" dirty="0"/>
           </a:p>
@@ -34449,7 +34623,7 @@
                 <a:ea typeface="Trebuchet MS" pitchFamily="34" charset="-122"/>
                 <a:cs typeface="Trebuchet MS" pitchFamily="34" charset="-120"/>
               </a:rPr>
-              <a:t>un-</a:t>
+              <a:t>be-</a:t>
             </a:r>
             <a:endParaRPr lang="en-US" sz="1300" dirty="0"/>
           </a:p>
@@ -34538,7 +34712,7 @@
                 <a:ea typeface="Trebuchet MS" pitchFamily="34" charset="-122"/>
                 <a:cs typeface="Trebuchet MS" pitchFamily="34" charset="-120"/>
               </a:rPr>
-              <a:t>-s</a:t>
+              <a:t>-ship</a:t>
             </a:r>
             <a:endParaRPr lang="en-US" sz="1300" dirty="0"/>
           </a:p>
@@ -34602,7 +34776,7 @@
                 <a:ea typeface="Trebuchet MS" pitchFamily="34" charset="-122"/>
                 <a:cs typeface="Trebuchet MS" pitchFamily="34" charset="-120"/>
               </a:rPr>
-              <a:t>be-</a:t>
+              <a:t>ad-</a:t>
             </a:r>
             <a:endParaRPr lang="en-US" sz="1300" dirty="0"/>
           </a:p>
@@ -34862,7 +35036,7 @@
                 <a:ea typeface="Trebuchet MS" pitchFamily="34" charset="-122"/>
                 <a:cs typeface="Trebuchet MS" pitchFamily="34" charset="-120"/>
               </a:rPr>
-              <a:t>judges</a:t>
+              <a:t>judgement</a:t>
             </a:r>
             <a:endParaRPr lang="en-US" sz="1200" dirty="0"/>
           </a:p>
@@ -34928,7 +35102,7 @@
                 <a:ea typeface="Trebuchet MS" pitchFamily="34" charset="-122"/>
                 <a:cs typeface="Trebuchet MS" pitchFamily="34" charset="-120"/>
               </a:rPr>
-              <a:t>judged</a:t>
+              <a:t>misjudge</a:t>
             </a:r>
             <a:endParaRPr lang="en-US" sz="1200" dirty="0"/>
           </a:p>
@@ -34994,7 +35168,7 @@
                 <a:ea typeface="Trebuchet MS" pitchFamily="34" charset="-122"/>
                 <a:cs typeface="Trebuchet MS" pitchFamily="34" charset="-120"/>
               </a:rPr>
-              <a:t>judging</a:t>
+              <a:t>prejudge</a:t>
             </a:r>
             <a:endParaRPr lang="en-US" sz="1200" dirty="0"/>
           </a:p>
@@ -35060,7 +35234,7 @@
                 <a:ea typeface="Trebuchet MS" pitchFamily="34" charset="-122"/>
                 <a:cs typeface="Trebuchet MS" pitchFamily="34" charset="-120"/>
               </a:rPr>
-              <a:t>judgement</a:t>
+              <a:t>judging</a:t>
             </a:r>
             <a:endParaRPr lang="en-US" sz="1200" dirty="0"/>
           </a:p>
@@ -35126,7 +35300,7 @@
                 <a:ea typeface="Trebuchet MS" pitchFamily="34" charset="-122"/>
                 <a:cs typeface="Trebuchet MS" pitchFamily="34" charset="-120"/>
               </a:rPr>
-              <a:t>misjudge</a:t>
+              <a:t>misjudgement</a:t>
             </a:r>
             <a:endParaRPr lang="en-US" sz="1200" dirty="0"/>
           </a:p>
@@ -35192,7 +35366,7 @@
                 <a:ea typeface="Trebuchet MS" pitchFamily="34" charset="-122"/>
                 <a:cs typeface="Trebuchet MS" pitchFamily="34" charset="-120"/>
               </a:rPr>
-              <a:t>prejudge</a:t>
+              <a:t>rejudge</a:t>
             </a:r>
             <a:endParaRPr lang="en-US" sz="1200" dirty="0"/>
           </a:p>
@@ -35258,7 +35432,7 @@
                 <a:ea typeface="Trebuchet MS" pitchFamily="34" charset="-122"/>
                 <a:cs typeface="Trebuchet MS" pitchFamily="34" charset="-120"/>
               </a:rPr>
-              <a:t>misjudgement</a:t>
+              <a:t>judgemental</a:t>
             </a:r>
             <a:endParaRPr lang="en-US" sz="1200" dirty="0"/>
           </a:p>
@@ -36446,7 +36620,7 @@
                 <a:ea typeface="Calibri" pitchFamily="34" charset="-122"/>
                 <a:cs typeface="Calibri" pitchFamily="34" charset="-120"/>
               </a:rPr>
-              <a:t>1.  The word 'judge' comes from a Latin word meaning to decide or declare the law.</a:t>
+              <a:t>1.  The word 'misjudge' uses the prefix 'mis-' meaning wrongly or badly.</a:t>
             </a:r>
             <a:endParaRPr lang="en-US" sz="1300" dirty="0"/>
           </a:p>
@@ -36585,7 +36759,7 @@
                 <a:ea typeface="Calibri" pitchFamily="34" charset="-122"/>
                 <a:cs typeface="Calibri" pitchFamily="34" charset="-120"/>
               </a:rPr>
-              <a:t>2.  The word 'misjudge' means to judge someone very carefully and correctly.</a:t>
+              <a:t>2.  The word 'judgement' is formed by adding the suffix '-ment' to the root 'judge'.</a:t>
             </a:r>
             <a:endParaRPr lang="en-US" sz="1300" dirty="0"/>
           </a:p>
@@ -36608,11 +36782,11 @@
             </a:avLst>
           </a:prstGeom>
           <a:solidFill>
-            <a:srgbClr val="FEE2E2"/>
-          </a:solidFill>
-          <a:ln w="12700">
-            <a:solidFill>
-              <a:srgbClr val="DC2626"/>
+            <a:srgbClr val="DCFCE7"/>
+          </a:solidFill>
+          <a:ln w="12700">
+            <a:solidFill>
+              <a:srgbClr val="16A34A"/>
             </a:solidFill>
             <a:prstDash val="solid"/>
           </a:ln>
@@ -36645,13 +36819,13 @@
             <a:r>
               <a:rPr lang="en-US" sz="1100" b="1" dirty="0">
                 <a:solidFill>
-                  <a:srgbClr val="DC2626"/>
+                  <a:srgbClr val="16A34A"/>
                 </a:solidFill>
                 <a:latin typeface="Trebuchet MS" pitchFamily="34" charset="0"/>
                 <a:ea typeface="Trebuchet MS" pitchFamily="34" charset="-122"/>
                 <a:cs typeface="Trebuchet MS" pitchFamily="34" charset="-120"/>
               </a:rPr>
-              <a:t>FALSE</a:t>
+              <a:t>TRUE</a:t>
             </a:r>
             <a:endParaRPr lang="en-US" sz="1100" dirty="0"/>
           </a:p>
@@ -36724,7 +36898,7 @@
                 <a:ea typeface="Calibri" pitchFamily="34" charset="-122"/>
                 <a:cs typeface="Calibri" pitchFamily="34" charset="-120"/>
               </a:rPr>
-              <a:t>3.  A 'judgement' is the decision or opinion reached after thinking something through.</a:t>
+              <a:t>3.  The root 'judge' carries the idea of deciding or forming an opinion.</a:t>
             </a:r>
             <a:endParaRPr lang="en-US" sz="1300" dirty="0"/>
           </a:p>
@@ -36863,7 +37037,7 @@
                 <a:ea typeface="Calibri" pitchFamily="34" charset="-122"/>
                 <a:cs typeface="Calibri" pitchFamily="34" charset="-120"/>
               </a:rPr>
-              <a:t>4.  The prefix 'pre' in 'prejudge' means before, so 'prejudge' means to judge before knowing all the facts.</a:t>
+              <a:t>4.  The root 'judge' comes from an Ancient Greek word.</a:t>
             </a:r>
             <a:endParaRPr lang="en-US" sz="1300" dirty="0"/>
           </a:p>
@@ -36886,11 +37060,11 @@
             </a:avLst>
           </a:prstGeom>
           <a:solidFill>
-            <a:srgbClr val="DCFCE7"/>
-          </a:solidFill>
-          <a:ln w="12700">
-            <a:solidFill>
-              <a:srgbClr val="16A34A"/>
+            <a:srgbClr val="FEE2E2"/>
+          </a:solidFill>
+          <a:ln w="12700">
+            <a:solidFill>
+              <a:srgbClr val="DC2626"/>
             </a:solidFill>
             <a:prstDash val="solid"/>
           </a:ln>
@@ -36923,13 +37097,13 @@
             <a:r>
               <a:rPr lang="en-US" sz="1100" b="1" dirty="0">
                 <a:solidFill>
-                  <a:srgbClr val="16A34A"/>
+                  <a:srgbClr val="DC2626"/>
                 </a:solidFill>
                 <a:latin typeface="Trebuchet MS" pitchFamily="34" charset="0"/>
                 <a:ea typeface="Trebuchet MS" pitchFamily="34" charset="-122"/>
                 <a:cs typeface="Trebuchet MS" pitchFamily="34" charset="-120"/>
               </a:rPr>
-              <a:t>TRUE</a:t>
+              <a:t>FALSE</a:t>
             </a:r>
             <a:endParaRPr lang="en-US" sz="1100" dirty="0"/>
           </a:p>
@@ -37002,7 +37176,7 @@
                 <a:ea typeface="Calibri" pitchFamily="34" charset="-122"/>
                 <a:cs typeface="Calibri" pitchFamily="34" charset="-120"/>
               </a:rPr>
-              <a:t>5.  The suffix '-ment' in 'judgement' turns the word into a verb (action word).</a:t>
+              <a:t>5.  A judgemental person is very good at keeping opinions to themselves.</a:t>
             </a:r>
             <a:endParaRPr lang="en-US" sz="1300" dirty="0"/>
           </a:p>
@@ -37707,7 +37881,7 @@
                 <a:ea typeface="Trebuchet MS" pitchFamily="34" charset="-122"/>
                 <a:cs typeface="Trebuchet MS" pitchFamily="34" charset="-120"/>
               </a:rPr>
-              <a:t>judges</a:t>
+              <a:t>judgement</a:t>
             </a:r>
             <a:endParaRPr lang="en-US" sz="1300" dirty="0"/>
           </a:p>
@@ -37773,7 +37947,7 @@
                 <a:ea typeface="Trebuchet MS" pitchFamily="34" charset="-122"/>
                 <a:cs typeface="Trebuchet MS" pitchFamily="34" charset="-120"/>
               </a:rPr>
-              <a:t>judged</a:t>
+              <a:t>misjudge</a:t>
             </a:r>
             <a:endParaRPr lang="en-US" sz="1300" dirty="0"/>
           </a:p>
@@ -37839,7 +38013,7 @@
                 <a:ea typeface="Trebuchet MS" pitchFamily="34" charset="-122"/>
                 <a:cs typeface="Trebuchet MS" pitchFamily="34" charset="-120"/>
               </a:rPr>
-              <a:t>judging</a:t>
+              <a:t>prejudge</a:t>
             </a:r>
             <a:endParaRPr lang="en-US" sz="1300" dirty="0"/>
           </a:p>
@@ -37905,7 +38079,7 @@
                 <a:ea typeface="Trebuchet MS" pitchFamily="34" charset="-122"/>
                 <a:cs typeface="Trebuchet MS" pitchFamily="34" charset="-120"/>
               </a:rPr>
-              <a:t>judgement</a:t>
+              <a:t>judging</a:t>
             </a:r>
             <a:endParaRPr lang="en-US" sz="1300" dirty="0"/>
           </a:p>
@@ -37971,7 +38145,7 @@
                 <a:ea typeface="Trebuchet MS" pitchFamily="34" charset="-122"/>
                 <a:cs typeface="Trebuchet MS" pitchFamily="34" charset="-120"/>
               </a:rPr>
-              <a:t>misjudge</a:t>
+              <a:t>misjudgement</a:t>
             </a:r>
             <a:endParaRPr lang="en-US" sz="1300" dirty="0"/>
           </a:p>
@@ -38037,7 +38211,7 @@
                 <a:ea typeface="Trebuchet MS" pitchFamily="34" charset="-122"/>
                 <a:cs typeface="Trebuchet MS" pitchFamily="34" charset="-120"/>
               </a:rPr>
-              <a:t>prejudge</a:t>
+              <a:t>rejudge</a:t>
             </a:r>
             <a:endParaRPr lang="en-US" sz="1300" dirty="0"/>
           </a:p>
@@ -39128,7 +39302,7 @@
                 <a:ea typeface="Trebuchet MS" pitchFamily="34" charset="-122"/>
                 <a:cs typeface="Trebuchet MS" pitchFamily="34" charset="-120"/>
               </a:rPr>
-              <a:t>un-</a:t>
+              <a:t>be-</a:t>
             </a:r>
             <a:endParaRPr lang="en-US" sz="1300" dirty="0"/>
           </a:p>
@@ -39217,7 +39391,7 @@
                 <a:ea typeface="Trebuchet MS" pitchFamily="34" charset="-122"/>
                 <a:cs typeface="Trebuchet MS" pitchFamily="34" charset="-120"/>
               </a:rPr>
-              <a:t>-s</a:t>
+              <a:t>-ship</a:t>
             </a:r>
             <a:endParaRPr lang="en-US" sz="1300" dirty="0"/>
           </a:p>
@@ -39281,7 +39455,7 @@
                 <a:ea typeface="Trebuchet MS" pitchFamily="34" charset="-122"/>
                 <a:cs typeface="Trebuchet MS" pitchFamily="34" charset="-120"/>
               </a:rPr>
-              <a:t>be-</a:t>
+              <a:t>ad-</a:t>
             </a:r>
             <a:endParaRPr lang="en-US" sz="1300" dirty="0"/>
           </a:p>
@@ -40281,7 +40455,7 @@
                 <a:ea typeface="Calibri" pitchFamily="34" charset="-122"/>
                 <a:cs typeface="Calibri" pitchFamily="34" charset="-120"/>
               </a:rPr>
-              <a:t>When someone has already made a decision or formed an opinion about something.</a:t>
+              <a:t>To make a wrong or unfair decision about someone or something.</a:t>
             </a:r>
             <a:endParaRPr lang="en-US" sz="1200" dirty="0"/>
           </a:p>
@@ -40354,7 +40528,7 @@
                 <a:ea typeface="Trebuchet MS" pitchFamily="34" charset="-122"/>
                 <a:cs typeface="Trebuchet MS" pitchFamily="34" charset="-120"/>
               </a:rPr>
-              <a:t>judges</a:t>
+              <a:t>judgement</a:t>
             </a:r>
             <a:endParaRPr lang="en-US" sz="1200" dirty="0"/>
           </a:p>
@@ -40420,7 +40594,7 @@
                 <a:ea typeface="Calibri" pitchFamily="34" charset="-122"/>
                 <a:cs typeface="Calibri" pitchFamily="34" charset="-120"/>
               </a:rPr>
-              <a:t>To make a wrong or unfair decision about someone or something.</a:t>
+              <a:t>A wrong or unfair decision that turns out to be a mistake.</a:t>
             </a:r>
             <a:endParaRPr lang="en-US" sz="1200" dirty="0"/>
           </a:p>
@@ -40493,7 +40667,7 @@
                 <a:ea typeface="Trebuchet MS" pitchFamily="34" charset="-122"/>
                 <a:cs typeface="Trebuchet MS" pitchFamily="34" charset="-120"/>
               </a:rPr>
-              <a:t>judged</a:t>
+              <a:t>misjudge</a:t>
             </a:r>
             <a:endParaRPr lang="en-US" sz="1200" dirty="0"/>
           </a:p>
@@ -40559,7 +40733,7 @@
                 <a:ea typeface="Calibri" pitchFamily="34" charset="-122"/>
                 <a:cs typeface="Calibri" pitchFamily="34" charset="-120"/>
               </a:rPr>
-              <a:t>A person who decides who wins a competition or who is guilty in a court of law.</a:t>
+              <a:t>A person who decides the winner of a competition or makes decisions in a court of law.</a:t>
             </a:r>
             <a:endParaRPr lang="en-US" sz="1200" dirty="0"/>
           </a:p>
@@ -40632,7 +40806,7 @@
                 <a:ea typeface="Trebuchet MS" pitchFamily="34" charset="-122"/>
                 <a:cs typeface="Trebuchet MS" pitchFamily="34" charset="-120"/>
               </a:rPr>
-              <a:t>judging</a:t>
+              <a:t>prejudge</a:t>
             </a:r>
             <a:endParaRPr lang="en-US" sz="1200" dirty="0"/>
           </a:p>
@@ -40698,7 +40872,7 @@
                 <a:ea typeface="Calibri" pitchFamily="34" charset="-122"/>
                 <a:cs typeface="Calibri" pitchFamily="34" charset="-120"/>
               </a:rPr>
-              <a:t>To form an opinion about someone before you know all the facts.</a:t>
+              <a:t>To look at something again and form a new opinion or decision.</a:t>
             </a:r>
             <a:endParaRPr lang="en-US" sz="1200" dirty="0"/>
           </a:p>
@@ -40771,7 +40945,7 @@
                 <a:ea typeface="Trebuchet MS" pitchFamily="34" charset="-122"/>
                 <a:cs typeface="Trebuchet MS" pitchFamily="34" charset="-120"/>
               </a:rPr>
-              <a:t>judgement</a:t>
+              <a:t>judging</a:t>
             </a:r>
             <a:endParaRPr lang="en-US" sz="1200" dirty="0"/>
           </a:p>
@@ -40837,7 +41011,7 @@
                 <a:ea typeface="Calibri" pitchFamily="34" charset="-122"/>
                 <a:cs typeface="Calibri" pitchFamily="34" charset="-120"/>
               </a:rPr>
-              <a:t>The decision or opinion someone makes after thinking carefully about something.</a:t>
+              <a:t>The act of deciding or forming an opinion about something.</a:t>
             </a:r>
             <a:endParaRPr lang="en-US" sz="1200" dirty="0"/>
           </a:p>
@@ -40910,7 +41084,7 @@
                 <a:ea typeface="Trebuchet MS" pitchFamily="34" charset="-122"/>
                 <a:cs typeface="Trebuchet MS" pitchFamily="34" charset="-120"/>
               </a:rPr>
-              <a:t>misjudge</a:t>
+              <a:t>misjudgement</a:t>
             </a:r>
             <a:endParaRPr lang="en-US" sz="1200" dirty="0"/>
           </a:p>
@@ -40976,7 +41150,7 @@
                 <a:ea typeface="Calibri" pitchFamily="34" charset="-122"/>
                 <a:cs typeface="Calibri" pitchFamily="34" charset="-120"/>
               </a:rPr>
-              <a:t>The act of deciding or forming an opinion about something right now.</a:t>
+              <a:t>To form an opinion about something before you have all the facts.</a:t>
             </a:r>
             <a:endParaRPr lang="en-US" sz="1200" dirty="0"/>
           </a:p>
@@ -41049,7 +41223,7 @@
                 <a:ea typeface="Trebuchet MS" pitchFamily="34" charset="-122"/>
                 <a:cs typeface="Trebuchet MS" pitchFamily="34" charset="-120"/>
               </a:rPr>
-              <a:t>prejudge</a:t>
+              <a:t>rejudge</a:t>
             </a:r>
             <a:endParaRPr lang="en-US" sz="1200" dirty="0"/>
           </a:p>
@@ -41115,7 +41289,7 @@
                 <a:ea typeface="Calibri" pitchFamily="34" charset="-122"/>
                 <a:cs typeface="Calibri" pitchFamily="34" charset="-120"/>
               </a:rPr>
-              <a:t>More than one person who makes official decisions or decides winners.</a:t>
+              <a:t>A decision or opinion formed after thinking carefully about something.</a:t>
             </a:r>
             <a:endParaRPr lang="en-US" sz="1200" dirty="0"/>
           </a:p>
@@ -41610,7 +41784,7 @@
                 <a:ea typeface="Calibri" pitchFamily="34" charset="-122"/>
                 <a:cs typeface="Calibri" pitchFamily="34" charset="-120"/>
               </a:rPr>
-              <a:t>The judge listened carefully to both sides before making her final decision.</a:t>
+              <a:t>The judge carefully listened to both sides before making her final decision.</a:t>
             </a:r>
             <a:endParaRPr lang="en-US" sz="1500" dirty="0"/>
           </a:p>
@@ -41774,7 +41948,7 @@
                 <a:ea typeface="Calibri" pitchFamily="34" charset="-122"/>
                 <a:cs typeface="Calibri" pitchFamily="34" charset="-120"/>
               </a:rPr>
-              <a:t>It is not fair to misjudge someone just because of the way they look.</a:t>
+              <a:t>It is easy to misjudge someone when you do not know their full story.</a:t>
             </a:r>
             <a:endParaRPr lang="en-US" sz="1500" dirty="0"/>
           </a:p>
@@ -41938,7 +42112,7 @@
                 <a:ea typeface="Calibri" pitchFamily="34" charset="-122"/>
                 <a:cs typeface="Calibri" pitchFamily="34" charset="-120"/>
               </a:rPr>
-              <a:t>The students were judging the science projects based on creativity and effort.</a:t>
+              <a:t>The teacher reminded us not to be judgemental about the way other students learn.</a:t>
             </a:r>
             <a:endParaRPr lang="en-US" sz="1500" dirty="0"/>
           </a:p>

--- a/output/wordlabs-judge-3day.pptx
+++ b/output/wordlabs-judge-3day.pptx
@@ -4240,7 +4240,7 @@
                 <a:ea typeface="Calibri" pitchFamily="34" charset="-122"/>
                 <a:cs typeface="Calibri" pitchFamily="34" charset="-120"/>
               </a:rPr>
-              <a:t>"to decide or form opinion"</a:t>
+              <a:t>"decide; form an opinion"</a:t>
             </a:r>
             <a:endParaRPr lang="en-US" sz="2200" dirty="0"/>
           </a:p>
@@ -4279,7 +4279,7 @@
                 <a:ea typeface="Calibri" pitchFamily="34" charset="-122"/>
                 <a:cs typeface="Calibri" pitchFamily="34" charset="-120"/>
               </a:rPr>
-              <a:t>Origin: Latin: judicare</a:t>
+              <a:t>Origin: Core English root</a:t>
             </a:r>
             <a:endParaRPr lang="en-US" sz="1300" dirty="0"/>
           </a:p>
@@ -5288,7 +5288,7 @@
                 <a:ea typeface="Calibri" pitchFamily="34" charset="-122"/>
                 <a:cs typeface="Calibri" pitchFamily="34" charset="-120"/>
               </a:rPr>
-              <a:t>Word Labs  •  wordlabs.app  •  Root: 'judge' = to decide or form opinion</a:t>
+              <a:t>Word Labs  •  wordlabs.app  •  Root: 'judge' = decide; form an opinion</a:t>
             </a:r>
             <a:endParaRPr lang="en-US" sz="800" dirty="0"/>
           </a:p>
@@ -5928,7 +5928,7 @@
                 <a:ea typeface="Calibri" pitchFamily="34" charset="-122"/>
                 <a:cs typeface="Calibri" pitchFamily="34" charset="-120"/>
               </a:rPr>
-              <a:t>Word Labs  •  wordlabs.app  •  Root: 'judge' = to decide or form opinion</a:t>
+              <a:t>Word Labs  •  wordlabs.app  •  Root: 'judge' = decide; form an opinion</a:t>
             </a:r>
             <a:endParaRPr lang="en-US" sz="800" dirty="0"/>
           </a:p>
@@ -6040,7 +6040,7 @@
                 <a:ea typeface="Calibri" pitchFamily="34" charset="-122"/>
                 <a:cs typeface="Calibri" pitchFamily="34" charset="-120"/>
               </a:rPr>
-              <a:t>The </a:t>
+              <a:t>Don't </a:t>
             </a:r>
             <a:pPr algn="l" indent="0" marL="0">
               <a:buNone/>
@@ -6057,7 +6057,7 @@
                 <a:ea typeface="Calibri" pitchFamily="34" charset="-122"/>
                 <a:cs typeface="Calibri" pitchFamily="34" charset="-120"/>
               </a:rPr>
-              <a:t>judge</a:t>
+              <a:t>misjudge</a:t>
             </a:r>
             <a:pPr algn="l" indent="0" marL="0">
               <a:buNone/>
@@ -6071,7 +6071,7 @@
                 <a:ea typeface="Calibri" pitchFamily="34" charset="-122"/>
                 <a:cs typeface="Calibri" pitchFamily="34" charset="-120"/>
               </a:rPr>
-              <a:t> announced her </a:t>
+              <a:t> her by her quiet manner; she's actually very confident. It's unfair to </a:t>
             </a:r>
             <a:pPr algn="l" indent="0" marL="0">
               <a:buNone/>
@@ -6088,7 +6088,7 @@
                 <a:ea typeface="Calibri" pitchFamily="34" charset="-122"/>
                 <a:cs typeface="Calibri" pitchFamily="34" charset="-120"/>
               </a:rPr>
-              <a:t>judgement</a:t>
+              <a:t>prejudge</a:t>
             </a:r>
             <a:pPr algn="l" indent="0" marL="0">
               <a:buNone/>
@@ -6102,7 +6102,7 @@
                 <a:ea typeface="Calibri" pitchFamily="34" charset="-122"/>
                 <a:cs typeface="Calibri" pitchFamily="34" charset="-120"/>
               </a:rPr>
-              <a:t>, and the whole crowd fell silent.</a:t>
+              <a:t> someone based on their appearance.</a:t>
             </a:r>
             <a:endParaRPr lang="en-US" sz="1800" dirty="0"/>
           </a:p>
@@ -6257,7 +6257,7 @@
                 <a:ea typeface="Trebuchet MS" pitchFamily="34" charset="-122"/>
                 <a:cs typeface="Trebuchet MS" pitchFamily="34" charset="-120"/>
               </a:rPr>
-              <a:t>judge</a:t>
+              <a:t>misjudge</a:t>
             </a:r>
             <a:endParaRPr lang="en-US" sz="1400" dirty="0"/>
           </a:p>
@@ -6385,7 +6385,7 @@
                 <a:ea typeface="Trebuchet MS" pitchFamily="34" charset="-122"/>
                 <a:cs typeface="Trebuchet MS" pitchFamily="34" charset="-120"/>
               </a:rPr>
-              <a:t>judgement</a:t>
+              <a:t>prejudge</a:t>
             </a:r>
             <a:endParaRPr lang="en-US" sz="1400" dirty="0"/>
           </a:p>
@@ -6716,7 +6716,7 @@
                 <a:ea typeface="Calibri" pitchFamily="34" charset="-122"/>
                 <a:cs typeface="Calibri" pitchFamily="34" charset="-120"/>
               </a:rPr>
-              <a:t>Word Labs  •  wordlabs.app  •  Root: 'judge' = to decide or form opinion</a:t>
+              <a:t>Word Labs  •  wordlabs.app  •  Root: 'judge' = decide; form an opinion</a:t>
             </a:r>
             <a:endParaRPr lang="en-US" sz="800" dirty="0"/>
           </a:p>
@@ -6855,7 +6855,7 @@
                 <a:ea typeface="Trebuchet MS" pitchFamily="34" charset="-122"/>
                 <a:cs typeface="Trebuchet MS" pitchFamily="34" charset="-120"/>
               </a:rPr>
-              <a:t>judge</a:t>
+              <a:t>misjudge</a:t>
             </a:r>
             <a:endParaRPr lang="en-US" sz="2800" dirty="0"/>
           </a:p>
@@ -7543,7 +7543,7 @@
                 <a:ea typeface="Calibri" pitchFamily="34" charset="-122"/>
                 <a:cs typeface="Calibri" pitchFamily="34" charset="-120"/>
               </a:rPr>
-              <a:t>Word Labs  •  wordlabs.app  •  Root: 'judge' = to decide or form opinion</a:t>
+              <a:t>Word Labs  •  wordlabs.app  •  Root: 'judge' = decide; form an opinion</a:t>
             </a:r>
             <a:endParaRPr lang="en-US" sz="800" dirty="0"/>
           </a:p>
@@ -7682,7 +7682,7 @@
                 <a:ea typeface="Trebuchet MS" pitchFamily="34" charset="-122"/>
                 <a:cs typeface="Trebuchet MS" pitchFamily="34" charset="-120"/>
               </a:rPr>
-              <a:t>judge</a:t>
+              <a:t>misjudge</a:t>
             </a:r>
             <a:endParaRPr lang="en-US" sz="2800" dirty="0"/>
           </a:p>
@@ -7762,7 +7762,7 @@
         </p:nvSpPr>
         <p:spPr>
           <a:xfrm>
-            <a:off x="4370832" y="2258568"/>
+            <a:off x="2938272" y="2258568"/>
             <a:ext cx="1828800" cy="292608"/>
           </a:xfrm>
           <a:prstGeom prst="rect">
@@ -7771,11 +7771,11 @@
             </a:avLst>
           </a:prstGeom>
           <a:solidFill>
-            <a:srgbClr val="CCFBF1"/>
+            <a:srgbClr val="DDD6FE"/>
           </a:solidFill>
           <a:ln w="19050">
             <a:solidFill>
-              <a:srgbClr val="0D9488"/>
+              <a:srgbClr val="7C3AED"/>
             </a:solidFill>
             <a:prstDash val="solid"/>
           </a:ln>
@@ -7796,7 +7796,7 @@
         </p:nvSpPr>
         <p:spPr>
           <a:xfrm>
-            <a:off x="4370832" y="2258568"/>
+            <a:off x="2938272" y="2258568"/>
             <a:ext cx="1828800" cy="292608"/>
           </a:xfrm>
           <a:prstGeom prst="rect">
@@ -7815,13 +7815,13 @@
             <a:r>
               <a:rPr lang="en-US" sz="1300" b="1" dirty="0">
                 <a:solidFill>
-                  <a:srgbClr val="0F766E"/>
+                  <a:srgbClr val="4C1D95"/>
                 </a:solidFill>
                 <a:latin typeface="Trebuchet MS" pitchFamily="34" charset="0"/>
                 <a:ea typeface="Trebuchet MS" pitchFamily="34" charset="-122"/>
                 <a:cs typeface="Trebuchet MS" pitchFamily="34" charset="-120"/>
               </a:rPr>
-              <a:t>judge</a:t>
+              <a:t>mis</a:t>
             </a:r>
             <a:endParaRPr lang="en-US" sz="1300" dirty="0"/>
           </a:p>
@@ -7835,7 +7835,7 @@
         </p:nvSpPr>
         <p:spPr>
           <a:xfrm>
-            <a:off x="4370832" y="2569464"/>
+            <a:off x="2938272" y="2569464"/>
             <a:ext cx="1828800" cy="201168"/>
           </a:xfrm>
           <a:prstGeom prst="rect">
@@ -7860,7 +7860,7 @@
                 <a:ea typeface="Calibri" pitchFamily="34" charset="-122"/>
                 <a:cs typeface="Calibri" pitchFamily="34" charset="-120"/>
               </a:rPr>
-              <a:t>to decide or form an opinion</a:t>
+              <a:t>wrong</a:t>
             </a:r>
             <a:endParaRPr lang="en-US" sz="850" dirty="0"/>
           </a:p>
@@ -7869,6 +7869,118 @@
       <p:sp>
         <p:nvSpPr>
           <p:cNvPr id="19" name="Shape 17"/>
+          <p:cNvSpPr/>
+          <p:nvPr/>
+        </p:nvSpPr>
+        <p:spPr>
+          <a:xfrm>
+            <a:off x="5803392" y="2258568"/>
+            <a:ext cx="1828800" cy="292608"/>
+          </a:xfrm>
+          <a:prstGeom prst="rect">
+            <a:avLst>
+              <a:gd name="adj" fmla="val 25000"/>
+            </a:avLst>
+          </a:prstGeom>
+          <a:solidFill>
+            <a:srgbClr val="CCFBF1"/>
+          </a:solidFill>
+          <a:ln w="19050">
+            <a:solidFill>
+              <a:srgbClr val="0D9488"/>
+            </a:solidFill>
+            <a:prstDash val="solid"/>
+          </a:ln>
+          <a:effectLst>
+            <a:outerShdw sx="100000" sy="100000" kx="0" ky="0" algn="bl" rotWithShape="0" blurRad="101600" dist="38100" dir="8100000">
+              <a:srgbClr val="000000">
+                <a:alpha val="12000"/>
+              </a:srgbClr>
+            </a:outerShdw>
+          </a:effectLst>
+        </p:spPr>
+      </p:sp>
+      <p:sp>
+        <p:nvSpPr>
+          <p:cNvPr id="20" name="Text 18"/>
+          <p:cNvSpPr/>
+          <p:nvPr/>
+        </p:nvSpPr>
+        <p:spPr>
+          <a:xfrm>
+            <a:off x="5803392" y="2258568"/>
+            <a:ext cx="1828800" cy="292608"/>
+          </a:xfrm>
+          <a:prstGeom prst="rect">
+            <a:avLst/>
+          </a:prstGeom>
+          <a:noFill/>
+          <a:ln/>
+        </p:spPr>
+        <p:txBody>
+          <a:bodyPr wrap="square" lIns="0" tIns="0" rIns="0" bIns="0" rtlCol="0" anchor="ctr"/>
+          <a:lstStyle/>
+          <a:p>
+            <a:pPr algn="ctr" indent="0" marL="0">
+              <a:buNone/>
+            </a:pPr>
+            <a:r>
+              <a:rPr lang="en-US" sz="1300" b="1" dirty="0">
+                <a:solidFill>
+                  <a:srgbClr val="0F766E"/>
+                </a:solidFill>
+                <a:latin typeface="Trebuchet MS" pitchFamily="34" charset="0"/>
+                <a:ea typeface="Trebuchet MS" pitchFamily="34" charset="-122"/>
+                <a:cs typeface="Trebuchet MS" pitchFamily="34" charset="-120"/>
+              </a:rPr>
+              <a:t>judge</a:t>
+            </a:r>
+            <a:endParaRPr lang="en-US" sz="1300" dirty="0"/>
+          </a:p>
+        </p:txBody>
+      </p:sp>
+      <p:sp>
+        <p:nvSpPr>
+          <p:cNvPr id="21" name="Text 19"/>
+          <p:cNvSpPr/>
+          <p:nvPr/>
+        </p:nvSpPr>
+        <p:spPr>
+          <a:xfrm>
+            <a:off x="5803392" y="2569464"/>
+            <a:ext cx="1828800" cy="201168"/>
+          </a:xfrm>
+          <a:prstGeom prst="rect">
+            <a:avLst/>
+          </a:prstGeom>
+          <a:noFill/>
+          <a:ln/>
+        </p:spPr>
+        <p:txBody>
+          <a:bodyPr wrap="square" lIns="0" tIns="0" rIns="0" bIns="0" rtlCol="0" anchor="t"/>
+          <a:lstStyle/>
+          <a:p>
+            <a:pPr algn="ctr" indent="0" marL="0">
+              <a:buNone/>
+            </a:pPr>
+            <a:r>
+              <a:rPr lang="en-US" sz="850" dirty="0">
+                <a:solidFill>
+                  <a:srgbClr val="475569"/>
+                </a:solidFill>
+                <a:latin typeface="Calibri" pitchFamily="34" charset="0"/>
+                <a:ea typeface="Calibri" pitchFamily="34" charset="-122"/>
+                <a:cs typeface="Calibri" pitchFamily="34" charset="-120"/>
+              </a:rPr>
+              <a:t>decide; form an opinion</a:t>
+            </a:r>
+            <a:endParaRPr lang="en-US" sz="850" dirty="0"/>
+          </a:p>
+        </p:txBody>
+      </p:sp>
+      <p:sp>
+        <p:nvSpPr>
+          <p:cNvPr id="22" name="Shape 20"/>
           <p:cNvSpPr/>
           <p:nvPr/>
         </p:nvSpPr>
@@ -7895,7 +8007,7 @@
       </p:sp>
       <p:sp>
         <p:nvSpPr>
-          <p:cNvPr id="20" name="Text 18"/>
+          <p:cNvPr id="23" name="Text 21"/>
           <p:cNvSpPr/>
           <p:nvPr/>
         </p:nvSpPr>
@@ -7934,7 +8046,7 @@
       </p:sp>
       <p:sp>
         <p:nvSpPr>
-          <p:cNvPr id="21" name="Shape 19"/>
+          <p:cNvPr id="24" name="Shape 22"/>
           <p:cNvSpPr/>
           <p:nvPr/>
         </p:nvSpPr>
@@ -7961,7 +8073,7 @@
       </p:sp>
       <p:sp>
         <p:nvSpPr>
-          <p:cNvPr id="22" name="Text 20"/>
+          <p:cNvPr id="25" name="Text 23"/>
           <p:cNvSpPr/>
           <p:nvPr/>
         </p:nvSpPr>
@@ -8000,7 +8112,7 @@
       </p:sp>
       <p:sp>
         <p:nvSpPr>
-          <p:cNvPr id="23" name="Shape 21"/>
+          <p:cNvPr id="26" name="Shape 24"/>
           <p:cNvSpPr/>
           <p:nvPr/>
         </p:nvSpPr>
@@ -8027,7 +8139,7 @@
       </p:sp>
       <p:sp>
         <p:nvSpPr>
-          <p:cNvPr id="24" name="Text 22"/>
+          <p:cNvPr id="27" name="Text 25"/>
           <p:cNvSpPr/>
           <p:nvPr/>
         </p:nvSpPr>
@@ -8066,7 +8178,7 @@
       </p:sp>
       <p:sp>
         <p:nvSpPr>
-          <p:cNvPr id="25" name="Shape 23"/>
+          <p:cNvPr id="28" name="Shape 26"/>
           <p:cNvSpPr/>
           <p:nvPr/>
         </p:nvSpPr>
@@ -8093,7 +8205,7 @@
       </p:sp>
       <p:sp>
         <p:nvSpPr>
-          <p:cNvPr id="26" name="Text 24"/>
+          <p:cNvPr id="29" name="Text 27"/>
           <p:cNvSpPr/>
           <p:nvPr/>
         </p:nvSpPr>
@@ -8416,7 +8528,7 @@
                 <a:ea typeface="Calibri" pitchFamily="34" charset="-122"/>
                 <a:cs typeface="Calibri" pitchFamily="34" charset="-120"/>
               </a:rPr>
-              <a:t>Word Labs  •  wordlabs.app  •  Root: 'judge' = to decide or form opinion</a:t>
+              <a:t>Word Labs  •  wordlabs.app  •  Root: 'judge' = decide; form an opinion</a:t>
             </a:r>
             <a:endParaRPr lang="en-US" sz="800" dirty="0"/>
           </a:p>
@@ -8555,7 +8667,7 @@
                 <a:ea typeface="Trebuchet MS" pitchFamily="34" charset="-122"/>
                 <a:cs typeface="Trebuchet MS" pitchFamily="34" charset="-120"/>
               </a:rPr>
-              <a:t>judge</a:t>
+              <a:t>misjudge</a:t>
             </a:r>
             <a:endParaRPr lang="en-US" sz="2800" dirty="0"/>
           </a:p>
@@ -8635,7 +8747,7 @@
         </p:nvSpPr>
         <p:spPr>
           <a:xfrm>
-            <a:off x="4370832" y="2258568"/>
+            <a:off x="2938272" y="2258568"/>
             <a:ext cx="1828800" cy="292608"/>
           </a:xfrm>
           <a:prstGeom prst="rect">
@@ -8644,11 +8756,11 @@
             </a:avLst>
           </a:prstGeom>
           <a:solidFill>
-            <a:srgbClr val="CCFBF1"/>
+            <a:srgbClr val="DDD6FE"/>
           </a:solidFill>
           <a:ln w="19050">
             <a:solidFill>
-              <a:srgbClr val="0D9488"/>
+              <a:srgbClr val="7C3AED"/>
             </a:solidFill>
             <a:prstDash val="solid"/>
           </a:ln>
@@ -8669,7 +8781,7 @@
         </p:nvSpPr>
         <p:spPr>
           <a:xfrm>
-            <a:off x="4370832" y="2258568"/>
+            <a:off x="2938272" y="2258568"/>
             <a:ext cx="1828800" cy="292608"/>
           </a:xfrm>
           <a:prstGeom prst="rect">
@@ -8688,13 +8800,13 @@
             <a:r>
               <a:rPr lang="en-US" sz="1300" b="1" dirty="0">
                 <a:solidFill>
-                  <a:srgbClr val="0F766E"/>
+                  <a:srgbClr val="4C1D95"/>
                 </a:solidFill>
                 <a:latin typeface="Trebuchet MS" pitchFamily="34" charset="0"/>
                 <a:ea typeface="Trebuchet MS" pitchFamily="34" charset="-122"/>
                 <a:cs typeface="Trebuchet MS" pitchFamily="34" charset="-120"/>
               </a:rPr>
-              <a:t>judge</a:t>
+              <a:t>mis</a:t>
             </a:r>
             <a:endParaRPr lang="en-US" sz="1300" dirty="0"/>
           </a:p>
@@ -8708,7 +8820,7 @@
         </p:nvSpPr>
         <p:spPr>
           <a:xfrm>
-            <a:off x="4370832" y="2569464"/>
+            <a:off x="2938272" y="2569464"/>
             <a:ext cx="1828800" cy="201168"/>
           </a:xfrm>
           <a:prstGeom prst="rect">
@@ -8733,7 +8845,7 @@
                 <a:ea typeface="Calibri" pitchFamily="34" charset="-122"/>
                 <a:cs typeface="Calibri" pitchFamily="34" charset="-120"/>
               </a:rPr>
-              <a:t>to decide or form an opinion</a:t>
+              <a:t>wrong</a:t>
             </a:r>
             <a:endParaRPr lang="en-US" sz="850" dirty="0"/>
           </a:p>
@@ -8742,6 +8854,118 @@
       <p:sp>
         <p:nvSpPr>
           <p:cNvPr id="19" name="Shape 17"/>
+          <p:cNvSpPr/>
+          <p:nvPr/>
+        </p:nvSpPr>
+        <p:spPr>
+          <a:xfrm>
+            <a:off x="5803392" y="2258568"/>
+            <a:ext cx="1828800" cy="292608"/>
+          </a:xfrm>
+          <a:prstGeom prst="rect">
+            <a:avLst>
+              <a:gd name="adj" fmla="val 25000"/>
+            </a:avLst>
+          </a:prstGeom>
+          <a:solidFill>
+            <a:srgbClr val="CCFBF1"/>
+          </a:solidFill>
+          <a:ln w="19050">
+            <a:solidFill>
+              <a:srgbClr val="0D9488"/>
+            </a:solidFill>
+            <a:prstDash val="solid"/>
+          </a:ln>
+          <a:effectLst>
+            <a:outerShdw sx="100000" sy="100000" kx="0" ky="0" algn="bl" rotWithShape="0" blurRad="101600" dist="38100" dir="8100000">
+              <a:srgbClr val="000000">
+                <a:alpha val="12000"/>
+              </a:srgbClr>
+            </a:outerShdw>
+          </a:effectLst>
+        </p:spPr>
+      </p:sp>
+      <p:sp>
+        <p:nvSpPr>
+          <p:cNvPr id="20" name="Text 18"/>
+          <p:cNvSpPr/>
+          <p:nvPr/>
+        </p:nvSpPr>
+        <p:spPr>
+          <a:xfrm>
+            <a:off x="5803392" y="2258568"/>
+            <a:ext cx="1828800" cy="292608"/>
+          </a:xfrm>
+          <a:prstGeom prst="rect">
+            <a:avLst/>
+          </a:prstGeom>
+          <a:noFill/>
+          <a:ln/>
+        </p:spPr>
+        <p:txBody>
+          <a:bodyPr wrap="square" lIns="0" tIns="0" rIns="0" bIns="0" rtlCol="0" anchor="ctr"/>
+          <a:lstStyle/>
+          <a:p>
+            <a:pPr algn="ctr" indent="0" marL="0">
+              <a:buNone/>
+            </a:pPr>
+            <a:r>
+              <a:rPr lang="en-US" sz="1300" b="1" dirty="0">
+                <a:solidFill>
+                  <a:srgbClr val="0F766E"/>
+                </a:solidFill>
+                <a:latin typeface="Trebuchet MS" pitchFamily="34" charset="0"/>
+                <a:ea typeface="Trebuchet MS" pitchFamily="34" charset="-122"/>
+                <a:cs typeface="Trebuchet MS" pitchFamily="34" charset="-120"/>
+              </a:rPr>
+              <a:t>judge</a:t>
+            </a:r>
+            <a:endParaRPr lang="en-US" sz="1300" dirty="0"/>
+          </a:p>
+        </p:txBody>
+      </p:sp>
+      <p:sp>
+        <p:nvSpPr>
+          <p:cNvPr id="21" name="Text 19"/>
+          <p:cNvSpPr/>
+          <p:nvPr/>
+        </p:nvSpPr>
+        <p:spPr>
+          <a:xfrm>
+            <a:off x="5803392" y="2569464"/>
+            <a:ext cx="1828800" cy="201168"/>
+          </a:xfrm>
+          <a:prstGeom prst="rect">
+            <a:avLst/>
+          </a:prstGeom>
+          <a:noFill/>
+          <a:ln/>
+        </p:spPr>
+        <p:txBody>
+          <a:bodyPr wrap="square" lIns="0" tIns="0" rIns="0" bIns="0" rtlCol="0" anchor="t"/>
+          <a:lstStyle/>
+          <a:p>
+            <a:pPr algn="ctr" indent="0" marL="0">
+              <a:buNone/>
+            </a:pPr>
+            <a:r>
+              <a:rPr lang="en-US" sz="850" dirty="0">
+                <a:solidFill>
+                  <a:srgbClr val="475569"/>
+                </a:solidFill>
+                <a:latin typeface="Calibri" pitchFamily="34" charset="0"/>
+                <a:ea typeface="Calibri" pitchFamily="34" charset="-122"/>
+                <a:cs typeface="Calibri" pitchFamily="34" charset="-120"/>
+              </a:rPr>
+              <a:t>decide; form an opinion</a:t>
+            </a:r>
+            <a:endParaRPr lang="en-US" sz="850" dirty="0"/>
+          </a:p>
+        </p:txBody>
+      </p:sp>
+      <p:sp>
+        <p:nvSpPr>
+          <p:cNvPr id="22" name="Shape 20"/>
           <p:cNvSpPr/>
           <p:nvPr/>
         </p:nvSpPr>
@@ -8768,7 +8992,7 @@
       </p:sp>
       <p:sp>
         <p:nvSpPr>
-          <p:cNvPr id="20" name="Text 18"/>
+          <p:cNvPr id="23" name="Text 21"/>
           <p:cNvSpPr/>
           <p:nvPr/>
         </p:nvSpPr>
@@ -8807,7 +9031,7 @@
       </p:sp>
       <p:sp>
         <p:nvSpPr>
-          <p:cNvPr id="21" name="Shape 19"/>
+          <p:cNvPr id="24" name="Shape 22"/>
           <p:cNvSpPr/>
           <p:nvPr/>
         </p:nvSpPr>
@@ -8834,13 +9058,13 @@
       </p:sp>
       <p:sp>
         <p:nvSpPr>
-          <p:cNvPr id="22" name="Shape 20"/>
-          <p:cNvSpPr/>
-          <p:nvPr/>
-        </p:nvSpPr>
-        <p:spPr>
-          <a:xfrm>
-            <a:off x="4370832" y="3364992"/>
+          <p:cNvPr id="25" name="Shape 23"/>
+          <p:cNvSpPr/>
+          <p:nvPr/>
+        </p:nvSpPr>
+        <p:spPr>
+          <a:xfrm>
+            <a:off x="2999232" y="3364992"/>
             <a:ext cx="1645920" cy="475488"/>
           </a:xfrm>
           <a:prstGeom prst="rect">
@@ -8861,13 +9085,13 @@
       </p:sp>
       <p:sp>
         <p:nvSpPr>
-          <p:cNvPr id="23" name="Text 21"/>
-          <p:cNvSpPr/>
-          <p:nvPr/>
-        </p:nvSpPr>
-        <p:spPr>
-          <a:xfrm>
-            <a:off x="4370832" y="3364992"/>
+          <p:cNvPr id="26" name="Text 24"/>
+          <p:cNvSpPr/>
+          <p:nvPr/>
+        </p:nvSpPr>
+        <p:spPr>
+          <a:xfrm>
+            <a:off x="2999232" y="3364992"/>
             <a:ext cx="1645920" cy="475488"/>
           </a:xfrm>
           <a:prstGeom prst="rect">
@@ -8892,6 +9116,111 @@
                 <a:ea typeface="Trebuchet MS" pitchFamily="34" charset="-122"/>
                 <a:cs typeface="Trebuchet MS" pitchFamily="34" charset="-120"/>
               </a:rPr>
+              <a:t>mis</a:t>
+            </a:r>
+            <a:endParaRPr lang="en-US" sz="1400" dirty="0"/>
+          </a:p>
+        </p:txBody>
+      </p:sp>
+      <p:sp>
+        <p:nvSpPr>
+          <p:cNvPr id="27" name="Text 25"/>
+          <p:cNvSpPr/>
+          <p:nvPr/>
+        </p:nvSpPr>
+        <p:spPr>
+          <a:xfrm>
+            <a:off x="4645152" y="3364992"/>
+            <a:ext cx="1097280" cy="475488"/>
+          </a:xfrm>
+          <a:prstGeom prst="rect">
+            <a:avLst/>
+          </a:prstGeom>
+          <a:noFill/>
+          <a:ln/>
+        </p:spPr>
+        <p:txBody>
+          <a:bodyPr wrap="square" lIns="0" tIns="0" rIns="0" bIns="0" rtlCol="0" anchor="ctr"/>
+          <a:lstStyle/>
+          <a:p>
+            <a:pPr algn="ctr" indent="0" marL="0">
+              <a:buNone/>
+            </a:pPr>
+            <a:r>
+              <a:rPr lang="en-US" sz="1600" b="1" dirty="0">
+                <a:solidFill>
+                  <a:srgbClr val="0D9488"/>
+                </a:solidFill>
+                <a:latin typeface="Trebuchet MS" pitchFamily="34" charset="0"/>
+                <a:ea typeface="Trebuchet MS" pitchFamily="34" charset="-122"/>
+                <a:cs typeface="Trebuchet MS" pitchFamily="34" charset="-120"/>
+              </a:rPr>
+              <a:t>·</a:t>
+            </a:r>
+            <a:endParaRPr lang="en-US" sz="1600" dirty="0"/>
+          </a:p>
+        </p:txBody>
+      </p:sp>
+      <p:sp>
+        <p:nvSpPr>
+          <p:cNvPr id="28" name="Shape 26"/>
+          <p:cNvSpPr/>
+          <p:nvPr/>
+        </p:nvSpPr>
+        <p:spPr>
+          <a:xfrm>
+            <a:off x="5742432" y="3364992"/>
+            <a:ext cx="1645920" cy="475488"/>
+          </a:xfrm>
+          <a:prstGeom prst="rect">
+            <a:avLst>
+              <a:gd name="adj" fmla="val 9615"/>
+            </a:avLst>
+          </a:prstGeom>
+          <a:solidFill>
+            <a:srgbClr val="FFFFFF"/>
+          </a:solidFill>
+          <a:ln w="12700">
+            <a:solidFill>
+              <a:srgbClr val="0D9488"/>
+            </a:solidFill>
+            <a:prstDash val="solid"/>
+          </a:ln>
+        </p:spPr>
+      </p:sp>
+      <p:sp>
+        <p:nvSpPr>
+          <p:cNvPr id="29" name="Text 27"/>
+          <p:cNvSpPr/>
+          <p:nvPr/>
+        </p:nvSpPr>
+        <p:spPr>
+          <a:xfrm>
+            <a:off x="5742432" y="3364992"/>
+            <a:ext cx="1645920" cy="475488"/>
+          </a:xfrm>
+          <a:prstGeom prst="rect">
+            <a:avLst/>
+          </a:prstGeom>
+          <a:noFill/>
+          <a:ln/>
+        </p:spPr>
+        <p:txBody>
+          <a:bodyPr wrap="square" lIns="0" tIns="0" rIns="0" bIns="0" rtlCol="0" anchor="ctr"/>
+          <a:lstStyle/>
+          <a:p>
+            <a:pPr algn="ctr" indent="0" marL="0">
+              <a:buNone/>
+            </a:pPr>
+            <a:r>
+              <a:rPr lang="en-US" sz="1400" b="1" dirty="0">
+                <a:solidFill>
+                  <a:srgbClr val="0D9488"/>
+                </a:solidFill>
+                <a:latin typeface="Trebuchet MS" pitchFamily="34" charset="0"/>
+                <a:ea typeface="Trebuchet MS" pitchFamily="34" charset="-122"/>
+                <a:cs typeface="Trebuchet MS" pitchFamily="34" charset="-120"/>
+              </a:rPr>
               <a:t>judge</a:t>
             </a:r>
             <a:endParaRPr lang="en-US" sz="1400" dirty="0"/>
@@ -8900,7 +9229,7 @@
       </p:sp>
       <p:sp>
         <p:nvSpPr>
-          <p:cNvPr id="24" name="Shape 22"/>
+          <p:cNvPr id="30" name="Shape 28"/>
           <p:cNvSpPr/>
           <p:nvPr/>
         </p:nvSpPr>
@@ -8927,7 +9256,7 @@
       </p:sp>
       <p:sp>
         <p:nvSpPr>
-          <p:cNvPr id="25" name="Text 23"/>
+          <p:cNvPr id="31" name="Text 29"/>
           <p:cNvSpPr/>
           <p:nvPr/>
         </p:nvSpPr>
@@ -8966,7 +9295,7 @@
       </p:sp>
       <p:sp>
         <p:nvSpPr>
-          <p:cNvPr id="26" name="Shape 24"/>
+          <p:cNvPr id="32" name="Shape 30"/>
           <p:cNvSpPr/>
           <p:nvPr/>
         </p:nvSpPr>
@@ -8993,7 +9322,7 @@
       </p:sp>
       <p:sp>
         <p:nvSpPr>
-          <p:cNvPr id="27" name="Text 25"/>
+          <p:cNvPr id="33" name="Text 31"/>
           <p:cNvSpPr/>
           <p:nvPr/>
         </p:nvSpPr>
@@ -9316,7 +9645,7 @@
                 <a:ea typeface="Calibri" pitchFamily="34" charset="-122"/>
                 <a:cs typeface="Calibri" pitchFamily="34" charset="-120"/>
               </a:rPr>
-              <a:t>Word Labs  •  wordlabs.app  •  Root: 'judge' = to decide or form opinion</a:t>
+              <a:t>Word Labs  •  wordlabs.app  •  Root: 'judge' = decide; form an opinion</a:t>
             </a:r>
             <a:endParaRPr lang="en-US" sz="800" dirty="0"/>
           </a:p>
@@ -9455,7 +9784,7 @@
                 <a:ea typeface="Trebuchet MS" pitchFamily="34" charset="-122"/>
                 <a:cs typeface="Trebuchet MS" pitchFamily="34" charset="-120"/>
               </a:rPr>
-              <a:t>judge</a:t>
+              <a:t>misjudge</a:t>
             </a:r>
             <a:endParaRPr lang="en-US" sz="2800" dirty="0"/>
           </a:p>
@@ -9535,7 +9864,7 @@
         </p:nvSpPr>
         <p:spPr>
           <a:xfrm>
-            <a:off x="4370832" y="2258568"/>
+            <a:off x="2938272" y="2258568"/>
             <a:ext cx="1828800" cy="292608"/>
           </a:xfrm>
           <a:prstGeom prst="rect">
@@ -9544,11 +9873,11 @@
             </a:avLst>
           </a:prstGeom>
           <a:solidFill>
-            <a:srgbClr val="CCFBF1"/>
+            <a:srgbClr val="DDD6FE"/>
           </a:solidFill>
           <a:ln w="19050">
             <a:solidFill>
-              <a:srgbClr val="0D9488"/>
+              <a:srgbClr val="7C3AED"/>
             </a:solidFill>
             <a:prstDash val="solid"/>
           </a:ln>
@@ -9569,7 +9898,7 @@
         </p:nvSpPr>
         <p:spPr>
           <a:xfrm>
-            <a:off x="4370832" y="2258568"/>
+            <a:off x="2938272" y="2258568"/>
             <a:ext cx="1828800" cy="292608"/>
           </a:xfrm>
           <a:prstGeom prst="rect">
@@ -9588,13 +9917,13 @@
             <a:r>
               <a:rPr lang="en-US" sz="1300" b="1" dirty="0">
                 <a:solidFill>
-                  <a:srgbClr val="0F766E"/>
+                  <a:srgbClr val="4C1D95"/>
                 </a:solidFill>
                 <a:latin typeface="Trebuchet MS" pitchFamily="34" charset="0"/>
                 <a:ea typeface="Trebuchet MS" pitchFamily="34" charset="-122"/>
                 <a:cs typeface="Trebuchet MS" pitchFamily="34" charset="-120"/>
               </a:rPr>
-              <a:t>judge</a:t>
+              <a:t>mis</a:t>
             </a:r>
             <a:endParaRPr lang="en-US" sz="1300" dirty="0"/>
           </a:p>
@@ -9608,7 +9937,7 @@
         </p:nvSpPr>
         <p:spPr>
           <a:xfrm>
-            <a:off x="4370832" y="2569464"/>
+            <a:off x="2938272" y="2569464"/>
             <a:ext cx="1828800" cy="201168"/>
           </a:xfrm>
           <a:prstGeom prst="rect">
@@ -9633,7 +9962,7 @@
                 <a:ea typeface="Calibri" pitchFamily="34" charset="-122"/>
                 <a:cs typeface="Calibri" pitchFamily="34" charset="-120"/>
               </a:rPr>
-              <a:t>to decide or form an opinion</a:t>
+              <a:t>wrong</a:t>
             </a:r>
             <a:endParaRPr lang="en-US" sz="850" dirty="0"/>
           </a:p>
@@ -9642,6 +9971,118 @@
       <p:sp>
         <p:nvSpPr>
           <p:cNvPr id="19" name="Shape 17"/>
+          <p:cNvSpPr/>
+          <p:nvPr/>
+        </p:nvSpPr>
+        <p:spPr>
+          <a:xfrm>
+            <a:off x="5803392" y="2258568"/>
+            <a:ext cx="1828800" cy="292608"/>
+          </a:xfrm>
+          <a:prstGeom prst="rect">
+            <a:avLst>
+              <a:gd name="adj" fmla="val 25000"/>
+            </a:avLst>
+          </a:prstGeom>
+          <a:solidFill>
+            <a:srgbClr val="CCFBF1"/>
+          </a:solidFill>
+          <a:ln w="19050">
+            <a:solidFill>
+              <a:srgbClr val="0D9488"/>
+            </a:solidFill>
+            <a:prstDash val="solid"/>
+          </a:ln>
+          <a:effectLst>
+            <a:outerShdw sx="100000" sy="100000" kx="0" ky="0" algn="bl" rotWithShape="0" blurRad="101600" dist="38100" dir="8100000">
+              <a:srgbClr val="000000">
+                <a:alpha val="12000"/>
+              </a:srgbClr>
+            </a:outerShdw>
+          </a:effectLst>
+        </p:spPr>
+      </p:sp>
+      <p:sp>
+        <p:nvSpPr>
+          <p:cNvPr id="20" name="Text 18"/>
+          <p:cNvSpPr/>
+          <p:nvPr/>
+        </p:nvSpPr>
+        <p:spPr>
+          <a:xfrm>
+            <a:off x="5803392" y="2258568"/>
+            <a:ext cx="1828800" cy="292608"/>
+          </a:xfrm>
+          <a:prstGeom prst="rect">
+            <a:avLst/>
+          </a:prstGeom>
+          <a:noFill/>
+          <a:ln/>
+        </p:spPr>
+        <p:txBody>
+          <a:bodyPr wrap="square" lIns="0" tIns="0" rIns="0" bIns="0" rtlCol="0" anchor="ctr"/>
+          <a:lstStyle/>
+          <a:p>
+            <a:pPr algn="ctr" indent="0" marL="0">
+              <a:buNone/>
+            </a:pPr>
+            <a:r>
+              <a:rPr lang="en-US" sz="1300" b="1" dirty="0">
+                <a:solidFill>
+                  <a:srgbClr val="0F766E"/>
+                </a:solidFill>
+                <a:latin typeface="Trebuchet MS" pitchFamily="34" charset="0"/>
+                <a:ea typeface="Trebuchet MS" pitchFamily="34" charset="-122"/>
+                <a:cs typeface="Trebuchet MS" pitchFamily="34" charset="-120"/>
+              </a:rPr>
+              <a:t>judge</a:t>
+            </a:r>
+            <a:endParaRPr lang="en-US" sz="1300" dirty="0"/>
+          </a:p>
+        </p:txBody>
+      </p:sp>
+      <p:sp>
+        <p:nvSpPr>
+          <p:cNvPr id="21" name="Text 19"/>
+          <p:cNvSpPr/>
+          <p:nvPr/>
+        </p:nvSpPr>
+        <p:spPr>
+          <a:xfrm>
+            <a:off x="5803392" y="2569464"/>
+            <a:ext cx="1828800" cy="201168"/>
+          </a:xfrm>
+          <a:prstGeom prst="rect">
+            <a:avLst/>
+          </a:prstGeom>
+          <a:noFill/>
+          <a:ln/>
+        </p:spPr>
+        <p:txBody>
+          <a:bodyPr wrap="square" lIns="0" tIns="0" rIns="0" bIns="0" rtlCol="0" anchor="t"/>
+          <a:lstStyle/>
+          <a:p>
+            <a:pPr algn="ctr" indent="0" marL="0">
+              <a:buNone/>
+            </a:pPr>
+            <a:r>
+              <a:rPr lang="en-US" sz="850" dirty="0">
+                <a:solidFill>
+                  <a:srgbClr val="475569"/>
+                </a:solidFill>
+                <a:latin typeface="Calibri" pitchFamily="34" charset="0"/>
+                <a:ea typeface="Calibri" pitchFamily="34" charset="-122"/>
+                <a:cs typeface="Calibri" pitchFamily="34" charset="-120"/>
+              </a:rPr>
+              <a:t>decide; form an opinion</a:t>
+            </a:r>
+            <a:endParaRPr lang="en-US" sz="850" dirty="0"/>
+          </a:p>
+        </p:txBody>
+      </p:sp>
+      <p:sp>
+        <p:nvSpPr>
+          <p:cNvPr id="22" name="Shape 20"/>
           <p:cNvSpPr/>
           <p:nvPr/>
         </p:nvSpPr>
@@ -9668,7 +10109,7 @@
       </p:sp>
       <p:sp>
         <p:nvSpPr>
-          <p:cNvPr id="20" name="Text 18"/>
+          <p:cNvPr id="23" name="Text 21"/>
           <p:cNvSpPr/>
           <p:nvPr/>
         </p:nvSpPr>
@@ -9707,7 +10148,7 @@
       </p:sp>
       <p:sp>
         <p:nvSpPr>
-          <p:cNvPr id="21" name="Shape 19"/>
+          <p:cNvPr id="24" name="Shape 22"/>
           <p:cNvSpPr/>
           <p:nvPr/>
         </p:nvSpPr>
@@ -9734,13 +10175,13 @@
       </p:sp>
       <p:sp>
         <p:nvSpPr>
-          <p:cNvPr id="22" name="Shape 20"/>
-          <p:cNvSpPr/>
-          <p:nvPr/>
-        </p:nvSpPr>
-        <p:spPr>
-          <a:xfrm>
-            <a:off x="4370832" y="3364992"/>
+          <p:cNvPr id="25" name="Shape 23"/>
+          <p:cNvSpPr/>
+          <p:nvPr/>
+        </p:nvSpPr>
+        <p:spPr>
+          <a:xfrm>
+            <a:off x="2999232" y="3364992"/>
             <a:ext cx="1645920" cy="475488"/>
           </a:xfrm>
           <a:prstGeom prst="rect">
@@ -9761,13 +10202,13 @@
       </p:sp>
       <p:sp>
         <p:nvSpPr>
-          <p:cNvPr id="23" name="Text 21"/>
-          <p:cNvSpPr/>
-          <p:nvPr/>
-        </p:nvSpPr>
-        <p:spPr>
-          <a:xfrm>
-            <a:off x="4370832" y="3364992"/>
+          <p:cNvPr id="26" name="Text 24"/>
+          <p:cNvSpPr/>
+          <p:nvPr/>
+        </p:nvSpPr>
+        <p:spPr>
+          <a:xfrm>
+            <a:off x="2999232" y="3364992"/>
             <a:ext cx="1645920" cy="475488"/>
           </a:xfrm>
           <a:prstGeom prst="rect">
@@ -9792,6 +10233,111 @@
                 <a:ea typeface="Trebuchet MS" pitchFamily="34" charset="-122"/>
                 <a:cs typeface="Trebuchet MS" pitchFamily="34" charset="-120"/>
               </a:rPr>
+              <a:t>mis</a:t>
+            </a:r>
+            <a:endParaRPr lang="en-US" sz="1400" dirty="0"/>
+          </a:p>
+        </p:txBody>
+      </p:sp>
+      <p:sp>
+        <p:nvSpPr>
+          <p:cNvPr id="27" name="Text 25"/>
+          <p:cNvSpPr/>
+          <p:nvPr/>
+        </p:nvSpPr>
+        <p:spPr>
+          <a:xfrm>
+            <a:off x="4645152" y="3364992"/>
+            <a:ext cx="1097280" cy="475488"/>
+          </a:xfrm>
+          <a:prstGeom prst="rect">
+            <a:avLst/>
+          </a:prstGeom>
+          <a:noFill/>
+          <a:ln/>
+        </p:spPr>
+        <p:txBody>
+          <a:bodyPr wrap="square" lIns="0" tIns="0" rIns="0" bIns="0" rtlCol="0" anchor="ctr"/>
+          <a:lstStyle/>
+          <a:p>
+            <a:pPr algn="ctr" indent="0" marL="0">
+              <a:buNone/>
+            </a:pPr>
+            <a:r>
+              <a:rPr lang="en-US" sz="1600" b="1" dirty="0">
+                <a:solidFill>
+                  <a:srgbClr val="0D9488"/>
+                </a:solidFill>
+                <a:latin typeface="Trebuchet MS" pitchFamily="34" charset="0"/>
+                <a:ea typeface="Trebuchet MS" pitchFamily="34" charset="-122"/>
+                <a:cs typeface="Trebuchet MS" pitchFamily="34" charset="-120"/>
+              </a:rPr>
+              <a:t>·</a:t>
+            </a:r>
+            <a:endParaRPr lang="en-US" sz="1600" dirty="0"/>
+          </a:p>
+        </p:txBody>
+      </p:sp>
+      <p:sp>
+        <p:nvSpPr>
+          <p:cNvPr id="28" name="Shape 26"/>
+          <p:cNvSpPr/>
+          <p:nvPr/>
+        </p:nvSpPr>
+        <p:spPr>
+          <a:xfrm>
+            <a:off x="5742432" y="3364992"/>
+            <a:ext cx="1645920" cy="475488"/>
+          </a:xfrm>
+          <a:prstGeom prst="rect">
+            <a:avLst>
+              <a:gd name="adj" fmla="val 9615"/>
+            </a:avLst>
+          </a:prstGeom>
+          <a:solidFill>
+            <a:srgbClr val="FFFFFF"/>
+          </a:solidFill>
+          <a:ln w="12700">
+            <a:solidFill>
+              <a:srgbClr val="0D9488"/>
+            </a:solidFill>
+            <a:prstDash val="solid"/>
+          </a:ln>
+        </p:spPr>
+      </p:sp>
+      <p:sp>
+        <p:nvSpPr>
+          <p:cNvPr id="29" name="Text 27"/>
+          <p:cNvSpPr/>
+          <p:nvPr/>
+        </p:nvSpPr>
+        <p:spPr>
+          <a:xfrm>
+            <a:off x="5742432" y="3364992"/>
+            <a:ext cx="1645920" cy="475488"/>
+          </a:xfrm>
+          <a:prstGeom prst="rect">
+            <a:avLst/>
+          </a:prstGeom>
+          <a:noFill/>
+          <a:ln/>
+        </p:spPr>
+        <p:txBody>
+          <a:bodyPr wrap="square" lIns="0" tIns="0" rIns="0" bIns="0" rtlCol="0" anchor="ctr"/>
+          <a:lstStyle/>
+          <a:p>
+            <a:pPr algn="ctr" indent="0" marL="0">
+              <a:buNone/>
+            </a:pPr>
+            <a:r>
+              <a:rPr lang="en-US" sz="1400" b="1" dirty="0">
+                <a:solidFill>
+                  <a:srgbClr val="0D9488"/>
+                </a:solidFill>
+                <a:latin typeface="Trebuchet MS" pitchFamily="34" charset="0"/>
+                <a:ea typeface="Trebuchet MS" pitchFamily="34" charset="-122"/>
+                <a:cs typeface="Trebuchet MS" pitchFamily="34" charset="-120"/>
+              </a:rPr>
               <a:t>judge</a:t>
             </a:r>
             <a:endParaRPr lang="en-US" sz="1400" dirty="0"/>
@@ -9800,7 +10346,7 @@
       </p:sp>
       <p:sp>
         <p:nvSpPr>
-          <p:cNvPr id="24" name="Shape 22"/>
+          <p:cNvPr id="30" name="Shape 28"/>
           <p:cNvSpPr/>
           <p:nvPr/>
         </p:nvSpPr>
@@ -9827,7 +10373,7 @@
       </p:sp>
       <p:sp>
         <p:nvSpPr>
-          <p:cNvPr id="25" name="Text 23"/>
+          <p:cNvPr id="31" name="Text 29"/>
           <p:cNvSpPr/>
           <p:nvPr/>
         </p:nvSpPr>
@@ -9866,18 +10412,18 @@
       </p:sp>
       <p:sp>
         <p:nvSpPr>
-          <p:cNvPr id="26" name="Shape 24"/>
+          <p:cNvPr id="32" name="Shape 30"/>
           <p:cNvSpPr/>
           <p:nvPr/>
         </p:nvSpPr>
         <p:spPr>
           <a:xfrm>
             <a:off x="1874520" y="4096512"/>
-            <a:ext cx="6903720" cy="804672"/>
+            <a:ext cx="6903720" cy="658368"/>
           </a:xfrm>
           <a:prstGeom prst="rect">
             <a:avLst>
-              <a:gd name="adj" fmla="val 6818"/>
+              <a:gd name="adj" fmla="val 8333"/>
             </a:avLst>
           </a:prstGeom>
           <a:solidFill>
@@ -9893,18 +10439,18 @@
       </p:sp>
       <p:sp>
         <p:nvSpPr>
-          <p:cNvPr id="27" name="Shape 25"/>
-          <p:cNvSpPr/>
-          <p:nvPr/>
-        </p:nvSpPr>
-        <p:spPr>
-          <a:xfrm>
-            <a:off x="3033522" y="4169664"/>
-            <a:ext cx="685800" cy="384048"/>
+          <p:cNvPr id="33" name="Shape 31"/>
+          <p:cNvSpPr/>
+          <p:nvPr/>
+        </p:nvSpPr>
+        <p:spPr>
+          <a:xfrm>
+            <a:off x="2254649" y="4169664"/>
+            <a:ext cx="685800" cy="475488"/>
           </a:xfrm>
           <a:prstGeom prst="rect">
             <a:avLst>
-              <a:gd name="adj" fmla="val 9524"/>
+              <a:gd name="adj" fmla="val 7692"/>
             </a:avLst>
           </a:prstGeom>
           <a:solidFill>
@@ -9920,14 +10466,14 @@
       </p:sp>
       <p:sp>
         <p:nvSpPr>
-          <p:cNvPr id="28" name="Text 26"/>
-          <p:cNvSpPr/>
-          <p:nvPr/>
-        </p:nvSpPr>
-        <p:spPr>
-          <a:xfrm>
-            <a:off x="3033522" y="4169664"/>
-            <a:ext cx="685800" cy="384048"/>
+          <p:cNvPr id="34" name="Text 32"/>
+          <p:cNvSpPr/>
+          <p:nvPr/>
+        </p:nvSpPr>
+        <p:spPr>
+          <a:xfrm>
+            <a:off x="2254649" y="4169664"/>
+            <a:ext cx="685800" cy="475488"/>
           </a:xfrm>
           <a:prstGeom prst="rect">
             <a:avLst/>
@@ -9943,7 +10489,7 @@
               <a:buNone/>
             </a:pPr>
             <a:r>
-              <a:rPr lang="en-US" sz="1000" b="1" dirty="0">
+              <a:rPr lang="en-US" sz="900" b="1" dirty="0">
                 <a:solidFill>
                   <a:srgbClr val="9D174D"/>
                 </a:solidFill>
@@ -9951,26 +10497,26 @@
                 <a:ea typeface="Trebuchet MS" pitchFamily="34" charset="-122"/>
                 <a:cs typeface="Trebuchet MS" pitchFamily="34" charset="-120"/>
               </a:rPr>
-              <a:t>j</a:t>
-            </a:r>
-            <a:endParaRPr lang="en-US" sz="1000" dirty="0"/>
-          </a:p>
-        </p:txBody>
-      </p:sp>
-      <p:sp>
-        <p:nvSpPr>
-          <p:cNvPr id="29" name="Shape 27"/>
-          <p:cNvSpPr/>
-          <p:nvPr/>
-        </p:nvSpPr>
-        <p:spPr>
-          <a:xfrm>
-            <a:off x="4850892" y="4169664"/>
-            <a:ext cx="685800" cy="384048"/>
+              <a:t>m</a:t>
+            </a:r>
+            <a:endParaRPr lang="en-US" sz="900" dirty="0"/>
+          </a:p>
+        </p:txBody>
+      </p:sp>
+      <p:sp>
+        <p:nvSpPr>
+          <p:cNvPr id="35" name="Shape 33"/>
+          <p:cNvSpPr/>
+          <p:nvPr/>
+        </p:nvSpPr>
+        <p:spPr>
+          <a:xfrm>
+            <a:off x="3293146" y="4169664"/>
+            <a:ext cx="685800" cy="475488"/>
           </a:xfrm>
           <a:prstGeom prst="rect">
             <a:avLst>
-              <a:gd name="adj" fmla="val 9524"/>
+              <a:gd name="adj" fmla="val 7692"/>
             </a:avLst>
           </a:prstGeom>
           <a:solidFill>
@@ -9986,14 +10532,14 @@
       </p:sp>
       <p:sp>
         <p:nvSpPr>
-          <p:cNvPr id="30" name="Text 28"/>
-          <p:cNvSpPr/>
-          <p:nvPr/>
-        </p:nvSpPr>
-        <p:spPr>
-          <a:xfrm>
-            <a:off x="4850892" y="4169664"/>
-            <a:ext cx="685800" cy="384048"/>
+          <p:cNvPr id="36" name="Text 34"/>
+          <p:cNvSpPr/>
+          <p:nvPr/>
+        </p:nvSpPr>
+        <p:spPr>
+          <a:xfrm>
+            <a:off x="3293146" y="4169664"/>
+            <a:ext cx="685800" cy="475488"/>
           </a:xfrm>
           <a:prstGeom prst="rect">
             <a:avLst/>
@@ -10009,7 +10555,7 @@
               <a:buNone/>
             </a:pPr>
             <a:r>
-              <a:rPr lang="en-US" sz="1000" b="1" dirty="0">
+              <a:rPr lang="en-US" sz="900" b="1" dirty="0">
                 <a:solidFill>
                   <a:srgbClr val="9D174D"/>
                 </a:solidFill>
@@ -10017,26 +10563,26 @@
                 <a:ea typeface="Trebuchet MS" pitchFamily="34" charset="-122"/>
                 <a:cs typeface="Trebuchet MS" pitchFamily="34" charset="-120"/>
               </a:rPr>
-              <a:t>u</a:t>
-            </a:r>
-            <a:endParaRPr lang="en-US" sz="1000" dirty="0"/>
-          </a:p>
-        </p:txBody>
-      </p:sp>
-      <p:sp>
-        <p:nvSpPr>
-          <p:cNvPr id="31" name="Shape 29"/>
-          <p:cNvSpPr/>
-          <p:nvPr/>
-        </p:nvSpPr>
-        <p:spPr>
-          <a:xfrm>
-            <a:off x="6668262" y="4169664"/>
-            <a:ext cx="685800" cy="384048"/>
+              <a:t>i</a:t>
+            </a:r>
+            <a:endParaRPr lang="en-US" sz="900" dirty="0"/>
+          </a:p>
+        </p:txBody>
+      </p:sp>
+      <p:sp>
+        <p:nvSpPr>
+          <p:cNvPr id="37" name="Shape 35"/>
+          <p:cNvSpPr/>
+          <p:nvPr/>
+        </p:nvSpPr>
+        <p:spPr>
+          <a:xfrm>
+            <a:off x="4331643" y="4169664"/>
+            <a:ext cx="685800" cy="475488"/>
           </a:xfrm>
           <a:prstGeom prst="rect">
             <a:avLst>
-              <a:gd name="adj" fmla="val 9524"/>
+              <a:gd name="adj" fmla="val 7692"/>
             </a:avLst>
           </a:prstGeom>
           <a:solidFill>
@@ -10052,14 +10598,14 @@
       </p:sp>
       <p:sp>
         <p:nvSpPr>
-          <p:cNvPr id="32" name="Text 30"/>
-          <p:cNvSpPr/>
-          <p:nvPr/>
-        </p:nvSpPr>
-        <p:spPr>
-          <a:xfrm>
-            <a:off x="6668262" y="4169664"/>
-            <a:ext cx="685800" cy="384048"/>
+          <p:cNvPr id="38" name="Text 36"/>
+          <p:cNvSpPr/>
+          <p:nvPr/>
+        </p:nvSpPr>
+        <p:spPr>
+          <a:xfrm>
+            <a:off x="4331643" y="4169664"/>
+            <a:ext cx="685800" cy="475488"/>
           </a:xfrm>
           <a:prstGeom prst="rect">
             <a:avLst/>
@@ -10075,7 +10621,7 @@
               <a:buNone/>
             </a:pPr>
             <a:r>
-              <a:rPr lang="en-US" sz="1000" b="1" dirty="0">
+              <a:rPr lang="en-US" sz="900" b="1" dirty="0">
                 <a:solidFill>
                   <a:srgbClr val="9D174D"/>
                 </a:solidFill>
@@ -10083,48 +10629,207 @@
                 <a:ea typeface="Trebuchet MS" pitchFamily="34" charset="-122"/>
                 <a:cs typeface="Trebuchet MS" pitchFamily="34" charset="-120"/>
               </a:rPr>
+              <a:t>s</a:t>
+            </a:r>
+            <a:endParaRPr lang="en-US" sz="900" dirty="0"/>
+          </a:p>
+        </p:txBody>
+      </p:sp>
+      <p:sp>
+        <p:nvSpPr>
+          <p:cNvPr id="39" name="Shape 37"/>
+          <p:cNvSpPr/>
+          <p:nvPr/>
+        </p:nvSpPr>
+        <p:spPr>
+          <a:xfrm>
+            <a:off x="5370141" y="4169664"/>
+            <a:ext cx="685800" cy="475488"/>
+          </a:xfrm>
+          <a:prstGeom prst="rect">
+            <a:avLst>
+              <a:gd name="adj" fmla="val 7692"/>
+            </a:avLst>
+          </a:prstGeom>
+          <a:solidFill>
+            <a:srgbClr val="FFFFFF"/>
+          </a:solidFill>
+          <a:ln w="12700">
+            <a:solidFill>
+              <a:srgbClr val="DB2777"/>
+            </a:solidFill>
+            <a:prstDash val="solid"/>
+          </a:ln>
+        </p:spPr>
+      </p:sp>
+      <p:sp>
+        <p:nvSpPr>
+          <p:cNvPr id="40" name="Text 38"/>
+          <p:cNvSpPr/>
+          <p:nvPr/>
+        </p:nvSpPr>
+        <p:spPr>
+          <a:xfrm>
+            <a:off x="5370141" y="4169664"/>
+            <a:ext cx="685800" cy="475488"/>
+          </a:xfrm>
+          <a:prstGeom prst="rect">
+            <a:avLst/>
+          </a:prstGeom>
+          <a:noFill/>
+          <a:ln/>
+        </p:spPr>
+        <p:txBody>
+          <a:bodyPr wrap="square" lIns="0" tIns="0" rIns="0" bIns="0" rtlCol="0" anchor="ctr"/>
+          <a:lstStyle/>
+          <a:p>
+            <a:pPr algn="ctr" indent="0" marL="0">
+              <a:buNone/>
+            </a:pPr>
+            <a:r>
+              <a:rPr lang="en-US" sz="900" b="1" dirty="0">
+                <a:solidFill>
+                  <a:srgbClr val="9D174D"/>
+                </a:solidFill>
+                <a:latin typeface="Trebuchet MS" pitchFamily="34" charset="0"/>
+                <a:ea typeface="Trebuchet MS" pitchFamily="34" charset="-122"/>
+                <a:cs typeface="Trebuchet MS" pitchFamily="34" charset="-120"/>
+              </a:rPr>
+              <a:t>j</a:t>
+            </a:r>
+            <a:endParaRPr lang="en-US" sz="900" dirty="0"/>
+          </a:p>
+        </p:txBody>
+      </p:sp>
+      <p:sp>
+        <p:nvSpPr>
+          <p:cNvPr id="41" name="Shape 39"/>
+          <p:cNvSpPr/>
+          <p:nvPr/>
+        </p:nvSpPr>
+        <p:spPr>
+          <a:xfrm>
+            <a:off x="6408638" y="4169664"/>
+            <a:ext cx="685800" cy="475488"/>
+          </a:xfrm>
+          <a:prstGeom prst="rect">
+            <a:avLst>
+              <a:gd name="adj" fmla="val 7692"/>
+            </a:avLst>
+          </a:prstGeom>
+          <a:solidFill>
+            <a:srgbClr val="FFFFFF"/>
+          </a:solidFill>
+          <a:ln w="12700">
+            <a:solidFill>
+              <a:srgbClr val="DB2777"/>
+            </a:solidFill>
+            <a:prstDash val="solid"/>
+          </a:ln>
+        </p:spPr>
+      </p:sp>
+      <p:sp>
+        <p:nvSpPr>
+          <p:cNvPr id="42" name="Text 40"/>
+          <p:cNvSpPr/>
+          <p:nvPr/>
+        </p:nvSpPr>
+        <p:spPr>
+          <a:xfrm>
+            <a:off x="6408638" y="4169664"/>
+            <a:ext cx="685800" cy="475488"/>
+          </a:xfrm>
+          <a:prstGeom prst="rect">
+            <a:avLst/>
+          </a:prstGeom>
+          <a:noFill/>
+          <a:ln/>
+        </p:spPr>
+        <p:txBody>
+          <a:bodyPr wrap="square" lIns="0" tIns="0" rIns="0" bIns="0" rtlCol="0" anchor="ctr"/>
+          <a:lstStyle/>
+          <a:p>
+            <a:pPr algn="ctr" indent="0" marL="0">
+              <a:buNone/>
+            </a:pPr>
+            <a:r>
+              <a:rPr lang="en-US" sz="900" b="1" dirty="0">
+                <a:solidFill>
+                  <a:srgbClr val="9D174D"/>
+                </a:solidFill>
+                <a:latin typeface="Trebuchet MS" pitchFamily="34" charset="0"/>
+                <a:ea typeface="Trebuchet MS" pitchFamily="34" charset="-122"/>
+                <a:cs typeface="Trebuchet MS" pitchFamily="34" charset="-120"/>
+              </a:rPr>
+              <a:t>u</a:t>
+            </a:r>
+            <a:endParaRPr lang="en-US" sz="900" dirty="0"/>
+          </a:p>
+        </p:txBody>
+      </p:sp>
+      <p:sp>
+        <p:nvSpPr>
+          <p:cNvPr id="43" name="Shape 41"/>
+          <p:cNvSpPr/>
+          <p:nvPr/>
+        </p:nvSpPr>
+        <p:spPr>
+          <a:xfrm>
+            <a:off x="7447135" y="4169664"/>
+            <a:ext cx="685800" cy="475488"/>
+          </a:xfrm>
+          <a:prstGeom prst="rect">
+            <a:avLst>
+              <a:gd name="adj" fmla="val 7692"/>
+            </a:avLst>
+          </a:prstGeom>
+          <a:solidFill>
+            <a:srgbClr val="FFFFFF"/>
+          </a:solidFill>
+          <a:ln w="12700">
+            <a:solidFill>
+              <a:srgbClr val="DB2777"/>
+            </a:solidFill>
+            <a:prstDash val="solid"/>
+          </a:ln>
+        </p:spPr>
+      </p:sp>
+      <p:sp>
+        <p:nvSpPr>
+          <p:cNvPr id="44" name="Text 42"/>
+          <p:cNvSpPr/>
+          <p:nvPr/>
+        </p:nvSpPr>
+        <p:spPr>
+          <a:xfrm>
+            <a:off x="7447135" y="4169664"/>
+            <a:ext cx="685800" cy="475488"/>
+          </a:xfrm>
+          <a:prstGeom prst="rect">
+            <a:avLst/>
+          </a:prstGeom>
+          <a:noFill/>
+          <a:ln/>
+        </p:spPr>
+        <p:txBody>
+          <a:bodyPr wrap="square" lIns="0" tIns="0" rIns="0" bIns="0" rtlCol="0" anchor="ctr"/>
+          <a:lstStyle/>
+          <a:p>
+            <a:pPr algn="ctr" indent="0" marL="0">
+              <a:buNone/>
+            </a:pPr>
+            <a:r>
+              <a:rPr lang="en-US" sz="900" b="1" dirty="0">
+                <a:solidFill>
+                  <a:srgbClr val="9D174D"/>
+                </a:solidFill>
+                <a:latin typeface="Trebuchet MS" pitchFamily="34" charset="0"/>
+                <a:ea typeface="Trebuchet MS" pitchFamily="34" charset="-122"/>
+                <a:cs typeface="Trebuchet MS" pitchFamily="34" charset="-120"/>
+              </a:rPr>
               <a:t>dge</a:t>
             </a:r>
-            <a:endParaRPr lang="en-US" sz="1000" dirty="0"/>
-          </a:p>
-        </p:txBody>
-      </p:sp>
-      <p:sp>
-        <p:nvSpPr>
-          <p:cNvPr id="33" name="Text 31"/>
-          <p:cNvSpPr/>
-          <p:nvPr/>
-        </p:nvSpPr>
-        <p:spPr>
-          <a:xfrm>
-            <a:off x="6668262" y="4572000"/>
-            <a:ext cx="685800" cy="219456"/>
-          </a:xfrm>
-          <a:prstGeom prst="rect">
-            <a:avLst/>
-          </a:prstGeom>
-          <a:noFill/>
-          <a:ln/>
-        </p:spPr>
-        <p:txBody>
-          <a:bodyPr wrap="square" lIns="0" tIns="0" rIns="0" bIns="0" rtlCol="0" anchor="t"/>
-          <a:lstStyle/>
-          <a:p>
-            <a:pPr algn="ctr" indent="0" marL="0">
-              <a:buNone/>
-            </a:pPr>
-            <a:r>
-              <a:rPr lang="en-US" sz="750" i="1" dirty="0">
-                <a:solidFill>
-                  <a:srgbClr val="94A3B8"/>
-                </a:solidFill>
-                <a:latin typeface="Calibri" pitchFamily="34" charset="0"/>
-                <a:ea typeface="Calibri" pitchFamily="34" charset="-122"/>
-                <a:cs typeface="Calibri" pitchFamily="34" charset="-120"/>
-              </a:rPr>
-              <a:t>/j/</a:t>
-            </a:r>
-            <a:endParaRPr lang="en-US" sz="750" dirty="0"/>
+            <a:endParaRPr lang="en-US" sz="900" dirty="0"/>
           </a:p>
         </p:txBody>
       </p:sp>
@@ -10414,7 +11119,7 @@
                 <a:ea typeface="Calibri" pitchFamily="34" charset="-122"/>
                 <a:cs typeface="Calibri" pitchFamily="34" charset="-120"/>
               </a:rPr>
-              <a:t>Word Labs  •  wordlabs.app  •  Root: 'judge' = to decide or form opinion</a:t>
+              <a:t>Word Labs  •  wordlabs.app  •  Root: 'judge' = decide; form an opinion</a:t>
             </a:r>
             <a:endParaRPr lang="en-US" sz="800" dirty="0"/>
           </a:p>
@@ -10553,7 +11258,7 @@
                 <a:ea typeface="Trebuchet MS" pitchFamily="34" charset="-122"/>
                 <a:cs typeface="Trebuchet MS" pitchFamily="34" charset="-120"/>
               </a:rPr>
-              <a:t>judgement</a:t>
+              <a:t>prejudge</a:t>
             </a:r>
             <a:endParaRPr lang="en-US" sz="2800" dirty="0"/>
           </a:p>
@@ -11241,7 +11946,7 @@
                 <a:ea typeface="Calibri" pitchFamily="34" charset="-122"/>
                 <a:cs typeface="Calibri" pitchFamily="34" charset="-120"/>
               </a:rPr>
-              <a:t>Word Labs  •  wordlabs.app  •  Root: 'judge' = to decide or form opinion</a:t>
+              <a:t>Word Labs  •  wordlabs.app  •  Root: 'judge' = decide; form an opinion</a:t>
             </a:r>
             <a:endParaRPr lang="en-US" sz="800" dirty="0"/>
           </a:p>
@@ -11380,7 +12085,7 @@
                 <a:ea typeface="Trebuchet MS" pitchFamily="34" charset="-122"/>
                 <a:cs typeface="Trebuchet MS" pitchFamily="34" charset="-120"/>
               </a:rPr>
-              <a:t>judgement</a:t>
+              <a:t>prejudge</a:t>
             </a:r>
             <a:endParaRPr lang="en-US" sz="2800" dirty="0"/>
           </a:p>
@@ -11469,11 +12174,11 @@
             </a:avLst>
           </a:prstGeom>
           <a:solidFill>
-            <a:srgbClr val="CCFBF1"/>
+            <a:srgbClr val="DDD6FE"/>
           </a:solidFill>
           <a:ln w="19050">
             <a:solidFill>
-              <a:srgbClr val="0D9488"/>
+              <a:srgbClr val="7C3AED"/>
             </a:solidFill>
             <a:prstDash val="solid"/>
           </a:ln>
@@ -11513,13 +12218,13 @@
             <a:r>
               <a:rPr lang="en-US" sz="1300" b="1" dirty="0">
                 <a:solidFill>
-                  <a:srgbClr val="0F766E"/>
+                  <a:srgbClr val="4C1D95"/>
                 </a:solidFill>
                 <a:latin typeface="Trebuchet MS" pitchFamily="34" charset="0"/>
                 <a:ea typeface="Trebuchet MS" pitchFamily="34" charset="-122"/>
                 <a:cs typeface="Trebuchet MS" pitchFamily="34" charset="-120"/>
               </a:rPr>
-              <a:t>judge</a:t>
+              <a:t>pre</a:t>
             </a:r>
             <a:endParaRPr lang="en-US" sz="1300" dirty="0"/>
           </a:p>
@@ -11558,7 +12263,7 @@
                 <a:ea typeface="Calibri" pitchFamily="34" charset="-122"/>
                 <a:cs typeface="Calibri" pitchFamily="34" charset="-120"/>
               </a:rPr>
-              <a:t>to decide or form an opinion</a:t>
+              <a:t>before</a:t>
             </a:r>
             <a:endParaRPr lang="en-US" sz="850" dirty="0"/>
           </a:p>
@@ -11581,11 +12286,11 @@
             </a:avLst>
           </a:prstGeom>
           <a:solidFill>
-            <a:srgbClr val="FCE7F3"/>
+            <a:srgbClr val="CCFBF1"/>
           </a:solidFill>
           <a:ln w="19050">
             <a:solidFill>
-              <a:srgbClr val="DB2777"/>
+              <a:srgbClr val="0D9488"/>
             </a:solidFill>
             <a:prstDash val="solid"/>
           </a:ln>
@@ -11625,13 +12330,13 @@
             <a:r>
               <a:rPr lang="en-US" sz="1300" b="1" dirty="0">
                 <a:solidFill>
-                  <a:srgbClr val="9D174D"/>
+                  <a:srgbClr val="0F766E"/>
                 </a:solidFill>
                 <a:latin typeface="Trebuchet MS" pitchFamily="34" charset="0"/>
                 <a:ea typeface="Trebuchet MS" pitchFamily="34" charset="-122"/>
                 <a:cs typeface="Trebuchet MS" pitchFamily="34" charset="-120"/>
               </a:rPr>
-              <a:t>ment</a:t>
+              <a:t>judge</a:t>
             </a:r>
             <a:endParaRPr lang="en-US" sz="1300" dirty="0"/>
           </a:p>
@@ -11670,7 +12375,7 @@
                 <a:ea typeface="Calibri" pitchFamily="34" charset="-122"/>
                 <a:cs typeface="Calibri" pitchFamily="34" charset="-120"/>
               </a:rPr>
-              <a:t>result or state of</a:t>
+              <a:t>decide; form an opinion</a:t>
             </a:r>
             <a:endParaRPr lang="en-US" sz="850" dirty="0"/>
           </a:p>
@@ -12226,7 +12931,7 @@
                 <a:ea typeface="Calibri" pitchFamily="34" charset="-122"/>
                 <a:cs typeface="Calibri" pitchFamily="34" charset="-120"/>
               </a:rPr>
-              <a:t>Word Labs  •  wordlabs.app  •  Root: 'judge' = to decide or form opinion</a:t>
+              <a:t>Word Labs  •  wordlabs.app  •  Root: 'judge' = decide; form an opinion</a:t>
             </a:r>
             <a:endParaRPr lang="en-US" sz="800" dirty="0"/>
           </a:p>
@@ -12365,7 +13070,7 @@
                 <a:ea typeface="Trebuchet MS" pitchFamily="34" charset="-122"/>
                 <a:cs typeface="Trebuchet MS" pitchFamily="34" charset="-120"/>
               </a:rPr>
-              <a:t>judgement</a:t>
+              <a:t>prejudge</a:t>
             </a:r>
             <a:endParaRPr lang="en-US" sz="2800" dirty="0"/>
           </a:p>
@@ -12454,11 +13159,11 @@
             </a:avLst>
           </a:prstGeom>
           <a:solidFill>
-            <a:srgbClr val="CCFBF1"/>
+            <a:srgbClr val="DDD6FE"/>
           </a:solidFill>
           <a:ln w="19050">
             <a:solidFill>
-              <a:srgbClr val="0D9488"/>
+              <a:srgbClr val="7C3AED"/>
             </a:solidFill>
             <a:prstDash val="solid"/>
           </a:ln>
@@ -12498,13 +13203,13 @@
             <a:r>
               <a:rPr lang="en-US" sz="1300" b="1" dirty="0">
                 <a:solidFill>
-                  <a:srgbClr val="0F766E"/>
+                  <a:srgbClr val="4C1D95"/>
                 </a:solidFill>
                 <a:latin typeface="Trebuchet MS" pitchFamily="34" charset="0"/>
                 <a:ea typeface="Trebuchet MS" pitchFamily="34" charset="-122"/>
                 <a:cs typeface="Trebuchet MS" pitchFamily="34" charset="-120"/>
               </a:rPr>
-              <a:t>judge</a:t>
+              <a:t>pre</a:t>
             </a:r>
             <a:endParaRPr lang="en-US" sz="1300" dirty="0"/>
           </a:p>
@@ -12543,7 +13248,7 @@
                 <a:ea typeface="Calibri" pitchFamily="34" charset="-122"/>
                 <a:cs typeface="Calibri" pitchFamily="34" charset="-120"/>
               </a:rPr>
-              <a:t>to decide or form an opinion</a:t>
+              <a:t>before</a:t>
             </a:r>
             <a:endParaRPr lang="en-US" sz="850" dirty="0"/>
           </a:p>
@@ -12566,11 +13271,11 @@
             </a:avLst>
           </a:prstGeom>
           <a:solidFill>
-            <a:srgbClr val="FCE7F3"/>
+            <a:srgbClr val="CCFBF1"/>
           </a:solidFill>
           <a:ln w="19050">
             <a:solidFill>
-              <a:srgbClr val="DB2777"/>
+              <a:srgbClr val="0D9488"/>
             </a:solidFill>
             <a:prstDash val="solid"/>
           </a:ln>
@@ -12610,13 +13315,13 @@
             <a:r>
               <a:rPr lang="en-US" sz="1300" b="1" dirty="0">
                 <a:solidFill>
-                  <a:srgbClr val="9D174D"/>
+                  <a:srgbClr val="0F766E"/>
                 </a:solidFill>
                 <a:latin typeface="Trebuchet MS" pitchFamily="34" charset="0"/>
                 <a:ea typeface="Trebuchet MS" pitchFamily="34" charset="-122"/>
                 <a:cs typeface="Trebuchet MS" pitchFamily="34" charset="-120"/>
               </a:rPr>
-              <a:t>ment</a:t>
+              <a:t>judge</a:t>
             </a:r>
             <a:endParaRPr lang="en-US" sz="1300" dirty="0"/>
           </a:p>
@@ -12655,7 +13360,7 @@
                 <a:ea typeface="Calibri" pitchFamily="34" charset="-122"/>
                 <a:cs typeface="Calibri" pitchFamily="34" charset="-120"/>
               </a:rPr>
-              <a:t>result or state of</a:t>
+              <a:t>decide; form an opinion</a:t>
             </a:r>
             <a:endParaRPr lang="en-US" sz="850" dirty="0"/>
           </a:p>
@@ -12814,7 +13519,7 @@
                 <a:ea typeface="Trebuchet MS" pitchFamily="34" charset="-122"/>
                 <a:cs typeface="Trebuchet MS" pitchFamily="34" charset="-120"/>
               </a:rPr>
-              <a:t>judge</a:t>
+              <a:t>pre</a:t>
             </a:r>
             <a:endParaRPr lang="en-US" sz="1400" dirty="0"/>
           </a:p>
@@ -12919,7 +13624,7 @@
                 <a:ea typeface="Trebuchet MS" pitchFamily="34" charset="-122"/>
                 <a:cs typeface="Trebuchet MS" pitchFamily="34" charset="-120"/>
               </a:rPr>
-              <a:t>ment</a:t>
+              <a:t>judge</a:t>
             </a:r>
             <a:endParaRPr lang="en-US" sz="1400" dirty="0"/>
           </a:p>
@@ -13252,7 +13957,7 @@
                 <a:ea typeface="Calibri" pitchFamily="34" charset="-122"/>
                 <a:cs typeface="Calibri" pitchFamily="34" charset="-120"/>
               </a:rPr>
-              <a:t>Root 'judge' — to decide or form opinion</a:t>
+              <a:t>Root 'judge' — decide; form an opinion</a:t>
             </a:r>
             <a:endParaRPr lang="en-US" sz="1600" dirty="0"/>
           </a:p>
@@ -13608,7 +14313,7 @@
                 <a:ea typeface="Calibri" pitchFamily="34" charset="-122"/>
                 <a:cs typeface="Calibri" pitchFamily="34" charset="-120"/>
               </a:rPr>
-              <a:t>Word Labs  •  wordlabs.app  •  Root: 'judge' = to decide or form opinion</a:t>
+              <a:t>Word Labs  •  wordlabs.app  •  Root: 'judge' = decide; form an opinion</a:t>
             </a:r>
             <a:endParaRPr lang="en-US" sz="800" dirty="0"/>
           </a:p>
@@ -13747,7 +14452,7 @@
                 <a:ea typeface="Trebuchet MS" pitchFamily="34" charset="-122"/>
                 <a:cs typeface="Trebuchet MS" pitchFamily="34" charset="-120"/>
               </a:rPr>
-              <a:t>judgement</a:t>
+              <a:t>prejudge</a:t>
             </a:r>
             <a:endParaRPr lang="en-US" sz="2800" dirty="0"/>
           </a:p>
@@ -13836,11 +14541,11 @@
             </a:avLst>
           </a:prstGeom>
           <a:solidFill>
-            <a:srgbClr val="CCFBF1"/>
+            <a:srgbClr val="DDD6FE"/>
           </a:solidFill>
           <a:ln w="19050">
             <a:solidFill>
-              <a:srgbClr val="0D9488"/>
+              <a:srgbClr val="7C3AED"/>
             </a:solidFill>
             <a:prstDash val="solid"/>
           </a:ln>
@@ -13880,13 +14585,13 @@
             <a:r>
               <a:rPr lang="en-US" sz="1300" b="1" dirty="0">
                 <a:solidFill>
-                  <a:srgbClr val="0F766E"/>
+                  <a:srgbClr val="4C1D95"/>
                 </a:solidFill>
                 <a:latin typeface="Trebuchet MS" pitchFamily="34" charset="0"/>
                 <a:ea typeface="Trebuchet MS" pitchFamily="34" charset="-122"/>
                 <a:cs typeface="Trebuchet MS" pitchFamily="34" charset="-120"/>
               </a:rPr>
-              <a:t>judge</a:t>
+              <a:t>pre</a:t>
             </a:r>
             <a:endParaRPr lang="en-US" sz="1300" dirty="0"/>
           </a:p>
@@ -13925,7 +14630,7 @@
                 <a:ea typeface="Calibri" pitchFamily="34" charset="-122"/>
                 <a:cs typeface="Calibri" pitchFamily="34" charset="-120"/>
               </a:rPr>
-              <a:t>to decide or form an opinion</a:t>
+              <a:t>before</a:t>
             </a:r>
             <a:endParaRPr lang="en-US" sz="850" dirty="0"/>
           </a:p>
@@ -13948,11 +14653,11 @@
             </a:avLst>
           </a:prstGeom>
           <a:solidFill>
-            <a:srgbClr val="FCE7F3"/>
+            <a:srgbClr val="CCFBF1"/>
           </a:solidFill>
           <a:ln w="19050">
             <a:solidFill>
-              <a:srgbClr val="DB2777"/>
+              <a:srgbClr val="0D9488"/>
             </a:solidFill>
             <a:prstDash val="solid"/>
           </a:ln>
@@ -13992,13 +14697,13 @@
             <a:r>
               <a:rPr lang="en-US" sz="1300" b="1" dirty="0">
                 <a:solidFill>
-                  <a:srgbClr val="9D174D"/>
+                  <a:srgbClr val="0F766E"/>
                 </a:solidFill>
                 <a:latin typeface="Trebuchet MS" pitchFamily="34" charset="0"/>
                 <a:ea typeface="Trebuchet MS" pitchFamily="34" charset="-122"/>
                 <a:cs typeface="Trebuchet MS" pitchFamily="34" charset="-120"/>
               </a:rPr>
-              <a:t>ment</a:t>
+              <a:t>judge</a:t>
             </a:r>
             <a:endParaRPr lang="en-US" sz="1300" dirty="0"/>
           </a:p>
@@ -14037,7 +14742,7 @@
                 <a:ea typeface="Calibri" pitchFamily="34" charset="-122"/>
                 <a:cs typeface="Calibri" pitchFamily="34" charset="-120"/>
               </a:rPr>
-              <a:t>result or state of</a:t>
+              <a:t>decide; form an opinion</a:t>
             </a:r>
             <a:endParaRPr lang="en-US" sz="850" dirty="0"/>
           </a:p>
@@ -14196,7 +14901,7 @@
                 <a:ea typeface="Trebuchet MS" pitchFamily="34" charset="-122"/>
                 <a:cs typeface="Trebuchet MS" pitchFamily="34" charset="-120"/>
               </a:rPr>
-              <a:t>judge</a:t>
+              <a:t>pre</a:t>
             </a:r>
             <a:endParaRPr lang="en-US" sz="1400" dirty="0"/>
           </a:p>
@@ -14301,7 +15006,7 @@
                 <a:ea typeface="Trebuchet MS" pitchFamily="34" charset="-122"/>
                 <a:cs typeface="Trebuchet MS" pitchFamily="34" charset="-120"/>
               </a:rPr>
-              <a:t>ment</a:t>
+              <a:t>judge</a:t>
             </a:r>
             <a:endParaRPr lang="en-US" sz="1400" dirty="0"/>
           </a:p>
@@ -14382,11 +15087,11 @@
         <p:spPr>
           <a:xfrm>
             <a:off x="1874520" y="4096512"/>
-            <a:ext cx="6903720" cy="804672"/>
+            <a:ext cx="6903720" cy="658368"/>
           </a:xfrm>
           <a:prstGeom prst="rect">
             <a:avLst>
-              <a:gd name="adj" fmla="val 6818"/>
+              <a:gd name="adj" fmla="val 8333"/>
             </a:avLst>
           </a:prstGeom>
           <a:solidFill>
@@ -14408,12 +15113,12 @@
         </p:nvSpPr>
         <p:spPr>
           <a:xfrm>
-            <a:off x="2124837" y="4169664"/>
-            <a:ext cx="685800" cy="384048"/>
+            <a:off x="2254649" y="4169664"/>
+            <a:ext cx="685800" cy="475488"/>
           </a:xfrm>
           <a:prstGeom prst="rect">
             <a:avLst>
-              <a:gd name="adj" fmla="val 9524"/>
+              <a:gd name="adj" fmla="val 7692"/>
             </a:avLst>
           </a:prstGeom>
           <a:solidFill>
@@ -14435,8 +15140,8 @@
         </p:nvSpPr>
         <p:spPr>
           <a:xfrm>
-            <a:off x="2124837" y="4169664"/>
-            <a:ext cx="685800" cy="384048"/>
+            <a:off x="2254649" y="4169664"/>
+            <a:ext cx="685800" cy="475488"/>
           </a:xfrm>
           <a:prstGeom prst="rect">
             <a:avLst/>
@@ -14460,7 +15165,7 @@
                 <a:ea typeface="Trebuchet MS" pitchFamily="34" charset="-122"/>
                 <a:cs typeface="Trebuchet MS" pitchFamily="34" charset="-120"/>
               </a:rPr>
-              <a:t>j</a:t>
+              <a:t>p</a:t>
             </a:r>
             <a:endParaRPr lang="en-US" sz="900" dirty="0"/>
           </a:p>
@@ -14474,12 +15179,12 @@
         </p:nvSpPr>
         <p:spPr>
           <a:xfrm>
-            <a:off x="3033522" y="4169664"/>
-            <a:ext cx="685800" cy="384048"/>
+            <a:off x="3293146" y="4169664"/>
+            <a:ext cx="685800" cy="475488"/>
           </a:xfrm>
           <a:prstGeom prst="rect">
             <a:avLst>
-              <a:gd name="adj" fmla="val 9524"/>
+              <a:gd name="adj" fmla="val 7692"/>
             </a:avLst>
           </a:prstGeom>
           <a:solidFill>
@@ -14501,8 +15206,8 @@
         </p:nvSpPr>
         <p:spPr>
           <a:xfrm>
-            <a:off x="3033522" y="4169664"/>
-            <a:ext cx="685800" cy="384048"/>
+            <a:off x="3293146" y="4169664"/>
+            <a:ext cx="685800" cy="475488"/>
           </a:xfrm>
           <a:prstGeom prst="rect">
             <a:avLst/>
@@ -14526,7 +15231,7 @@
                 <a:ea typeface="Trebuchet MS" pitchFamily="34" charset="-122"/>
                 <a:cs typeface="Trebuchet MS" pitchFamily="34" charset="-120"/>
               </a:rPr>
-              <a:t>u</a:t>
+              <a:t>r</a:t>
             </a:r>
             <a:endParaRPr lang="en-US" sz="900" dirty="0"/>
           </a:p>
@@ -14540,12 +15245,12 @@
         </p:nvSpPr>
         <p:spPr>
           <a:xfrm>
-            <a:off x="3942207" y="4169664"/>
-            <a:ext cx="685800" cy="384048"/>
+            <a:off x="4331643" y="4169664"/>
+            <a:ext cx="685800" cy="475488"/>
           </a:xfrm>
           <a:prstGeom prst="rect">
             <a:avLst>
-              <a:gd name="adj" fmla="val 9524"/>
+              <a:gd name="adj" fmla="val 7692"/>
             </a:avLst>
           </a:prstGeom>
           <a:solidFill>
@@ -14567,8 +15272,8 @@
         </p:nvSpPr>
         <p:spPr>
           <a:xfrm>
-            <a:off x="3942207" y="4169664"/>
-            <a:ext cx="685800" cy="384048"/>
+            <a:off x="4331643" y="4169664"/>
+            <a:ext cx="685800" cy="475488"/>
           </a:xfrm>
           <a:prstGeom prst="rect">
             <a:avLst/>
@@ -14592,7 +15297,7 @@
                 <a:ea typeface="Trebuchet MS" pitchFamily="34" charset="-122"/>
                 <a:cs typeface="Trebuchet MS" pitchFamily="34" charset="-120"/>
               </a:rPr>
-              <a:t>dge</a:t>
+              <a:t>e</a:t>
             </a:r>
             <a:endParaRPr lang="en-US" sz="900" dirty="0"/>
           </a:p>
@@ -14600,57 +15305,18 @@
       </p:sp>
       <p:sp>
         <p:nvSpPr>
-          <p:cNvPr id="39" name="Text 37"/>
-          <p:cNvSpPr/>
-          <p:nvPr/>
-        </p:nvSpPr>
-        <p:spPr>
-          <a:xfrm>
-            <a:off x="3942207" y="4572000"/>
-            <a:ext cx="685800" cy="219456"/>
-          </a:xfrm>
-          <a:prstGeom prst="rect">
-            <a:avLst/>
-          </a:prstGeom>
-          <a:noFill/>
-          <a:ln/>
-        </p:spPr>
-        <p:txBody>
-          <a:bodyPr wrap="square" lIns="0" tIns="0" rIns="0" bIns="0" rtlCol="0" anchor="t"/>
-          <a:lstStyle/>
-          <a:p>
-            <a:pPr algn="ctr" indent="0" marL="0">
-              <a:buNone/>
-            </a:pPr>
-            <a:r>
-              <a:rPr lang="en-US" sz="750" i="1" dirty="0">
-                <a:solidFill>
-                  <a:srgbClr val="94A3B8"/>
-                </a:solidFill>
-                <a:latin typeface="Calibri" pitchFamily="34" charset="0"/>
-                <a:ea typeface="Calibri" pitchFamily="34" charset="-122"/>
-                <a:cs typeface="Calibri" pitchFamily="34" charset="-120"/>
-              </a:rPr>
-              <a:t>/j/</a:t>
-            </a:r>
-            <a:endParaRPr lang="en-US" sz="750" dirty="0"/>
-          </a:p>
-        </p:txBody>
-      </p:sp>
-      <p:sp>
-        <p:nvSpPr>
-          <p:cNvPr id="40" name="Shape 38"/>
-          <p:cNvSpPr/>
-          <p:nvPr/>
-        </p:nvSpPr>
-        <p:spPr>
-          <a:xfrm>
-            <a:off x="4850892" y="4169664"/>
-            <a:ext cx="685800" cy="384048"/>
+          <p:cNvPr id="39" name="Shape 37"/>
+          <p:cNvSpPr/>
+          <p:nvPr/>
+        </p:nvSpPr>
+        <p:spPr>
+          <a:xfrm>
+            <a:off x="5370141" y="4169664"/>
+            <a:ext cx="685800" cy="475488"/>
           </a:xfrm>
           <a:prstGeom prst="rect">
             <a:avLst>
-              <a:gd name="adj" fmla="val 9524"/>
+              <a:gd name="adj" fmla="val 7692"/>
             </a:avLst>
           </a:prstGeom>
           <a:solidFill>
@@ -14666,14 +15332,14 @@
       </p:sp>
       <p:sp>
         <p:nvSpPr>
-          <p:cNvPr id="41" name="Text 39"/>
-          <p:cNvSpPr/>
-          <p:nvPr/>
-        </p:nvSpPr>
-        <p:spPr>
-          <a:xfrm>
-            <a:off x="4850892" y="4169664"/>
-            <a:ext cx="685800" cy="384048"/>
+          <p:cNvPr id="40" name="Text 38"/>
+          <p:cNvSpPr/>
+          <p:nvPr/>
+        </p:nvSpPr>
+        <p:spPr>
+          <a:xfrm>
+            <a:off x="5370141" y="4169664"/>
+            <a:ext cx="685800" cy="475488"/>
           </a:xfrm>
           <a:prstGeom prst="rect">
             <a:avLst/>
@@ -14697,7 +15363,7 @@
                 <a:ea typeface="Trebuchet MS" pitchFamily="34" charset="-122"/>
                 <a:cs typeface="Trebuchet MS" pitchFamily="34" charset="-120"/>
               </a:rPr>
-              <a:t>m</a:t>
+              <a:t>j</a:t>
             </a:r>
             <a:endParaRPr lang="en-US" sz="900" dirty="0"/>
           </a:p>
@@ -14705,18 +15371,18 @@
       </p:sp>
       <p:sp>
         <p:nvSpPr>
-          <p:cNvPr id="42" name="Shape 40"/>
-          <p:cNvSpPr/>
-          <p:nvPr/>
-        </p:nvSpPr>
-        <p:spPr>
-          <a:xfrm>
-            <a:off x="5759577" y="4169664"/>
-            <a:ext cx="685800" cy="384048"/>
+          <p:cNvPr id="41" name="Shape 39"/>
+          <p:cNvSpPr/>
+          <p:nvPr/>
+        </p:nvSpPr>
+        <p:spPr>
+          <a:xfrm>
+            <a:off x="6408638" y="4169664"/>
+            <a:ext cx="685800" cy="475488"/>
           </a:xfrm>
           <a:prstGeom prst="rect">
             <a:avLst>
-              <a:gd name="adj" fmla="val 9524"/>
+              <a:gd name="adj" fmla="val 7692"/>
             </a:avLst>
           </a:prstGeom>
           <a:solidFill>
@@ -14732,14 +15398,14 @@
       </p:sp>
       <p:sp>
         <p:nvSpPr>
-          <p:cNvPr id="43" name="Text 41"/>
-          <p:cNvSpPr/>
-          <p:nvPr/>
-        </p:nvSpPr>
-        <p:spPr>
-          <a:xfrm>
-            <a:off x="5759577" y="4169664"/>
-            <a:ext cx="685800" cy="384048"/>
+          <p:cNvPr id="42" name="Text 40"/>
+          <p:cNvSpPr/>
+          <p:nvPr/>
+        </p:nvSpPr>
+        <p:spPr>
+          <a:xfrm>
+            <a:off x="6408638" y="4169664"/>
+            <a:ext cx="685800" cy="475488"/>
           </a:xfrm>
           <a:prstGeom prst="rect">
             <a:avLst/>
@@ -14763,7 +15429,7 @@
                 <a:ea typeface="Trebuchet MS" pitchFamily="34" charset="-122"/>
                 <a:cs typeface="Trebuchet MS" pitchFamily="34" charset="-120"/>
               </a:rPr>
-              <a:t>e</a:t>
+              <a:t>u</a:t>
             </a:r>
             <a:endParaRPr lang="en-US" sz="900" dirty="0"/>
           </a:p>
@@ -14771,18 +15437,18 @@
       </p:sp>
       <p:sp>
         <p:nvSpPr>
-          <p:cNvPr id="44" name="Shape 42"/>
-          <p:cNvSpPr/>
-          <p:nvPr/>
-        </p:nvSpPr>
-        <p:spPr>
-          <a:xfrm>
-            <a:off x="6668262" y="4169664"/>
-            <a:ext cx="685800" cy="384048"/>
+          <p:cNvPr id="43" name="Shape 41"/>
+          <p:cNvSpPr/>
+          <p:nvPr/>
+        </p:nvSpPr>
+        <p:spPr>
+          <a:xfrm>
+            <a:off x="7447135" y="4169664"/>
+            <a:ext cx="685800" cy="475488"/>
           </a:xfrm>
           <a:prstGeom prst="rect">
             <a:avLst>
-              <a:gd name="adj" fmla="val 9524"/>
+              <a:gd name="adj" fmla="val 7692"/>
             </a:avLst>
           </a:prstGeom>
           <a:solidFill>
@@ -14798,14 +15464,14 @@
       </p:sp>
       <p:sp>
         <p:nvSpPr>
-          <p:cNvPr id="45" name="Text 43"/>
-          <p:cNvSpPr/>
-          <p:nvPr/>
-        </p:nvSpPr>
-        <p:spPr>
-          <a:xfrm>
-            <a:off x="6668262" y="4169664"/>
-            <a:ext cx="685800" cy="384048"/>
+          <p:cNvPr id="44" name="Text 42"/>
+          <p:cNvSpPr/>
+          <p:nvPr/>
+        </p:nvSpPr>
+        <p:spPr>
+          <a:xfrm>
+            <a:off x="7447135" y="4169664"/>
+            <a:ext cx="685800" cy="475488"/>
           </a:xfrm>
           <a:prstGeom prst="rect">
             <a:avLst/>
@@ -14829,73 +15495,7 @@
                 <a:ea typeface="Trebuchet MS" pitchFamily="34" charset="-122"/>
                 <a:cs typeface="Trebuchet MS" pitchFamily="34" charset="-120"/>
               </a:rPr>
-              <a:t>n</a:t>
-            </a:r>
-            <a:endParaRPr lang="en-US" sz="900" dirty="0"/>
-          </a:p>
-        </p:txBody>
-      </p:sp>
-      <p:sp>
-        <p:nvSpPr>
-          <p:cNvPr id="46" name="Shape 44"/>
-          <p:cNvSpPr/>
-          <p:nvPr/>
-        </p:nvSpPr>
-        <p:spPr>
-          <a:xfrm>
-            <a:off x="7576947" y="4169664"/>
-            <a:ext cx="685800" cy="384048"/>
-          </a:xfrm>
-          <a:prstGeom prst="rect">
-            <a:avLst>
-              <a:gd name="adj" fmla="val 9524"/>
-            </a:avLst>
-          </a:prstGeom>
-          <a:solidFill>
-            <a:srgbClr val="FFFFFF"/>
-          </a:solidFill>
-          <a:ln w="12700">
-            <a:solidFill>
-              <a:srgbClr val="DB2777"/>
-            </a:solidFill>
-            <a:prstDash val="solid"/>
-          </a:ln>
-        </p:spPr>
-      </p:sp>
-      <p:sp>
-        <p:nvSpPr>
-          <p:cNvPr id="47" name="Text 45"/>
-          <p:cNvSpPr/>
-          <p:nvPr/>
-        </p:nvSpPr>
-        <p:spPr>
-          <a:xfrm>
-            <a:off x="7576947" y="4169664"/>
-            <a:ext cx="685800" cy="384048"/>
-          </a:xfrm>
-          <a:prstGeom prst="rect">
-            <a:avLst/>
-          </a:prstGeom>
-          <a:noFill/>
-          <a:ln/>
-        </p:spPr>
-        <p:txBody>
-          <a:bodyPr wrap="square" lIns="0" tIns="0" rIns="0" bIns="0" rtlCol="0" anchor="ctr"/>
-          <a:lstStyle/>
-          <a:p>
-            <a:pPr algn="ctr" indent="0" marL="0">
-              <a:buNone/>
-            </a:pPr>
-            <a:r>
-              <a:rPr lang="en-US" sz="900" b="1" dirty="0">
-                <a:solidFill>
-                  <a:srgbClr val="9D174D"/>
-                </a:solidFill>
-                <a:latin typeface="Trebuchet MS" pitchFamily="34" charset="0"/>
-                <a:ea typeface="Trebuchet MS" pitchFamily="34" charset="-122"/>
-                <a:cs typeface="Trebuchet MS" pitchFamily="34" charset="-120"/>
-              </a:rPr>
-              <a:t>t</a:t>
+              <a:t>dge</a:t>
             </a:r>
             <a:endParaRPr lang="en-US" sz="900" dirty="0"/>
           </a:p>
@@ -15469,7 +16069,7 @@
                 <a:ea typeface="Calibri" pitchFamily="34" charset="-122"/>
                 <a:cs typeface="Calibri" pitchFamily="34" charset="-120"/>
               </a:rPr>
-              <a:t>Word Labs  •  wordlabs.app  •  Root: 'judge' = to decide or form opinion</a:t>
+              <a:t>Word Labs  •  wordlabs.app  •  Root: 'judge' = decide; form an opinion</a:t>
             </a:r>
             <a:endParaRPr lang="en-US" sz="800" dirty="0"/>
           </a:p>
@@ -15803,7 +16403,7 @@
                 <a:ea typeface="Trebuchet MS" pitchFamily="34" charset="-122"/>
                 <a:cs typeface="Trebuchet MS" pitchFamily="34" charset="-120"/>
               </a:rPr>
-              <a:t>1</a:t>
+              <a:t>0</a:t>
             </a:r>
             <a:pPr algn="ctr" indent="0" marL="0">
               <a:buNone/>
@@ -16109,7 +16709,7 @@
                 <a:ea typeface="Calibri" pitchFamily="34" charset="-122"/>
                 <a:cs typeface="Calibri" pitchFamily="34" charset="-120"/>
               </a:rPr>
-              <a:t>Word Labs  •  wordlabs.app  •  Root: 'judge' = to decide or form opinion</a:t>
+              <a:t>Word Labs  •  wordlabs.app  •  Root: 'judge' = decide; form an opinion</a:t>
             </a:r>
             <a:endParaRPr lang="en-US" sz="800" dirty="0"/>
           </a:p>
@@ -16221,7 +16821,7 @@
                 <a:ea typeface="Calibri" pitchFamily="34" charset="-122"/>
                 <a:cs typeface="Calibri" pitchFamily="34" charset="-120"/>
               </a:rPr>
-              <a:t>She knew it was wrong to </a:t>
+              <a:t>The court reached its </a:t>
             </a:r>
             <a:pPr algn="l" indent="0" marL="0">
               <a:buNone/>
@@ -16238,7 +16838,7 @@
                 <a:ea typeface="Calibri" pitchFamily="34" charset="-122"/>
                 <a:cs typeface="Calibri" pitchFamily="34" charset="-120"/>
               </a:rPr>
-              <a:t>prejudge</a:t>
+              <a:t>judgement</a:t>
             </a:r>
             <a:pPr algn="l" indent="0" marL="0">
               <a:buNone/>
@@ -16252,7 +16852,7 @@
                 <a:ea typeface="Calibri" pitchFamily="34" charset="-122"/>
                 <a:cs typeface="Calibri" pitchFamily="34" charset="-120"/>
               </a:rPr>
-              <a:t> him, but her </a:t>
+              <a:t> after a long trial. He </a:t>
             </a:r>
             <a:pPr algn="l" indent="0" marL="0">
               <a:buNone/>
@@ -16269,7 +16869,7 @@
                 <a:ea typeface="Calibri" pitchFamily="34" charset="-122"/>
                 <a:cs typeface="Calibri" pitchFamily="34" charset="-120"/>
               </a:rPr>
-              <a:t>misjudgement</a:t>
+              <a:t>misjudged</a:t>
             </a:r>
             <a:pPr algn="l" indent="0" marL="0">
               <a:buNone/>
@@ -16283,7 +16883,7 @@
                 <a:ea typeface="Calibri" pitchFamily="34" charset="-122"/>
                 <a:cs typeface="Calibri" pitchFamily="34" charset="-120"/>
               </a:rPr>
-              <a:t> had already made the situation </a:t>
+              <a:t> the gap and the ball flew straight into the net. He was </a:t>
             </a:r>
             <a:pPr algn="l" indent="0" marL="0">
               <a:buNone/>
@@ -16300,7 +16900,7 @@
                 <a:ea typeface="Calibri" pitchFamily="34" charset="-122"/>
                 <a:cs typeface="Calibri" pitchFamily="34" charset="-120"/>
               </a:rPr>
-              <a:t>judgemental</a:t>
+              <a:t>misjudging</a:t>
             </a:r>
             <a:pPr algn="l" indent="0" marL="0">
               <a:buNone/>
@@ -16314,7 +16914,7 @@
                 <a:ea typeface="Calibri" pitchFamily="34" charset="-122"/>
                 <a:cs typeface="Calibri" pitchFamily="34" charset="-120"/>
               </a:rPr>
-              <a:t>.</a:t>
+              <a:t> the speed of the car as it came around the bend.</a:t>
             </a:r>
             <a:endParaRPr lang="en-US" sz="1800" dirty="0"/>
           </a:p>
@@ -16469,7 +17069,7 @@
                 <a:ea typeface="Trebuchet MS" pitchFamily="34" charset="-122"/>
                 <a:cs typeface="Trebuchet MS" pitchFamily="34" charset="-120"/>
               </a:rPr>
-              <a:t>prejudge</a:t>
+              <a:t>judgement</a:t>
             </a:r>
             <a:endParaRPr lang="en-US" sz="1400" dirty="0"/>
           </a:p>
@@ -16597,7 +17197,7 @@
                 <a:ea typeface="Trebuchet MS" pitchFamily="34" charset="-122"/>
                 <a:cs typeface="Trebuchet MS" pitchFamily="34" charset="-120"/>
               </a:rPr>
-              <a:t>misjudgement</a:t>
+              <a:t>misjudged</a:t>
             </a:r>
             <a:endParaRPr lang="en-US" sz="1400" dirty="0"/>
           </a:p>
@@ -16725,7 +17325,7 @@
                 <a:ea typeface="Trebuchet MS" pitchFamily="34" charset="-122"/>
                 <a:cs typeface="Trebuchet MS" pitchFamily="34" charset="-120"/>
               </a:rPr>
-              <a:t>judgemental</a:t>
+              <a:t>misjudging</a:t>
             </a:r>
             <a:endParaRPr lang="en-US" sz="1400" dirty="0"/>
           </a:p>
@@ -17056,7 +17656,7 @@
                 <a:ea typeface="Calibri" pitchFamily="34" charset="-122"/>
                 <a:cs typeface="Calibri" pitchFamily="34" charset="-120"/>
               </a:rPr>
-              <a:t>Word Labs  •  wordlabs.app  •  Root: 'judge' = to decide or form opinion</a:t>
+              <a:t>Word Labs  •  wordlabs.app  •  Root: 'judge' = decide; form an opinion</a:t>
             </a:r>
             <a:endParaRPr lang="en-US" sz="800" dirty="0"/>
           </a:p>
@@ -17195,7 +17795,7 @@
                 <a:ea typeface="Trebuchet MS" pitchFamily="34" charset="-122"/>
                 <a:cs typeface="Trebuchet MS" pitchFamily="34" charset="-120"/>
               </a:rPr>
-              <a:t>prejudge</a:t>
+              <a:t>judgement</a:t>
             </a:r>
             <a:endParaRPr lang="en-US" sz="2800" dirty="0"/>
           </a:p>
@@ -17883,7 +18483,7 @@
                 <a:ea typeface="Calibri" pitchFamily="34" charset="-122"/>
                 <a:cs typeface="Calibri" pitchFamily="34" charset="-120"/>
               </a:rPr>
-              <a:t>Word Labs  •  wordlabs.app  •  Root: 'judge' = to decide or form opinion</a:t>
+              <a:t>Word Labs  •  wordlabs.app  •  Root: 'judge' = decide; form an opinion</a:t>
             </a:r>
             <a:endParaRPr lang="en-US" sz="800" dirty="0"/>
           </a:p>
@@ -18022,7 +18622,7 @@
                 <a:ea typeface="Trebuchet MS" pitchFamily="34" charset="-122"/>
                 <a:cs typeface="Trebuchet MS" pitchFamily="34" charset="-120"/>
               </a:rPr>
-              <a:t>prejudge</a:t>
+              <a:t>judgement</a:t>
             </a:r>
             <a:endParaRPr lang="en-US" sz="2800" dirty="0"/>
           </a:p>
@@ -18111,11 +18711,11 @@
             </a:avLst>
           </a:prstGeom>
           <a:solidFill>
-            <a:srgbClr val="DDD6FE"/>
+            <a:srgbClr val="CCFBF1"/>
           </a:solidFill>
           <a:ln w="19050">
             <a:solidFill>
-              <a:srgbClr val="7C3AED"/>
+              <a:srgbClr val="0D9488"/>
             </a:solidFill>
             <a:prstDash val="solid"/>
           </a:ln>
@@ -18155,13 +18755,13 @@
             <a:r>
               <a:rPr lang="en-US" sz="1300" b="1" dirty="0">
                 <a:solidFill>
-                  <a:srgbClr val="4C1D95"/>
+                  <a:srgbClr val="0F766E"/>
                 </a:solidFill>
                 <a:latin typeface="Trebuchet MS" pitchFamily="34" charset="0"/>
                 <a:ea typeface="Trebuchet MS" pitchFamily="34" charset="-122"/>
                 <a:cs typeface="Trebuchet MS" pitchFamily="34" charset="-120"/>
               </a:rPr>
-              <a:t>pre</a:t>
+              <a:t>judge</a:t>
             </a:r>
             <a:endParaRPr lang="en-US" sz="1300" dirty="0"/>
           </a:p>
@@ -18200,7 +18800,7 @@
                 <a:ea typeface="Calibri" pitchFamily="34" charset="-122"/>
                 <a:cs typeface="Calibri" pitchFamily="34" charset="-120"/>
               </a:rPr>
-              <a:t>before</a:t>
+              <a:t>decide; form an opinion</a:t>
             </a:r>
             <a:endParaRPr lang="en-US" sz="850" dirty="0"/>
           </a:p>
@@ -18223,11 +18823,11 @@
             </a:avLst>
           </a:prstGeom>
           <a:solidFill>
-            <a:srgbClr val="CCFBF1"/>
+            <a:srgbClr val="FCE7F3"/>
           </a:solidFill>
           <a:ln w="19050">
             <a:solidFill>
-              <a:srgbClr val="0D9488"/>
+              <a:srgbClr val="DB2777"/>
             </a:solidFill>
             <a:prstDash val="solid"/>
           </a:ln>
@@ -18267,13 +18867,13 @@
             <a:r>
               <a:rPr lang="en-US" sz="1300" b="1" dirty="0">
                 <a:solidFill>
-                  <a:srgbClr val="0F766E"/>
+                  <a:srgbClr val="9D174D"/>
                 </a:solidFill>
                 <a:latin typeface="Trebuchet MS" pitchFamily="34" charset="0"/>
                 <a:ea typeface="Trebuchet MS" pitchFamily="34" charset="-122"/>
                 <a:cs typeface="Trebuchet MS" pitchFamily="34" charset="-120"/>
               </a:rPr>
-              <a:t>judge</a:t>
+              <a:t>ment</a:t>
             </a:r>
             <a:endParaRPr lang="en-US" sz="1300" dirty="0"/>
           </a:p>
@@ -18312,7 +18912,7 @@
                 <a:ea typeface="Calibri" pitchFamily="34" charset="-122"/>
                 <a:cs typeface="Calibri" pitchFamily="34" charset="-120"/>
               </a:rPr>
-              <a:t>to decide or form an opinion</a:t>
+              <a:t>result of action</a:t>
             </a:r>
             <a:endParaRPr lang="en-US" sz="850" dirty="0"/>
           </a:p>
@@ -18868,7 +19468,7 @@
                 <a:ea typeface="Calibri" pitchFamily="34" charset="-122"/>
                 <a:cs typeface="Calibri" pitchFamily="34" charset="-120"/>
               </a:rPr>
-              <a:t>Word Labs  •  wordlabs.app  •  Root: 'judge' = to decide or form opinion</a:t>
+              <a:t>Word Labs  •  wordlabs.app  •  Root: 'judge' = decide; form an opinion</a:t>
             </a:r>
             <a:endParaRPr lang="en-US" sz="800" dirty="0"/>
           </a:p>
@@ -19007,7 +19607,7 @@
                 <a:ea typeface="Trebuchet MS" pitchFamily="34" charset="-122"/>
                 <a:cs typeface="Trebuchet MS" pitchFamily="34" charset="-120"/>
               </a:rPr>
-              <a:t>prejudge</a:t>
+              <a:t>judgement</a:t>
             </a:r>
             <a:endParaRPr lang="en-US" sz="2800" dirty="0"/>
           </a:p>
@@ -19096,11 +19696,11 @@
             </a:avLst>
           </a:prstGeom>
           <a:solidFill>
-            <a:srgbClr val="DDD6FE"/>
+            <a:srgbClr val="CCFBF1"/>
           </a:solidFill>
           <a:ln w="19050">
             <a:solidFill>
-              <a:srgbClr val="7C3AED"/>
+              <a:srgbClr val="0D9488"/>
             </a:solidFill>
             <a:prstDash val="solid"/>
           </a:ln>
@@ -19140,13 +19740,13 @@
             <a:r>
               <a:rPr lang="en-US" sz="1300" b="1" dirty="0">
                 <a:solidFill>
-                  <a:srgbClr val="4C1D95"/>
+                  <a:srgbClr val="0F766E"/>
                 </a:solidFill>
                 <a:latin typeface="Trebuchet MS" pitchFamily="34" charset="0"/>
                 <a:ea typeface="Trebuchet MS" pitchFamily="34" charset="-122"/>
                 <a:cs typeface="Trebuchet MS" pitchFamily="34" charset="-120"/>
               </a:rPr>
-              <a:t>pre</a:t>
+              <a:t>judge</a:t>
             </a:r>
             <a:endParaRPr lang="en-US" sz="1300" dirty="0"/>
           </a:p>
@@ -19185,7 +19785,7 @@
                 <a:ea typeface="Calibri" pitchFamily="34" charset="-122"/>
                 <a:cs typeface="Calibri" pitchFamily="34" charset="-120"/>
               </a:rPr>
-              <a:t>before</a:t>
+              <a:t>decide; form an opinion</a:t>
             </a:r>
             <a:endParaRPr lang="en-US" sz="850" dirty="0"/>
           </a:p>
@@ -19208,11 +19808,11 @@
             </a:avLst>
           </a:prstGeom>
           <a:solidFill>
-            <a:srgbClr val="CCFBF1"/>
+            <a:srgbClr val="FCE7F3"/>
           </a:solidFill>
           <a:ln w="19050">
             <a:solidFill>
-              <a:srgbClr val="0D9488"/>
+              <a:srgbClr val="DB2777"/>
             </a:solidFill>
             <a:prstDash val="solid"/>
           </a:ln>
@@ -19252,13 +19852,13 @@
             <a:r>
               <a:rPr lang="en-US" sz="1300" b="1" dirty="0">
                 <a:solidFill>
-                  <a:srgbClr val="0F766E"/>
+                  <a:srgbClr val="9D174D"/>
                 </a:solidFill>
                 <a:latin typeface="Trebuchet MS" pitchFamily="34" charset="0"/>
                 <a:ea typeface="Trebuchet MS" pitchFamily="34" charset="-122"/>
                 <a:cs typeface="Trebuchet MS" pitchFamily="34" charset="-120"/>
               </a:rPr>
-              <a:t>judge</a:t>
+              <a:t>ment</a:t>
             </a:r>
             <a:endParaRPr lang="en-US" sz="1300" dirty="0"/>
           </a:p>
@@ -19297,7 +19897,7 @@
                 <a:ea typeface="Calibri" pitchFamily="34" charset="-122"/>
                 <a:cs typeface="Calibri" pitchFamily="34" charset="-120"/>
               </a:rPr>
-              <a:t>to decide or form an opinion</a:t>
+              <a:t>result of action</a:t>
             </a:r>
             <a:endParaRPr lang="en-US" sz="850" dirty="0"/>
           </a:p>
@@ -19456,7 +20056,7 @@
                 <a:ea typeface="Trebuchet MS" pitchFamily="34" charset="-122"/>
                 <a:cs typeface="Trebuchet MS" pitchFamily="34" charset="-120"/>
               </a:rPr>
-              <a:t>pre</a:t>
+              <a:t>judge</a:t>
             </a:r>
             <a:endParaRPr lang="en-US" sz="1400" dirty="0"/>
           </a:p>
@@ -19561,7 +20161,7 @@
                 <a:ea typeface="Trebuchet MS" pitchFamily="34" charset="-122"/>
                 <a:cs typeface="Trebuchet MS" pitchFamily="34" charset="-120"/>
               </a:rPr>
-              <a:t>judge</a:t>
+              <a:t>ment</a:t>
             </a:r>
             <a:endParaRPr lang="en-US" sz="1400" dirty="0"/>
           </a:p>
@@ -19985,7 +20585,7 @@
                 <a:ea typeface="Calibri" pitchFamily="34" charset="-122"/>
                 <a:cs typeface="Calibri" pitchFamily="34" charset="-120"/>
               </a:rPr>
-              <a:t>Word Labs  •  wordlabs.app  •  Root: 'judge' = to decide or form opinion</a:t>
+              <a:t>Word Labs  •  wordlabs.app  •  Root: 'judge' = decide; form an opinion</a:t>
             </a:r>
             <a:endParaRPr lang="en-US" sz="800" dirty="0"/>
           </a:p>
@@ -20124,7 +20724,7 @@
                 <a:ea typeface="Trebuchet MS" pitchFamily="34" charset="-122"/>
                 <a:cs typeface="Trebuchet MS" pitchFamily="34" charset="-120"/>
               </a:rPr>
-              <a:t>prejudge</a:t>
+              <a:t>judgement</a:t>
             </a:r>
             <a:endParaRPr lang="en-US" sz="2800" dirty="0"/>
           </a:p>
@@ -20213,11 +20813,11 @@
             </a:avLst>
           </a:prstGeom>
           <a:solidFill>
-            <a:srgbClr val="DDD6FE"/>
+            <a:srgbClr val="CCFBF1"/>
           </a:solidFill>
           <a:ln w="19050">
             <a:solidFill>
-              <a:srgbClr val="7C3AED"/>
+              <a:srgbClr val="0D9488"/>
             </a:solidFill>
             <a:prstDash val="solid"/>
           </a:ln>
@@ -20257,13 +20857,13 @@
             <a:r>
               <a:rPr lang="en-US" sz="1300" b="1" dirty="0">
                 <a:solidFill>
-                  <a:srgbClr val="4C1D95"/>
+                  <a:srgbClr val="0F766E"/>
                 </a:solidFill>
                 <a:latin typeface="Trebuchet MS" pitchFamily="34" charset="0"/>
                 <a:ea typeface="Trebuchet MS" pitchFamily="34" charset="-122"/>
                 <a:cs typeface="Trebuchet MS" pitchFamily="34" charset="-120"/>
               </a:rPr>
-              <a:t>pre</a:t>
+              <a:t>judge</a:t>
             </a:r>
             <a:endParaRPr lang="en-US" sz="1300" dirty="0"/>
           </a:p>
@@ -20302,7 +20902,7 @@
                 <a:ea typeface="Calibri" pitchFamily="34" charset="-122"/>
                 <a:cs typeface="Calibri" pitchFamily="34" charset="-120"/>
               </a:rPr>
-              <a:t>before</a:t>
+              <a:t>decide; form an opinion</a:t>
             </a:r>
             <a:endParaRPr lang="en-US" sz="850" dirty="0"/>
           </a:p>
@@ -20325,11 +20925,11 @@
             </a:avLst>
           </a:prstGeom>
           <a:solidFill>
-            <a:srgbClr val="CCFBF1"/>
+            <a:srgbClr val="FCE7F3"/>
           </a:solidFill>
           <a:ln w="19050">
             <a:solidFill>
-              <a:srgbClr val="0D9488"/>
+              <a:srgbClr val="DB2777"/>
             </a:solidFill>
             <a:prstDash val="solid"/>
           </a:ln>
@@ -20369,13 +20969,13 @@
             <a:r>
               <a:rPr lang="en-US" sz="1300" b="1" dirty="0">
                 <a:solidFill>
-                  <a:srgbClr val="0F766E"/>
+                  <a:srgbClr val="9D174D"/>
                 </a:solidFill>
                 <a:latin typeface="Trebuchet MS" pitchFamily="34" charset="0"/>
                 <a:ea typeface="Trebuchet MS" pitchFamily="34" charset="-122"/>
                 <a:cs typeface="Trebuchet MS" pitchFamily="34" charset="-120"/>
               </a:rPr>
-              <a:t>judge</a:t>
+              <a:t>ment</a:t>
             </a:r>
             <a:endParaRPr lang="en-US" sz="1300" dirty="0"/>
           </a:p>
@@ -20414,7 +21014,7 @@
                 <a:ea typeface="Calibri" pitchFamily="34" charset="-122"/>
                 <a:cs typeface="Calibri" pitchFamily="34" charset="-120"/>
               </a:rPr>
-              <a:t>to decide or form an opinion</a:t>
+              <a:t>result of action</a:t>
             </a:r>
             <a:endParaRPr lang="en-US" sz="850" dirty="0"/>
           </a:p>
@@ -20573,7 +21173,7 @@
                 <a:ea typeface="Trebuchet MS" pitchFamily="34" charset="-122"/>
                 <a:cs typeface="Trebuchet MS" pitchFamily="34" charset="-120"/>
               </a:rPr>
-              <a:t>pre</a:t>
+              <a:t>judge</a:t>
             </a:r>
             <a:endParaRPr lang="en-US" sz="1400" dirty="0"/>
           </a:p>
@@ -20678,7 +21278,7 @@
                 <a:ea typeface="Trebuchet MS" pitchFamily="34" charset="-122"/>
                 <a:cs typeface="Trebuchet MS" pitchFamily="34" charset="-120"/>
               </a:rPr>
-              <a:t>judge</a:t>
+              <a:t>ment</a:t>
             </a:r>
             <a:endParaRPr lang="en-US" sz="1400" dirty="0"/>
           </a:p>
@@ -20759,11 +21359,11 @@
         <p:spPr>
           <a:xfrm>
             <a:off x="1874520" y="4096512"/>
-            <a:ext cx="6903720" cy="804672"/>
+            <a:ext cx="6903720" cy="658368"/>
           </a:xfrm>
           <a:prstGeom prst="rect">
             <a:avLst>
-              <a:gd name="adj" fmla="val 6818"/>
+              <a:gd name="adj" fmla="val 8333"/>
             </a:avLst>
           </a:prstGeom>
           <a:solidFill>
@@ -20785,12 +21385,12 @@
         </p:nvSpPr>
         <p:spPr>
           <a:xfrm>
-            <a:off x="2254649" y="4169664"/>
-            <a:ext cx="685800" cy="384048"/>
+            <a:off x="2124837" y="4169664"/>
+            <a:ext cx="685800" cy="475488"/>
           </a:xfrm>
           <a:prstGeom prst="rect">
             <a:avLst>
-              <a:gd name="adj" fmla="val 9524"/>
+              <a:gd name="adj" fmla="val 7692"/>
             </a:avLst>
           </a:prstGeom>
           <a:solidFill>
@@ -20812,8 +21412,8 @@
         </p:nvSpPr>
         <p:spPr>
           <a:xfrm>
-            <a:off x="2254649" y="4169664"/>
-            <a:ext cx="685800" cy="384048"/>
+            <a:off x="2124837" y="4169664"/>
+            <a:ext cx="685800" cy="475488"/>
           </a:xfrm>
           <a:prstGeom prst="rect">
             <a:avLst/>
@@ -20837,7 +21437,7 @@
                 <a:ea typeface="Trebuchet MS" pitchFamily="34" charset="-122"/>
                 <a:cs typeface="Trebuchet MS" pitchFamily="34" charset="-120"/>
               </a:rPr>
-              <a:t>p</a:t>
+              <a:t>j</a:t>
             </a:r>
             <a:endParaRPr lang="en-US" sz="900" dirty="0"/>
           </a:p>
@@ -20851,12 +21451,12 @@
         </p:nvSpPr>
         <p:spPr>
           <a:xfrm>
-            <a:off x="3293146" y="4169664"/>
-            <a:ext cx="685800" cy="384048"/>
+            <a:off x="3033522" y="4169664"/>
+            <a:ext cx="685800" cy="475488"/>
           </a:xfrm>
           <a:prstGeom prst="rect">
             <a:avLst>
-              <a:gd name="adj" fmla="val 9524"/>
+              <a:gd name="adj" fmla="val 7692"/>
             </a:avLst>
           </a:prstGeom>
           <a:solidFill>
@@ -20878,8 +21478,8 @@
         </p:nvSpPr>
         <p:spPr>
           <a:xfrm>
-            <a:off x="3293146" y="4169664"/>
-            <a:ext cx="685800" cy="384048"/>
+            <a:off x="3033522" y="4169664"/>
+            <a:ext cx="685800" cy="475488"/>
           </a:xfrm>
           <a:prstGeom prst="rect">
             <a:avLst/>
@@ -20903,7 +21503,7 @@
                 <a:ea typeface="Trebuchet MS" pitchFamily="34" charset="-122"/>
                 <a:cs typeface="Trebuchet MS" pitchFamily="34" charset="-120"/>
               </a:rPr>
-              <a:t>r</a:t>
+              <a:t>u</a:t>
             </a:r>
             <a:endParaRPr lang="en-US" sz="900" dirty="0"/>
           </a:p>
@@ -20917,12 +21517,12 @@
         </p:nvSpPr>
         <p:spPr>
           <a:xfrm>
-            <a:off x="4331643" y="4169664"/>
-            <a:ext cx="685800" cy="384048"/>
+            <a:off x="3942207" y="4169664"/>
+            <a:ext cx="685800" cy="475488"/>
           </a:xfrm>
           <a:prstGeom prst="rect">
             <a:avLst>
-              <a:gd name="adj" fmla="val 9524"/>
+              <a:gd name="adj" fmla="val 7692"/>
             </a:avLst>
           </a:prstGeom>
           <a:solidFill>
@@ -20944,8 +21544,8 @@
         </p:nvSpPr>
         <p:spPr>
           <a:xfrm>
-            <a:off x="4331643" y="4169664"/>
-            <a:ext cx="685800" cy="384048"/>
+            <a:off x="3942207" y="4169664"/>
+            <a:ext cx="685800" cy="475488"/>
           </a:xfrm>
           <a:prstGeom prst="rect">
             <a:avLst/>
@@ -20969,7 +21569,7 @@
                 <a:ea typeface="Trebuchet MS" pitchFamily="34" charset="-122"/>
                 <a:cs typeface="Trebuchet MS" pitchFamily="34" charset="-120"/>
               </a:rPr>
-              <a:t>e</a:t>
+              <a:t>dge</a:t>
             </a:r>
             <a:endParaRPr lang="en-US" sz="900" dirty="0"/>
           </a:p>
@@ -20983,12 +21583,12 @@
         </p:nvSpPr>
         <p:spPr>
           <a:xfrm>
-            <a:off x="5370141" y="4169664"/>
-            <a:ext cx="685800" cy="384048"/>
+            <a:off x="4850892" y="4169664"/>
+            <a:ext cx="685800" cy="475488"/>
           </a:xfrm>
           <a:prstGeom prst="rect">
             <a:avLst>
-              <a:gd name="adj" fmla="val 9524"/>
+              <a:gd name="adj" fmla="val 7692"/>
             </a:avLst>
           </a:prstGeom>
           <a:solidFill>
@@ -21010,8 +21610,8 @@
         </p:nvSpPr>
         <p:spPr>
           <a:xfrm>
-            <a:off x="5370141" y="4169664"/>
-            <a:ext cx="685800" cy="384048"/>
+            <a:off x="4850892" y="4169664"/>
+            <a:ext cx="685800" cy="475488"/>
           </a:xfrm>
           <a:prstGeom prst="rect">
             <a:avLst/>
@@ -21035,7 +21635,7 @@
                 <a:ea typeface="Trebuchet MS" pitchFamily="34" charset="-122"/>
                 <a:cs typeface="Trebuchet MS" pitchFamily="34" charset="-120"/>
               </a:rPr>
-              <a:t>j</a:t>
+              <a:t>m</a:t>
             </a:r>
             <a:endParaRPr lang="en-US" sz="900" dirty="0"/>
           </a:p>
@@ -21049,12 +21649,12 @@
         </p:nvSpPr>
         <p:spPr>
           <a:xfrm>
-            <a:off x="6408638" y="4169664"/>
-            <a:ext cx="685800" cy="384048"/>
+            <a:off x="5759577" y="4169664"/>
+            <a:ext cx="685800" cy="475488"/>
           </a:xfrm>
           <a:prstGeom prst="rect">
             <a:avLst>
-              <a:gd name="adj" fmla="val 9524"/>
+              <a:gd name="adj" fmla="val 7692"/>
             </a:avLst>
           </a:prstGeom>
           <a:solidFill>
@@ -21076,8 +21676,8 @@
         </p:nvSpPr>
         <p:spPr>
           <a:xfrm>
-            <a:off x="6408638" y="4169664"/>
-            <a:ext cx="685800" cy="384048"/>
+            <a:off x="5759577" y="4169664"/>
+            <a:ext cx="685800" cy="475488"/>
           </a:xfrm>
           <a:prstGeom prst="rect">
             <a:avLst/>
@@ -21101,7 +21701,7 @@
                 <a:ea typeface="Trebuchet MS" pitchFamily="34" charset="-122"/>
                 <a:cs typeface="Trebuchet MS" pitchFamily="34" charset="-120"/>
               </a:rPr>
-              <a:t>u</a:t>
+              <a:t>e</a:t>
             </a:r>
             <a:endParaRPr lang="en-US" sz="900" dirty="0"/>
           </a:p>
@@ -21115,12 +21715,12 @@
         </p:nvSpPr>
         <p:spPr>
           <a:xfrm>
-            <a:off x="7447135" y="4169664"/>
-            <a:ext cx="685800" cy="384048"/>
+            <a:off x="6668262" y="4169664"/>
+            <a:ext cx="685800" cy="475488"/>
           </a:xfrm>
           <a:prstGeom prst="rect">
             <a:avLst>
-              <a:gd name="adj" fmla="val 9524"/>
+              <a:gd name="adj" fmla="val 7692"/>
             </a:avLst>
           </a:prstGeom>
           <a:solidFill>
@@ -21142,8 +21742,8 @@
         </p:nvSpPr>
         <p:spPr>
           <a:xfrm>
-            <a:off x="7447135" y="4169664"/>
-            <a:ext cx="685800" cy="384048"/>
+            <a:off x="6668262" y="4169664"/>
+            <a:ext cx="685800" cy="475488"/>
           </a:xfrm>
           <a:prstGeom prst="rect">
             <a:avLst/>
@@ -21167,7 +21767,7 @@
                 <a:ea typeface="Trebuchet MS" pitchFamily="34" charset="-122"/>
                 <a:cs typeface="Trebuchet MS" pitchFamily="34" charset="-120"/>
               </a:rPr>
-              <a:t>dge</a:t>
+              <a:t>n</a:t>
             </a:r>
             <a:endParaRPr lang="en-US" sz="900" dirty="0"/>
           </a:p>
@@ -21175,40 +21775,67 @@
       </p:sp>
       <p:sp>
         <p:nvSpPr>
-          <p:cNvPr id="45" name="Text 43"/>
-          <p:cNvSpPr/>
-          <p:nvPr/>
-        </p:nvSpPr>
-        <p:spPr>
-          <a:xfrm>
-            <a:off x="7447135" y="4572000"/>
-            <a:ext cx="685800" cy="219456"/>
-          </a:xfrm>
-          <a:prstGeom prst="rect">
-            <a:avLst/>
-          </a:prstGeom>
-          <a:noFill/>
-          <a:ln/>
-        </p:spPr>
-        <p:txBody>
-          <a:bodyPr wrap="square" lIns="0" tIns="0" rIns="0" bIns="0" rtlCol="0" anchor="t"/>
-          <a:lstStyle/>
-          <a:p>
-            <a:pPr algn="ctr" indent="0" marL="0">
-              <a:buNone/>
-            </a:pPr>
-            <a:r>
-              <a:rPr lang="en-US" sz="750" i="1" dirty="0">
-                <a:solidFill>
-                  <a:srgbClr val="94A3B8"/>
-                </a:solidFill>
-                <a:latin typeface="Calibri" pitchFamily="34" charset="0"/>
-                <a:ea typeface="Calibri" pitchFamily="34" charset="-122"/>
-                <a:cs typeface="Calibri" pitchFamily="34" charset="-120"/>
-              </a:rPr>
-              <a:t>/j/</a:t>
-            </a:r>
-            <a:endParaRPr lang="en-US" sz="750" dirty="0"/>
+          <p:cNvPr id="45" name="Shape 43"/>
+          <p:cNvSpPr/>
+          <p:nvPr/>
+        </p:nvSpPr>
+        <p:spPr>
+          <a:xfrm>
+            <a:off x="7576947" y="4169664"/>
+            <a:ext cx="685800" cy="475488"/>
+          </a:xfrm>
+          <a:prstGeom prst="rect">
+            <a:avLst>
+              <a:gd name="adj" fmla="val 7692"/>
+            </a:avLst>
+          </a:prstGeom>
+          <a:solidFill>
+            <a:srgbClr val="FFFFFF"/>
+          </a:solidFill>
+          <a:ln w="12700">
+            <a:solidFill>
+              <a:srgbClr val="DB2777"/>
+            </a:solidFill>
+            <a:prstDash val="solid"/>
+          </a:ln>
+        </p:spPr>
+      </p:sp>
+      <p:sp>
+        <p:nvSpPr>
+          <p:cNvPr id="46" name="Text 44"/>
+          <p:cNvSpPr/>
+          <p:nvPr/>
+        </p:nvSpPr>
+        <p:spPr>
+          <a:xfrm>
+            <a:off x="7576947" y="4169664"/>
+            <a:ext cx="685800" cy="475488"/>
+          </a:xfrm>
+          <a:prstGeom prst="rect">
+            <a:avLst/>
+          </a:prstGeom>
+          <a:noFill/>
+          <a:ln/>
+        </p:spPr>
+        <p:txBody>
+          <a:bodyPr wrap="square" lIns="0" tIns="0" rIns="0" bIns="0" rtlCol="0" anchor="ctr"/>
+          <a:lstStyle/>
+          <a:p>
+            <a:pPr algn="ctr" indent="0" marL="0">
+              <a:buNone/>
+            </a:pPr>
+            <a:r>
+              <a:rPr lang="en-US" sz="900" b="1" dirty="0">
+                <a:solidFill>
+                  <a:srgbClr val="9D174D"/>
+                </a:solidFill>
+                <a:latin typeface="Trebuchet MS" pitchFamily="34" charset="0"/>
+                <a:ea typeface="Trebuchet MS" pitchFamily="34" charset="-122"/>
+                <a:cs typeface="Trebuchet MS" pitchFamily="34" charset="-120"/>
+              </a:rPr>
+              <a:t>t</a:t>
+            </a:r>
+            <a:endParaRPr lang="en-US" sz="900" dirty="0"/>
           </a:p>
         </p:txBody>
       </p:sp>
@@ -21498,7 +22125,7 @@
                 <a:ea typeface="Calibri" pitchFamily="34" charset="-122"/>
                 <a:cs typeface="Calibri" pitchFamily="34" charset="-120"/>
               </a:rPr>
-              <a:t>Word Labs  •  wordlabs.app  •  Root: 'judge' = to decide or form opinion</a:t>
+              <a:t>Word Labs  •  wordlabs.app  •  Root: 'judge' = decide; form an opinion</a:t>
             </a:r>
             <a:endParaRPr lang="en-US" sz="800" dirty="0"/>
           </a:p>
@@ -21637,7 +22264,7 @@
                 <a:ea typeface="Trebuchet MS" pitchFamily="34" charset="-122"/>
                 <a:cs typeface="Trebuchet MS" pitchFamily="34" charset="-120"/>
               </a:rPr>
-              <a:t>misjudgement</a:t>
+              <a:t>misjudged</a:t>
             </a:r>
             <a:endParaRPr lang="en-US" sz="2800" dirty="0"/>
           </a:p>
@@ -22325,7 +22952,7 @@
                 <a:ea typeface="Calibri" pitchFamily="34" charset="-122"/>
                 <a:cs typeface="Calibri" pitchFamily="34" charset="-120"/>
               </a:rPr>
-              <a:t>Word Labs  •  wordlabs.app  •  Root: 'judge' = to decide or form opinion</a:t>
+              <a:t>Word Labs  •  wordlabs.app  •  Root: 'judge' = decide; form an opinion</a:t>
             </a:r>
             <a:endParaRPr lang="en-US" sz="800" dirty="0"/>
           </a:p>
@@ -22464,7 +23091,7 @@
                 <a:ea typeface="Trebuchet MS" pitchFamily="34" charset="-122"/>
                 <a:cs typeface="Trebuchet MS" pitchFamily="34" charset="-120"/>
               </a:rPr>
-              <a:t>misjudgement</a:t>
+              <a:t>misjudged</a:t>
             </a:r>
             <a:endParaRPr lang="en-US" sz="2800" dirty="0"/>
           </a:p>
@@ -22642,7 +23269,7 @@
                 <a:ea typeface="Calibri" pitchFamily="34" charset="-122"/>
                 <a:cs typeface="Calibri" pitchFamily="34" charset="-120"/>
               </a:rPr>
-              <a:t>wrongly or badly</a:t>
+              <a:t>wrong</a:t>
             </a:r>
             <a:endParaRPr lang="en-US" sz="850" dirty="0"/>
           </a:p>
@@ -22754,7 +23381,7 @@
                 <a:ea typeface="Calibri" pitchFamily="34" charset="-122"/>
                 <a:cs typeface="Calibri" pitchFamily="34" charset="-120"/>
               </a:rPr>
-              <a:t>to decide or form an opinion</a:t>
+              <a:t>decide; form an opinion</a:t>
             </a:r>
             <a:endParaRPr lang="en-US" sz="850" dirty="0"/>
           </a:p>
@@ -22827,7 +23454,7 @@
                 <a:ea typeface="Trebuchet MS" pitchFamily="34" charset="-122"/>
                 <a:cs typeface="Trebuchet MS" pitchFamily="34" charset="-120"/>
               </a:rPr>
-              <a:t>ment</a:t>
+              <a:t>ed</a:t>
             </a:r>
             <a:endParaRPr lang="en-US" sz="1300" dirty="0"/>
           </a:p>
@@ -22866,7 +23493,7 @@
                 <a:ea typeface="Calibri" pitchFamily="34" charset="-122"/>
                 <a:cs typeface="Calibri" pitchFamily="34" charset="-120"/>
               </a:rPr>
-              <a:t>result or state of</a:t>
+              <a:t>past tense</a:t>
             </a:r>
             <a:endParaRPr lang="en-US" sz="850" dirty="0"/>
           </a:p>
@@ -23422,7 +24049,7 @@
                 <a:ea typeface="Calibri" pitchFamily="34" charset="-122"/>
                 <a:cs typeface="Calibri" pitchFamily="34" charset="-120"/>
               </a:rPr>
-              <a:t>Word Labs  •  wordlabs.app  •  Root: 'judge' = to decide or form opinion</a:t>
+              <a:t>Word Labs  •  wordlabs.app  •  Root: 'judge' = decide; form an opinion</a:t>
             </a:r>
             <a:endParaRPr lang="en-US" sz="800" dirty="0"/>
           </a:p>
@@ -23495,7 +24122,7 @@
                 <a:ea typeface="Trebuchet MS" pitchFamily="34" charset="-122"/>
                 <a:cs typeface="Trebuchet MS" pitchFamily="34" charset="-120"/>
               </a:rPr>
-              <a:t>We are learning that the root 'judge' means 'to decide or form opinion'.</a:t>
+              <a:t>We are learning that the root 'judge' means 'decide; form an opinion'.</a:t>
             </a:r>
             <a:endParaRPr lang="en-US" sz="2000" dirty="0"/>
           </a:p>
@@ -24141,7 +24768,7 @@
                 <a:ea typeface="Calibri" pitchFamily="34" charset="-122"/>
                 <a:cs typeface="Calibri" pitchFamily="34" charset="-120"/>
               </a:rPr>
-              <a:t>Word Labs  •  wordlabs.app  •  Root: 'judge' = to decide or form opinion</a:t>
+              <a:t>Word Labs  •  wordlabs.app  •  Root: 'judge' = decide; form an opinion</a:t>
             </a:r>
             <a:endParaRPr lang="en-US" sz="800" dirty="0"/>
           </a:p>
@@ -24280,7 +24907,7 @@
                 <a:ea typeface="Trebuchet MS" pitchFamily="34" charset="-122"/>
                 <a:cs typeface="Trebuchet MS" pitchFamily="34" charset="-120"/>
               </a:rPr>
-              <a:t>misjudgement</a:t>
+              <a:t>misjudged</a:t>
             </a:r>
             <a:endParaRPr lang="en-US" sz="2800" dirty="0"/>
           </a:p>
@@ -24458,7 +25085,7 @@
                 <a:ea typeface="Calibri" pitchFamily="34" charset="-122"/>
                 <a:cs typeface="Calibri" pitchFamily="34" charset="-120"/>
               </a:rPr>
-              <a:t>wrongly or badly</a:t>
+              <a:t>wrong</a:t>
             </a:r>
             <a:endParaRPr lang="en-US" sz="850" dirty="0"/>
           </a:p>
@@ -24570,7 +25197,7 @@
                 <a:ea typeface="Calibri" pitchFamily="34" charset="-122"/>
                 <a:cs typeface="Calibri" pitchFamily="34" charset="-120"/>
               </a:rPr>
-              <a:t>to decide or form an opinion</a:t>
+              <a:t>decide; form an opinion</a:t>
             </a:r>
             <a:endParaRPr lang="en-US" sz="850" dirty="0"/>
           </a:p>
@@ -24643,7 +25270,7 @@
                 <a:ea typeface="Trebuchet MS" pitchFamily="34" charset="-122"/>
                 <a:cs typeface="Trebuchet MS" pitchFamily="34" charset="-120"/>
               </a:rPr>
-              <a:t>ment</a:t>
+              <a:t>ed</a:t>
             </a:r>
             <a:endParaRPr lang="en-US" sz="1300" dirty="0"/>
           </a:p>
@@ -24682,7 +25309,7 @@
                 <a:ea typeface="Calibri" pitchFamily="34" charset="-122"/>
                 <a:cs typeface="Calibri" pitchFamily="34" charset="-120"/>
               </a:rPr>
-              <a:t>result or state of</a:t>
+              <a:t>past tense</a:t>
             </a:r>
             <a:endParaRPr lang="en-US" sz="850" dirty="0"/>
           </a:p>
@@ -24789,7 +25416,7 @@
         </p:nvSpPr>
         <p:spPr>
           <a:xfrm>
-            <a:off x="2313432" y="3364992"/>
+            <a:off x="2999232" y="3364992"/>
             <a:ext cx="1645920" cy="475488"/>
           </a:xfrm>
           <a:prstGeom prst="rect">
@@ -24816,7 +25443,7 @@
         </p:nvSpPr>
         <p:spPr>
           <a:xfrm>
-            <a:off x="2313432" y="3364992"/>
+            <a:off x="2999232" y="3364992"/>
             <a:ext cx="1645920" cy="475488"/>
           </a:xfrm>
           <a:prstGeom prst="rect">
@@ -24855,8 +25482,8 @@
         </p:nvSpPr>
         <p:spPr>
           <a:xfrm>
-            <a:off x="3959352" y="3364992"/>
-            <a:ext cx="411480" cy="475488"/>
+            <a:off x="4645152" y="3364992"/>
+            <a:ext cx="1097280" cy="475488"/>
           </a:xfrm>
           <a:prstGeom prst="rect">
             <a:avLst/>
@@ -24894,7 +25521,7 @@
         </p:nvSpPr>
         <p:spPr>
           <a:xfrm>
-            <a:off x="4370832" y="3364992"/>
+            <a:off x="5742432" y="3364992"/>
             <a:ext cx="1645920" cy="475488"/>
           </a:xfrm>
           <a:prstGeom prst="rect">
@@ -24921,7 +25548,7 @@
         </p:nvSpPr>
         <p:spPr>
           <a:xfrm>
-            <a:off x="4370832" y="3364992"/>
+            <a:off x="5742432" y="3364992"/>
             <a:ext cx="1645920" cy="475488"/>
           </a:xfrm>
           <a:prstGeom prst="rect">
@@ -24946,7 +25573,7 @@
                 <a:ea typeface="Trebuchet MS" pitchFamily="34" charset="-122"/>
                 <a:cs typeface="Trebuchet MS" pitchFamily="34" charset="-120"/>
               </a:rPr>
-              <a:t>judge</a:t>
+              <a:t>judged</a:t>
             </a:r>
             <a:endParaRPr lang="en-US" sz="1400" dirty="0"/>
           </a:p>
@@ -24954,14 +25581,41 @@
       </p:sp>
       <p:sp>
         <p:nvSpPr>
-          <p:cNvPr id="33" name="Text 31"/>
-          <p:cNvSpPr/>
-          <p:nvPr/>
-        </p:nvSpPr>
-        <p:spPr>
-          <a:xfrm>
-            <a:off x="6016752" y="3364992"/>
-            <a:ext cx="411480" cy="475488"/>
+          <p:cNvPr id="33" name="Shape 31"/>
+          <p:cNvSpPr/>
+          <p:nvPr/>
+        </p:nvSpPr>
+        <p:spPr>
+          <a:xfrm>
+            <a:off x="365760" y="4096512"/>
+            <a:ext cx="1371600" cy="804672"/>
+          </a:xfrm>
+          <a:prstGeom prst="rect">
+            <a:avLst>
+              <a:gd name="adj" fmla="val 6818"/>
+            </a:avLst>
+          </a:prstGeom>
+          <a:solidFill>
+            <a:srgbClr val="E2E8F0"/>
+          </a:solidFill>
+          <a:ln w="12700">
+            <a:solidFill>
+              <a:srgbClr val="E2E8F0"/>
+            </a:solidFill>
+            <a:prstDash val="solid"/>
+          </a:ln>
+        </p:spPr>
+      </p:sp>
+      <p:sp>
+        <p:nvSpPr>
+          <p:cNvPr id="34" name="Text 32"/>
+          <p:cNvSpPr/>
+          <p:nvPr/>
+        </p:nvSpPr>
+        <p:spPr>
+          <a:xfrm>
+            <a:off x="365760" y="4096512"/>
+            <a:ext cx="1371600" cy="804672"/>
           </a:xfrm>
           <a:prstGeom prst="rect">
             <a:avLst/>
@@ -24977,96 +25631,30 @@
               <a:buNone/>
             </a:pPr>
             <a:r>
-              <a:rPr lang="en-US" sz="1600" b="1" dirty="0">
-                <a:solidFill>
-                  <a:srgbClr val="0D9488"/>
+              <a:rPr lang="en-US" sz="1100" b="1" dirty="0">
+                <a:solidFill>
+                  <a:srgbClr val="475569"/>
                 </a:solidFill>
                 <a:latin typeface="Trebuchet MS" pitchFamily="34" charset="0"/>
                 <a:ea typeface="Trebuchet MS" pitchFamily="34" charset="-122"/>
                 <a:cs typeface="Trebuchet MS" pitchFamily="34" charset="-120"/>
               </a:rPr>
-              <a:t>·</a:t>
-            </a:r>
-            <a:endParaRPr lang="en-US" sz="1600" dirty="0"/>
-          </a:p>
-        </p:txBody>
-      </p:sp>
-      <p:sp>
-        <p:nvSpPr>
-          <p:cNvPr id="34" name="Shape 32"/>
-          <p:cNvSpPr/>
-          <p:nvPr/>
-        </p:nvSpPr>
-        <p:spPr>
-          <a:xfrm>
-            <a:off x="6428232" y="3364992"/>
-            <a:ext cx="1645920" cy="475488"/>
-          </a:xfrm>
-          <a:prstGeom prst="rect">
-            <a:avLst>
-              <a:gd name="adj" fmla="val 9615"/>
-            </a:avLst>
-          </a:prstGeom>
-          <a:solidFill>
-            <a:srgbClr val="FFFFFF"/>
-          </a:solidFill>
-          <a:ln w="12700">
-            <a:solidFill>
-              <a:srgbClr val="0D9488"/>
-            </a:solidFill>
-            <a:prstDash val="solid"/>
-          </a:ln>
-        </p:spPr>
-      </p:sp>
-      <p:sp>
-        <p:nvSpPr>
-          <p:cNvPr id="35" name="Text 33"/>
-          <p:cNvSpPr/>
-          <p:nvPr/>
-        </p:nvSpPr>
-        <p:spPr>
-          <a:xfrm>
-            <a:off x="6428232" y="3364992"/>
-            <a:ext cx="1645920" cy="475488"/>
-          </a:xfrm>
-          <a:prstGeom prst="rect">
-            <a:avLst/>
-          </a:prstGeom>
-          <a:noFill/>
-          <a:ln/>
-        </p:spPr>
-        <p:txBody>
-          <a:bodyPr wrap="square" lIns="0" tIns="0" rIns="0" bIns="0" rtlCol="0" anchor="ctr"/>
-          <a:lstStyle/>
-          <a:p>
-            <a:pPr algn="ctr" indent="0" marL="0">
-              <a:buNone/>
-            </a:pPr>
-            <a:r>
-              <a:rPr lang="en-US" sz="1400" b="1" dirty="0">
-                <a:solidFill>
-                  <a:srgbClr val="0D9488"/>
-                </a:solidFill>
-                <a:latin typeface="Trebuchet MS" pitchFamily="34" charset="0"/>
-                <a:ea typeface="Trebuchet MS" pitchFamily="34" charset="-122"/>
-                <a:cs typeface="Trebuchet MS" pitchFamily="34" charset="-120"/>
-              </a:rPr>
-              <a:t>ment</a:t>
-            </a:r>
-            <a:endParaRPr lang="en-US" sz="1400" dirty="0"/>
-          </a:p>
-        </p:txBody>
-      </p:sp>
-      <p:sp>
-        <p:nvSpPr>
-          <p:cNvPr id="36" name="Shape 34"/>
-          <p:cNvSpPr/>
-          <p:nvPr/>
-        </p:nvSpPr>
-        <p:spPr>
-          <a:xfrm>
-            <a:off x="365760" y="4096512"/>
-            <a:ext cx="1371600" cy="804672"/>
+              <a:t>Phonemes</a:t>
+            </a:r>
+            <a:endParaRPr lang="en-US" sz="1100" dirty="0"/>
+          </a:p>
+        </p:txBody>
+      </p:sp>
+      <p:sp>
+        <p:nvSpPr>
+          <p:cNvPr id="35" name="Shape 33"/>
+          <p:cNvSpPr/>
+          <p:nvPr/>
+        </p:nvSpPr>
+        <p:spPr>
+          <a:xfrm>
+            <a:off x="1874520" y="4096512"/>
+            <a:ext cx="6903720" cy="804672"/>
           </a:xfrm>
           <a:prstGeom prst="rect">
             <a:avLst>
@@ -25074,85 +25662,19 @@
             </a:avLst>
           </a:prstGeom>
           <a:solidFill>
-            <a:srgbClr val="E2E8F0"/>
+            <a:srgbClr val="F8FAFC"/>
           </a:solidFill>
           <a:ln w="12700">
             <a:solidFill>
               <a:srgbClr val="E2E8F0"/>
             </a:solidFill>
-            <a:prstDash val="solid"/>
-          </a:ln>
-        </p:spPr>
-      </p:sp>
-      <p:sp>
-        <p:nvSpPr>
-          <p:cNvPr id="37" name="Text 35"/>
-          <p:cNvSpPr/>
-          <p:nvPr/>
-        </p:nvSpPr>
-        <p:spPr>
-          <a:xfrm>
-            <a:off x="365760" y="4096512"/>
-            <a:ext cx="1371600" cy="804672"/>
-          </a:xfrm>
-          <a:prstGeom prst="rect">
-            <a:avLst/>
-          </a:prstGeom>
-          <a:noFill/>
-          <a:ln/>
-        </p:spPr>
-        <p:txBody>
-          <a:bodyPr wrap="square" lIns="0" tIns="0" rIns="0" bIns="0" rtlCol="0" anchor="ctr"/>
-          <a:lstStyle/>
-          <a:p>
-            <a:pPr algn="ctr" indent="0" marL="0">
-              <a:buNone/>
-            </a:pPr>
-            <a:r>
-              <a:rPr lang="en-US" sz="1100" b="1" dirty="0">
-                <a:solidFill>
-                  <a:srgbClr val="475569"/>
-                </a:solidFill>
-                <a:latin typeface="Trebuchet MS" pitchFamily="34" charset="0"/>
-                <a:ea typeface="Trebuchet MS" pitchFamily="34" charset="-122"/>
-                <a:cs typeface="Trebuchet MS" pitchFamily="34" charset="-120"/>
-              </a:rPr>
-              <a:t>Phonemes</a:t>
-            </a:r>
-            <a:endParaRPr lang="en-US" sz="1100" dirty="0"/>
-          </a:p>
-        </p:txBody>
-      </p:sp>
-      <p:sp>
-        <p:nvSpPr>
-          <p:cNvPr id="38" name="Shape 36"/>
-          <p:cNvSpPr/>
-          <p:nvPr/>
-        </p:nvSpPr>
-        <p:spPr>
-          <a:xfrm>
-            <a:off x="1874520" y="4096512"/>
-            <a:ext cx="6903720" cy="804672"/>
-          </a:xfrm>
-          <a:prstGeom prst="rect">
-            <a:avLst>
-              <a:gd name="adj" fmla="val 6818"/>
-            </a:avLst>
-          </a:prstGeom>
-          <a:solidFill>
-            <a:srgbClr val="F8FAFC"/>
-          </a:solidFill>
-          <a:ln w="12700">
-            <a:solidFill>
-              <a:srgbClr val="E2E8F0"/>
-            </a:solidFill>
             <a:prstDash val="dash"/>
           </a:ln>
         </p:spPr>
       </p:sp>
       <p:sp>
         <p:nvSpPr>
-          <p:cNvPr id="39" name="Text 37"/>
+          <p:cNvPr id="36" name="Text 34"/>
           <p:cNvSpPr/>
           <p:nvPr/>
         </p:nvSpPr>
@@ -25475,7 +25997,7 @@
                 <a:ea typeface="Calibri" pitchFamily="34" charset="-122"/>
                 <a:cs typeface="Calibri" pitchFamily="34" charset="-120"/>
               </a:rPr>
-              <a:t>Word Labs  •  wordlabs.app  •  Root: 'judge' = to decide or form opinion</a:t>
+              <a:t>Word Labs  •  wordlabs.app  •  Root: 'judge' = decide; form an opinion</a:t>
             </a:r>
             <a:endParaRPr lang="en-US" sz="800" dirty="0"/>
           </a:p>
@@ -25614,7 +26136,7 @@
                 <a:ea typeface="Trebuchet MS" pitchFamily="34" charset="-122"/>
                 <a:cs typeface="Trebuchet MS" pitchFamily="34" charset="-120"/>
               </a:rPr>
-              <a:t>misjudgement</a:t>
+              <a:t>misjudged</a:t>
             </a:r>
             <a:endParaRPr lang="en-US" sz="2800" dirty="0"/>
           </a:p>
@@ -25792,7 +26314,7 @@
                 <a:ea typeface="Calibri" pitchFamily="34" charset="-122"/>
                 <a:cs typeface="Calibri" pitchFamily="34" charset="-120"/>
               </a:rPr>
-              <a:t>wrongly or badly</a:t>
+              <a:t>wrong</a:t>
             </a:r>
             <a:endParaRPr lang="en-US" sz="850" dirty="0"/>
           </a:p>
@@ -25904,7 +26426,7 @@
                 <a:ea typeface="Calibri" pitchFamily="34" charset="-122"/>
                 <a:cs typeface="Calibri" pitchFamily="34" charset="-120"/>
               </a:rPr>
-              <a:t>to decide or form an opinion</a:t>
+              <a:t>decide; form an opinion</a:t>
             </a:r>
             <a:endParaRPr lang="en-US" sz="850" dirty="0"/>
           </a:p>
@@ -25977,7 +26499,7 @@
                 <a:ea typeface="Trebuchet MS" pitchFamily="34" charset="-122"/>
                 <a:cs typeface="Trebuchet MS" pitchFamily="34" charset="-120"/>
               </a:rPr>
-              <a:t>ment</a:t>
+              <a:t>ed</a:t>
             </a:r>
             <a:endParaRPr lang="en-US" sz="1300" dirty="0"/>
           </a:p>
@@ -26016,7 +26538,7 @@
                 <a:ea typeface="Calibri" pitchFamily="34" charset="-122"/>
                 <a:cs typeface="Calibri" pitchFamily="34" charset="-120"/>
               </a:rPr>
-              <a:t>result or state of</a:t>
+              <a:t>past tense</a:t>
             </a:r>
             <a:endParaRPr lang="en-US" sz="850" dirty="0"/>
           </a:p>
@@ -26123,7 +26645,7 @@
         </p:nvSpPr>
         <p:spPr>
           <a:xfrm>
-            <a:off x="2313432" y="3364992"/>
+            <a:off x="2999232" y="3364992"/>
             <a:ext cx="1645920" cy="475488"/>
           </a:xfrm>
           <a:prstGeom prst="rect">
@@ -26150,7 +26672,7 @@
         </p:nvSpPr>
         <p:spPr>
           <a:xfrm>
-            <a:off x="2313432" y="3364992"/>
+            <a:off x="2999232" y="3364992"/>
             <a:ext cx="1645920" cy="475488"/>
           </a:xfrm>
           <a:prstGeom prst="rect">
@@ -26189,8 +26711,8 @@
         </p:nvSpPr>
         <p:spPr>
           <a:xfrm>
-            <a:off x="3959352" y="3364992"/>
-            <a:ext cx="411480" cy="475488"/>
+            <a:off x="4645152" y="3364992"/>
+            <a:ext cx="1097280" cy="475488"/>
           </a:xfrm>
           <a:prstGeom prst="rect">
             <a:avLst/>
@@ -26228,7 +26750,7 @@
         </p:nvSpPr>
         <p:spPr>
           <a:xfrm>
-            <a:off x="4370832" y="3364992"/>
+            <a:off x="5742432" y="3364992"/>
             <a:ext cx="1645920" cy="475488"/>
           </a:xfrm>
           <a:prstGeom prst="rect">
@@ -26255,7 +26777,7 @@
         </p:nvSpPr>
         <p:spPr>
           <a:xfrm>
-            <a:off x="4370832" y="3364992"/>
+            <a:off x="5742432" y="3364992"/>
             <a:ext cx="1645920" cy="475488"/>
           </a:xfrm>
           <a:prstGeom prst="rect">
@@ -26280,7 +26802,7 @@
                 <a:ea typeface="Trebuchet MS" pitchFamily="34" charset="-122"/>
                 <a:cs typeface="Trebuchet MS" pitchFamily="34" charset="-120"/>
               </a:rPr>
-              <a:t>judge</a:t>
+              <a:t>judged</a:t>
             </a:r>
             <a:endParaRPr lang="en-US" sz="1400" dirty="0"/>
           </a:p>
@@ -26288,14 +26810,41 @@
       </p:sp>
       <p:sp>
         <p:nvSpPr>
-          <p:cNvPr id="33" name="Text 31"/>
-          <p:cNvSpPr/>
-          <p:nvPr/>
-        </p:nvSpPr>
-        <p:spPr>
-          <a:xfrm>
-            <a:off x="6016752" y="3364992"/>
-            <a:ext cx="411480" cy="475488"/>
+          <p:cNvPr id="33" name="Shape 31"/>
+          <p:cNvSpPr/>
+          <p:nvPr/>
+        </p:nvSpPr>
+        <p:spPr>
+          <a:xfrm>
+            <a:off x="365760" y="4096512"/>
+            <a:ext cx="1371600" cy="804672"/>
+          </a:xfrm>
+          <a:prstGeom prst="rect">
+            <a:avLst>
+              <a:gd name="adj" fmla="val 6818"/>
+            </a:avLst>
+          </a:prstGeom>
+          <a:solidFill>
+            <a:srgbClr val="E2E8F0"/>
+          </a:solidFill>
+          <a:ln w="12700">
+            <a:solidFill>
+              <a:srgbClr val="E2E8F0"/>
+            </a:solidFill>
+            <a:prstDash val="solid"/>
+          </a:ln>
+        </p:spPr>
+      </p:sp>
+      <p:sp>
+        <p:nvSpPr>
+          <p:cNvPr id="34" name="Text 32"/>
+          <p:cNvSpPr/>
+          <p:nvPr/>
+        </p:nvSpPr>
+        <p:spPr>
+          <a:xfrm>
+            <a:off x="365760" y="4096512"/>
+            <a:ext cx="1371600" cy="804672"/>
           </a:xfrm>
           <a:prstGeom prst="rect">
             <a:avLst/>
@@ -26311,57 +26860,84 @@
               <a:buNone/>
             </a:pPr>
             <a:r>
-              <a:rPr lang="en-US" sz="1600" b="1" dirty="0">
-                <a:solidFill>
-                  <a:srgbClr val="0D9488"/>
+              <a:rPr lang="en-US" sz="1100" b="1" dirty="0">
+                <a:solidFill>
+                  <a:srgbClr val="475569"/>
                 </a:solidFill>
                 <a:latin typeface="Trebuchet MS" pitchFamily="34" charset="0"/>
                 <a:ea typeface="Trebuchet MS" pitchFamily="34" charset="-122"/>
                 <a:cs typeface="Trebuchet MS" pitchFamily="34" charset="-120"/>
               </a:rPr>
-              <a:t>·</a:t>
-            </a:r>
-            <a:endParaRPr lang="en-US" sz="1600" dirty="0"/>
-          </a:p>
-        </p:txBody>
-      </p:sp>
-      <p:sp>
-        <p:nvSpPr>
-          <p:cNvPr id="34" name="Shape 32"/>
-          <p:cNvSpPr/>
-          <p:nvPr/>
-        </p:nvSpPr>
-        <p:spPr>
-          <a:xfrm>
-            <a:off x="6428232" y="3364992"/>
-            <a:ext cx="1645920" cy="475488"/>
+              <a:t>Phonemes</a:t>
+            </a:r>
+            <a:endParaRPr lang="en-US" sz="1100" dirty="0"/>
+          </a:p>
+        </p:txBody>
+      </p:sp>
+      <p:sp>
+        <p:nvSpPr>
+          <p:cNvPr id="35" name="Shape 33"/>
+          <p:cNvSpPr/>
+          <p:nvPr/>
+        </p:nvSpPr>
+        <p:spPr>
+          <a:xfrm>
+            <a:off x="1874520" y="4096512"/>
+            <a:ext cx="6903720" cy="658368"/>
           </a:xfrm>
           <a:prstGeom prst="rect">
             <a:avLst>
-              <a:gd name="adj" fmla="val 9615"/>
+              <a:gd name="adj" fmla="val 8333"/>
             </a:avLst>
           </a:prstGeom>
           <a:solidFill>
+            <a:srgbClr val="FCE7F3"/>
+          </a:solidFill>
+          <a:ln w="12700">
+            <a:solidFill>
+              <a:srgbClr val="DB2777"/>
+            </a:solidFill>
+            <a:prstDash val="solid"/>
+          </a:ln>
+        </p:spPr>
+      </p:sp>
+      <p:sp>
+        <p:nvSpPr>
+          <p:cNvPr id="36" name="Shape 34"/>
+          <p:cNvSpPr/>
+          <p:nvPr/>
+        </p:nvSpPr>
+        <p:spPr>
+          <a:xfrm>
+            <a:off x="2124837" y="4169664"/>
+            <a:ext cx="685800" cy="475488"/>
+          </a:xfrm>
+          <a:prstGeom prst="rect">
+            <a:avLst>
+              <a:gd name="adj" fmla="val 7692"/>
+            </a:avLst>
+          </a:prstGeom>
+          <a:solidFill>
             <a:srgbClr val="FFFFFF"/>
           </a:solidFill>
           <a:ln w="12700">
             <a:solidFill>
-              <a:srgbClr val="0D9488"/>
-            </a:solidFill>
-            <a:prstDash val="solid"/>
-          </a:ln>
-        </p:spPr>
-      </p:sp>
-      <p:sp>
-        <p:nvSpPr>
-          <p:cNvPr id="35" name="Text 33"/>
-          <p:cNvSpPr/>
-          <p:nvPr/>
-        </p:nvSpPr>
-        <p:spPr>
-          <a:xfrm>
-            <a:off x="6428232" y="3364992"/>
-            <a:ext cx="1645920" cy="475488"/>
+              <a:srgbClr val="DB2777"/>
+            </a:solidFill>
+            <a:prstDash val="solid"/>
+          </a:ln>
+        </p:spPr>
+      </p:sp>
+      <p:sp>
+        <p:nvSpPr>
+          <p:cNvPr id="37" name="Text 35"/>
+          <p:cNvSpPr/>
+          <p:nvPr/>
+        </p:nvSpPr>
+        <p:spPr>
+          <a:xfrm>
+            <a:off x="2124837" y="4169664"/>
+            <a:ext cx="685800" cy="475488"/>
           </a:xfrm>
           <a:prstGeom prst="rect">
             <a:avLst/>
@@ -26377,57 +26953,57 @@
               <a:buNone/>
             </a:pPr>
             <a:r>
-              <a:rPr lang="en-US" sz="1400" b="1" dirty="0">
-                <a:solidFill>
-                  <a:srgbClr val="0D9488"/>
+              <a:rPr lang="en-US" sz="900" b="1" dirty="0">
+                <a:solidFill>
+                  <a:srgbClr val="9D174D"/>
                 </a:solidFill>
                 <a:latin typeface="Trebuchet MS" pitchFamily="34" charset="0"/>
                 <a:ea typeface="Trebuchet MS" pitchFamily="34" charset="-122"/>
                 <a:cs typeface="Trebuchet MS" pitchFamily="34" charset="-120"/>
               </a:rPr>
-              <a:t>ment</a:t>
-            </a:r>
-            <a:endParaRPr lang="en-US" sz="1400" dirty="0"/>
-          </a:p>
-        </p:txBody>
-      </p:sp>
-      <p:sp>
-        <p:nvSpPr>
-          <p:cNvPr id="36" name="Shape 34"/>
-          <p:cNvSpPr/>
-          <p:nvPr/>
-        </p:nvSpPr>
-        <p:spPr>
-          <a:xfrm>
-            <a:off x="365760" y="4096512"/>
-            <a:ext cx="1371600" cy="804672"/>
+              <a:t>m</a:t>
+            </a:r>
+            <a:endParaRPr lang="en-US" sz="900" dirty="0"/>
+          </a:p>
+        </p:txBody>
+      </p:sp>
+      <p:sp>
+        <p:nvSpPr>
+          <p:cNvPr id="38" name="Shape 36"/>
+          <p:cNvSpPr/>
+          <p:nvPr/>
+        </p:nvSpPr>
+        <p:spPr>
+          <a:xfrm>
+            <a:off x="3033522" y="4169664"/>
+            <a:ext cx="685800" cy="475488"/>
           </a:xfrm>
           <a:prstGeom prst="rect">
             <a:avLst>
-              <a:gd name="adj" fmla="val 6818"/>
+              <a:gd name="adj" fmla="val 7692"/>
             </a:avLst>
           </a:prstGeom>
           <a:solidFill>
-            <a:srgbClr val="E2E8F0"/>
-          </a:solidFill>
-          <a:ln w="12700">
-            <a:solidFill>
-              <a:srgbClr val="E2E8F0"/>
-            </a:solidFill>
-            <a:prstDash val="solid"/>
-          </a:ln>
-        </p:spPr>
-      </p:sp>
-      <p:sp>
-        <p:nvSpPr>
-          <p:cNvPr id="37" name="Text 35"/>
-          <p:cNvSpPr/>
-          <p:nvPr/>
-        </p:nvSpPr>
-        <p:spPr>
-          <a:xfrm>
-            <a:off x="365760" y="4096512"/>
-            <a:ext cx="1371600" cy="804672"/>
+            <a:srgbClr val="FFFFFF"/>
+          </a:solidFill>
+          <a:ln w="12700">
+            <a:solidFill>
+              <a:srgbClr val="DB2777"/>
+            </a:solidFill>
+            <a:prstDash val="solid"/>
+          </a:ln>
+        </p:spPr>
+      </p:sp>
+      <p:sp>
+        <p:nvSpPr>
+          <p:cNvPr id="39" name="Text 37"/>
+          <p:cNvSpPr/>
+          <p:nvPr/>
+        </p:nvSpPr>
+        <p:spPr>
+          <a:xfrm>
+            <a:off x="3033522" y="4169664"/>
+            <a:ext cx="685800" cy="475488"/>
           </a:xfrm>
           <a:prstGeom prst="rect">
             <a:avLst/>
@@ -26443,38 +27019,38 @@
               <a:buNone/>
             </a:pPr>
             <a:r>
-              <a:rPr lang="en-US" sz="1100" b="1" dirty="0">
-                <a:solidFill>
-                  <a:srgbClr val="475569"/>
+              <a:rPr lang="en-US" sz="900" b="1" dirty="0">
+                <a:solidFill>
+                  <a:srgbClr val="9D174D"/>
                 </a:solidFill>
                 <a:latin typeface="Trebuchet MS" pitchFamily="34" charset="0"/>
                 <a:ea typeface="Trebuchet MS" pitchFamily="34" charset="-122"/>
                 <a:cs typeface="Trebuchet MS" pitchFamily="34" charset="-120"/>
               </a:rPr>
-              <a:t>Phonemes</a:t>
-            </a:r>
-            <a:endParaRPr lang="en-US" sz="1100" dirty="0"/>
-          </a:p>
-        </p:txBody>
-      </p:sp>
-      <p:sp>
-        <p:nvSpPr>
-          <p:cNvPr id="38" name="Shape 36"/>
-          <p:cNvSpPr/>
-          <p:nvPr/>
-        </p:nvSpPr>
-        <p:spPr>
-          <a:xfrm>
-            <a:off x="1874520" y="4096512"/>
-            <a:ext cx="6903720" cy="804672"/>
+              <a:t>i</a:t>
+            </a:r>
+            <a:endParaRPr lang="en-US" sz="900" dirty="0"/>
+          </a:p>
+        </p:txBody>
+      </p:sp>
+      <p:sp>
+        <p:nvSpPr>
+          <p:cNvPr id="40" name="Shape 38"/>
+          <p:cNvSpPr/>
+          <p:nvPr/>
+        </p:nvSpPr>
+        <p:spPr>
+          <a:xfrm>
+            <a:off x="3942207" y="4169664"/>
+            <a:ext cx="685800" cy="475488"/>
           </a:xfrm>
           <a:prstGeom prst="rect">
             <a:avLst>
-              <a:gd name="adj" fmla="val 6818"/>
+              <a:gd name="adj" fmla="val 7692"/>
             </a:avLst>
           </a:prstGeom>
           <a:solidFill>
-            <a:srgbClr val="FCE7F3"/>
+            <a:srgbClr val="FFFFFF"/>
           </a:solidFill>
           <a:ln w="12700">
             <a:solidFill>
@@ -26486,41 +27062,14 @@
       </p:sp>
       <p:sp>
         <p:nvSpPr>
-          <p:cNvPr id="39" name="Shape 37"/>
-          <p:cNvSpPr/>
-          <p:nvPr/>
-        </p:nvSpPr>
-        <p:spPr>
-          <a:xfrm>
-            <a:off x="1951828" y="4169664"/>
-            <a:ext cx="603504" cy="384048"/>
-          </a:xfrm>
-          <a:prstGeom prst="rect">
-            <a:avLst>
-              <a:gd name="adj" fmla="val 9524"/>
-            </a:avLst>
-          </a:prstGeom>
-          <a:solidFill>
-            <a:srgbClr val="FFFFFF"/>
-          </a:solidFill>
-          <a:ln w="12700">
-            <a:solidFill>
-              <a:srgbClr val="DB2777"/>
-            </a:solidFill>
-            <a:prstDash val="solid"/>
-          </a:ln>
-        </p:spPr>
-      </p:sp>
-      <p:sp>
-        <p:nvSpPr>
-          <p:cNvPr id="40" name="Text 38"/>
-          <p:cNvSpPr/>
-          <p:nvPr/>
-        </p:nvSpPr>
-        <p:spPr>
-          <a:xfrm>
-            <a:off x="1951828" y="4169664"/>
-            <a:ext cx="603504" cy="384048"/>
+          <p:cNvPr id="41" name="Text 39"/>
+          <p:cNvSpPr/>
+          <p:nvPr/>
+        </p:nvSpPr>
+        <p:spPr>
+          <a:xfrm>
+            <a:off x="3942207" y="4169664"/>
+            <a:ext cx="685800" cy="475488"/>
           </a:xfrm>
           <a:prstGeom prst="rect">
             <a:avLst/>
@@ -26544,7 +27093,7 @@
                 <a:ea typeface="Trebuchet MS" pitchFamily="34" charset="-122"/>
                 <a:cs typeface="Trebuchet MS" pitchFamily="34" charset="-120"/>
               </a:rPr>
-              <a:t>m</a:t>
+              <a:t>s</a:t>
             </a:r>
             <a:endParaRPr lang="en-US" sz="900" dirty="0"/>
           </a:p>
@@ -26552,18 +27101,18 @@
       </p:sp>
       <p:sp>
         <p:nvSpPr>
-          <p:cNvPr id="41" name="Shape 39"/>
-          <p:cNvSpPr/>
-          <p:nvPr/>
-        </p:nvSpPr>
-        <p:spPr>
-          <a:xfrm>
-            <a:off x="2605209" y="4169664"/>
-            <a:ext cx="603504" cy="384048"/>
+          <p:cNvPr id="42" name="Shape 40"/>
+          <p:cNvSpPr/>
+          <p:nvPr/>
+        </p:nvSpPr>
+        <p:spPr>
+          <a:xfrm>
+            <a:off x="4850892" y="4169664"/>
+            <a:ext cx="685800" cy="475488"/>
           </a:xfrm>
           <a:prstGeom prst="rect">
             <a:avLst>
-              <a:gd name="adj" fmla="val 9524"/>
+              <a:gd name="adj" fmla="val 7692"/>
             </a:avLst>
           </a:prstGeom>
           <a:solidFill>
@@ -26579,14 +27128,14 @@
       </p:sp>
       <p:sp>
         <p:nvSpPr>
-          <p:cNvPr id="42" name="Text 40"/>
-          <p:cNvSpPr/>
-          <p:nvPr/>
-        </p:nvSpPr>
-        <p:spPr>
-          <a:xfrm>
-            <a:off x="2605209" y="4169664"/>
-            <a:ext cx="603504" cy="384048"/>
+          <p:cNvPr id="43" name="Text 41"/>
+          <p:cNvSpPr/>
+          <p:nvPr/>
+        </p:nvSpPr>
+        <p:spPr>
+          <a:xfrm>
+            <a:off x="4850892" y="4169664"/>
+            <a:ext cx="685800" cy="475488"/>
           </a:xfrm>
           <a:prstGeom prst="rect">
             <a:avLst/>
@@ -26610,7 +27159,7 @@
                 <a:ea typeface="Trebuchet MS" pitchFamily="34" charset="-122"/>
                 <a:cs typeface="Trebuchet MS" pitchFamily="34" charset="-120"/>
               </a:rPr>
-              <a:t>i</a:t>
+              <a:t>j</a:t>
             </a:r>
             <a:endParaRPr lang="en-US" sz="900" dirty="0"/>
           </a:p>
@@ -26618,18 +27167,18 @@
       </p:sp>
       <p:sp>
         <p:nvSpPr>
-          <p:cNvPr id="43" name="Shape 41"/>
-          <p:cNvSpPr/>
-          <p:nvPr/>
-        </p:nvSpPr>
-        <p:spPr>
-          <a:xfrm>
-            <a:off x="3258589" y="4169664"/>
-            <a:ext cx="603504" cy="384048"/>
+          <p:cNvPr id="44" name="Shape 42"/>
+          <p:cNvSpPr/>
+          <p:nvPr/>
+        </p:nvSpPr>
+        <p:spPr>
+          <a:xfrm>
+            <a:off x="5759577" y="4169664"/>
+            <a:ext cx="685800" cy="475488"/>
           </a:xfrm>
           <a:prstGeom prst="rect">
             <a:avLst>
-              <a:gd name="adj" fmla="val 9524"/>
+              <a:gd name="adj" fmla="val 7692"/>
             </a:avLst>
           </a:prstGeom>
           <a:solidFill>
@@ -26645,14 +27194,14 @@
       </p:sp>
       <p:sp>
         <p:nvSpPr>
-          <p:cNvPr id="44" name="Text 42"/>
-          <p:cNvSpPr/>
-          <p:nvPr/>
-        </p:nvSpPr>
-        <p:spPr>
-          <a:xfrm>
-            <a:off x="3258589" y="4169664"/>
-            <a:ext cx="603504" cy="384048"/>
+          <p:cNvPr id="45" name="Text 43"/>
+          <p:cNvSpPr/>
+          <p:nvPr/>
+        </p:nvSpPr>
+        <p:spPr>
+          <a:xfrm>
+            <a:off x="5759577" y="4169664"/>
+            <a:ext cx="685800" cy="475488"/>
           </a:xfrm>
           <a:prstGeom prst="rect">
             <a:avLst/>
@@ -26676,7 +27225,7 @@
                 <a:ea typeface="Trebuchet MS" pitchFamily="34" charset="-122"/>
                 <a:cs typeface="Trebuchet MS" pitchFamily="34" charset="-120"/>
               </a:rPr>
-              <a:t>s</a:t>
+              <a:t>u</a:t>
             </a:r>
             <a:endParaRPr lang="en-US" sz="900" dirty="0"/>
           </a:p>
@@ -26684,18 +27233,18 @@
       </p:sp>
       <p:sp>
         <p:nvSpPr>
-          <p:cNvPr id="45" name="Shape 43"/>
-          <p:cNvSpPr/>
-          <p:nvPr/>
-        </p:nvSpPr>
-        <p:spPr>
-          <a:xfrm>
-            <a:off x="3911969" y="4169664"/>
-            <a:ext cx="603504" cy="384048"/>
+          <p:cNvPr id="46" name="Shape 44"/>
+          <p:cNvSpPr/>
+          <p:nvPr/>
+        </p:nvSpPr>
+        <p:spPr>
+          <a:xfrm>
+            <a:off x="6668262" y="4169664"/>
+            <a:ext cx="685800" cy="475488"/>
           </a:xfrm>
           <a:prstGeom prst="rect">
             <a:avLst>
-              <a:gd name="adj" fmla="val 9524"/>
+              <a:gd name="adj" fmla="val 7692"/>
             </a:avLst>
           </a:prstGeom>
           <a:solidFill>
@@ -26711,14 +27260,14 @@
       </p:sp>
       <p:sp>
         <p:nvSpPr>
-          <p:cNvPr id="46" name="Text 44"/>
-          <p:cNvSpPr/>
-          <p:nvPr/>
-        </p:nvSpPr>
-        <p:spPr>
-          <a:xfrm>
-            <a:off x="3911969" y="4169664"/>
-            <a:ext cx="603504" cy="384048"/>
+          <p:cNvPr id="47" name="Text 45"/>
+          <p:cNvSpPr/>
+          <p:nvPr/>
+        </p:nvSpPr>
+        <p:spPr>
+          <a:xfrm>
+            <a:off x="6668262" y="4169664"/>
+            <a:ext cx="685800" cy="475488"/>
           </a:xfrm>
           <a:prstGeom prst="rect">
             <a:avLst/>
@@ -26742,7 +27291,7 @@
                 <a:ea typeface="Trebuchet MS" pitchFamily="34" charset="-122"/>
                 <a:cs typeface="Trebuchet MS" pitchFamily="34" charset="-120"/>
               </a:rPr>
-              <a:t>j</a:t>
+              <a:t>dge</a:t>
             </a:r>
             <a:endParaRPr lang="en-US" sz="900" dirty="0"/>
           </a:p>
@@ -26750,18 +27299,18 @@
       </p:sp>
       <p:sp>
         <p:nvSpPr>
-          <p:cNvPr id="47" name="Shape 45"/>
-          <p:cNvSpPr/>
-          <p:nvPr/>
-        </p:nvSpPr>
-        <p:spPr>
-          <a:xfrm>
-            <a:off x="4565350" y="4169664"/>
-            <a:ext cx="603504" cy="384048"/>
+          <p:cNvPr id="48" name="Shape 46"/>
+          <p:cNvSpPr/>
+          <p:nvPr/>
+        </p:nvSpPr>
+        <p:spPr>
+          <a:xfrm>
+            <a:off x="7576947" y="4169664"/>
+            <a:ext cx="685800" cy="475488"/>
           </a:xfrm>
           <a:prstGeom prst="rect">
             <a:avLst>
-              <a:gd name="adj" fmla="val 9524"/>
+              <a:gd name="adj" fmla="val 7692"/>
             </a:avLst>
           </a:prstGeom>
           <a:solidFill>
@@ -26777,14 +27326,14 @@
       </p:sp>
       <p:sp>
         <p:nvSpPr>
-          <p:cNvPr id="48" name="Text 46"/>
-          <p:cNvSpPr/>
-          <p:nvPr/>
-        </p:nvSpPr>
-        <p:spPr>
-          <a:xfrm>
-            <a:off x="4565350" y="4169664"/>
-            <a:ext cx="603504" cy="384048"/>
+          <p:cNvPr id="49" name="Text 47"/>
+          <p:cNvSpPr/>
+          <p:nvPr/>
+        </p:nvSpPr>
+        <p:spPr>
+          <a:xfrm>
+            <a:off x="7576947" y="4169664"/>
+            <a:ext cx="685800" cy="475488"/>
           </a:xfrm>
           <a:prstGeom prst="rect">
             <a:avLst/>
@@ -26808,376 +27357,7 @@
                 <a:ea typeface="Trebuchet MS" pitchFamily="34" charset="-122"/>
                 <a:cs typeface="Trebuchet MS" pitchFamily="34" charset="-120"/>
               </a:rPr>
-              <a:t>u</a:t>
-            </a:r>
-            <a:endParaRPr lang="en-US" sz="900" dirty="0"/>
-          </a:p>
-        </p:txBody>
-      </p:sp>
-      <p:sp>
-        <p:nvSpPr>
-          <p:cNvPr id="49" name="Shape 47"/>
-          <p:cNvSpPr/>
-          <p:nvPr/>
-        </p:nvSpPr>
-        <p:spPr>
-          <a:xfrm>
-            <a:off x="5218730" y="4169664"/>
-            <a:ext cx="603504" cy="384048"/>
-          </a:xfrm>
-          <a:prstGeom prst="rect">
-            <a:avLst>
-              <a:gd name="adj" fmla="val 9524"/>
-            </a:avLst>
-          </a:prstGeom>
-          <a:solidFill>
-            <a:srgbClr val="FFFFFF"/>
-          </a:solidFill>
-          <a:ln w="12700">
-            <a:solidFill>
-              <a:srgbClr val="DB2777"/>
-            </a:solidFill>
-            <a:prstDash val="solid"/>
-          </a:ln>
-        </p:spPr>
-      </p:sp>
-      <p:sp>
-        <p:nvSpPr>
-          <p:cNvPr id="50" name="Text 48"/>
-          <p:cNvSpPr/>
-          <p:nvPr/>
-        </p:nvSpPr>
-        <p:spPr>
-          <a:xfrm>
-            <a:off x="5218730" y="4169664"/>
-            <a:ext cx="603504" cy="384048"/>
-          </a:xfrm>
-          <a:prstGeom prst="rect">
-            <a:avLst/>
-          </a:prstGeom>
-          <a:noFill/>
-          <a:ln/>
-        </p:spPr>
-        <p:txBody>
-          <a:bodyPr wrap="square" lIns="0" tIns="0" rIns="0" bIns="0" rtlCol="0" anchor="ctr"/>
-          <a:lstStyle/>
-          <a:p>
-            <a:pPr algn="ctr" indent="0" marL="0">
-              <a:buNone/>
-            </a:pPr>
-            <a:r>
-              <a:rPr lang="en-US" sz="900" b="1" dirty="0">
-                <a:solidFill>
-                  <a:srgbClr val="9D174D"/>
-                </a:solidFill>
-                <a:latin typeface="Trebuchet MS" pitchFamily="34" charset="0"/>
-                <a:ea typeface="Trebuchet MS" pitchFamily="34" charset="-122"/>
-                <a:cs typeface="Trebuchet MS" pitchFamily="34" charset="-120"/>
-              </a:rPr>
-              <a:t>dge</a:t>
-            </a:r>
-            <a:endParaRPr lang="en-US" sz="900" dirty="0"/>
-          </a:p>
-        </p:txBody>
-      </p:sp>
-      <p:sp>
-        <p:nvSpPr>
-          <p:cNvPr id="51" name="Text 49"/>
-          <p:cNvSpPr/>
-          <p:nvPr/>
-        </p:nvSpPr>
-        <p:spPr>
-          <a:xfrm>
-            <a:off x="5218730" y="4572000"/>
-            <a:ext cx="603504" cy="219456"/>
-          </a:xfrm>
-          <a:prstGeom prst="rect">
-            <a:avLst/>
-          </a:prstGeom>
-          <a:noFill/>
-          <a:ln/>
-        </p:spPr>
-        <p:txBody>
-          <a:bodyPr wrap="square" lIns="0" tIns="0" rIns="0" bIns="0" rtlCol="0" anchor="t"/>
-          <a:lstStyle/>
-          <a:p>
-            <a:pPr algn="ctr" indent="0" marL="0">
-              <a:buNone/>
-            </a:pPr>
-            <a:r>
-              <a:rPr lang="en-US" sz="750" i="1" dirty="0">
-                <a:solidFill>
-                  <a:srgbClr val="94A3B8"/>
-                </a:solidFill>
-                <a:latin typeface="Calibri" pitchFamily="34" charset="0"/>
-                <a:ea typeface="Calibri" pitchFamily="34" charset="-122"/>
-                <a:cs typeface="Calibri" pitchFamily="34" charset="-120"/>
-              </a:rPr>
-              <a:t>/j/</a:t>
-            </a:r>
-            <a:endParaRPr lang="en-US" sz="750" dirty="0"/>
-          </a:p>
-        </p:txBody>
-      </p:sp>
-      <p:sp>
-        <p:nvSpPr>
-          <p:cNvPr id="52" name="Shape 50"/>
-          <p:cNvSpPr/>
-          <p:nvPr/>
-        </p:nvSpPr>
-        <p:spPr>
-          <a:xfrm>
-            <a:off x="5872111" y="4169664"/>
-            <a:ext cx="603504" cy="384048"/>
-          </a:xfrm>
-          <a:prstGeom prst="rect">
-            <a:avLst>
-              <a:gd name="adj" fmla="val 9524"/>
-            </a:avLst>
-          </a:prstGeom>
-          <a:solidFill>
-            <a:srgbClr val="FFFFFF"/>
-          </a:solidFill>
-          <a:ln w="12700">
-            <a:solidFill>
-              <a:srgbClr val="DB2777"/>
-            </a:solidFill>
-            <a:prstDash val="solid"/>
-          </a:ln>
-        </p:spPr>
-      </p:sp>
-      <p:sp>
-        <p:nvSpPr>
-          <p:cNvPr id="53" name="Text 51"/>
-          <p:cNvSpPr/>
-          <p:nvPr/>
-        </p:nvSpPr>
-        <p:spPr>
-          <a:xfrm>
-            <a:off x="5872111" y="4169664"/>
-            <a:ext cx="603504" cy="384048"/>
-          </a:xfrm>
-          <a:prstGeom prst="rect">
-            <a:avLst/>
-          </a:prstGeom>
-          <a:noFill/>
-          <a:ln/>
-        </p:spPr>
-        <p:txBody>
-          <a:bodyPr wrap="square" lIns="0" tIns="0" rIns="0" bIns="0" rtlCol="0" anchor="ctr"/>
-          <a:lstStyle/>
-          <a:p>
-            <a:pPr algn="ctr" indent="0" marL="0">
-              <a:buNone/>
-            </a:pPr>
-            <a:r>
-              <a:rPr lang="en-US" sz="900" b="1" dirty="0">
-                <a:solidFill>
-                  <a:srgbClr val="9D174D"/>
-                </a:solidFill>
-                <a:latin typeface="Trebuchet MS" pitchFamily="34" charset="0"/>
-                <a:ea typeface="Trebuchet MS" pitchFamily="34" charset="-122"/>
-                <a:cs typeface="Trebuchet MS" pitchFamily="34" charset="-120"/>
-              </a:rPr>
-              <a:t>m</a:t>
-            </a:r>
-            <a:endParaRPr lang="en-US" sz="900" dirty="0"/>
-          </a:p>
-        </p:txBody>
-      </p:sp>
-      <p:sp>
-        <p:nvSpPr>
-          <p:cNvPr id="54" name="Shape 52"/>
-          <p:cNvSpPr/>
-          <p:nvPr/>
-        </p:nvSpPr>
-        <p:spPr>
-          <a:xfrm>
-            <a:off x="6525491" y="4169664"/>
-            <a:ext cx="603504" cy="384048"/>
-          </a:xfrm>
-          <a:prstGeom prst="rect">
-            <a:avLst>
-              <a:gd name="adj" fmla="val 9524"/>
-            </a:avLst>
-          </a:prstGeom>
-          <a:solidFill>
-            <a:srgbClr val="FFFFFF"/>
-          </a:solidFill>
-          <a:ln w="12700">
-            <a:solidFill>
-              <a:srgbClr val="DB2777"/>
-            </a:solidFill>
-            <a:prstDash val="solid"/>
-          </a:ln>
-        </p:spPr>
-      </p:sp>
-      <p:sp>
-        <p:nvSpPr>
-          <p:cNvPr id="55" name="Text 53"/>
-          <p:cNvSpPr/>
-          <p:nvPr/>
-        </p:nvSpPr>
-        <p:spPr>
-          <a:xfrm>
-            <a:off x="6525491" y="4169664"/>
-            <a:ext cx="603504" cy="384048"/>
-          </a:xfrm>
-          <a:prstGeom prst="rect">
-            <a:avLst/>
-          </a:prstGeom>
-          <a:noFill/>
-          <a:ln/>
-        </p:spPr>
-        <p:txBody>
-          <a:bodyPr wrap="square" lIns="0" tIns="0" rIns="0" bIns="0" rtlCol="0" anchor="ctr"/>
-          <a:lstStyle/>
-          <a:p>
-            <a:pPr algn="ctr" indent="0" marL="0">
-              <a:buNone/>
-            </a:pPr>
-            <a:r>
-              <a:rPr lang="en-US" sz="900" b="1" dirty="0">
-                <a:solidFill>
-                  <a:srgbClr val="9D174D"/>
-                </a:solidFill>
-                <a:latin typeface="Trebuchet MS" pitchFamily="34" charset="0"/>
-                <a:ea typeface="Trebuchet MS" pitchFamily="34" charset="-122"/>
-                <a:cs typeface="Trebuchet MS" pitchFamily="34" charset="-120"/>
-              </a:rPr>
-              <a:t>e</a:t>
-            </a:r>
-            <a:endParaRPr lang="en-US" sz="900" dirty="0"/>
-          </a:p>
-        </p:txBody>
-      </p:sp>
-      <p:sp>
-        <p:nvSpPr>
-          <p:cNvPr id="56" name="Shape 54"/>
-          <p:cNvSpPr/>
-          <p:nvPr/>
-        </p:nvSpPr>
-        <p:spPr>
-          <a:xfrm>
-            <a:off x="7178871" y="4169664"/>
-            <a:ext cx="603504" cy="384048"/>
-          </a:xfrm>
-          <a:prstGeom prst="rect">
-            <a:avLst>
-              <a:gd name="adj" fmla="val 9524"/>
-            </a:avLst>
-          </a:prstGeom>
-          <a:solidFill>
-            <a:srgbClr val="FFFFFF"/>
-          </a:solidFill>
-          <a:ln w="12700">
-            <a:solidFill>
-              <a:srgbClr val="DB2777"/>
-            </a:solidFill>
-            <a:prstDash val="solid"/>
-          </a:ln>
-        </p:spPr>
-      </p:sp>
-      <p:sp>
-        <p:nvSpPr>
-          <p:cNvPr id="57" name="Text 55"/>
-          <p:cNvSpPr/>
-          <p:nvPr/>
-        </p:nvSpPr>
-        <p:spPr>
-          <a:xfrm>
-            <a:off x="7178871" y="4169664"/>
-            <a:ext cx="603504" cy="384048"/>
-          </a:xfrm>
-          <a:prstGeom prst="rect">
-            <a:avLst/>
-          </a:prstGeom>
-          <a:noFill/>
-          <a:ln/>
-        </p:spPr>
-        <p:txBody>
-          <a:bodyPr wrap="square" lIns="0" tIns="0" rIns="0" bIns="0" rtlCol="0" anchor="ctr"/>
-          <a:lstStyle/>
-          <a:p>
-            <a:pPr algn="ctr" indent="0" marL="0">
-              <a:buNone/>
-            </a:pPr>
-            <a:r>
-              <a:rPr lang="en-US" sz="900" b="1" dirty="0">
-                <a:solidFill>
-                  <a:srgbClr val="9D174D"/>
-                </a:solidFill>
-                <a:latin typeface="Trebuchet MS" pitchFamily="34" charset="0"/>
-                <a:ea typeface="Trebuchet MS" pitchFamily="34" charset="-122"/>
-                <a:cs typeface="Trebuchet MS" pitchFamily="34" charset="-120"/>
-              </a:rPr>
-              <a:t>n</a:t>
-            </a:r>
-            <a:endParaRPr lang="en-US" sz="900" dirty="0"/>
-          </a:p>
-        </p:txBody>
-      </p:sp>
-      <p:sp>
-        <p:nvSpPr>
-          <p:cNvPr id="58" name="Shape 56"/>
-          <p:cNvSpPr/>
-          <p:nvPr/>
-        </p:nvSpPr>
-        <p:spPr>
-          <a:xfrm>
-            <a:off x="7832252" y="4169664"/>
-            <a:ext cx="603504" cy="384048"/>
-          </a:xfrm>
-          <a:prstGeom prst="rect">
-            <a:avLst>
-              <a:gd name="adj" fmla="val 9524"/>
-            </a:avLst>
-          </a:prstGeom>
-          <a:solidFill>
-            <a:srgbClr val="FFFFFF"/>
-          </a:solidFill>
-          <a:ln w="12700">
-            <a:solidFill>
-              <a:srgbClr val="DB2777"/>
-            </a:solidFill>
-            <a:prstDash val="solid"/>
-          </a:ln>
-        </p:spPr>
-      </p:sp>
-      <p:sp>
-        <p:nvSpPr>
-          <p:cNvPr id="59" name="Text 57"/>
-          <p:cNvSpPr/>
-          <p:nvPr/>
-        </p:nvSpPr>
-        <p:spPr>
-          <a:xfrm>
-            <a:off x="7832252" y="4169664"/>
-            <a:ext cx="603504" cy="384048"/>
-          </a:xfrm>
-          <a:prstGeom prst="rect">
-            <a:avLst/>
-          </a:prstGeom>
-          <a:noFill/>
-          <a:ln/>
-        </p:spPr>
-        <p:txBody>
-          <a:bodyPr wrap="square" lIns="0" tIns="0" rIns="0" bIns="0" rtlCol="0" anchor="ctr"/>
-          <a:lstStyle/>
-          <a:p>
-            <a:pPr algn="ctr" indent="0" marL="0">
-              <a:buNone/>
-            </a:pPr>
-            <a:r>
-              <a:rPr lang="en-US" sz="900" b="1" dirty="0">
-                <a:solidFill>
-                  <a:srgbClr val="9D174D"/>
-                </a:solidFill>
-                <a:latin typeface="Trebuchet MS" pitchFamily="34" charset="0"/>
-                <a:ea typeface="Trebuchet MS" pitchFamily="34" charset="-122"/>
-                <a:cs typeface="Trebuchet MS" pitchFamily="34" charset="-120"/>
-              </a:rPr>
-              <a:t>t</a:t>
+              <a:t>d</a:t>
             </a:r>
             <a:endParaRPr lang="en-US" sz="900" dirty="0"/>
           </a:p>
@@ -27469,7 +27649,7 @@
                 <a:ea typeface="Calibri" pitchFamily="34" charset="-122"/>
                 <a:cs typeface="Calibri" pitchFamily="34" charset="-120"/>
               </a:rPr>
-              <a:t>Word Labs  •  wordlabs.app  •  Root: 'judge' = to decide or form opinion</a:t>
+              <a:t>Word Labs  •  wordlabs.app  •  Root: 'judge' = decide; form an opinion</a:t>
             </a:r>
             <a:endParaRPr lang="en-US" sz="800" dirty="0"/>
           </a:p>
@@ -27608,7 +27788,7 @@
                 <a:ea typeface="Trebuchet MS" pitchFamily="34" charset="-122"/>
                 <a:cs typeface="Trebuchet MS" pitchFamily="34" charset="-120"/>
               </a:rPr>
-              <a:t>judgemental</a:t>
+              <a:t>misjudging</a:t>
             </a:r>
             <a:endParaRPr lang="en-US" sz="2800" dirty="0"/>
           </a:p>
@@ -28296,7 +28476,7 @@
                 <a:ea typeface="Calibri" pitchFamily="34" charset="-122"/>
                 <a:cs typeface="Calibri" pitchFamily="34" charset="-120"/>
               </a:rPr>
-              <a:t>Word Labs  •  wordlabs.app  •  Root: 'judge' = to decide or form opinion</a:t>
+              <a:t>Word Labs  •  wordlabs.app  •  Root: 'judge' = decide; form an opinion</a:t>
             </a:r>
             <a:endParaRPr lang="en-US" sz="800" dirty="0"/>
           </a:p>
@@ -28435,7 +28615,7 @@
                 <a:ea typeface="Trebuchet MS" pitchFamily="34" charset="-122"/>
                 <a:cs typeface="Trebuchet MS" pitchFamily="34" charset="-120"/>
               </a:rPr>
-              <a:t>judgemental</a:t>
+              <a:t>misjudging</a:t>
             </a:r>
             <a:endParaRPr lang="en-US" sz="2800" dirty="0"/>
           </a:p>
@@ -28524,11 +28704,11 @@
             </a:avLst>
           </a:prstGeom>
           <a:solidFill>
-            <a:srgbClr val="CCFBF1"/>
+            <a:srgbClr val="DDD6FE"/>
           </a:solidFill>
           <a:ln w="19050">
             <a:solidFill>
-              <a:srgbClr val="0D9488"/>
+              <a:srgbClr val="7C3AED"/>
             </a:solidFill>
             <a:prstDash val="solid"/>
           </a:ln>
@@ -28568,13 +28748,13 @@
             <a:r>
               <a:rPr lang="en-US" sz="1300" b="1" dirty="0">
                 <a:solidFill>
-                  <a:srgbClr val="0F766E"/>
+                  <a:srgbClr val="4C1D95"/>
                 </a:solidFill>
                 <a:latin typeface="Trebuchet MS" pitchFamily="34" charset="0"/>
                 <a:ea typeface="Trebuchet MS" pitchFamily="34" charset="-122"/>
                 <a:cs typeface="Trebuchet MS" pitchFamily="34" charset="-120"/>
               </a:rPr>
-              <a:t>judge</a:t>
+              <a:t>mis</a:t>
             </a:r>
             <a:endParaRPr lang="en-US" sz="1300" dirty="0"/>
           </a:p>
@@ -28613,7 +28793,7 @@
                 <a:ea typeface="Calibri" pitchFamily="34" charset="-122"/>
                 <a:cs typeface="Calibri" pitchFamily="34" charset="-120"/>
               </a:rPr>
-              <a:t>to decide or form an opinion</a:t>
+              <a:t>wrong</a:t>
             </a:r>
             <a:endParaRPr lang="en-US" sz="850" dirty="0"/>
           </a:p>
@@ -28636,11 +28816,11 @@
             </a:avLst>
           </a:prstGeom>
           <a:solidFill>
-            <a:srgbClr val="FCE7F3"/>
+            <a:srgbClr val="CCFBF1"/>
           </a:solidFill>
           <a:ln w="19050">
             <a:solidFill>
-              <a:srgbClr val="DB2777"/>
+              <a:srgbClr val="0D9488"/>
             </a:solidFill>
             <a:prstDash val="solid"/>
           </a:ln>
@@ -28680,13 +28860,13 @@
             <a:r>
               <a:rPr lang="en-US" sz="1300" b="1" dirty="0">
                 <a:solidFill>
-                  <a:srgbClr val="9D174D"/>
+                  <a:srgbClr val="0F766E"/>
                 </a:solidFill>
                 <a:latin typeface="Trebuchet MS" pitchFamily="34" charset="0"/>
                 <a:ea typeface="Trebuchet MS" pitchFamily="34" charset="-122"/>
                 <a:cs typeface="Trebuchet MS" pitchFamily="34" charset="-120"/>
               </a:rPr>
-              <a:t>ment</a:t>
+              <a:t>judge</a:t>
             </a:r>
             <a:endParaRPr lang="en-US" sz="1300" dirty="0"/>
           </a:p>
@@ -28725,7 +28905,7 @@
                 <a:ea typeface="Calibri" pitchFamily="34" charset="-122"/>
                 <a:cs typeface="Calibri" pitchFamily="34" charset="-120"/>
               </a:rPr>
-              <a:t>result or state of</a:t>
+              <a:t>decide; form an opinion</a:t>
             </a:r>
             <a:endParaRPr lang="en-US" sz="850" dirty="0"/>
           </a:p>
@@ -28798,7 +28978,7 @@
                 <a:ea typeface="Trebuchet MS" pitchFamily="34" charset="-122"/>
                 <a:cs typeface="Trebuchet MS" pitchFamily="34" charset="-120"/>
               </a:rPr>
-              <a:t>al</a:t>
+              <a:t>ing</a:t>
             </a:r>
             <a:endParaRPr lang="en-US" sz="1300" dirty="0"/>
           </a:p>
@@ -28837,7 +29017,7 @@
                 <a:ea typeface="Calibri" pitchFamily="34" charset="-122"/>
                 <a:cs typeface="Calibri" pitchFamily="34" charset="-120"/>
               </a:rPr>
-              <a:t>relating to</a:t>
+              <a:t>happening now</a:t>
             </a:r>
             <a:endParaRPr lang="en-US" sz="850" dirty="0"/>
           </a:p>
@@ -29393,7 +29573,7 @@
                 <a:ea typeface="Calibri" pitchFamily="34" charset="-122"/>
                 <a:cs typeface="Calibri" pitchFamily="34" charset="-120"/>
               </a:rPr>
-              <a:t>Word Labs  •  wordlabs.app  •  Root: 'judge' = to decide or form opinion</a:t>
+              <a:t>Word Labs  •  wordlabs.app  •  Root: 'judge' = decide; form an opinion</a:t>
             </a:r>
             <a:endParaRPr lang="en-US" sz="800" dirty="0"/>
           </a:p>
@@ -29532,7 +29712,7 @@
                 <a:ea typeface="Trebuchet MS" pitchFamily="34" charset="-122"/>
                 <a:cs typeface="Trebuchet MS" pitchFamily="34" charset="-120"/>
               </a:rPr>
-              <a:t>judgemental</a:t>
+              <a:t>misjudging</a:t>
             </a:r>
             <a:endParaRPr lang="en-US" sz="2800" dirty="0"/>
           </a:p>
@@ -29621,11 +29801,11 @@
             </a:avLst>
           </a:prstGeom>
           <a:solidFill>
-            <a:srgbClr val="CCFBF1"/>
+            <a:srgbClr val="DDD6FE"/>
           </a:solidFill>
           <a:ln w="19050">
             <a:solidFill>
-              <a:srgbClr val="0D9488"/>
+              <a:srgbClr val="7C3AED"/>
             </a:solidFill>
             <a:prstDash val="solid"/>
           </a:ln>
@@ -29665,13 +29845,13 @@
             <a:r>
               <a:rPr lang="en-US" sz="1300" b="1" dirty="0">
                 <a:solidFill>
-                  <a:srgbClr val="0F766E"/>
+                  <a:srgbClr val="4C1D95"/>
                 </a:solidFill>
                 <a:latin typeface="Trebuchet MS" pitchFamily="34" charset="0"/>
                 <a:ea typeface="Trebuchet MS" pitchFamily="34" charset="-122"/>
                 <a:cs typeface="Trebuchet MS" pitchFamily="34" charset="-120"/>
               </a:rPr>
-              <a:t>judge</a:t>
+              <a:t>mis</a:t>
             </a:r>
             <a:endParaRPr lang="en-US" sz="1300" dirty="0"/>
           </a:p>
@@ -29710,7 +29890,7 @@
                 <a:ea typeface="Calibri" pitchFamily="34" charset="-122"/>
                 <a:cs typeface="Calibri" pitchFamily="34" charset="-120"/>
               </a:rPr>
-              <a:t>to decide or form an opinion</a:t>
+              <a:t>wrong</a:t>
             </a:r>
             <a:endParaRPr lang="en-US" sz="850" dirty="0"/>
           </a:p>
@@ -29733,11 +29913,11 @@
             </a:avLst>
           </a:prstGeom>
           <a:solidFill>
-            <a:srgbClr val="FCE7F3"/>
+            <a:srgbClr val="CCFBF1"/>
           </a:solidFill>
           <a:ln w="19050">
             <a:solidFill>
-              <a:srgbClr val="DB2777"/>
+              <a:srgbClr val="0D9488"/>
             </a:solidFill>
             <a:prstDash val="solid"/>
           </a:ln>
@@ -29777,13 +29957,13 @@
             <a:r>
               <a:rPr lang="en-US" sz="1300" b="1" dirty="0">
                 <a:solidFill>
-                  <a:srgbClr val="9D174D"/>
+                  <a:srgbClr val="0F766E"/>
                 </a:solidFill>
                 <a:latin typeface="Trebuchet MS" pitchFamily="34" charset="0"/>
                 <a:ea typeface="Trebuchet MS" pitchFamily="34" charset="-122"/>
                 <a:cs typeface="Trebuchet MS" pitchFamily="34" charset="-120"/>
               </a:rPr>
-              <a:t>ment</a:t>
+              <a:t>judge</a:t>
             </a:r>
             <a:endParaRPr lang="en-US" sz="1300" dirty="0"/>
           </a:p>
@@ -29822,7 +30002,7 @@
                 <a:ea typeface="Calibri" pitchFamily="34" charset="-122"/>
                 <a:cs typeface="Calibri" pitchFamily="34" charset="-120"/>
               </a:rPr>
-              <a:t>result or state of</a:t>
+              <a:t>decide; form an opinion</a:t>
             </a:r>
             <a:endParaRPr lang="en-US" sz="850" dirty="0"/>
           </a:p>
@@ -29895,7 +30075,7 @@
                 <a:ea typeface="Trebuchet MS" pitchFamily="34" charset="-122"/>
                 <a:cs typeface="Trebuchet MS" pitchFamily="34" charset="-120"/>
               </a:rPr>
-              <a:t>al</a:t>
+              <a:t>ing</a:t>
             </a:r>
             <a:endParaRPr lang="en-US" sz="1300" dirty="0"/>
           </a:p>
@@ -29934,7 +30114,7 @@
                 <a:ea typeface="Calibri" pitchFamily="34" charset="-122"/>
                 <a:cs typeface="Calibri" pitchFamily="34" charset="-120"/>
               </a:rPr>
-              <a:t>relating to</a:t>
+              <a:t>happening now</a:t>
             </a:r>
             <a:endParaRPr lang="en-US" sz="850" dirty="0"/>
           </a:p>
@@ -30093,7 +30273,7 @@
                 <a:ea typeface="Trebuchet MS" pitchFamily="34" charset="-122"/>
                 <a:cs typeface="Trebuchet MS" pitchFamily="34" charset="-120"/>
               </a:rPr>
-              <a:t>judge</a:t>
+              <a:t>mis</a:t>
             </a:r>
             <a:endParaRPr lang="en-US" sz="1400" dirty="0"/>
           </a:p>
@@ -30198,7 +30378,7 @@
                 <a:ea typeface="Trebuchet MS" pitchFamily="34" charset="-122"/>
                 <a:cs typeface="Trebuchet MS" pitchFamily="34" charset="-120"/>
               </a:rPr>
-              <a:t>men</a:t>
+              <a:t>judg</a:t>
             </a:r>
             <a:endParaRPr lang="en-US" sz="1400" dirty="0"/>
           </a:p>
@@ -30303,7 +30483,7 @@
                 <a:ea typeface="Trebuchet MS" pitchFamily="34" charset="-122"/>
                 <a:cs typeface="Trebuchet MS" pitchFamily="34" charset="-120"/>
               </a:rPr>
-              <a:t>tal</a:t>
+              <a:t>ing</a:t>
             </a:r>
             <a:endParaRPr lang="en-US" sz="1400" dirty="0"/>
           </a:p>
@@ -30727,7 +30907,7 @@
                 <a:ea typeface="Calibri" pitchFamily="34" charset="-122"/>
                 <a:cs typeface="Calibri" pitchFamily="34" charset="-120"/>
               </a:rPr>
-              <a:t>Word Labs  •  wordlabs.app  •  Root: 'judge' = to decide or form opinion</a:t>
+              <a:t>Word Labs  •  wordlabs.app  •  Root: 'judge' = decide; form an opinion</a:t>
             </a:r>
             <a:endParaRPr lang="en-US" sz="800" dirty="0"/>
           </a:p>
@@ -30866,7 +31046,7 @@
                 <a:ea typeface="Trebuchet MS" pitchFamily="34" charset="-122"/>
                 <a:cs typeface="Trebuchet MS" pitchFamily="34" charset="-120"/>
               </a:rPr>
-              <a:t>judgemental</a:t>
+              <a:t>misjudging</a:t>
             </a:r>
             <a:endParaRPr lang="en-US" sz="2800" dirty="0"/>
           </a:p>
@@ -30955,11 +31135,11 @@
             </a:avLst>
           </a:prstGeom>
           <a:solidFill>
-            <a:srgbClr val="CCFBF1"/>
+            <a:srgbClr val="DDD6FE"/>
           </a:solidFill>
           <a:ln w="19050">
             <a:solidFill>
-              <a:srgbClr val="0D9488"/>
+              <a:srgbClr val="7C3AED"/>
             </a:solidFill>
             <a:prstDash val="solid"/>
           </a:ln>
@@ -30999,13 +31179,13 @@
             <a:r>
               <a:rPr lang="en-US" sz="1300" b="1" dirty="0">
                 <a:solidFill>
-                  <a:srgbClr val="0F766E"/>
+                  <a:srgbClr val="4C1D95"/>
                 </a:solidFill>
                 <a:latin typeface="Trebuchet MS" pitchFamily="34" charset="0"/>
                 <a:ea typeface="Trebuchet MS" pitchFamily="34" charset="-122"/>
                 <a:cs typeface="Trebuchet MS" pitchFamily="34" charset="-120"/>
               </a:rPr>
-              <a:t>judge</a:t>
+              <a:t>mis</a:t>
             </a:r>
             <a:endParaRPr lang="en-US" sz="1300" dirty="0"/>
           </a:p>
@@ -31044,7 +31224,7 @@
                 <a:ea typeface="Calibri" pitchFamily="34" charset="-122"/>
                 <a:cs typeface="Calibri" pitchFamily="34" charset="-120"/>
               </a:rPr>
-              <a:t>to decide or form an opinion</a:t>
+              <a:t>wrong</a:t>
             </a:r>
             <a:endParaRPr lang="en-US" sz="850" dirty="0"/>
           </a:p>
@@ -31067,11 +31247,11 @@
             </a:avLst>
           </a:prstGeom>
           <a:solidFill>
-            <a:srgbClr val="FCE7F3"/>
+            <a:srgbClr val="CCFBF1"/>
           </a:solidFill>
           <a:ln w="19050">
             <a:solidFill>
-              <a:srgbClr val="DB2777"/>
+              <a:srgbClr val="0D9488"/>
             </a:solidFill>
             <a:prstDash val="solid"/>
           </a:ln>
@@ -31111,13 +31291,13 @@
             <a:r>
               <a:rPr lang="en-US" sz="1300" b="1" dirty="0">
                 <a:solidFill>
-                  <a:srgbClr val="9D174D"/>
+                  <a:srgbClr val="0F766E"/>
                 </a:solidFill>
                 <a:latin typeface="Trebuchet MS" pitchFamily="34" charset="0"/>
                 <a:ea typeface="Trebuchet MS" pitchFamily="34" charset="-122"/>
                 <a:cs typeface="Trebuchet MS" pitchFamily="34" charset="-120"/>
               </a:rPr>
-              <a:t>ment</a:t>
+              <a:t>judge</a:t>
             </a:r>
             <a:endParaRPr lang="en-US" sz="1300" dirty="0"/>
           </a:p>
@@ -31156,7 +31336,7 @@
                 <a:ea typeface="Calibri" pitchFamily="34" charset="-122"/>
                 <a:cs typeface="Calibri" pitchFamily="34" charset="-120"/>
               </a:rPr>
-              <a:t>result or state of</a:t>
+              <a:t>decide; form an opinion</a:t>
             </a:r>
             <a:endParaRPr lang="en-US" sz="850" dirty="0"/>
           </a:p>
@@ -31229,7 +31409,7 @@
                 <a:ea typeface="Trebuchet MS" pitchFamily="34" charset="-122"/>
                 <a:cs typeface="Trebuchet MS" pitchFamily="34" charset="-120"/>
               </a:rPr>
-              <a:t>al</a:t>
+              <a:t>ing</a:t>
             </a:r>
             <a:endParaRPr lang="en-US" sz="1300" dirty="0"/>
           </a:p>
@@ -31268,7 +31448,7 @@
                 <a:ea typeface="Calibri" pitchFamily="34" charset="-122"/>
                 <a:cs typeface="Calibri" pitchFamily="34" charset="-120"/>
               </a:rPr>
-              <a:t>relating to</a:t>
+              <a:t>happening now</a:t>
             </a:r>
             <a:endParaRPr lang="en-US" sz="850" dirty="0"/>
           </a:p>
@@ -31427,7 +31607,7 @@
                 <a:ea typeface="Trebuchet MS" pitchFamily="34" charset="-122"/>
                 <a:cs typeface="Trebuchet MS" pitchFamily="34" charset="-120"/>
               </a:rPr>
-              <a:t>judge</a:t>
+              <a:t>mis</a:t>
             </a:r>
             <a:endParaRPr lang="en-US" sz="1400" dirty="0"/>
           </a:p>
@@ -31532,7 +31712,7 @@
                 <a:ea typeface="Trebuchet MS" pitchFamily="34" charset="-122"/>
                 <a:cs typeface="Trebuchet MS" pitchFamily="34" charset="-120"/>
               </a:rPr>
-              <a:t>men</a:t>
+              <a:t>judg</a:t>
             </a:r>
             <a:endParaRPr lang="en-US" sz="1400" dirty="0"/>
           </a:p>
@@ -31637,7 +31817,7 @@
                 <a:ea typeface="Trebuchet MS" pitchFamily="34" charset="-122"/>
                 <a:cs typeface="Trebuchet MS" pitchFamily="34" charset="-120"/>
               </a:rPr>
-              <a:t>tal</a:t>
+              <a:t>ing</a:t>
             </a:r>
             <a:endParaRPr lang="en-US" sz="1400" dirty="0"/>
           </a:p>
@@ -31718,11 +31898,11 @@
         <p:spPr>
           <a:xfrm>
             <a:off x="1874520" y="4096512"/>
-            <a:ext cx="6903720" cy="804672"/>
+            <a:ext cx="6903720" cy="658368"/>
           </a:xfrm>
           <a:prstGeom prst="rect">
             <a:avLst>
-              <a:gd name="adj" fmla="val 6818"/>
+              <a:gd name="adj" fmla="val 8333"/>
             </a:avLst>
           </a:prstGeom>
           <a:solidFill>
@@ -31744,12 +31924,12 @@
         </p:nvSpPr>
         <p:spPr>
           <a:xfrm>
-            <a:off x="1951330" y="4169664"/>
-            <a:ext cx="676656" cy="384048"/>
+            <a:off x="2023872" y="4169664"/>
+            <a:ext cx="685800" cy="475488"/>
           </a:xfrm>
           <a:prstGeom prst="rect">
             <a:avLst>
-              <a:gd name="adj" fmla="val 9524"/>
+              <a:gd name="adj" fmla="val 7692"/>
             </a:avLst>
           </a:prstGeom>
           <a:solidFill>
@@ -31771,8 +31951,8 @@
         </p:nvSpPr>
         <p:spPr>
           <a:xfrm>
-            <a:off x="1951330" y="4169664"/>
-            <a:ext cx="676656" cy="384048"/>
+            <a:off x="2023872" y="4169664"/>
+            <a:ext cx="685800" cy="475488"/>
           </a:xfrm>
           <a:prstGeom prst="rect">
             <a:avLst/>
@@ -31796,7 +31976,7 @@
                 <a:ea typeface="Trebuchet MS" pitchFamily="34" charset="-122"/>
                 <a:cs typeface="Trebuchet MS" pitchFamily="34" charset="-120"/>
               </a:rPr>
-              <a:t>j</a:t>
+              <a:t>m</a:t>
             </a:r>
             <a:endParaRPr lang="en-US" sz="900" dirty="0"/>
           </a:p>
@@ -31810,12 +31990,12 @@
         </p:nvSpPr>
         <p:spPr>
           <a:xfrm>
-            <a:off x="2677363" y="4169664"/>
-            <a:ext cx="676656" cy="384048"/>
+            <a:off x="2831592" y="4169664"/>
+            <a:ext cx="685800" cy="475488"/>
           </a:xfrm>
           <a:prstGeom prst="rect">
             <a:avLst>
-              <a:gd name="adj" fmla="val 9524"/>
+              <a:gd name="adj" fmla="val 7692"/>
             </a:avLst>
           </a:prstGeom>
           <a:solidFill>
@@ -31837,8 +32017,8 @@
         </p:nvSpPr>
         <p:spPr>
           <a:xfrm>
-            <a:off x="2677363" y="4169664"/>
-            <a:ext cx="676656" cy="384048"/>
+            <a:off x="2831592" y="4169664"/>
+            <a:ext cx="685800" cy="475488"/>
           </a:xfrm>
           <a:prstGeom prst="rect">
             <a:avLst/>
@@ -31862,7 +32042,7 @@
                 <a:ea typeface="Trebuchet MS" pitchFamily="34" charset="-122"/>
                 <a:cs typeface="Trebuchet MS" pitchFamily="34" charset="-120"/>
               </a:rPr>
-              <a:t>u</a:t>
+              <a:t>i</a:t>
             </a:r>
             <a:endParaRPr lang="en-US" sz="900" dirty="0"/>
           </a:p>
@@ -31876,12 +32056,12 @@
         </p:nvSpPr>
         <p:spPr>
           <a:xfrm>
-            <a:off x="3403397" y="4169664"/>
-            <a:ext cx="676656" cy="384048"/>
+            <a:off x="3639312" y="4169664"/>
+            <a:ext cx="685800" cy="475488"/>
           </a:xfrm>
           <a:prstGeom prst="rect">
             <a:avLst>
-              <a:gd name="adj" fmla="val 9524"/>
+              <a:gd name="adj" fmla="val 7692"/>
             </a:avLst>
           </a:prstGeom>
           <a:solidFill>
@@ -31903,8 +32083,8 @@
         </p:nvSpPr>
         <p:spPr>
           <a:xfrm>
-            <a:off x="3403397" y="4169664"/>
-            <a:ext cx="676656" cy="384048"/>
+            <a:off x="3639312" y="4169664"/>
+            <a:ext cx="685800" cy="475488"/>
           </a:xfrm>
           <a:prstGeom prst="rect">
             <a:avLst/>
@@ -31928,7 +32108,7 @@
                 <a:ea typeface="Trebuchet MS" pitchFamily="34" charset="-122"/>
                 <a:cs typeface="Trebuchet MS" pitchFamily="34" charset="-120"/>
               </a:rPr>
-              <a:t>dge</a:t>
+              <a:t>s</a:t>
             </a:r>
             <a:endParaRPr lang="en-US" sz="900" dirty="0"/>
           </a:p>
@@ -31936,57 +32116,18 @@
       </p:sp>
       <p:sp>
         <p:nvSpPr>
-          <p:cNvPr id="45" name="Text 43"/>
-          <p:cNvSpPr/>
-          <p:nvPr/>
-        </p:nvSpPr>
-        <p:spPr>
-          <a:xfrm>
-            <a:off x="3403397" y="4572000"/>
-            <a:ext cx="676656" cy="219456"/>
-          </a:xfrm>
-          <a:prstGeom prst="rect">
-            <a:avLst/>
-          </a:prstGeom>
-          <a:noFill/>
-          <a:ln/>
-        </p:spPr>
-        <p:txBody>
-          <a:bodyPr wrap="square" lIns="0" tIns="0" rIns="0" bIns="0" rtlCol="0" anchor="t"/>
-          <a:lstStyle/>
-          <a:p>
-            <a:pPr algn="ctr" indent="0" marL="0">
-              <a:buNone/>
-            </a:pPr>
-            <a:r>
-              <a:rPr lang="en-US" sz="750" i="1" dirty="0">
-                <a:solidFill>
-                  <a:srgbClr val="94A3B8"/>
-                </a:solidFill>
-                <a:latin typeface="Calibri" pitchFamily="34" charset="0"/>
-                <a:ea typeface="Calibri" pitchFamily="34" charset="-122"/>
-                <a:cs typeface="Calibri" pitchFamily="34" charset="-120"/>
-              </a:rPr>
-              <a:t>/j/</a:t>
-            </a:r>
-            <a:endParaRPr lang="en-US" sz="750" dirty="0"/>
-          </a:p>
-        </p:txBody>
-      </p:sp>
-      <p:sp>
-        <p:nvSpPr>
-          <p:cNvPr id="46" name="Shape 44"/>
-          <p:cNvSpPr/>
-          <p:nvPr/>
-        </p:nvSpPr>
-        <p:spPr>
-          <a:xfrm>
-            <a:off x="4129430" y="4169664"/>
-            <a:ext cx="676656" cy="384048"/>
+          <p:cNvPr id="45" name="Shape 43"/>
+          <p:cNvSpPr/>
+          <p:nvPr/>
+        </p:nvSpPr>
+        <p:spPr>
+          <a:xfrm>
+            <a:off x="4447032" y="4169664"/>
+            <a:ext cx="685800" cy="475488"/>
           </a:xfrm>
           <a:prstGeom prst="rect">
             <a:avLst>
-              <a:gd name="adj" fmla="val 9524"/>
+              <a:gd name="adj" fmla="val 7692"/>
             </a:avLst>
           </a:prstGeom>
           <a:solidFill>
@@ -32002,14 +32143,14 @@
       </p:sp>
       <p:sp>
         <p:nvSpPr>
-          <p:cNvPr id="47" name="Text 45"/>
-          <p:cNvSpPr/>
-          <p:nvPr/>
-        </p:nvSpPr>
-        <p:spPr>
-          <a:xfrm>
-            <a:off x="4129430" y="4169664"/>
-            <a:ext cx="676656" cy="384048"/>
+          <p:cNvPr id="46" name="Text 44"/>
+          <p:cNvSpPr/>
+          <p:nvPr/>
+        </p:nvSpPr>
+        <p:spPr>
+          <a:xfrm>
+            <a:off x="4447032" y="4169664"/>
+            <a:ext cx="685800" cy="475488"/>
           </a:xfrm>
           <a:prstGeom prst="rect">
             <a:avLst/>
@@ -32033,7 +32174,7 @@
                 <a:ea typeface="Trebuchet MS" pitchFamily="34" charset="-122"/>
                 <a:cs typeface="Trebuchet MS" pitchFamily="34" charset="-120"/>
               </a:rPr>
-              <a:t>m</a:t>
+              <a:t>j</a:t>
             </a:r>
             <a:endParaRPr lang="en-US" sz="900" dirty="0"/>
           </a:p>
@@ -32041,18 +32182,18 @@
       </p:sp>
       <p:sp>
         <p:nvSpPr>
-          <p:cNvPr id="48" name="Shape 46"/>
-          <p:cNvSpPr/>
-          <p:nvPr/>
-        </p:nvSpPr>
-        <p:spPr>
-          <a:xfrm>
-            <a:off x="4855464" y="4169664"/>
-            <a:ext cx="676656" cy="384048"/>
+          <p:cNvPr id="47" name="Shape 45"/>
+          <p:cNvSpPr/>
+          <p:nvPr/>
+        </p:nvSpPr>
+        <p:spPr>
+          <a:xfrm>
+            <a:off x="5254752" y="4169664"/>
+            <a:ext cx="685800" cy="475488"/>
           </a:xfrm>
           <a:prstGeom prst="rect">
             <a:avLst>
-              <a:gd name="adj" fmla="val 9524"/>
+              <a:gd name="adj" fmla="val 7692"/>
             </a:avLst>
           </a:prstGeom>
           <a:solidFill>
@@ -32068,14 +32209,14 @@
       </p:sp>
       <p:sp>
         <p:nvSpPr>
-          <p:cNvPr id="49" name="Text 47"/>
-          <p:cNvSpPr/>
-          <p:nvPr/>
-        </p:nvSpPr>
-        <p:spPr>
-          <a:xfrm>
-            <a:off x="4855464" y="4169664"/>
-            <a:ext cx="676656" cy="384048"/>
+          <p:cNvPr id="48" name="Text 46"/>
+          <p:cNvSpPr/>
+          <p:nvPr/>
+        </p:nvSpPr>
+        <p:spPr>
+          <a:xfrm>
+            <a:off x="5254752" y="4169664"/>
+            <a:ext cx="685800" cy="475488"/>
           </a:xfrm>
           <a:prstGeom prst="rect">
             <a:avLst/>
@@ -32099,7 +32240,7 @@
                 <a:ea typeface="Trebuchet MS" pitchFamily="34" charset="-122"/>
                 <a:cs typeface="Trebuchet MS" pitchFamily="34" charset="-120"/>
               </a:rPr>
-              <a:t>e</a:t>
+              <a:t>u</a:t>
             </a:r>
             <a:endParaRPr lang="en-US" sz="900" dirty="0"/>
           </a:p>
@@ -32107,18 +32248,18 @@
       </p:sp>
       <p:sp>
         <p:nvSpPr>
-          <p:cNvPr id="50" name="Shape 48"/>
-          <p:cNvSpPr/>
-          <p:nvPr/>
-        </p:nvSpPr>
-        <p:spPr>
-          <a:xfrm>
-            <a:off x="5581498" y="4169664"/>
-            <a:ext cx="676656" cy="384048"/>
+          <p:cNvPr id="49" name="Shape 47"/>
+          <p:cNvSpPr/>
+          <p:nvPr/>
+        </p:nvSpPr>
+        <p:spPr>
+          <a:xfrm>
+            <a:off x="6062472" y="4169664"/>
+            <a:ext cx="685800" cy="475488"/>
           </a:xfrm>
           <a:prstGeom prst="rect">
             <a:avLst>
-              <a:gd name="adj" fmla="val 9524"/>
+              <a:gd name="adj" fmla="val 7692"/>
             </a:avLst>
           </a:prstGeom>
           <a:solidFill>
@@ -32134,14 +32275,14 @@
       </p:sp>
       <p:sp>
         <p:nvSpPr>
-          <p:cNvPr id="51" name="Text 49"/>
-          <p:cNvSpPr/>
-          <p:nvPr/>
-        </p:nvSpPr>
-        <p:spPr>
-          <a:xfrm>
-            <a:off x="5581498" y="4169664"/>
-            <a:ext cx="676656" cy="384048"/>
+          <p:cNvPr id="50" name="Text 48"/>
+          <p:cNvSpPr/>
+          <p:nvPr/>
+        </p:nvSpPr>
+        <p:spPr>
+          <a:xfrm>
+            <a:off x="6062472" y="4169664"/>
+            <a:ext cx="685800" cy="475488"/>
           </a:xfrm>
           <a:prstGeom prst="rect">
             <a:avLst/>
@@ -32165,7 +32306,7 @@
                 <a:ea typeface="Trebuchet MS" pitchFamily="34" charset="-122"/>
                 <a:cs typeface="Trebuchet MS" pitchFamily="34" charset="-120"/>
               </a:rPr>
-              <a:t>n</a:t>
+              <a:t>dg</a:t>
             </a:r>
             <a:endParaRPr lang="en-US" sz="900" dirty="0"/>
           </a:p>
@@ -32173,18 +32314,18 @@
       </p:sp>
       <p:sp>
         <p:nvSpPr>
-          <p:cNvPr id="52" name="Shape 50"/>
-          <p:cNvSpPr/>
-          <p:nvPr/>
-        </p:nvSpPr>
-        <p:spPr>
-          <a:xfrm>
-            <a:off x="6307531" y="4169664"/>
-            <a:ext cx="676656" cy="384048"/>
+          <p:cNvPr id="51" name="Shape 49"/>
+          <p:cNvSpPr/>
+          <p:nvPr/>
+        </p:nvSpPr>
+        <p:spPr>
+          <a:xfrm>
+            <a:off x="6870192" y="4169664"/>
+            <a:ext cx="685800" cy="475488"/>
           </a:xfrm>
           <a:prstGeom prst="rect">
             <a:avLst>
-              <a:gd name="adj" fmla="val 9524"/>
+              <a:gd name="adj" fmla="val 7692"/>
             </a:avLst>
           </a:prstGeom>
           <a:solidFill>
@@ -32200,14 +32341,14 @@
       </p:sp>
       <p:sp>
         <p:nvSpPr>
-          <p:cNvPr id="53" name="Text 51"/>
-          <p:cNvSpPr/>
-          <p:nvPr/>
-        </p:nvSpPr>
-        <p:spPr>
-          <a:xfrm>
-            <a:off x="6307531" y="4169664"/>
-            <a:ext cx="676656" cy="384048"/>
+          <p:cNvPr id="52" name="Text 50"/>
+          <p:cNvSpPr/>
+          <p:nvPr/>
+        </p:nvSpPr>
+        <p:spPr>
+          <a:xfrm>
+            <a:off x="6870192" y="4169664"/>
+            <a:ext cx="685800" cy="475488"/>
           </a:xfrm>
           <a:prstGeom prst="rect">
             <a:avLst/>
@@ -32231,7 +32372,7 @@
                 <a:ea typeface="Trebuchet MS" pitchFamily="34" charset="-122"/>
                 <a:cs typeface="Trebuchet MS" pitchFamily="34" charset="-120"/>
               </a:rPr>
-              <a:t>t</a:t>
+              <a:t>i</a:t>
             </a:r>
             <a:endParaRPr lang="en-US" sz="900" dirty="0"/>
           </a:p>
@@ -32239,18 +32380,18 @@
       </p:sp>
       <p:sp>
         <p:nvSpPr>
-          <p:cNvPr id="54" name="Shape 52"/>
-          <p:cNvSpPr/>
-          <p:nvPr/>
-        </p:nvSpPr>
-        <p:spPr>
-          <a:xfrm>
-            <a:off x="7033565" y="4169664"/>
-            <a:ext cx="676656" cy="384048"/>
+          <p:cNvPr id="53" name="Shape 51"/>
+          <p:cNvSpPr/>
+          <p:nvPr/>
+        </p:nvSpPr>
+        <p:spPr>
+          <a:xfrm>
+            <a:off x="7677912" y="4169664"/>
+            <a:ext cx="685800" cy="475488"/>
           </a:xfrm>
           <a:prstGeom prst="rect">
             <a:avLst>
-              <a:gd name="adj" fmla="val 9524"/>
+              <a:gd name="adj" fmla="val 7692"/>
             </a:avLst>
           </a:prstGeom>
           <a:solidFill>
@@ -32266,14 +32407,14 @@
       </p:sp>
       <p:sp>
         <p:nvSpPr>
-          <p:cNvPr id="55" name="Text 53"/>
-          <p:cNvSpPr/>
-          <p:nvPr/>
-        </p:nvSpPr>
-        <p:spPr>
-          <a:xfrm>
-            <a:off x="7033565" y="4169664"/>
-            <a:ext cx="676656" cy="384048"/>
+          <p:cNvPr id="54" name="Text 52"/>
+          <p:cNvSpPr/>
+          <p:nvPr/>
+        </p:nvSpPr>
+        <p:spPr>
+          <a:xfrm>
+            <a:off x="7677912" y="4169664"/>
+            <a:ext cx="685800" cy="475488"/>
           </a:xfrm>
           <a:prstGeom prst="rect">
             <a:avLst/>
@@ -32297,73 +32438,7 @@
                 <a:ea typeface="Trebuchet MS" pitchFamily="34" charset="-122"/>
                 <a:cs typeface="Trebuchet MS" pitchFamily="34" charset="-120"/>
               </a:rPr>
-              <a:t>a</a:t>
-            </a:r>
-            <a:endParaRPr lang="en-US" sz="900" dirty="0"/>
-          </a:p>
-        </p:txBody>
-      </p:sp>
-      <p:sp>
-        <p:nvSpPr>
-          <p:cNvPr id="56" name="Shape 54"/>
-          <p:cNvSpPr/>
-          <p:nvPr/>
-        </p:nvSpPr>
-        <p:spPr>
-          <a:xfrm>
-            <a:off x="7759598" y="4169664"/>
-            <a:ext cx="676656" cy="384048"/>
-          </a:xfrm>
-          <a:prstGeom prst="rect">
-            <a:avLst>
-              <a:gd name="adj" fmla="val 9524"/>
-            </a:avLst>
-          </a:prstGeom>
-          <a:solidFill>
-            <a:srgbClr val="FFFFFF"/>
-          </a:solidFill>
-          <a:ln w="12700">
-            <a:solidFill>
-              <a:srgbClr val="DB2777"/>
-            </a:solidFill>
-            <a:prstDash val="solid"/>
-          </a:ln>
-        </p:spPr>
-      </p:sp>
-      <p:sp>
-        <p:nvSpPr>
-          <p:cNvPr id="57" name="Text 55"/>
-          <p:cNvSpPr/>
-          <p:nvPr/>
-        </p:nvSpPr>
-        <p:spPr>
-          <a:xfrm>
-            <a:off x="7759598" y="4169664"/>
-            <a:ext cx="676656" cy="384048"/>
-          </a:xfrm>
-          <a:prstGeom prst="rect">
-            <a:avLst/>
-          </a:prstGeom>
-          <a:noFill/>
-          <a:ln/>
-        </p:spPr>
-        <p:txBody>
-          <a:bodyPr wrap="square" lIns="0" tIns="0" rIns="0" bIns="0" rtlCol="0" anchor="ctr"/>
-          <a:lstStyle/>
-          <a:p>
-            <a:pPr algn="ctr" indent="0" marL="0">
-              <a:buNone/>
-            </a:pPr>
-            <a:r>
-              <a:rPr lang="en-US" sz="900" b="1" dirty="0">
-                <a:solidFill>
-                  <a:srgbClr val="9D174D"/>
-                </a:solidFill>
-                <a:latin typeface="Trebuchet MS" pitchFamily="34" charset="0"/>
-                <a:ea typeface="Trebuchet MS" pitchFamily="34" charset="-122"/>
-                <a:cs typeface="Trebuchet MS" pitchFamily="34" charset="-120"/>
-              </a:rPr>
-              <a:t>l</a:t>
+              <a:t>ng</a:t>
             </a:r>
             <a:endParaRPr lang="en-US" sz="900" dirty="0"/>
           </a:p>
@@ -32655,7 +32730,7 @@
                 <a:ea typeface="Calibri" pitchFamily="34" charset="-122"/>
                 <a:cs typeface="Calibri" pitchFamily="34" charset="-120"/>
               </a:rPr>
-              <a:t>Word Labs  •  wordlabs.app  •  Root: 'judge' = to decide or form opinion</a:t>
+              <a:t>Word Labs  •  wordlabs.app  •  Root: 'judge' = decide; form an opinion</a:t>
             </a:r>
             <a:endParaRPr lang="en-US" sz="800" dirty="0"/>
           </a:p>
@@ -33824,7 +33899,7 @@
                 <a:ea typeface="Calibri" pitchFamily="34" charset="-122"/>
                 <a:cs typeface="Calibri" pitchFamily="34" charset="-120"/>
               </a:rPr>
-              <a:t>Word Labs  •  wordlabs.app  •  Root: 'judge' = to decide or form opinion</a:t>
+              <a:t>Word Labs  •  wordlabs.app  •  Root: 'judge' = decide; form an opinion</a:t>
             </a:r>
             <a:endParaRPr lang="en-US" sz="800" dirty="0"/>
           </a:p>
@@ -34253,7 +34328,7 @@
                 <a:ea typeface="Trebuchet MS" pitchFamily="34" charset="-122"/>
                 <a:cs typeface="Trebuchet MS" pitchFamily="34" charset="-120"/>
               </a:rPr>
-              <a:t>-ment</a:t>
+              <a:t>-ed</a:t>
             </a:r>
             <a:endParaRPr lang="en-US" sz="1300" dirty="0"/>
           </a:p>
@@ -34406,7 +34481,7 @@
                 <a:ea typeface="Trebuchet MS" pitchFamily="34" charset="-122"/>
                 <a:cs typeface="Trebuchet MS" pitchFamily="34" charset="-120"/>
               </a:rPr>
-              <a:t>-ing</a:t>
+              <a:t>-ment</a:t>
             </a:r>
             <a:endParaRPr lang="en-US" sz="1300" dirty="0"/>
           </a:p>
@@ -34427,7 +34502,7 @@
             <a:avLst/>
           </a:prstGeom>
           <a:solidFill>
-            <a:srgbClr val="DDD6FE"/>
+            <a:srgbClr val="F8FAFC"/>
           </a:solidFill>
           <a:ln w="12700">
             <a:solidFill>
@@ -34439,14 +34514,64 @@
       </p:sp>
       <p:sp>
         <p:nvSpPr>
-          <p:cNvPr id="29" name="Text 27"/>
-          <p:cNvSpPr/>
-          <p:nvPr/>
-        </p:nvSpPr>
-        <p:spPr>
-          <a:xfrm>
-            <a:off x="365760" y="2404872"/>
-            <a:ext cx="2468880" cy="402336"/>
+          <p:cNvPr id="29" name="Shape 27"/>
+          <p:cNvSpPr/>
+          <p:nvPr/>
+        </p:nvSpPr>
+        <p:spPr>
+          <a:xfrm>
+            <a:off x="2971800" y="2404872"/>
+            <a:ext cx="2834640" cy="402336"/>
+          </a:xfrm>
+          <a:prstGeom prst="rect">
+            <a:avLst/>
+          </a:prstGeom>
+          <a:solidFill>
+            <a:srgbClr val="F8FAFC"/>
+          </a:solidFill>
+          <a:ln w="12700">
+            <a:solidFill>
+              <a:srgbClr val="E2E8F0"/>
+            </a:solidFill>
+            <a:prstDash val="solid"/>
+          </a:ln>
+        </p:spPr>
+      </p:sp>
+      <p:sp>
+        <p:nvSpPr>
+          <p:cNvPr id="30" name="Shape 28"/>
+          <p:cNvSpPr/>
+          <p:nvPr/>
+        </p:nvSpPr>
+        <p:spPr>
+          <a:xfrm>
+            <a:off x="5943600" y="2404872"/>
+            <a:ext cx="2834640" cy="402336"/>
+          </a:xfrm>
+          <a:prstGeom prst="rect">
+            <a:avLst/>
+          </a:prstGeom>
+          <a:solidFill>
+            <a:srgbClr val="FCE7F3"/>
+          </a:solidFill>
+          <a:ln w="12700">
+            <a:solidFill>
+              <a:srgbClr val="E2E8F0"/>
+            </a:solidFill>
+            <a:prstDash val="solid"/>
+          </a:ln>
+        </p:spPr>
+      </p:sp>
+      <p:sp>
+        <p:nvSpPr>
+          <p:cNvPr id="31" name="Text 29"/>
+          <p:cNvSpPr/>
+          <p:nvPr/>
+        </p:nvSpPr>
+        <p:spPr>
+          <a:xfrm>
+            <a:off x="5943600" y="2404872"/>
+            <a:ext cx="2834640" cy="402336"/>
           </a:xfrm>
           <a:prstGeom prst="rect">
             <a:avLst/>
@@ -34464,13 +34589,13 @@
             <a:r>
               <a:rPr lang="en-US" sz="1300" b="1" dirty="0">
                 <a:solidFill>
-                  <a:srgbClr val="4C1D95"/>
+                  <a:srgbClr val="9D174D"/>
                 </a:solidFill>
                 <a:latin typeface="Trebuchet MS" pitchFamily="34" charset="0"/>
                 <a:ea typeface="Trebuchet MS" pitchFamily="34" charset="-122"/>
                 <a:cs typeface="Trebuchet MS" pitchFamily="34" charset="-120"/>
               </a:rPr>
-              <a:t>re-</a:t>
+              <a:t>-s</a:t>
             </a:r>
             <a:endParaRPr lang="en-US" sz="1300" dirty="0"/>
           </a:p>
@@ -34478,20 +34603,45 @@
       </p:sp>
       <p:sp>
         <p:nvSpPr>
-          <p:cNvPr id="30" name="Shape 28"/>
-          <p:cNvSpPr/>
-          <p:nvPr/>
-        </p:nvSpPr>
-        <p:spPr>
-          <a:xfrm>
-            <a:off x="2971800" y="2404872"/>
+          <p:cNvPr id="32" name="Shape 30"/>
+          <p:cNvSpPr/>
+          <p:nvPr/>
+        </p:nvSpPr>
+        <p:spPr>
+          <a:xfrm>
+            <a:off x="365760" y="2825496"/>
+            <a:ext cx="2468880" cy="402336"/>
+          </a:xfrm>
+          <a:prstGeom prst="rect">
+            <a:avLst/>
+          </a:prstGeom>
+          <a:solidFill>
+            <a:srgbClr val="F1F5F9"/>
+          </a:solidFill>
+          <a:ln w="12700">
+            <a:solidFill>
+              <a:srgbClr val="E2E8F0"/>
+            </a:solidFill>
+            <a:prstDash val="solid"/>
+          </a:ln>
+        </p:spPr>
+      </p:sp>
+      <p:sp>
+        <p:nvSpPr>
+          <p:cNvPr id="33" name="Shape 31"/>
+          <p:cNvSpPr/>
+          <p:nvPr/>
+        </p:nvSpPr>
+        <p:spPr>
+          <a:xfrm>
+            <a:off x="2971800" y="2825496"/>
             <a:ext cx="2834640" cy="402336"/>
           </a:xfrm>
           <a:prstGeom prst="rect">
             <a:avLst/>
           </a:prstGeom>
           <a:solidFill>
-            <a:srgbClr val="F8FAFC"/>
+            <a:srgbClr val="F1F5F9"/>
           </a:solidFill>
           <a:ln w="12700">
             <a:solidFill>
@@ -34503,13 +34653,13 @@
       </p:sp>
       <p:sp>
         <p:nvSpPr>
-          <p:cNvPr id="31" name="Shape 29"/>
-          <p:cNvSpPr/>
-          <p:nvPr/>
-        </p:nvSpPr>
-        <p:spPr>
-          <a:xfrm>
-            <a:off x="5943600" y="2404872"/>
+          <p:cNvPr id="34" name="Shape 32"/>
+          <p:cNvSpPr/>
+          <p:nvPr/>
+        </p:nvSpPr>
+        <p:spPr>
+          <a:xfrm>
+            <a:off x="5943600" y="2825496"/>
             <a:ext cx="2834640" cy="402336"/>
           </a:xfrm>
           <a:prstGeom prst="rect">
@@ -34528,13 +34678,13 @@
       </p:sp>
       <p:sp>
         <p:nvSpPr>
-          <p:cNvPr id="32" name="Text 30"/>
-          <p:cNvSpPr/>
-          <p:nvPr/>
-        </p:nvSpPr>
-        <p:spPr>
-          <a:xfrm>
-            <a:off x="5943600" y="2404872"/>
+          <p:cNvPr id="35" name="Text 33"/>
+          <p:cNvSpPr/>
+          <p:nvPr/>
+        </p:nvSpPr>
+        <p:spPr>
+          <a:xfrm>
+            <a:off x="5943600" y="2825496"/>
             <a:ext cx="2834640" cy="402336"/>
           </a:xfrm>
           <a:prstGeom prst="rect">
@@ -34559,7 +34709,7 @@
                 <a:ea typeface="Trebuchet MS" pitchFamily="34" charset="-122"/>
                 <a:cs typeface="Trebuchet MS" pitchFamily="34" charset="-120"/>
               </a:rPr>
-              <a:t>-ed</a:t>
+              <a:t>-ing</a:t>
             </a:r>
             <a:endParaRPr lang="en-US" sz="1300" dirty="0"/>
           </a:p>
@@ -34567,39 +34717,14 @@
       </p:sp>
       <p:sp>
         <p:nvSpPr>
-          <p:cNvPr id="33" name="Shape 31"/>
-          <p:cNvSpPr/>
-          <p:nvPr/>
-        </p:nvSpPr>
-        <p:spPr>
-          <a:xfrm>
-            <a:off x="365760" y="2825496"/>
-            <a:ext cx="2468880" cy="402336"/>
-          </a:xfrm>
-          <a:prstGeom prst="rect">
-            <a:avLst/>
-          </a:prstGeom>
-          <a:solidFill>
-            <a:srgbClr val="DDD6FE"/>
-          </a:solidFill>
-          <a:ln w="12700">
-            <a:solidFill>
-              <a:srgbClr val="E2E8F0"/>
-            </a:solidFill>
-            <a:prstDash val="solid"/>
-          </a:ln>
-        </p:spPr>
-      </p:sp>
-      <p:sp>
-        <p:nvSpPr>
-          <p:cNvPr id="34" name="Text 32"/>
-          <p:cNvSpPr/>
-          <p:nvPr/>
-        </p:nvSpPr>
-        <p:spPr>
-          <a:xfrm>
-            <a:off x="365760" y="2825496"/>
-            <a:ext cx="2468880" cy="402336"/>
+          <p:cNvPr id="36" name="Text 34"/>
+          <p:cNvSpPr/>
+          <p:nvPr/>
+        </p:nvSpPr>
+        <p:spPr>
+          <a:xfrm>
+            <a:off x="365760" y="3611880"/>
+            <a:ext cx="1828800" cy="347472"/>
           </a:xfrm>
           <a:prstGeom prst="rect">
             <a:avLst/>
@@ -34611,84 +34736,61 @@
           <a:bodyPr wrap="square" lIns="0" tIns="0" rIns="0" bIns="0" rtlCol="0" anchor="ctr"/>
           <a:lstStyle/>
           <a:p>
-            <a:pPr algn="ctr" indent="0" marL="0">
-              <a:buNone/>
-            </a:pPr>
-            <a:r>
-              <a:rPr lang="en-US" sz="1300" b="1" dirty="0">
-                <a:solidFill>
-                  <a:srgbClr val="4C1D95"/>
+            <a:pPr algn="l" indent="0" marL="0">
+              <a:buNone/>
+            </a:pPr>
+            <a:r>
+              <a:rPr lang="en-US" sz="1200" b="1" dirty="0">
+                <a:solidFill>
+                  <a:srgbClr val="0F172A"/>
                 </a:solidFill>
                 <a:latin typeface="Trebuchet MS" pitchFamily="34" charset="0"/>
                 <a:ea typeface="Trebuchet MS" pitchFamily="34" charset="-122"/>
                 <a:cs typeface="Trebuchet MS" pitchFamily="34" charset="-120"/>
               </a:rPr>
-              <a:t>be-</a:t>
-            </a:r>
-            <a:endParaRPr lang="en-US" sz="1300" dirty="0"/>
-          </a:p>
-        </p:txBody>
-      </p:sp>
-      <p:sp>
-        <p:nvSpPr>
-          <p:cNvPr id="35" name="Shape 33"/>
-          <p:cNvSpPr/>
-          <p:nvPr/>
-        </p:nvSpPr>
-        <p:spPr>
-          <a:xfrm>
-            <a:off x="2971800" y="2825496"/>
-            <a:ext cx="2834640" cy="402336"/>
-          </a:xfrm>
-          <a:prstGeom prst="rect">
-            <a:avLst/>
-          </a:prstGeom>
-          <a:solidFill>
-            <a:srgbClr val="F1F5F9"/>
-          </a:solidFill>
-          <a:ln w="12700">
-            <a:solidFill>
-              <a:srgbClr val="E2E8F0"/>
-            </a:solidFill>
-            <a:prstDash val="solid"/>
-          </a:ln>
-        </p:spPr>
-      </p:sp>
-      <p:sp>
-        <p:nvSpPr>
-          <p:cNvPr id="36" name="Shape 34"/>
-          <p:cNvSpPr/>
-          <p:nvPr/>
-        </p:nvSpPr>
-        <p:spPr>
-          <a:xfrm>
-            <a:off x="5943600" y="2825496"/>
-            <a:ext cx="2834640" cy="402336"/>
-          </a:xfrm>
-          <a:prstGeom prst="rect">
-            <a:avLst/>
-          </a:prstGeom>
-          <a:solidFill>
-            <a:srgbClr val="FCE7F3"/>
-          </a:solidFill>
-          <a:ln w="12700">
-            <a:solidFill>
-              <a:srgbClr val="E2E8F0"/>
-            </a:solidFill>
-            <a:prstDash val="solid"/>
-          </a:ln>
-        </p:spPr>
-      </p:sp>
-      <p:sp>
-        <p:nvSpPr>
-          <p:cNvPr id="37" name="Text 35"/>
-          <p:cNvSpPr/>
-          <p:nvPr/>
-        </p:nvSpPr>
-        <p:spPr>
-          <a:xfrm>
-            <a:off x="5943600" y="2825496"/>
-            <a:ext cx="2834640" cy="402336"/>
+              <a:t>Sample words:</a:t>
+            </a:r>
+            <a:endParaRPr lang="en-US" sz="1200" dirty="0"/>
+          </a:p>
+        </p:txBody>
+      </p:sp>
+      <p:sp>
+        <p:nvSpPr>
+          <p:cNvPr id="37" name="Shape 35"/>
+          <p:cNvSpPr/>
+          <p:nvPr/>
+        </p:nvSpPr>
+        <p:spPr>
+          <a:xfrm>
+            <a:off x="365760" y="4023360"/>
+            <a:ext cx="2011680" cy="402336"/>
+          </a:xfrm>
+          <a:prstGeom prst="rect">
+            <a:avLst>
+              <a:gd name="adj" fmla="val 13636"/>
+            </a:avLst>
+          </a:prstGeom>
+          <a:solidFill>
+            <a:srgbClr val="EEF2FF"/>
+          </a:solidFill>
+          <a:ln w="12700">
+            <a:solidFill>
+              <a:srgbClr val="6366F1"/>
+            </a:solidFill>
+            <a:prstDash val="solid"/>
+          </a:ln>
+        </p:spPr>
+      </p:sp>
+      <p:sp>
+        <p:nvSpPr>
+          <p:cNvPr id="38" name="Text 36"/>
+          <p:cNvSpPr/>
+          <p:nvPr/>
+        </p:nvSpPr>
+        <p:spPr>
+          <a:xfrm>
+            <a:off x="365760" y="4023360"/>
+            <a:ext cx="2011680" cy="402336"/>
           </a:xfrm>
           <a:prstGeom prst="rect">
             <a:avLst/>
@@ -34704,55 +34806,57 @@
               <a:buNone/>
             </a:pPr>
             <a:r>
-              <a:rPr lang="en-US" sz="1300" b="1" dirty="0">
-                <a:solidFill>
-                  <a:srgbClr val="9D174D"/>
+              <a:rPr lang="en-US" sz="1200" b="1" dirty="0">
+                <a:solidFill>
+                  <a:srgbClr val="4338CA"/>
                 </a:solidFill>
                 <a:latin typeface="Trebuchet MS" pitchFamily="34" charset="0"/>
                 <a:ea typeface="Trebuchet MS" pitchFamily="34" charset="-122"/>
                 <a:cs typeface="Trebuchet MS" pitchFamily="34" charset="-120"/>
               </a:rPr>
-              <a:t>-ship</a:t>
-            </a:r>
-            <a:endParaRPr lang="en-US" sz="1300" dirty="0"/>
-          </a:p>
-        </p:txBody>
-      </p:sp>
-      <p:sp>
-        <p:nvSpPr>
-          <p:cNvPr id="38" name="Shape 36"/>
-          <p:cNvSpPr/>
-          <p:nvPr/>
-        </p:nvSpPr>
-        <p:spPr>
-          <a:xfrm>
-            <a:off x="365760" y="3246120"/>
-            <a:ext cx="2468880" cy="402336"/>
-          </a:xfrm>
-          <a:prstGeom prst="rect">
-            <a:avLst/>
-          </a:prstGeom>
-          <a:solidFill>
-            <a:srgbClr val="DDD6FE"/>
-          </a:solidFill>
-          <a:ln w="12700">
-            <a:solidFill>
-              <a:srgbClr val="E2E8F0"/>
-            </a:solidFill>
-            <a:prstDash val="solid"/>
-          </a:ln>
-        </p:spPr>
-      </p:sp>
-      <p:sp>
-        <p:nvSpPr>
-          <p:cNvPr id="39" name="Text 37"/>
-          <p:cNvSpPr/>
-          <p:nvPr/>
-        </p:nvSpPr>
-        <p:spPr>
-          <a:xfrm>
-            <a:off x="365760" y="3246120"/>
-            <a:ext cx="2468880" cy="402336"/>
+              <a:t>judge</a:t>
+            </a:r>
+            <a:endParaRPr lang="en-US" sz="1200" dirty="0"/>
+          </a:p>
+        </p:txBody>
+      </p:sp>
+      <p:sp>
+        <p:nvSpPr>
+          <p:cNvPr id="39" name="Shape 37"/>
+          <p:cNvSpPr/>
+          <p:nvPr/>
+        </p:nvSpPr>
+        <p:spPr>
+          <a:xfrm>
+            <a:off x="2542032" y="4023360"/>
+            <a:ext cx="2011680" cy="402336"/>
+          </a:xfrm>
+          <a:prstGeom prst="rect">
+            <a:avLst>
+              <a:gd name="adj" fmla="val 13636"/>
+            </a:avLst>
+          </a:prstGeom>
+          <a:solidFill>
+            <a:srgbClr val="EEF2FF"/>
+          </a:solidFill>
+          <a:ln w="12700">
+            <a:solidFill>
+              <a:srgbClr val="6366F1"/>
+            </a:solidFill>
+            <a:prstDash val="solid"/>
+          </a:ln>
+        </p:spPr>
+      </p:sp>
+      <p:sp>
+        <p:nvSpPr>
+          <p:cNvPr id="40" name="Text 38"/>
+          <p:cNvSpPr/>
+          <p:nvPr/>
+        </p:nvSpPr>
+        <p:spPr>
+          <a:xfrm>
+            <a:off x="2542032" y="4023360"/>
+            <a:ext cx="2011680" cy="402336"/>
           </a:xfrm>
           <a:prstGeom prst="rect">
             <a:avLst/>
@@ -34768,44 +34872,19 @@
               <a:buNone/>
             </a:pPr>
             <a:r>
-              <a:rPr lang="en-US" sz="1300" b="1" dirty="0">
-                <a:solidFill>
-                  <a:srgbClr val="4C1D95"/>
+              <a:rPr lang="en-US" sz="1200" b="1" dirty="0">
+                <a:solidFill>
+                  <a:srgbClr val="4338CA"/>
                 </a:solidFill>
                 <a:latin typeface="Trebuchet MS" pitchFamily="34" charset="0"/>
                 <a:ea typeface="Trebuchet MS" pitchFamily="34" charset="-122"/>
                 <a:cs typeface="Trebuchet MS" pitchFamily="34" charset="-120"/>
               </a:rPr>
-              <a:t>ad-</a:t>
-            </a:r>
-            <a:endParaRPr lang="en-US" sz="1300" dirty="0"/>
-          </a:p>
-        </p:txBody>
-      </p:sp>
-      <p:sp>
-        <p:nvSpPr>
-          <p:cNvPr id="40" name="Shape 38"/>
-          <p:cNvSpPr/>
-          <p:nvPr/>
-        </p:nvSpPr>
-        <p:spPr>
-          <a:xfrm>
-            <a:off x="2971800" y="3246120"/>
-            <a:ext cx="2834640" cy="402336"/>
-          </a:xfrm>
-          <a:prstGeom prst="rect">
-            <a:avLst/>
-          </a:prstGeom>
-          <a:solidFill>
-            <a:srgbClr val="F8FAFC"/>
-          </a:solidFill>
-          <a:ln w="12700">
-            <a:solidFill>
-              <a:srgbClr val="E2E8F0"/>
-            </a:solidFill>
-            <a:prstDash val="solid"/>
-          </a:ln>
-        </p:spPr>
+              <a:t>judged</a:t>
+            </a:r>
+            <a:endParaRPr lang="en-US" sz="1200" dirty="0"/>
+          </a:p>
+        </p:txBody>
       </p:sp>
       <p:sp>
         <p:nvSpPr>
@@ -34815,18 +34894,20 @@
         </p:nvSpPr>
         <p:spPr>
           <a:xfrm>
-            <a:off x="5943600" y="3246120"/>
-            <a:ext cx="2834640" cy="402336"/>
-          </a:xfrm>
-          <a:prstGeom prst="rect">
-            <a:avLst/>
-          </a:prstGeom>
-          <a:solidFill>
-            <a:srgbClr val="FCE7F3"/>
-          </a:solidFill>
-          <a:ln w="12700">
-            <a:solidFill>
-              <a:srgbClr val="E2E8F0"/>
+            <a:off x="4718304" y="4023360"/>
+            <a:ext cx="2011680" cy="402336"/>
+          </a:xfrm>
+          <a:prstGeom prst="rect">
+            <a:avLst>
+              <a:gd name="adj" fmla="val 13636"/>
+            </a:avLst>
+          </a:prstGeom>
+          <a:solidFill>
+            <a:srgbClr val="EEF2FF"/>
+          </a:solidFill>
+          <a:ln w="12700">
+            <a:solidFill>
+              <a:srgbClr val="6366F1"/>
             </a:solidFill>
             <a:prstDash val="solid"/>
           </a:ln>
@@ -34840,8 +34921,8 @@
         </p:nvSpPr>
         <p:spPr>
           <a:xfrm>
-            <a:off x="5943600" y="3246120"/>
-            <a:ext cx="2834640" cy="402336"/>
+            <a:off x="4718304" y="4023360"/>
+            <a:ext cx="2011680" cy="402336"/>
           </a:xfrm>
           <a:prstGeom prst="rect">
             <a:avLst/>
@@ -34857,30 +34938,57 @@
               <a:buNone/>
             </a:pPr>
             <a:r>
-              <a:rPr lang="en-US" sz="1300" b="1" dirty="0">
-                <a:solidFill>
-                  <a:srgbClr val="9D174D"/>
+              <a:rPr lang="en-US" sz="1200" b="1" dirty="0">
+                <a:solidFill>
+                  <a:srgbClr val="4338CA"/>
                 </a:solidFill>
                 <a:latin typeface="Trebuchet MS" pitchFamily="34" charset="0"/>
                 <a:ea typeface="Trebuchet MS" pitchFamily="34" charset="-122"/>
                 <a:cs typeface="Trebuchet MS" pitchFamily="34" charset="-120"/>
               </a:rPr>
-              <a:t>-al</a:t>
-            </a:r>
-            <a:endParaRPr lang="en-US" sz="1300" dirty="0"/>
-          </a:p>
-        </p:txBody>
-      </p:sp>
-      <p:sp>
-        <p:nvSpPr>
-          <p:cNvPr id="43" name="Text 41"/>
-          <p:cNvSpPr/>
-          <p:nvPr/>
-        </p:nvSpPr>
-        <p:spPr>
-          <a:xfrm>
-            <a:off x="365760" y="3611880"/>
-            <a:ext cx="1828800" cy="347472"/>
+              <a:t>judges</a:t>
+            </a:r>
+            <a:endParaRPr lang="en-US" sz="1200" dirty="0"/>
+          </a:p>
+        </p:txBody>
+      </p:sp>
+      <p:sp>
+        <p:nvSpPr>
+          <p:cNvPr id="43" name="Shape 41"/>
+          <p:cNvSpPr/>
+          <p:nvPr/>
+        </p:nvSpPr>
+        <p:spPr>
+          <a:xfrm>
+            <a:off x="6894576" y="4023360"/>
+            <a:ext cx="2011680" cy="402336"/>
+          </a:xfrm>
+          <a:prstGeom prst="rect">
+            <a:avLst>
+              <a:gd name="adj" fmla="val 13636"/>
+            </a:avLst>
+          </a:prstGeom>
+          <a:solidFill>
+            <a:srgbClr val="EEF2FF"/>
+          </a:solidFill>
+          <a:ln w="12700">
+            <a:solidFill>
+              <a:srgbClr val="6366F1"/>
+            </a:solidFill>
+            <a:prstDash val="solid"/>
+          </a:ln>
+        </p:spPr>
+      </p:sp>
+      <p:sp>
+        <p:nvSpPr>
+          <p:cNvPr id="44" name="Text 42"/>
+          <p:cNvSpPr/>
+          <p:nvPr/>
+        </p:nvSpPr>
+        <p:spPr>
+          <a:xfrm>
+            <a:off x="6894576" y="4023360"/>
+            <a:ext cx="2011680" cy="402336"/>
           </a:xfrm>
           <a:prstGeom prst="rect">
             <a:avLst/>
@@ -34892,547 +35000,19 @@
           <a:bodyPr wrap="square" lIns="0" tIns="0" rIns="0" bIns="0" rtlCol="0" anchor="ctr"/>
           <a:lstStyle/>
           <a:p>
-            <a:pPr algn="l" indent="0" marL="0">
+            <a:pPr algn="ctr" indent="0" marL="0">
               <a:buNone/>
             </a:pPr>
             <a:r>
               <a:rPr lang="en-US" sz="1200" b="1" dirty="0">
                 <a:solidFill>
-                  <a:srgbClr val="0F172A"/>
+                  <a:srgbClr val="4338CA"/>
                 </a:solidFill>
                 <a:latin typeface="Trebuchet MS" pitchFamily="34" charset="0"/>
                 <a:ea typeface="Trebuchet MS" pitchFamily="34" charset="-122"/>
                 <a:cs typeface="Trebuchet MS" pitchFamily="34" charset="-120"/>
               </a:rPr>
-              <a:t>Sample words:</a:t>
-            </a:r>
-            <a:endParaRPr lang="en-US" sz="1200" dirty="0"/>
-          </a:p>
-        </p:txBody>
-      </p:sp>
-      <p:sp>
-        <p:nvSpPr>
-          <p:cNvPr id="44" name="Shape 42"/>
-          <p:cNvSpPr/>
-          <p:nvPr/>
-        </p:nvSpPr>
-        <p:spPr>
-          <a:xfrm>
-            <a:off x="365760" y="4023360"/>
-            <a:ext cx="2011680" cy="402336"/>
-          </a:xfrm>
-          <a:prstGeom prst="rect">
-            <a:avLst>
-              <a:gd name="adj" fmla="val 13636"/>
-            </a:avLst>
-          </a:prstGeom>
-          <a:solidFill>
-            <a:srgbClr val="EEF2FF"/>
-          </a:solidFill>
-          <a:ln w="12700">
-            <a:solidFill>
-              <a:srgbClr val="6366F1"/>
-            </a:solidFill>
-            <a:prstDash val="solid"/>
-          </a:ln>
-        </p:spPr>
-      </p:sp>
-      <p:sp>
-        <p:nvSpPr>
-          <p:cNvPr id="45" name="Text 43"/>
-          <p:cNvSpPr/>
-          <p:nvPr/>
-        </p:nvSpPr>
-        <p:spPr>
-          <a:xfrm>
-            <a:off x="365760" y="4023360"/>
-            <a:ext cx="2011680" cy="402336"/>
-          </a:xfrm>
-          <a:prstGeom prst="rect">
-            <a:avLst/>
-          </a:prstGeom>
-          <a:noFill/>
-          <a:ln/>
-        </p:spPr>
-        <p:txBody>
-          <a:bodyPr wrap="square" lIns="0" tIns="0" rIns="0" bIns="0" rtlCol="0" anchor="ctr"/>
-          <a:lstStyle/>
-          <a:p>
-            <a:pPr algn="ctr" indent="0" marL="0">
-              <a:buNone/>
-            </a:pPr>
-            <a:r>
-              <a:rPr lang="en-US" sz="1200" b="1" dirty="0">
-                <a:solidFill>
-                  <a:srgbClr val="4338CA"/>
-                </a:solidFill>
-                <a:latin typeface="Trebuchet MS" pitchFamily="34" charset="0"/>
-                <a:ea typeface="Trebuchet MS" pitchFamily="34" charset="-122"/>
-                <a:cs typeface="Trebuchet MS" pitchFamily="34" charset="-120"/>
-              </a:rPr>
-              <a:t>judge</a:t>
-            </a:r>
-            <a:endParaRPr lang="en-US" sz="1200" dirty="0"/>
-          </a:p>
-        </p:txBody>
-      </p:sp>
-      <p:sp>
-        <p:nvSpPr>
-          <p:cNvPr id="46" name="Shape 44"/>
-          <p:cNvSpPr/>
-          <p:nvPr/>
-        </p:nvSpPr>
-        <p:spPr>
-          <a:xfrm>
-            <a:off x="2542032" y="4023360"/>
-            <a:ext cx="2011680" cy="402336"/>
-          </a:xfrm>
-          <a:prstGeom prst="rect">
-            <a:avLst>
-              <a:gd name="adj" fmla="val 13636"/>
-            </a:avLst>
-          </a:prstGeom>
-          <a:solidFill>
-            <a:srgbClr val="EEF2FF"/>
-          </a:solidFill>
-          <a:ln w="12700">
-            <a:solidFill>
-              <a:srgbClr val="6366F1"/>
-            </a:solidFill>
-            <a:prstDash val="solid"/>
-          </a:ln>
-        </p:spPr>
-      </p:sp>
-      <p:sp>
-        <p:nvSpPr>
-          <p:cNvPr id="47" name="Text 45"/>
-          <p:cNvSpPr/>
-          <p:nvPr/>
-        </p:nvSpPr>
-        <p:spPr>
-          <a:xfrm>
-            <a:off x="2542032" y="4023360"/>
-            <a:ext cx="2011680" cy="402336"/>
-          </a:xfrm>
-          <a:prstGeom prst="rect">
-            <a:avLst/>
-          </a:prstGeom>
-          <a:noFill/>
-          <a:ln/>
-        </p:spPr>
-        <p:txBody>
-          <a:bodyPr wrap="square" lIns="0" tIns="0" rIns="0" bIns="0" rtlCol="0" anchor="ctr"/>
-          <a:lstStyle/>
-          <a:p>
-            <a:pPr algn="ctr" indent="0" marL="0">
-              <a:buNone/>
-            </a:pPr>
-            <a:r>
-              <a:rPr lang="en-US" sz="1200" b="1" dirty="0">
-                <a:solidFill>
-                  <a:srgbClr val="4338CA"/>
-                </a:solidFill>
-                <a:latin typeface="Trebuchet MS" pitchFamily="34" charset="0"/>
-                <a:ea typeface="Trebuchet MS" pitchFamily="34" charset="-122"/>
-                <a:cs typeface="Trebuchet MS" pitchFamily="34" charset="-120"/>
-              </a:rPr>
-              <a:t>judgement</a:t>
-            </a:r>
-            <a:endParaRPr lang="en-US" sz="1200" dirty="0"/>
-          </a:p>
-        </p:txBody>
-      </p:sp>
-      <p:sp>
-        <p:nvSpPr>
-          <p:cNvPr id="48" name="Shape 46"/>
-          <p:cNvSpPr/>
-          <p:nvPr/>
-        </p:nvSpPr>
-        <p:spPr>
-          <a:xfrm>
-            <a:off x="4718304" y="4023360"/>
-            <a:ext cx="2011680" cy="402336"/>
-          </a:xfrm>
-          <a:prstGeom prst="rect">
-            <a:avLst>
-              <a:gd name="adj" fmla="val 13636"/>
-            </a:avLst>
-          </a:prstGeom>
-          <a:solidFill>
-            <a:srgbClr val="EEF2FF"/>
-          </a:solidFill>
-          <a:ln w="12700">
-            <a:solidFill>
-              <a:srgbClr val="6366F1"/>
-            </a:solidFill>
-            <a:prstDash val="solid"/>
-          </a:ln>
-        </p:spPr>
-      </p:sp>
-      <p:sp>
-        <p:nvSpPr>
-          <p:cNvPr id="49" name="Text 47"/>
-          <p:cNvSpPr/>
-          <p:nvPr/>
-        </p:nvSpPr>
-        <p:spPr>
-          <a:xfrm>
-            <a:off x="4718304" y="4023360"/>
-            <a:ext cx="2011680" cy="402336"/>
-          </a:xfrm>
-          <a:prstGeom prst="rect">
-            <a:avLst/>
-          </a:prstGeom>
-          <a:noFill/>
-          <a:ln/>
-        </p:spPr>
-        <p:txBody>
-          <a:bodyPr wrap="square" lIns="0" tIns="0" rIns="0" bIns="0" rtlCol="0" anchor="ctr"/>
-          <a:lstStyle/>
-          <a:p>
-            <a:pPr algn="ctr" indent="0" marL="0">
-              <a:buNone/>
-            </a:pPr>
-            <a:r>
-              <a:rPr lang="en-US" sz="1200" b="1" dirty="0">
-                <a:solidFill>
-                  <a:srgbClr val="4338CA"/>
-                </a:solidFill>
-                <a:latin typeface="Trebuchet MS" pitchFamily="34" charset="0"/>
-                <a:ea typeface="Trebuchet MS" pitchFamily="34" charset="-122"/>
-                <a:cs typeface="Trebuchet MS" pitchFamily="34" charset="-120"/>
-              </a:rPr>
-              <a:t>misjudge</a:t>
-            </a:r>
-            <a:endParaRPr lang="en-US" sz="1200" dirty="0"/>
-          </a:p>
-        </p:txBody>
-      </p:sp>
-      <p:sp>
-        <p:nvSpPr>
-          <p:cNvPr id="50" name="Shape 48"/>
-          <p:cNvSpPr/>
-          <p:nvPr/>
-        </p:nvSpPr>
-        <p:spPr>
-          <a:xfrm>
-            <a:off x="6894576" y="4023360"/>
-            <a:ext cx="2011680" cy="402336"/>
-          </a:xfrm>
-          <a:prstGeom prst="rect">
-            <a:avLst>
-              <a:gd name="adj" fmla="val 13636"/>
-            </a:avLst>
-          </a:prstGeom>
-          <a:solidFill>
-            <a:srgbClr val="EEF2FF"/>
-          </a:solidFill>
-          <a:ln w="12700">
-            <a:solidFill>
-              <a:srgbClr val="6366F1"/>
-            </a:solidFill>
-            <a:prstDash val="solid"/>
-          </a:ln>
-        </p:spPr>
-      </p:sp>
-      <p:sp>
-        <p:nvSpPr>
-          <p:cNvPr id="51" name="Text 49"/>
-          <p:cNvSpPr/>
-          <p:nvPr/>
-        </p:nvSpPr>
-        <p:spPr>
-          <a:xfrm>
-            <a:off x="6894576" y="4023360"/>
-            <a:ext cx="2011680" cy="402336"/>
-          </a:xfrm>
-          <a:prstGeom prst="rect">
-            <a:avLst/>
-          </a:prstGeom>
-          <a:noFill/>
-          <a:ln/>
-        </p:spPr>
-        <p:txBody>
-          <a:bodyPr wrap="square" lIns="0" tIns="0" rIns="0" bIns="0" rtlCol="0" anchor="ctr"/>
-          <a:lstStyle/>
-          <a:p>
-            <a:pPr algn="ctr" indent="0" marL="0">
-              <a:buNone/>
-            </a:pPr>
-            <a:r>
-              <a:rPr lang="en-US" sz="1200" b="1" dirty="0">
-                <a:solidFill>
-                  <a:srgbClr val="4338CA"/>
-                </a:solidFill>
-                <a:latin typeface="Trebuchet MS" pitchFamily="34" charset="0"/>
-                <a:ea typeface="Trebuchet MS" pitchFamily="34" charset="-122"/>
-                <a:cs typeface="Trebuchet MS" pitchFamily="34" charset="-120"/>
-              </a:rPr>
-              <a:t>prejudge</a:t>
-            </a:r>
-            <a:endParaRPr lang="en-US" sz="1200" dirty="0"/>
-          </a:p>
-        </p:txBody>
-      </p:sp>
-      <p:sp>
-        <p:nvSpPr>
-          <p:cNvPr id="52" name="Shape 50"/>
-          <p:cNvSpPr/>
-          <p:nvPr/>
-        </p:nvSpPr>
-        <p:spPr>
-          <a:xfrm>
-            <a:off x="365760" y="4498848"/>
-            <a:ext cx="2011680" cy="402336"/>
-          </a:xfrm>
-          <a:prstGeom prst="rect">
-            <a:avLst>
-              <a:gd name="adj" fmla="val 13636"/>
-            </a:avLst>
-          </a:prstGeom>
-          <a:solidFill>
-            <a:srgbClr val="EEF2FF"/>
-          </a:solidFill>
-          <a:ln w="12700">
-            <a:solidFill>
-              <a:srgbClr val="6366F1"/>
-            </a:solidFill>
-            <a:prstDash val="solid"/>
-          </a:ln>
-        </p:spPr>
-      </p:sp>
-      <p:sp>
-        <p:nvSpPr>
-          <p:cNvPr id="53" name="Text 51"/>
-          <p:cNvSpPr/>
-          <p:nvPr/>
-        </p:nvSpPr>
-        <p:spPr>
-          <a:xfrm>
-            <a:off x="365760" y="4498848"/>
-            <a:ext cx="2011680" cy="402336"/>
-          </a:xfrm>
-          <a:prstGeom prst="rect">
-            <a:avLst/>
-          </a:prstGeom>
-          <a:noFill/>
-          <a:ln/>
-        </p:spPr>
-        <p:txBody>
-          <a:bodyPr wrap="square" lIns="0" tIns="0" rIns="0" bIns="0" rtlCol="0" anchor="ctr"/>
-          <a:lstStyle/>
-          <a:p>
-            <a:pPr algn="ctr" indent="0" marL="0">
-              <a:buNone/>
-            </a:pPr>
-            <a:r>
-              <a:rPr lang="en-US" sz="1200" b="1" dirty="0">
-                <a:solidFill>
-                  <a:srgbClr val="4338CA"/>
-                </a:solidFill>
-                <a:latin typeface="Trebuchet MS" pitchFamily="34" charset="0"/>
-                <a:ea typeface="Trebuchet MS" pitchFamily="34" charset="-122"/>
-                <a:cs typeface="Trebuchet MS" pitchFamily="34" charset="-120"/>
-              </a:rPr>
               <a:t>judging</a:t>
-            </a:r>
-            <a:endParaRPr lang="en-US" sz="1200" dirty="0"/>
-          </a:p>
-        </p:txBody>
-      </p:sp>
-      <p:sp>
-        <p:nvSpPr>
-          <p:cNvPr id="54" name="Shape 52"/>
-          <p:cNvSpPr/>
-          <p:nvPr/>
-        </p:nvSpPr>
-        <p:spPr>
-          <a:xfrm>
-            <a:off x="2542032" y="4498848"/>
-            <a:ext cx="2011680" cy="402336"/>
-          </a:xfrm>
-          <a:prstGeom prst="rect">
-            <a:avLst>
-              <a:gd name="adj" fmla="val 13636"/>
-            </a:avLst>
-          </a:prstGeom>
-          <a:solidFill>
-            <a:srgbClr val="EEF2FF"/>
-          </a:solidFill>
-          <a:ln w="12700">
-            <a:solidFill>
-              <a:srgbClr val="6366F1"/>
-            </a:solidFill>
-            <a:prstDash val="solid"/>
-          </a:ln>
-        </p:spPr>
-      </p:sp>
-      <p:sp>
-        <p:nvSpPr>
-          <p:cNvPr id="55" name="Text 53"/>
-          <p:cNvSpPr/>
-          <p:nvPr/>
-        </p:nvSpPr>
-        <p:spPr>
-          <a:xfrm>
-            <a:off x="2542032" y="4498848"/>
-            <a:ext cx="2011680" cy="402336"/>
-          </a:xfrm>
-          <a:prstGeom prst="rect">
-            <a:avLst/>
-          </a:prstGeom>
-          <a:noFill/>
-          <a:ln/>
-        </p:spPr>
-        <p:txBody>
-          <a:bodyPr wrap="square" lIns="0" tIns="0" rIns="0" bIns="0" rtlCol="0" anchor="ctr"/>
-          <a:lstStyle/>
-          <a:p>
-            <a:pPr algn="ctr" indent="0" marL="0">
-              <a:buNone/>
-            </a:pPr>
-            <a:r>
-              <a:rPr lang="en-US" sz="1200" b="1" dirty="0">
-                <a:solidFill>
-                  <a:srgbClr val="4338CA"/>
-                </a:solidFill>
-                <a:latin typeface="Trebuchet MS" pitchFamily="34" charset="0"/>
-                <a:ea typeface="Trebuchet MS" pitchFamily="34" charset="-122"/>
-                <a:cs typeface="Trebuchet MS" pitchFamily="34" charset="-120"/>
-              </a:rPr>
-              <a:t>misjudgement</a:t>
-            </a:r>
-            <a:endParaRPr lang="en-US" sz="1200" dirty="0"/>
-          </a:p>
-        </p:txBody>
-      </p:sp>
-      <p:sp>
-        <p:nvSpPr>
-          <p:cNvPr id="56" name="Shape 54"/>
-          <p:cNvSpPr/>
-          <p:nvPr/>
-        </p:nvSpPr>
-        <p:spPr>
-          <a:xfrm>
-            <a:off x="4718304" y="4498848"/>
-            <a:ext cx="2011680" cy="402336"/>
-          </a:xfrm>
-          <a:prstGeom prst="rect">
-            <a:avLst>
-              <a:gd name="adj" fmla="val 13636"/>
-            </a:avLst>
-          </a:prstGeom>
-          <a:solidFill>
-            <a:srgbClr val="EEF2FF"/>
-          </a:solidFill>
-          <a:ln w="12700">
-            <a:solidFill>
-              <a:srgbClr val="6366F1"/>
-            </a:solidFill>
-            <a:prstDash val="solid"/>
-          </a:ln>
-        </p:spPr>
-      </p:sp>
-      <p:sp>
-        <p:nvSpPr>
-          <p:cNvPr id="57" name="Text 55"/>
-          <p:cNvSpPr/>
-          <p:nvPr/>
-        </p:nvSpPr>
-        <p:spPr>
-          <a:xfrm>
-            <a:off x="4718304" y="4498848"/>
-            <a:ext cx="2011680" cy="402336"/>
-          </a:xfrm>
-          <a:prstGeom prst="rect">
-            <a:avLst/>
-          </a:prstGeom>
-          <a:noFill/>
-          <a:ln/>
-        </p:spPr>
-        <p:txBody>
-          <a:bodyPr wrap="square" lIns="0" tIns="0" rIns="0" bIns="0" rtlCol="0" anchor="ctr"/>
-          <a:lstStyle/>
-          <a:p>
-            <a:pPr algn="ctr" indent="0" marL="0">
-              <a:buNone/>
-            </a:pPr>
-            <a:r>
-              <a:rPr lang="en-US" sz="1200" b="1" dirty="0">
-                <a:solidFill>
-                  <a:srgbClr val="4338CA"/>
-                </a:solidFill>
-                <a:latin typeface="Trebuchet MS" pitchFamily="34" charset="0"/>
-                <a:ea typeface="Trebuchet MS" pitchFamily="34" charset="-122"/>
-                <a:cs typeface="Trebuchet MS" pitchFamily="34" charset="-120"/>
-              </a:rPr>
-              <a:t>rejudge</a:t>
-            </a:r>
-            <a:endParaRPr lang="en-US" sz="1200" dirty="0"/>
-          </a:p>
-        </p:txBody>
-      </p:sp>
-      <p:sp>
-        <p:nvSpPr>
-          <p:cNvPr id="58" name="Shape 56"/>
-          <p:cNvSpPr/>
-          <p:nvPr/>
-        </p:nvSpPr>
-        <p:spPr>
-          <a:xfrm>
-            <a:off x="6894576" y="4498848"/>
-            <a:ext cx="2011680" cy="402336"/>
-          </a:xfrm>
-          <a:prstGeom prst="rect">
-            <a:avLst>
-              <a:gd name="adj" fmla="val 13636"/>
-            </a:avLst>
-          </a:prstGeom>
-          <a:solidFill>
-            <a:srgbClr val="EEF2FF"/>
-          </a:solidFill>
-          <a:ln w="12700">
-            <a:solidFill>
-              <a:srgbClr val="6366F1"/>
-            </a:solidFill>
-            <a:prstDash val="solid"/>
-          </a:ln>
-        </p:spPr>
-      </p:sp>
-      <p:sp>
-        <p:nvSpPr>
-          <p:cNvPr id="59" name="Text 57"/>
-          <p:cNvSpPr/>
-          <p:nvPr/>
-        </p:nvSpPr>
-        <p:spPr>
-          <a:xfrm>
-            <a:off x="6894576" y="4498848"/>
-            <a:ext cx="2011680" cy="402336"/>
-          </a:xfrm>
-          <a:prstGeom prst="rect">
-            <a:avLst/>
-          </a:prstGeom>
-          <a:noFill/>
-          <a:ln/>
-        </p:spPr>
-        <p:txBody>
-          <a:bodyPr wrap="square" lIns="0" tIns="0" rIns="0" bIns="0" rtlCol="0" anchor="ctr"/>
-          <a:lstStyle/>
-          <a:p>
-            <a:pPr algn="ctr" indent="0" marL="0">
-              <a:buNone/>
-            </a:pPr>
-            <a:r>
-              <a:rPr lang="en-US" sz="1200" b="1" dirty="0">
-                <a:solidFill>
-                  <a:srgbClr val="4338CA"/>
-                </a:solidFill>
-                <a:latin typeface="Trebuchet MS" pitchFamily="34" charset="0"/>
-                <a:ea typeface="Trebuchet MS" pitchFamily="34" charset="-122"/>
-                <a:cs typeface="Trebuchet MS" pitchFamily="34" charset="-120"/>
-              </a:rPr>
-              <a:t>judgemental</a:t>
             </a:r>
             <a:endParaRPr lang="en-US" sz="1200" dirty="0"/>
           </a:p>
@@ -35724,7 +35304,7 @@
                 <a:ea typeface="Calibri" pitchFamily="34" charset="-122"/>
                 <a:cs typeface="Calibri" pitchFamily="34" charset="-120"/>
               </a:rPr>
-              <a:t>Word Labs  •  wordlabs.app  •  Root: 'judge' = to decide or form opinion</a:t>
+              <a:t>Word Labs  •  wordlabs.app  •  Root: 'judge' = decide; form an opinion</a:t>
             </a:r>
             <a:endParaRPr lang="en-US" sz="800" dirty="0"/>
           </a:p>
@@ -35888,7 +35468,7 @@
                 <a:ea typeface="Calibri" pitchFamily="34" charset="-122"/>
                 <a:cs typeface="Calibri" pitchFamily="34" charset="-120"/>
               </a:rPr>
-              <a:t>The core part of a word carrying its basic meaning. For example, 'judge' means 'to decide or form opinion'.</a:t>
+              <a:t>The core part of a word carrying its basic meaning. For example, 'judge' means 'decide; form an opinion'.</a:t>
             </a:r>
             <a:endParaRPr lang="en-US" sz="1350" dirty="0"/>
           </a:p>
@@ -36508,7 +36088,7 @@
                 <a:ea typeface="Calibri" pitchFamily="34" charset="-122"/>
                 <a:cs typeface="Calibri" pitchFamily="34" charset="-120"/>
               </a:rPr>
-              <a:t>Word Labs  •  wordlabs.app  •  Root: 'judge' = to decide or form opinion</a:t>
+              <a:t>Word Labs  •  wordlabs.app  •  Root: 'judge' = decide; form an opinion</a:t>
             </a:r>
             <a:endParaRPr lang="en-US" sz="800" dirty="0"/>
           </a:p>
@@ -36620,7 +36200,7 @@
                 <a:ea typeface="Calibri" pitchFamily="34" charset="-122"/>
                 <a:cs typeface="Calibri" pitchFamily="34" charset="-120"/>
               </a:rPr>
-              <a:t>1.  The word 'misjudge' uses the prefix 'mis-' meaning wrongly or badly.</a:t>
+              <a:t>1.  'judge' means 'decide; form an opinion'.</a:t>
             </a:r>
             <a:endParaRPr lang="en-US" sz="1300" dirty="0"/>
           </a:p>
@@ -36759,7 +36339,7 @@
                 <a:ea typeface="Calibri" pitchFamily="34" charset="-122"/>
                 <a:cs typeface="Calibri" pitchFamily="34" charset="-120"/>
               </a:rPr>
-              <a:t>2.  The word 'judgement' is formed by adding the suffix '-ment' to the root 'judge'.</a:t>
+              <a:t>2.  'judge' means 'a person who decides the result in a court or competition'.</a:t>
             </a:r>
             <a:endParaRPr lang="en-US" sz="1300" dirty="0"/>
           </a:p>
@@ -36898,7 +36478,7 @@
                 <a:ea typeface="Calibri" pitchFamily="34" charset="-122"/>
                 <a:cs typeface="Calibri" pitchFamily="34" charset="-120"/>
               </a:rPr>
-              <a:t>3.  The root 'judge' carries the idea of deciding or forming an opinion.</a:t>
+              <a:t>3.  'judge' means 'a tool used for measuring length'.</a:t>
             </a:r>
             <a:endParaRPr lang="en-US" sz="1300" dirty="0"/>
           </a:p>
@@ -36921,11 +36501,11 @@
             </a:avLst>
           </a:prstGeom>
           <a:solidFill>
-            <a:srgbClr val="DCFCE7"/>
-          </a:solidFill>
-          <a:ln w="12700">
-            <a:solidFill>
-              <a:srgbClr val="16A34A"/>
+            <a:srgbClr val="FEE2E2"/>
+          </a:solidFill>
+          <a:ln w="12700">
+            <a:solidFill>
+              <a:srgbClr val="DC2626"/>
             </a:solidFill>
             <a:prstDash val="solid"/>
           </a:ln>
@@ -36958,13 +36538,13 @@
             <a:r>
               <a:rPr lang="en-US" sz="1100" b="1" dirty="0">
                 <a:solidFill>
-                  <a:srgbClr val="16A34A"/>
+                  <a:srgbClr val="DC2626"/>
                 </a:solidFill>
                 <a:latin typeface="Trebuchet MS" pitchFamily="34" charset="0"/>
                 <a:ea typeface="Trebuchet MS" pitchFamily="34" charset="-122"/>
                 <a:cs typeface="Trebuchet MS" pitchFamily="34" charset="-120"/>
               </a:rPr>
-              <a:t>TRUE</a:t>
+              <a:t>FALSE</a:t>
             </a:r>
             <a:endParaRPr lang="en-US" sz="1100" dirty="0"/>
           </a:p>
@@ -37037,7 +36617,7 @@
                 <a:ea typeface="Calibri" pitchFamily="34" charset="-122"/>
                 <a:cs typeface="Calibri" pitchFamily="34" charset="-120"/>
               </a:rPr>
-              <a:t>4.  The root 'judge' comes from an Ancient Greek word.</a:t>
+              <a:t>4.  'judged' means 'jumped over something quickly'.</a:t>
             </a:r>
             <a:endParaRPr lang="en-US" sz="1300" dirty="0"/>
           </a:p>
@@ -37176,7 +36756,7 @@
                 <a:ea typeface="Calibri" pitchFamily="34" charset="-122"/>
                 <a:cs typeface="Calibri" pitchFamily="34" charset="-120"/>
               </a:rPr>
-              <a:t>5.  A judgemental person is very good at keeping opinions to themselves.</a:t>
+              <a:t>5.  'judged' means 'decided or formed an opinion about something (past tense)'.</a:t>
             </a:r>
             <a:endParaRPr lang="en-US" sz="1300" dirty="0"/>
           </a:p>
@@ -37199,11 +36779,11 @@
             </a:avLst>
           </a:prstGeom>
           <a:solidFill>
-            <a:srgbClr val="FEE2E2"/>
-          </a:solidFill>
-          <a:ln w="12700">
-            <a:solidFill>
-              <a:srgbClr val="DC2626"/>
+            <a:srgbClr val="DCFCE7"/>
+          </a:solidFill>
+          <a:ln w="12700">
+            <a:solidFill>
+              <a:srgbClr val="16A34A"/>
             </a:solidFill>
             <a:prstDash val="solid"/>
           </a:ln>
@@ -37236,13 +36816,13 @@
             <a:r>
               <a:rPr lang="en-US" sz="1100" b="1" dirty="0">
                 <a:solidFill>
-                  <a:srgbClr val="DC2626"/>
+                  <a:srgbClr val="16A34A"/>
                 </a:solidFill>
                 <a:latin typeface="Trebuchet MS" pitchFamily="34" charset="0"/>
                 <a:ea typeface="Trebuchet MS" pitchFamily="34" charset="-122"/>
                 <a:cs typeface="Trebuchet MS" pitchFamily="34" charset="-120"/>
               </a:rPr>
-              <a:t>FALSE</a:t>
+              <a:t>TRUE</a:t>
             </a:r>
             <a:endParaRPr lang="en-US" sz="1100" dirty="0"/>
           </a:p>
@@ -37534,7 +37114,7 @@
                 <a:ea typeface="Calibri" pitchFamily="34" charset="-122"/>
                 <a:cs typeface="Calibri" pitchFamily="34" charset="-120"/>
               </a:rPr>
-              <a:t>Word Labs  •  wordlabs.app  •  Root: 'judge' = to decide or form opinion</a:t>
+              <a:t>Word Labs  •  wordlabs.app  •  Root: 'judge' = decide; form an opinion</a:t>
             </a:r>
             <a:endParaRPr lang="en-US" sz="800" dirty="0"/>
           </a:p>
@@ -37671,7 +37251,7 @@
                 <a:ea typeface="Trebuchet MS" pitchFamily="34" charset="-122"/>
                 <a:cs typeface="Trebuchet MS" pitchFamily="34" charset="-120"/>
               </a:rPr>
-              <a:t>to decide or form opinion</a:t>
+              <a:t>decide; form an opinion</a:t>
             </a:r>
             <a:endParaRPr lang="en-US" sz="2000" dirty="0"/>
           </a:p>
@@ -37710,7 +37290,7 @@
                 <a:ea typeface="Calibri" pitchFamily="34" charset="-122"/>
                 <a:cs typeface="Calibri" pitchFamily="34" charset="-120"/>
               </a:rPr>
-              <a:t>Origin: Latin: judicare</a:t>
+              <a:t>Origin: Core English root</a:t>
             </a:r>
             <a:endParaRPr lang="en-US" sz="1100" dirty="0"/>
           </a:p>
@@ -37881,7 +37461,7 @@
                 <a:ea typeface="Trebuchet MS" pitchFamily="34" charset="-122"/>
                 <a:cs typeface="Trebuchet MS" pitchFamily="34" charset="-120"/>
               </a:rPr>
-              <a:t>judgement</a:t>
+              <a:t>judged</a:t>
             </a:r>
             <a:endParaRPr lang="en-US" sz="1300" dirty="0"/>
           </a:p>
@@ -37947,7 +37527,7 @@
                 <a:ea typeface="Trebuchet MS" pitchFamily="34" charset="-122"/>
                 <a:cs typeface="Trebuchet MS" pitchFamily="34" charset="-120"/>
               </a:rPr>
-              <a:t>misjudge</a:t>
+              <a:t>judges</a:t>
             </a:r>
             <a:endParaRPr lang="en-US" sz="1300" dirty="0"/>
           </a:p>
@@ -38013,205 +37593,7 @@
                 <a:ea typeface="Trebuchet MS" pitchFamily="34" charset="-122"/>
                 <a:cs typeface="Trebuchet MS" pitchFamily="34" charset="-120"/>
               </a:rPr>
-              <a:t>prejudge</a:t>
-            </a:r>
-            <a:endParaRPr lang="en-US" sz="1300" dirty="0"/>
-          </a:p>
-        </p:txBody>
-      </p:sp>
-      <p:sp>
-        <p:nvSpPr>
-          <p:cNvPr id="24" name="Shape 22"/>
-          <p:cNvSpPr/>
-          <p:nvPr/>
-        </p:nvSpPr>
-        <p:spPr>
-          <a:xfrm>
-            <a:off x="365760" y="3401568"/>
-            <a:ext cx="2011680" cy="502920"/>
-          </a:xfrm>
-          <a:prstGeom prst="rect">
-            <a:avLst>
-              <a:gd name="adj" fmla="val 14545"/>
-            </a:avLst>
-          </a:prstGeom>
-          <a:solidFill>
-            <a:srgbClr val="EEF2FF"/>
-          </a:solidFill>
-          <a:ln w="12700">
-            <a:solidFill>
-              <a:srgbClr val="6366F1"/>
-            </a:solidFill>
-            <a:prstDash val="solid"/>
-          </a:ln>
-        </p:spPr>
-      </p:sp>
-      <p:sp>
-        <p:nvSpPr>
-          <p:cNvPr id="25" name="Text 23"/>
-          <p:cNvSpPr/>
-          <p:nvPr/>
-        </p:nvSpPr>
-        <p:spPr>
-          <a:xfrm>
-            <a:off x="365760" y="3401568"/>
-            <a:ext cx="2011680" cy="502920"/>
-          </a:xfrm>
-          <a:prstGeom prst="rect">
-            <a:avLst/>
-          </a:prstGeom>
-          <a:noFill/>
-          <a:ln/>
-        </p:spPr>
-        <p:txBody>
-          <a:bodyPr wrap="square" lIns="0" tIns="0" rIns="0" bIns="0" rtlCol="0" anchor="ctr"/>
-          <a:lstStyle/>
-          <a:p>
-            <a:pPr algn="ctr" indent="0" marL="0">
-              <a:buNone/>
-            </a:pPr>
-            <a:r>
-              <a:rPr lang="en-US" sz="1300" b="1" dirty="0">
-                <a:solidFill>
-                  <a:srgbClr val="4338CA"/>
-                </a:solidFill>
-                <a:latin typeface="Trebuchet MS" pitchFamily="34" charset="0"/>
-                <a:ea typeface="Trebuchet MS" pitchFamily="34" charset="-122"/>
-                <a:cs typeface="Trebuchet MS" pitchFamily="34" charset="-120"/>
-              </a:rPr>
               <a:t>judging</a:t>
-            </a:r>
-            <a:endParaRPr lang="en-US" sz="1300" dirty="0"/>
-          </a:p>
-        </p:txBody>
-      </p:sp>
-      <p:sp>
-        <p:nvSpPr>
-          <p:cNvPr id="26" name="Shape 24"/>
-          <p:cNvSpPr/>
-          <p:nvPr/>
-        </p:nvSpPr>
-        <p:spPr>
-          <a:xfrm>
-            <a:off x="2514600" y="3401568"/>
-            <a:ext cx="2011680" cy="502920"/>
-          </a:xfrm>
-          <a:prstGeom prst="rect">
-            <a:avLst>
-              <a:gd name="adj" fmla="val 14545"/>
-            </a:avLst>
-          </a:prstGeom>
-          <a:solidFill>
-            <a:srgbClr val="EEF2FF"/>
-          </a:solidFill>
-          <a:ln w="12700">
-            <a:solidFill>
-              <a:srgbClr val="6366F1"/>
-            </a:solidFill>
-            <a:prstDash val="solid"/>
-          </a:ln>
-        </p:spPr>
-      </p:sp>
-      <p:sp>
-        <p:nvSpPr>
-          <p:cNvPr id="27" name="Text 25"/>
-          <p:cNvSpPr/>
-          <p:nvPr/>
-        </p:nvSpPr>
-        <p:spPr>
-          <a:xfrm>
-            <a:off x="2514600" y="3401568"/>
-            <a:ext cx="2011680" cy="502920"/>
-          </a:xfrm>
-          <a:prstGeom prst="rect">
-            <a:avLst/>
-          </a:prstGeom>
-          <a:noFill/>
-          <a:ln/>
-        </p:spPr>
-        <p:txBody>
-          <a:bodyPr wrap="square" lIns="0" tIns="0" rIns="0" bIns="0" rtlCol="0" anchor="ctr"/>
-          <a:lstStyle/>
-          <a:p>
-            <a:pPr algn="ctr" indent="0" marL="0">
-              <a:buNone/>
-            </a:pPr>
-            <a:r>
-              <a:rPr lang="en-US" sz="1300" b="1" dirty="0">
-                <a:solidFill>
-                  <a:srgbClr val="4338CA"/>
-                </a:solidFill>
-                <a:latin typeface="Trebuchet MS" pitchFamily="34" charset="0"/>
-                <a:ea typeface="Trebuchet MS" pitchFamily="34" charset="-122"/>
-                <a:cs typeface="Trebuchet MS" pitchFamily="34" charset="-120"/>
-              </a:rPr>
-              <a:t>misjudgement</a:t>
-            </a:r>
-            <a:endParaRPr lang="en-US" sz="1300" dirty="0"/>
-          </a:p>
-        </p:txBody>
-      </p:sp>
-      <p:sp>
-        <p:nvSpPr>
-          <p:cNvPr id="28" name="Shape 26"/>
-          <p:cNvSpPr/>
-          <p:nvPr/>
-        </p:nvSpPr>
-        <p:spPr>
-          <a:xfrm>
-            <a:off x="4663440" y="3401568"/>
-            <a:ext cx="2011680" cy="502920"/>
-          </a:xfrm>
-          <a:prstGeom prst="rect">
-            <a:avLst>
-              <a:gd name="adj" fmla="val 14545"/>
-            </a:avLst>
-          </a:prstGeom>
-          <a:solidFill>
-            <a:srgbClr val="EEF2FF"/>
-          </a:solidFill>
-          <a:ln w="12700">
-            <a:solidFill>
-              <a:srgbClr val="6366F1"/>
-            </a:solidFill>
-            <a:prstDash val="solid"/>
-          </a:ln>
-        </p:spPr>
-      </p:sp>
-      <p:sp>
-        <p:nvSpPr>
-          <p:cNvPr id="29" name="Text 27"/>
-          <p:cNvSpPr/>
-          <p:nvPr/>
-        </p:nvSpPr>
-        <p:spPr>
-          <a:xfrm>
-            <a:off x="4663440" y="3401568"/>
-            <a:ext cx="2011680" cy="502920"/>
-          </a:xfrm>
-          <a:prstGeom prst="rect">
-            <a:avLst/>
-          </a:prstGeom>
-          <a:noFill/>
-          <a:ln/>
-        </p:spPr>
-        <p:txBody>
-          <a:bodyPr wrap="square" lIns="0" tIns="0" rIns="0" bIns="0" rtlCol="0" anchor="ctr"/>
-          <a:lstStyle/>
-          <a:p>
-            <a:pPr algn="ctr" indent="0" marL="0">
-              <a:buNone/>
-            </a:pPr>
-            <a:r>
-              <a:rPr lang="en-US" sz="1300" b="1" dirty="0">
-                <a:solidFill>
-                  <a:srgbClr val="4338CA"/>
-                </a:solidFill>
-                <a:latin typeface="Trebuchet MS" pitchFamily="34" charset="0"/>
-                <a:ea typeface="Trebuchet MS" pitchFamily="34" charset="-122"/>
-                <a:cs typeface="Trebuchet MS" pitchFamily="34" charset="-120"/>
-              </a:rPr>
-              <a:t>rejudge</a:t>
             </a:r>
             <a:endParaRPr lang="en-US" sz="1300" dirty="0"/>
           </a:p>
@@ -38503,7 +37885,7 @@
                 <a:ea typeface="Calibri" pitchFamily="34" charset="-122"/>
                 <a:cs typeface="Calibri" pitchFamily="34" charset="-120"/>
               </a:rPr>
-              <a:t>Word Labs  •  wordlabs.app  •  Root: 'judge' = to decide or form opinion</a:t>
+              <a:t>Word Labs  •  wordlabs.app  •  Root: 'judge' = decide; form an opinion</a:t>
             </a:r>
             <a:endParaRPr lang="en-US" sz="800" dirty="0"/>
           </a:p>
@@ -38932,7 +38314,7 @@
                 <a:ea typeface="Trebuchet MS" pitchFamily="34" charset="-122"/>
                 <a:cs typeface="Trebuchet MS" pitchFamily="34" charset="-120"/>
               </a:rPr>
-              <a:t>-ment</a:t>
+              <a:t>-ed</a:t>
             </a:r>
             <a:endParaRPr lang="en-US" sz="1300" dirty="0"/>
           </a:p>
@@ -39085,7 +38467,7 @@
                 <a:ea typeface="Trebuchet MS" pitchFamily="34" charset="-122"/>
                 <a:cs typeface="Trebuchet MS" pitchFamily="34" charset="-120"/>
               </a:rPr>
-              <a:t>-ing</a:t>
+              <a:t>-ment</a:t>
             </a:r>
             <a:endParaRPr lang="en-US" sz="1300" dirty="0"/>
           </a:p>
@@ -39106,7 +38488,7 @@
             <a:avLst/>
           </a:prstGeom>
           <a:solidFill>
-            <a:srgbClr val="DDD6FE"/>
+            <a:srgbClr val="F8FAFC"/>
           </a:solidFill>
           <a:ln w="12700">
             <a:solidFill>
@@ -39118,18 +38500,68 @@
       </p:sp>
       <p:sp>
         <p:nvSpPr>
-          <p:cNvPr id="29" name="Text 27"/>
-          <p:cNvSpPr/>
-          <p:nvPr/>
-        </p:nvSpPr>
-        <p:spPr>
-          <a:xfrm>
-            <a:off x="640080" y="2670048"/>
+          <p:cNvPr id="29" name="Shape 27"/>
+          <p:cNvSpPr/>
+          <p:nvPr/>
+        </p:nvSpPr>
+        <p:spPr>
+          <a:xfrm>
+            <a:off x="3291840" y="2670048"/>
+            <a:ext cx="1645920" cy="420624"/>
+          </a:xfrm>
+          <a:prstGeom prst="rect">
+            <a:avLst/>
+          </a:prstGeom>
+          <a:solidFill>
+            <a:srgbClr val="F8FAFC"/>
+          </a:solidFill>
+          <a:ln w="12700">
+            <a:solidFill>
+              <a:srgbClr val="E5E7EB"/>
+            </a:solidFill>
+            <a:prstDash val="solid"/>
+          </a:ln>
+        </p:spPr>
+      </p:sp>
+      <p:sp>
+        <p:nvSpPr>
+          <p:cNvPr id="30" name="Shape 28"/>
+          <p:cNvSpPr/>
+          <p:nvPr/>
+        </p:nvSpPr>
+        <p:spPr>
+          <a:xfrm>
+            <a:off x="5943600" y="2670048"/>
             <a:ext cx="1463040" cy="420624"/>
           </a:xfrm>
           <a:prstGeom prst="rect">
             <a:avLst/>
           </a:prstGeom>
+          <a:solidFill>
+            <a:srgbClr val="FCE7F3"/>
+          </a:solidFill>
+          <a:ln w="12700">
+            <a:solidFill>
+              <a:srgbClr val="E5E7EB"/>
+            </a:solidFill>
+            <a:prstDash val="solid"/>
+          </a:ln>
+        </p:spPr>
+      </p:sp>
+      <p:sp>
+        <p:nvSpPr>
+          <p:cNvPr id="31" name="Text 29"/>
+          <p:cNvSpPr/>
+          <p:nvPr/>
+        </p:nvSpPr>
+        <p:spPr>
+          <a:xfrm>
+            <a:off x="5943600" y="2670048"/>
+            <a:ext cx="1463040" cy="420624"/>
+          </a:xfrm>
+          <a:prstGeom prst="rect">
+            <a:avLst/>
+          </a:prstGeom>
           <a:noFill/>
           <a:ln/>
         </p:spPr>
@@ -39143,13 +38575,13 @@
             <a:r>
               <a:rPr lang="en-US" sz="1300" b="1" dirty="0">
                 <a:solidFill>
-                  <a:srgbClr val="4C1D95"/>
+                  <a:srgbClr val="9D174D"/>
                 </a:solidFill>
                 <a:latin typeface="Trebuchet MS" pitchFamily="34" charset="0"/>
                 <a:ea typeface="Trebuchet MS" pitchFamily="34" charset="-122"/>
                 <a:cs typeface="Trebuchet MS" pitchFamily="34" charset="-120"/>
               </a:rPr>
-              <a:t>re-</a:t>
+              <a:t>-s</a:t>
             </a:r>
             <a:endParaRPr lang="en-US" sz="1300" dirty="0"/>
           </a:p>
@@ -39157,20 +38589,45 @@
       </p:sp>
       <p:sp>
         <p:nvSpPr>
-          <p:cNvPr id="30" name="Shape 28"/>
-          <p:cNvSpPr/>
-          <p:nvPr/>
-        </p:nvSpPr>
-        <p:spPr>
-          <a:xfrm>
-            <a:off x="3291840" y="2670048"/>
+          <p:cNvPr id="32" name="Shape 30"/>
+          <p:cNvSpPr/>
+          <p:nvPr/>
+        </p:nvSpPr>
+        <p:spPr>
+          <a:xfrm>
+            <a:off x="640080" y="3127248"/>
+            <a:ext cx="1463040" cy="420624"/>
+          </a:xfrm>
+          <a:prstGeom prst="rect">
+            <a:avLst/>
+          </a:prstGeom>
+          <a:solidFill>
+            <a:srgbClr val="F1F5F9"/>
+          </a:solidFill>
+          <a:ln w="12700">
+            <a:solidFill>
+              <a:srgbClr val="E5E7EB"/>
+            </a:solidFill>
+            <a:prstDash val="solid"/>
+          </a:ln>
+        </p:spPr>
+      </p:sp>
+      <p:sp>
+        <p:nvSpPr>
+          <p:cNvPr id="33" name="Shape 31"/>
+          <p:cNvSpPr/>
+          <p:nvPr/>
+        </p:nvSpPr>
+        <p:spPr>
+          <a:xfrm>
+            <a:off x="3291840" y="3127248"/>
             <a:ext cx="1645920" cy="420624"/>
           </a:xfrm>
           <a:prstGeom prst="rect">
             <a:avLst/>
           </a:prstGeom>
           <a:solidFill>
-            <a:srgbClr val="F8FAFC"/>
+            <a:srgbClr val="F1F5F9"/>
           </a:solidFill>
           <a:ln w="12700">
             <a:solidFill>
@@ -39182,13 +38639,13 @@
       </p:sp>
       <p:sp>
         <p:nvSpPr>
-          <p:cNvPr id="31" name="Shape 29"/>
-          <p:cNvSpPr/>
-          <p:nvPr/>
-        </p:nvSpPr>
-        <p:spPr>
-          <a:xfrm>
-            <a:off x="5943600" y="2670048"/>
+          <p:cNvPr id="34" name="Shape 32"/>
+          <p:cNvSpPr/>
+          <p:nvPr/>
+        </p:nvSpPr>
+        <p:spPr>
+          <a:xfrm>
+            <a:off x="5943600" y="3127248"/>
             <a:ext cx="1463040" cy="420624"/>
           </a:xfrm>
           <a:prstGeom prst="rect">
@@ -39207,13 +38664,13 @@
       </p:sp>
       <p:sp>
         <p:nvSpPr>
-          <p:cNvPr id="32" name="Text 30"/>
-          <p:cNvSpPr/>
-          <p:nvPr/>
-        </p:nvSpPr>
-        <p:spPr>
-          <a:xfrm>
-            <a:off x="5943600" y="2670048"/>
+          <p:cNvPr id="35" name="Text 33"/>
+          <p:cNvSpPr/>
+          <p:nvPr/>
+        </p:nvSpPr>
+        <p:spPr>
+          <a:xfrm>
+            <a:off x="5943600" y="3127248"/>
             <a:ext cx="1463040" cy="420624"/>
           </a:xfrm>
           <a:prstGeom prst="rect">
@@ -39238,7 +38695,7 @@
                 <a:ea typeface="Trebuchet MS" pitchFamily="34" charset="-122"/>
                 <a:cs typeface="Trebuchet MS" pitchFamily="34" charset="-120"/>
               </a:rPr>
-              <a:t>-ed</a:t>
+              <a:t>-ing</a:t>
             </a:r>
             <a:endParaRPr lang="en-US" sz="1300" dirty="0"/>
           </a:p>
@@ -39246,319 +38703,13 @@
       </p:sp>
       <p:sp>
         <p:nvSpPr>
-          <p:cNvPr id="33" name="Shape 31"/>
-          <p:cNvSpPr/>
-          <p:nvPr/>
-        </p:nvSpPr>
-        <p:spPr>
-          <a:xfrm>
-            <a:off x="640080" y="3127248"/>
-            <a:ext cx="1463040" cy="420624"/>
-          </a:xfrm>
-          <a:prstGeom prst="rect">
-            <a:avLst/>
-          </a:prstGeom>
-          <a:solidFill>
-            <a:srgbClr val="DDD6FE"/>
-          </a:solidFill>
-          <a:ln w="12700">
-            <a:solidFill>
-              <a:srgbClr val="E5E7EB"/>
-            </a:solidFill>
-            <a:prstDash val="solid"/>
-          </a:ln>
-        </p:spPr>
-      </p:sp>
-      <p:sp>
-        <p:nvSpPr>
-          <p:cNvPr id="34" name="Text 32"/>
-          <p:cNvSpPr/>
-          <p:nvPr/>
-        </p:nvSpPr>
-        <p:spPr>
-          <a:xfrm>
-            <a:off x="640080" y="3127248"/>
-            <a:ext cx="1463040" cy="420624"/>
-          </a:xfrm>
-          <a:prstGeom prst="rect">
-            <a:avLst/>
-          </a:prstGeom>
-          <a:noFill/>
-          <a:ln/>
-        </p:spPr>
-        <p:txBody>
-          <a:bodyPr wrap="square" lIns="0" tIns="0" rIns="0" bIns="0" rtlCol="0" anchor="ctr"/>
-          <a:lstStyle/>
-          <a:p>
-            <a:pPr algn="ctr" indent="0" marL="0">
-              <a:buNone/>
-            </a:pPr>
-            <a:r>
-              <a:rPr lang="en-US" sz="1300" b="1" dirty="0">
-                <a:solidFill>
-                  <a:srgbClr val="4C1D95"/>
-                </a:solidFill>
-                <a:latin typeface="Trebuchet MS" pitchFamily="34" charset="0"/>
-                <a:ea typeface="Trebuchet MS" pitchFamily="34" charset="-122"/>
-                <a:cs typeface="Trebuchet MS" pitchFamily="34" charset="-120"/>
-              </a:rPr>
-              <a:t>be-</a:t>
-            </a:r>
-            <a:endParaRPr lang="en-US" sz="1300" dirty="0"/>
-          </a:p>
-        </p:txBody>
-      </p:sp>
-      <p:sp>
-        <p:nvSpPr>
-          <p:cNvPr id="35" name="Shape 33"/>
-          <p:cNvSpPr/>
-          <p:nvPr/>
-        </p:nvSpPr>
-        <p:spPr>
-          <a:xfrm>
-            <a:off x="3291840" y="3127248"/>
-            <a:ext cx="1645920" cy="420624"/>
-          </a:xfrm>
-          <a:prstGeom prst="rect">
-            <a:avLst/>
-          </a:prstGeom>
-          <a:solidFill>
-            <a:srgbClr val="F1F5F9"/>
-          </a:solidFill>
-          <a:ln w="12700">
-            <a:solidFill>
-              <a:srgbClr val="E5E7EB"/>
-            </a:solidFill>
-            <a:prstDash val="solid"/>
-          </a:ln>
-        </p:spPr>
-      </p:sp>
-      <p:sp>
-        <p:nvSpPr>
-          <p:cNvPr id="36" name="Shape 34"/>
-          <p:cNvSpPr/>
-          <p:nvPr/>
-        </p:nvSpPr>
-        <p:spPr>
-          <a:xfrm>
-            <a:off x="5943600" y="3127248"/>
-            <a:ext cx="1463040" cy="420624"/>
-          </a:xfrm>
-          <a:prstGeom prst="rect">
-            <a:avLst/>
-          </a:prstGeom>
-          <a:solidFill>
-            <a:srgbClr val="FCE7F3"/>
-          </a:solidFill>
-          <a:ln w="12700">
-            <a:solidFill>
-              <a:srgbClr val="E5E7EB"/>
-            </a:solidFill>
-            <a:prstDash val="solid"/>
-          </a:ln>
-        </p:spPr>
-      </p:sp>
-      <p:sp>
-        <p:nvSpPr>
-          <p:cNvPr id="37" name="Text 35"/>
-          <p:cNvSpPr/>
-          <p:nvPr/>
-        </p:nvSpPr>
-        <p:spPr>
-          <a:xfrm>
-            <a:off x="5943600" y="3127248"/>
-            <a:ext cx="1463040" cy="420624"/>
-          </a:xfrm>
-          <a:prstGeom prst="rect">
-            <a:avLst/>
-          </a:prstGeom>
-          <a:noFill/>
-          <a:ln/>
-        </p:spPr>
-        <p:txBody>
-          <a:bodyPr wrap="square" lIns="0" tIns="0" rIns="0" bIns="0" rtlCol="0" anchor="ctr"/>
-          <a:lstStyle/>
-          <a:p>
-            <a:pPr algn="ctr" indent="0" marL="0">
-              <a:buNone/>
-            </a:pPr>
-            <a:r>
-              <a:rPr lang="en-US" sz="1300" b="1" dirty="0">
-                <a:solidFill>
-                  <a:srgbClr val="9D174D"/>
-                </a:solidFill>
-                <a:latin typeface="Trebuchet MS" pitchFamily="34" charset="0"/>
-                <a:ea typeface="Trebuchet MS" pitchFamily="34" charset="-122"/>
-                <a:cs typeface="Trebuchet MS" pitchFamily="34" charset="-120"/>
-              </a:rPr>
-              <a:t>-ship</a:t>
-            </a:r>
-            <a:endParaRPr lang="en-US" sz="1300" dirty="0"/>
-          </a:p>
-        </p:txBody>
-      </p:sp>
-      <p:sp>
-        <p:nvSpPr>
-          <p:cNvPr id="38" name="Shape 36"/>
-          <p:cNvSpPr/>
-          <p:nvPr/>
-        </p:nvSpPr>
-        <p:spPr>
-          <a:xfrm>
-            <a:off x="640080" y="3584448"/>
-            <a:ext cx="1463040" cy="420624"/>
-          </a:xfrm>
-          <a:prstGeom prst="rect">
-            <a:avLst/>
-          </a:prstGeom>
-          <a:solidFill>
-            <a:srgbClr val="DDD6FE"/>
-          </a:solidFill>
-          <a:ln w="12700">
-            <a:solidFill>
-              <a:srgbClr val="E5E7EB"/>
-            </a:solidFill>
-            <a:prstDash val="solid"/>
-          </a:ln>
-        </p:spPr>
-      </p:sp>
-      <p:sp>
-        <p:nvSpPr>
-          <p:cNvPr id="39" name="Text 37"/>
-          <p:cNvSpPr/>
-          <p:nvPr/>
-        </p:nvSpPr>
-        <p:spPr>
-          <a:xfrm>
-            <a:off x="640080" y="3584448"/>
-            <a:ext cx="1463040" cy="420624"/>
-          </a:xfrm>
-          <a:prstGeom prst="rect">
-            <a:avLst/>
-          </a:prstGeom>
-          <a:noFill/>
-          <a:ln/>
-        </p:spPr>
-        <p:txBody>
-          <a:bodyPr wrap="square" lIns="0" tIns="0" rIns="0" bIns="0" rtlCol="0" anchor="ctr"/>
-          <a:lstStyle/>
-          <a:p>
-            <a:pPr algn="ctr" indent="0" marL="0">
-              <a:buNone/>
-            </a:pPr>
-            <a:r>
-              <a:rPr lang="en-US" sz="1300" b="1" dirty="0">
-                <a:solidFill>
-                  <a:srgbClr val="4C1D95"/>
-                </a:solidFill>
-                <a:latin typeface="Trebuchet MS" pitchFamily="34" charset="0"/>
-                <a:ea typeface="Trebuchet MS" pitchFamily="34" charset="-122"/>
-                <a:cs typeface="Trebuchet MS" pitchFamily="34" charset="-120"/>
-              </a:rPr>
-              <a:t>ad-</a:t>
-            </a:r>
-            <a:endParaRPr lang="en-US" sz="1300" dirty="0"/>
-          </a:p>
-        </p:txBody>
-      </p:sp>
-      <p:sp>
-        <p:nvSpPr>
-          <p:cNvPr id="40" name="Shape 38"/>
-          <p:cNvSpPr/>
-          <p:nvPr/>
-        </p:nvSpPr>
-        <p:spPr>
-          <a:xfrm>
-            <a:off x="3291840" y="3584448"/>
-            <a:ext cx="1645920" cy="420624"/>
-          </a:xfrm>
-          <a:prstGeom prst="rect">
-            <a:avLst/>
-          </a:prstGeom>
-          <a:solidFill>
-            <a:srgbClr val="F8FAFC"/>
-          </a:solidFill>
-          <a:ln w="12700">
-            <a:solidFill>
-              <a:srgbClr val="E5E7EB"/>
-            </a:solidFill>
-            <a:prstDash val="solid"/>
-          </a:ln>
-        </p:spPr>
-      </p:sp>
-      <p:sp>
-        <p:nvSpPr>
-          <p:cNvPr id="41" name="Shape 39"/>
-          <p:cNvSpPr/>
-          <p:nvPr/>
-        </p:nvSpPr>
-        <p:spPr>
-          <a:xfrm>
-            <a:off x="5943600" y="3584448"/>
-            <a:ext cx="1463040" cy="420624"/>
-          </a:xfrm>
-          <a:prstGeom prst="rect">
-            <a:avLst/>
-          </a:prstGeom>
-          <a:solidFill>
-            <a:srgbClr val="FCE7F3"/>
-          </a:solidFill>
-          <a:ln w="12700">
-            <a:solidFill>
-              <a:srgbClr val="E5E7EB"/>
-            </a:solidFill>
-            <a:prstDash val="solid"/>
-          </a:ln>
-        </p:spPr>
-      </p:sp>
-      <p:sp>
-        <p:nvSpPr>
-          <p:cNvPr id="42" name="Text 40"/>
-          <p:cNvSpPr/>
-          <p:nvPr/>
-        </p:nvSpPr>
-        <p:spPr>
-          <a:xfrm>
-            <a:off x="5943600" y="3584448"/>
-            <a:ext cx="1463040" cy="420624"/>
-          </a:xfrm>
-          <a:prstGeom prst="rect">
-            <a:avLst/>
-          </a:prstGeom>
-          <a:noFill/>
-          <a:ln/>
-        </p:spPr>
-        <p:txBody>
-          <a:bodyPr wrap="square" lIns="0" tIns="0" rIns="0" bIns="0" rtlCol="0" anchor="ctr"/>
-          <a:lstStyle/>
-          <a:p>
-            <a:pPr algn="ctr" indent="0" marL="0">
-              <a:buNone/>
-            </a:pPr>
-            <a:r>
-              <a:rPr lang="en-US" sz="1300" b="1" dirty="0">
-                <a:solidFill>
-                  <a:srgbClr val="9D174D"/>
-                </a:solidFill>
-                <a:latin typeface="Trebuchet MS" pitchFamily="34" charset="0"/>
-                <a:ea typeface="Trebuchet MS" pitchFamily="34" charset="-122"/>
-                <a:cs typeface="Trebuchet MS" pitchFamily="34" charset="-120"/>
-              </a:rPr>
-              <a:t>-al</a:t>
-            </a:r>
-            <a:endParaRPr lang="en-US" sz="1300" dirty="0"/>
-          </a:p>
-        </p:txBody>
-      </p:sp>
-      <p:sp>
-        <p:nvSpPr>
-          <p:cNvPr id="43" name="Text 41"/>
-          <p:cNvSpPr/>
-          <p:nvPr/>
-        </p:nvSpPr>
-        <p:spPr>
-          <a:xfrm>
-            <a:off x="365760" y="4178808"/>
+          <p:cNvPr id="36" name="Text 34"/>
+          <p:cNvSpPr/>
+          <p:nvPr/>
+        </p:nvSpPr>
+        <p:spPr>
+          <a:xfrm>
+            <a:off x="365760" y="3721608"/>
             <a:ext cx="1097280" cy="420624"/>
           </a:xfrm>
           <a:prstGeom prst="rect">
@@ -39591,13 +38742,13 @@
       </p:sp>
       <p:sp>
         <p:nvSpPr>
-          <p:cNvPr id="44" name="Shape 42"/>
-          <p:cNvSpPr/>
-          <p:nvPr/>
-        </p:nvSpPr>
-        <p:spPr>
-          <a:xfrm>
-            <a:off x="1508760" y="4178808"/>
+          <p:cNvPr id="37" name="Shape 35"/>
+          <p:cNvSpPr/>
+          <p:nvPr/>
+        </p:nvSpPr>
+        <p:spPr>
+          <a:xfrm>
+            <a:off x="1508760" y="3721608"/>
             <a:ext cx="950976" cy="420624"/>
           </a:xfrm>
           <a:prstGeom prst="rect">
@@ -39625,13 +38776,13 @@
       </p:sp>
       <p:sp>
         <p:nvSpPr>
-          <p:cNvPr id="45" name="Text 43"/>
-          <p:cNvSpPr/>
-          <p:nvPr/>
-        </p:nvSpPr>
-        <p:spPr>
-          <a:xfrm>
-            <a:off x="1508760" y="4178808"/>
+          <p:cNvPr id="38" name="Text 36"/>
+          <p:cNvSpPr/>
+          <p:nvPr/>
+        </p:nvSpPr>
+        <p:spPr>
+          <a:xfrm>
+            <a:off x="1508760" y="3721608"/>
             <a:ext cx="950976" cy="420624"/>
           </a:xfrm>
           <a:prstGeom prst="rect">
@@ -39664,13 +38815,13 @@
       </p:sp>
       <p:sp>
         <p:nvSpPr>
-          <p:cNvPr id="46" name="Text 44"/>
-          <p:cNvSpPr/>
-          <p:nvPr/>
-        </p:nvSpPr>
-        <p:spPr>
-          <a:xfrm>
-            <a:off x="2487168" y="4178808"/>
+          <p:cNvPr id="39" name="Text 37"/>
+          <p:cNvSpPr/>
+          <p:nvPr/>
+        </p:nvSpPr>
+        <p:spPr>
+          <a:xfrm>
+            <a:off x="2487168" y="3721608"/>
             <a:ext cx="320040" cy="420624"/>
           </a:xfrm>
           <a:prstGeom prst="rect">
@@ -39703,13 +38854,13 @@
       </p:sp>
       <p:sp>
         <p:nvSpPr>
-          <p:cNvPr id="47" name="Shape 45"/>
-          <p:cNvSpPr/>
-          <p:nvPr/>
-        </p:nvSpPr>
-        <p:spPr>
-          <a:xfrm>
-            <a:off x="2834640" y="4178808"/>
+          <p:cNvPr id="40" name="Shape 38"/>
+          <p:cNvSpPr/>
+          <p:nvPr/>
+        </p:nvSpPr>
+        <p:spPr>
+          <a:xfrm>
+            <a:off x="2834640" y="3721608"/>
             <a:ext cx="1389888" cy="420624"/>
           </a:xfrm>
           <a:prstGeom prst="rect">
@@ -39737,13 +38888,13 @@
       </p:sp>
       <p:sp>
         <p:nvSpPr>
-          <p:cNvPr id="48" name="Text 46"/>
-          <p:cNvSpPr/>
-          <p:nvPr/>
-        </p:nvSpPr>
-        <p:spPr>
-          <a:xfrm>
-            <a:off x="2834640" y="4178808"/>
+          <p:cNvPr id="41" name="Text 39"/>
+          <p:cNvSpPr/>
+          <p:nvPr/>
+        </p:nvSpPr>
+        <p:spPr>
+          <a:xfrm>
+            <a:off x="2834640" y="3721608"/>
             <a:ext cx="1389888" cy="420624"/>
           </a:xfrm>
           <a:prstGeom prst="rect">
@@ -39776,13 +38927,13 @@
       </p:sp>
       <p:sp>
         <p:nvSpPr>
-          <p:cNvPr id="49" name="Text 47"/>
-          <p:cNvSpPr/>
-          <p:nvPr/>
-        </p:nvSpPr>
-        <p:spPr>
-          <a:xfrm>
-            <a:off x="4251960" y="4178808"/>
+          <p:cNvPr id="42" name="Text 40"/>
+          <p:cNvSpPr/>
+          <p:nvPr/>
+        </p:nvSpPr>
+        <p:spPr>
+          <a:xfrm>
+            <a:off x="4251960" y="3721608"/>
             <a:ext cx="320040" cy="420624"/>
           </a:xfrm>
           <a:prstGeom prst="rect">
@@ -39815,14 +38966,14 @@
       </p:sp>
       <p:sp>
         <p:nvSpPr>
-          <p:cNvPr id="50" name="Shape 48"/>
-          <p:cNvSpPr/>
-          <p:nvPr/>
-        </p:nvSpPr>
-        <p:spPr>
-          <a:xfrm>
-            <a:off x="4599432" y="4178808"/>
-            <a:ext cx="1097280" cy="420624"/>
+          <p:cNvPr id="43" name="Shape 41"/>
+          <p:cNvSpPr/>
+          <p:nvPr/>
+        </p:nvSpPr>
+        <p:spPr>
+          <a:xfrm>
+            <a:off x="4599432" y="3721608"/>
+            <a:ext cx="822960" cy="420624"/>
           </a:xfrm>
           <a:prstGeom prst="rect">
             <a:avLst>
@@ -39849,14 +39000,14 @@
       </p:sp>
       <p:sp>
         <p:nvSpPr>
-          <p:cNvPr id="51" name="Text 49"/>
-          <p:cNvSpPr/>
-          <p:nvPr/>
-        </p:nvSpPr>
-        <p:spPr>
-          <a:xfrm>
-            <a:off x="4599432" y="4178808"/>
-            <a:ext cx="1097280" cy="420624"/>
+          <p:cNvPr id="44" name="Text 42"/>
+          <p:cNvSpPr/>
+          <p:nvPr/>
+        </p:nvSpPr>
+        <p:spPr>
+          <a:xfrm>
+            <a:off x="4599432" y="3721608"/>
+            <a:ext cx="822960" cy="420624"/>
           </a:xfrm>
           <a:prstGeom prst="rect">
             <a:avLst/>
@@ -39880,7 +39031,7 @@
                 <a:ea typeface="Trebuchet MS" pitchFamily="34" charset="-122"/>
                 <a:cs typeface="Trebuchet MS" pitchFamily="34" charset="-120"/>
               </a:rPr>
-              <a:t>-ment</a:t>
+              <a:t>-ed</a:t>
             </a:r>
             <a:endParaRPr lang="en-US" sz="1300" dirty="0"/>
           </a:p>
@@ -39888,13 +39039,13 @@
       </p:sp>
       <p:sp>
         <p:nvSpPr>
-          <p:cNvPr id="52" name="Text 50"/>
-          <p:cNvSpPr/>
-          <p:nvPr/>
-        </p:nvSpPr>
-        <p:spPr>
-          <a:xfrm>
-            <a:off x="5769864" y="4178808"/>
+          <p:cNvPr id="45" name="Text 43"/>
+          <p:cNvSpPr/>
+          <p:nvPr/>
+        </p:nvSpPr>
+        <p:spPr>
+          <a:xfrm>
+            <a:off x="5495544" y="3721608"/>
             <a:ext cx="365760" cy="420624"/>
           </a:xfrm>
           <a:prstGeom prst="rect">
@@ -39927,13 +39078,13 @@
       </p:sp>
       <p:sp>
         <p:nvSpPr>
-          <p:cNvPr id="53" name="Shape 51"/>
-          <p:cNvSpPr/>
-          <p:nvPr/>
-        </p:nvSpPr>
-        <p:spPr>
-          <a:xfrm>
-            <a:off x="6181344" y="4178808"/>
+          <p:cNvPr id="46" name="Shape 44"/>
+          <p:cNvSpPr/>
+          <p:nvPr/>
+        </p:nvSpPr>
+        <p:spPr>
+          <a:xfrm>
+            <a:off x="5907024" y="3721608"/>
             <a:ext cx="2194560" cy="420624"/>
           </a:xfrm>
           <a:prstGeom prst="rect">
@@ -39954,13 +39105,13 @@
       </p:sp>
       <p:sp>
         <p:nvSpPr>
-          <p:cNvPr id="54" name="Text 52"/>
-          <p:cNvSpPr/>
-          <p:nvPr/>
-        </p:nvSpPr>
-        <p:spPr>
-          <a:xfrm>
-            <a:off x="6181344" y="4178808"/>
+          <p:cNvPr id="47" name="Text 45"/>
+          <p:cNvSpPr/>
+          <p:nvPr/>
+        </p:nvSpPr>
+        <p:spPr>
+          <a:xfrm>
+            <a:off x="5907024" y="3721608"/>
             <a:ext cx="2194560" cy="420624"/>
           </a:xfrm>
           <a:prstGeom prst="rect">
@@ -40277,7 +39428,7 @@
                 <a:ea typeface="Calibri" pitchFamily="34" charset="-122"/>
                 <a:cs typeface="Calibri" pitchFamily="34" charset="-120"/>
               </a:rPr>
-              <a:t>Word Labs  •  wordlabs.app  •  Root: 'judge' = to decide or form opinion</a:t>
+              <a:t>Word Labs  •  wordlabs.app  •  Root: 'judge' = decide; form an opinion</a:t>
             </a:r>
             <a:endParaRPr lang="en-US" sz="800" dirty="0"/>
           </a:p>
@@ -40455,7 +39606,7 @@
                 <a:ea typeface="Calibri" pitchFamily="34" charset="-122"/>
                 <a:cs typeface="Calibri" pitchFamily="34" charset="-120"/>
               </a:rPr>
-              <a:t>To make a wrong or unfair decision about someone or something.</a:t>
+              <a:t>more than one judge, or he/she judges something (verb form)</a:t>
             </a:r>
             <a:endParaRPr lang="en-US" sz="1200" dirty="0"/>
           </a:p>
@@ -40528,7 +39679,7 @@
                 <a:ea typeface="Trebuchet MS" pitchFamily="34" charset="-122"/>
                 <a:cs typeface="Trebuchet MS" pitchFamily="34" charset="-120"/>
               </a:rPr>
-              <a:t>judgement</a:t>
+              <a:t>judged</a:t>
             </a:r>
             <a:endParaRPr lang="en-US" sz="1200" dirty="0"/>
           </a:p>
@@ -40594,7 +39745,7 @@
                 <a:ea typeface="Calibri" pitchFamily="34" charset="-122"/>
                 <a:cs typeface="Calibri" pitchFamily="34" charset="-120"/>
               </a:rPr>
-              <a:t>A wrong or unfair decision that turns out to be a mistake.</a:t>
+              <a:t>in the process of forming an opinion or deciding a result</a:t>
             </a:r>
             <a:endParaRPr lang="en-US" sz="1200" dirty="0"/>
           </a:p>
@@ -40667,7 +39818,7 @@
                 <a:ea typeface="Trebuchet MS" pitchFamily="34" charset="-122"/>
                 <a:cs typeface="Trebuchet MS" pitchFamily="34" charset="-120"/>
               </a:rPr>
-              <a:t>misjudge</a:t>
+              <a:t>judges</a:t>
             </a:r>
             <a:endParaRPr lang="en-US" sz="1200" dirty="0"/>
           </a:p>
@@ -40733,7 +39884,7 @@
                 <a:ea typeface="Calibri" pitchFamily="34" charset="-122"/>
                 <a:cs typeface="Calibri" pitchFamily="34" charset="-120"/>
               </a:rPr>
-              <a:t>A person who decides the winner of a competition or makes decisions in a court of law.</a:t>
+              <a:t>a person who decides the result in a court or competition</a:t>
             </a:r>
             <a:endParaRPr lang="en-US" sz="1200" dirty="0"/>
           </a:p>
@@ -40806,7 +39957,7 @@
                 <a:ea typeface="Trebuchet MS" pitchFamily="34" charset="-122"/>
                 <a:cs typeface="Trebuchet MS" pitchFamily="34" charset="-120"/>
               </a:rPr>
-              <a:t>prejudge</a:t>
+              <a:t>judging</a:t>
             </a:r>
             <a:endParaRPr lang="en-US" sz="1200" dirty="0"/>
           </a:p>
@@ -40872,424 +40023,7 @@
                 <a:ea typeface="Calibri" pitchFamily="34" charset="-122"/>
                 <a:cs typeface="Calibri" pitchFamily="34" charset="-120"/>
               </a:rPr>
-              <a:t>To look at something again and form a new opinion or decision.</a:t>
-            </a:r>
-            <a:endParaRPr lang="en-US" sz="1200" dirty="0"/>
-          </a:p>
-        </p:txBody>
-      </p:sp>
-      <p:sp>
-        <p:nvSpPr>
-          <p:cNvPr id="27" name="Shape 25"/>
-          <p:cNvSpPr/>
-          <p:nvPr/>
-        </p:nvSpPr>
-        <p:spPr>
-          <a:xfrm>
-            <a:off x="365760" y="3310128"/>
-            <a:ext cx="2011680" cy="457200"/>
-          </a:xfrm>
-          <a:prstGeom prst="rect">
-            <a:avLst>
-              <a:gd name="adj" fmla="val 12000"/>
-            </a:avLst>
-          </a:prstGeom>
-          <a:solidFill>
-            <a:srgbClr val="EEF2FF"/>
-          </a:solidFill>
-          <a:ln w="12700">
-            <a:solidFill>
-              <a:srgbClr val="6366F1"/>
-            </a:solidFill>
-            <a:prstDash val="solid"/>
-          </a:ln>
-          <a:effectLst>
-            <a:outerShdw sx="100000" sy="100000" kx="0" ky="0" algn="bl" rotWithShape="0" blurRad="101600" dist="38100" dir="8100000">
-              <a:srgbClr val="000000">
-                <a:alpha val="12000"/>
-              </a:srgbClr>
-            </a:outerShdw>
-          </a:effectLst>
-        </p:spPr>
-      </p:sp>
-      <p:sp>
-        <p:nvSpPr>
-          <p:cNvPr id="28" name="Text 26"/>
-          <p:cNvSpPr/>
-          <p:nvPr/>
-        </p:nvSpPr>
-        <p:spPr>
-          <a:xfrm>
-            <a:off x="365760" y="3310128"/>
-            <a:ext cx="2011680" cy="457200"/>
-          </a:xfrm>
-          <a:prstGeom prst="rect">
-            <a:avLst/>
-          </a:prstGeom>
-          <a:noFill/>
-          <a:ln/>
-        </p:spPr>
-        <p:txBody>
-          <a:bodyPr wrap="square" lIns="0" tIns="0" rIns="0" bIns="0" rtlCol="0" anchor="ctr"/>
-          <a:lstStyle/>
-          <a:p>
-            <a:pPr algn="ctr" indent="0" marL="0">
-              <a:buNone/>
-            </a:pPr>
-            <a:r>
-              <a:rPr lang="en-US" sz="1200" b="1" dirty="0">
-                <a:solidFill>
-                  <a:srgbClr val="4338CA"/>
-                </a:solidFill>
-                <a:latin typeface="Trebuchet MS" pitchFamily="34" charset="0"/>
-                <a:ea typeface="Trebuchet MS" pitchFamily="34" charset="-122"/>
-                <a:cs typeface="Trebuchet MS" pitchFamily="34" charset="-120"/>
-              </a:rPr>
-              <a:t>judging</a:t>
-            </a:r>
-            <a:endParaRPr lang="en-US" sz="1200" dirty="0"/>
-          </a:p>
-        </p:txBody>
-      </p:sp>
-      <p:sp>
-        <p:nvSpPr>
-          <p:cNvPr id="29" name="Shape 27"/>
-          <p:cNvSpPr/>
-          <p:nvPr/>
-        </p:nvSpPr>
-        <p:spPr>
-          <a:xfrm>
-            <a:off x="2514600" y="3310128"/>
-            <a:ext cx="6263640" cy="457200"/>
-          </a:xfrm>
-          <a:prstGeom prst="rect">
-            <a:avLst>
-              <a:gd name="adj" fmla="val 12000"/>
-            </a:avLst>
-          </a:prstGeom>
-          <a:solidFill>
-            <a:srgbClr val="F8FAFC"/>
-          </a:solidFill>
-          <a:ln w="12700">
-            <a:solidFill>
-              <a:srgbClr val="E2E8F0"/>
-            </a:solidFill>
-            <a:prstDash val="solid"/>
-          </a:ln>
-        </p:spPr>
-      </p:sp>
-      <p:sp>
-        <p:nvSpPr>
-          <p:cNvPr id="30" name="Text 28"/>
-          <p:cNvSpPr/>
-          <p:nvPr/>
-        </p:nvSpPr>
-        <p:spPr>
-          <a:xfrm>
-            <a:off x="2651760" y="3310128"/>
-            <a:ext cx="6035040" cy="457200"/>
-          </a:xfrm>
-          <a:prstGeom prst="rect">
-            <a:avLst/>
-          </a:prstGeom>
-          <a:noFill/>
-          <a:ln/>
-        </p:spPr>
-        <p:txBody>
-          <a:bodyPr wrap="square" rtlCol="0" anchor="ctr"/>
-          <a:lstStyle/>
-          <a:p>
-            <a:pPr algn="l" indent="0" marL="0">
-              <a:buNone/>
-            </a:pPr>
-            <a:r>
-              <a:rPr lang="en-US" sz="1200" dirty="0">
-                <a:solidFill>
-                  <a:srgbClr val="0F172A"/>
-                </a:solidFill>
-                <a:latin typeface="Calibri" pitchFamily="34" charset="0"/>
-                <a:ea typeface="Calibri" pitchFamily="34" charset="-122"/>
-                <a:cs typeface="Calibri" pitchFamily="34" charset="-120"/>
-              </a:rPr>
-              <a:t>The act of deciding or forming an opinion about something.</a:t>
-            </a:r>
-            <a:endParaRPr lang="en-US" sz="1200" dirty="0"/>
-          </a:p>
-        </p:txBody>
-      </p:sp>
-      <p:sp>
-        <p:nvSpPr>
-          <p:cNvPr id="31" name="Shape 29"/>
-          <p:cNvSpPr/>
-          <p:nvPr/>
-        </p:nvSpPr>
-        <p:spPr>
-          <a:xfrm>
-            <a:off x="365760" y="3840480"/>
-            <a:ext cx="2011680" cy="457200"/>
-          </a:xfrm>
-          <a:prstGeom prst="rect">
-            <a:avLst>
-              <a:gd name="adj" fmla="val 12000"/>
-            </a:avLst>
-          </a:prstGeom>
-          <a:solidFill>
-            <a:srgbClr val="EEF2FF"/>
-          </a:solidFill>
-          <a:ln w="12700">
-            <a:solidFill>
-              <a:srgbClr val="6366F1"/>
-            </a:solidFill>
-            <a:prstDash val="solid"/>
-          </a:ln>
-          <a:effectLst>
-            <a:outerShdw sx="100000" sy="100000" kx="0" ky="0" algn="bl" rotWithShape="0" blurRad="101600" dist="38100" dir="8100000">
-              <a:srgbClr val="000000">
-                <a:alpha val="12000"/>
-              </a:srgbClr>
-            </a:outerShdw>
-          </a:effectLst>
-        </p:spPr>
-      </p:sp>
-      <p:sp>
-        <p:nvSpPr>
-          <p:cNvPr id="32" name="Text 30"/>
-          <p:cNvSpPr/>
-          <p:nvPr/>
-        </p:nvSpPr>
-        <p:spPr>
-          <a:xfrm>
-            <a:off x="365760" y="3840480"/>
-            <a:ext cx="2011680" cy="457200"/>
-          </a:xfrm>
-          <a:prstGeom prst="rect">
-            <a:avLst/>
-          </a:prstGeom>
-          <a:noFill/>
-          <a:ln/>
-        </p:spPr>
-        <p:txBody>
-          <a:bodyPr wrap="square" lIns="0" tIns="0" rIns="0" bIns="0" rtlCol="0" anchor="ctr"/>
-          <a:lstStyle/>
-          <a:p>
-            <a:pPr algn="ctr" indent="0" marL="0">
-              <a:buNone/>
-            </a:pPr>
-            <a:r>
-              <a:rPr lang="en-US" sz="1200" b="1" dirty="0">
-                <a:solidFill>
-                  <a:srgbClr val="4338CA"/>
-                </a:solidFill>
-                <a:latin typeface="Trebuchet MS" pitchFamily="34" charset="0"/>
-                <a:ea typeface="Trebuchet MS" pitchFamily="34" charset="-122"/>
-                <a:cs typeface="Trebuchet MS" pitchFamily="34" charset="-120"/>
-              </a:rPr>
-              <a:t>misjudgement</a:t>
-            </a:r>
-            <a:endParaRPr lang="en-US" sz="1200" dirty="0"/>
-          </a:p>
-        </p:txBody>
-      </p:sp>
-      <p:sp>
-        <p:nvSpPr>
-          <p:cNvPr id="33" name="Shape 31"/>
-          <p:cNvSpPr/>
-          <p:nvPr/>
-        </p:nvSpPr>
-        <p:spPr>
-          <a:xfrm>
-            <a:off x="2514600" y="3840480"/>
-            <a:ext cx="6263640" cy="457200"/>
-          </a:xfrm>
-          <a:prstGeom prst="rect">
-            <a:avLst>
-              <a:gd name="adj" fmla="val 12000"/>
-            </a:avLst>
-          </a:prstGeom>
-          <a:solidFill>
-            <a:srgbClr val="F8FAFC"/>
-          </a:solidFill>
-          <a:ln w="12700">
-            <a:solidFill>
-              <a:srgbClr val="E2E8F0"/>
-            </a:solidFill>
-            <a:prstDash val="solid"/>
-          </a:ln>
-        </p:spPr>
-      </p:sp>
-      <p:sp>
-        <p:nvSpPr>
-          <p:cNvPr id="34" name="Text 32"/>
-          <p:cNvSpPr/>
-          <p:nvPr/>
-        </p:nvSpPr>
-        <p:spPr>
-          <a:xfrm>
-            <a:off x="2651760" y="3840480"/>
-            <a:ext cx="6035040" cy="457200"/>
-          </a:xfrm>
-          <a:prstGeom prst="rect">
-            <a:avLst/>
-          </a:prstGeom>
-          <a:noFill/>
-          <a:ln/>
-        </p:spPr>
-        <p:txBody>
-          <a:bodyPr wrap="square" rtlCol="0" anchor="ctr"/>
-          <a:lstStyle/>
-          <a:p>
-            <a:pPr algn="l" indent="0" marL="0">
-              <a:buNone/>
-            </a:pPr>
-            <a:r>
-              <a:rPr lang="en-US" sz="1200" dirty="0">
-                <a:solidFill>
-                  <a:srgbClr val="0F172A"/>
-                </a:solidFill>
-                <a:latin typeface="Calibri" pitchFamily="34" charset="0"/>
-                <a:ea typeface="Calibri" pitchFamily="34" charset="-122"/>
-                <a:cs typeface="Calibri" pitchFamily="34" charset="-120"/>
-              </a:rPr>
-              <a:t>To form an opinion about something before you have all the facts.</a:t>
-            </a:r>
-            <a:endParaRPr lang="en-US" sz="1200" dirty="0"/>
-          </a:p>
-        </p:txBody>
-      </p:sp>
-      <p:sp>
-        <p:nvSpPr>
-          <p:cNvPr id="35" name="Shape 33"/>
-          <p:cNvSpPr/>
-          <p:nvPr/>
-        </p:nvSpPr>
-        <p:spPr>
-          <a:xfrm>
-            <a:off x="365760" y="4370832"/>
-            <a:ext cx="2011680" cy="457200"/>
-          </a:xfrm>
-          <a:prstGeom prst="rect">
-            <a:avLst>
-              <a:gd name="adj" fmla="val 12000"/>
-            </a:avLst>
-          </a:prstGeom>
-          <a:solidFill>
-            <a:srgbClr val="EEF2FF"/>
-          </a:solidFill>
-          <a:ln w="12700">
-            <a:solidFill>
-              <a:srgbClr val="6366F1"/>
-            </a:solidFill>
-            <a:prstDash val="solid"/>
-          </a:ln>
-          <a:effectLst>
-            <a:outerShdw sx="100000" sy="100000" kx="0" ky="0" algn="bl" rotWithShape="0" blurRad="101600" dist="38100" dir="8100000">
-              <a:srgbClr val="000000">
-                <a:alpha val="12000"/>
-              </a:srgbClr>
-            </a:outerShdw>
-          </a:effectLst>
-        </p:spPr>
-      </p:sp>
-      <p:sp>
-        <p:nvSpPr>
-          <p:cNvPr id="36" name="Text 34"/>
-          <p:cNvSpPr/>
-          <p:nvPr/>
-        </p:nvSpPr>
-        <p:spPr>
-          <a:xfrm>
-            <a:off x="365760" y="4370832"/>
-            <a:ext cx="2011680" cy="457200"/>
-          </a:xfrm>
-          <a:prstGeom prst="rect">
-            <a:avLst/>
-          </a:prstGeom>
-          <a:noFill/>
-          <a:ln/>
-        </p:spPr>
-        <p:txBody>
-          <a:bodyPr wrap="square" lIns="0" tIns="0" rIns="0" bIns="0" rtlCol="0" anchor="ctr"/>
-          <a:lstStyle/>
-          <a:p>
-            <a:pPr algn="ctr" indent="0" marL="0">
-              <a:buNone/>
-            </a:pPr>
-            <a:r>
-              <a:rPr lang="en-US" sz="1200" b="1" dirty="0">
-                <a:solidFill>
-                  <a:srgbClr val="4338CA"/>
-                </a:solidFill>
-                <a:latin typeface="Trebuchet MS" pitchFamily="34" charset="0"/>
-                <a:ea typeface="Trebuchet MS" pitchFamily="34" charset="-122"/>
-                <a:cs typeface="Trebuchet MS" pitchFamily="34" charset="-120"/>
-              </a:rPr>
-              <a:t>rejudge</a:t>
-            </a:r>
-            <a:endParaRPr lang="en-US" sz="1200" dirty="0"/>
-          </a:p>
-        </p:txBody>
-      </p:sp>
-      <p:sp>
-        <p:nvSpPr>
-          <p:cNvPr id="37" name="Shape 35"/>
-          <p:cNvSpPr/>
-          <p:nvPr/>
-        </p:nvSpPr>
-        <p:spPr>
-          <a:xfrm>
-            <a:off x="2514600" y="4370832"/>
-            <a:ext cx="6263640" cy="457200"/>
-          </a:xfrm>
-          <a:prstGeom prst="rect">
-            <a:avLst>
-              <a:gd name="adj" fmla="val 12000"/>
-            </a:avLst>
-          </a:prstGeom>
-          <a:solidFill>
-            <a:srgbClr val="F8FAFC"/>
-          </a:solidFill>
-          <a:ln w="12700">
-            <a:solidFill>
-              <a:srgbClr val="E2E8F0"/>
-            </a:solidFill>
-            <a:prstDash val="solid"/>
-          </a:ln>
-        </p:spPr>
-      </p:sp>
-      <p:sp>
-        <p:nvSpPr>
-          <p:cNvPr id="38" name="Text 36"/>
-          <p:cNvSpPr/>
-          <p:nvPr/>
-        </p:nvSpPr>
-        <p:spPr>
-          <a:xfrm>
-            <a:off x="2651760" y="4370832"/>
-            <a:ext cx="6035040" cy="457200"/>
-          </a:xfrm>
-          <a:prstGeom prst="rect">
-            <a:avLst/>
-          </a:prstGeom>
-          <a:noFill/>
-          <a:ln/>
-        </p:spPr>
-        <p:txBody>
-          <a:bodyPr wrap="square" rtlCol="0" anchor="ctr"/>
-          <a:lstStyle/>
-          <a:p>
-            <a:pPr algn="l" indent="0" marL="0">
-              <a:buNone/>
-            </a:pPr>
-            <a:r>
-              <a:rPr lang="en-US" sz="1200" dirty="0">
-                <a:solidFill>
-                  <a:srgbClr val="0F172A"/>
-                </a:solidFill>
-                <a:latin typeface="Calibri" pitchFamily="34" charset="0"/>
-                <a:ea typeface="Calibri" pitchFamily="34" charset="-122"/>
-                <a:cs typeface="Calibri" pitchFamily="34" charset="-120"/>
-              </a:rPr>
-              <a:t>A decision or opinion formed after thinking carefully about something.</a:t>
+              <a:t>decided or formed an opinion about something (past tense)</a:t>
             </a:r>
             <a:endParaRPr lang="en-US" sz="1200" dirty="0"/>
           </a:p>
@@ -41581,7 +40315,7 @@
                 <a:ea typeface="Calibri" pitchFamily="34" charset="-122"/>
                 <a:cs typeface="Calibri" pitchFamily="34" charset="-120"/>
               </a:rPr>
-              <a:t>Word Labs  •  wordlabs.app  •  Root: 'judge' = to decide or form opinion</a:t>
+              <a:t>Word Labs  •  wordlabs.app  •  Root: 'judge' = decide; form an opinion</a:t>
             </a:r>
             <a:endParaRPr lang="en-US" sz="800" dirty="0"/>
           </a:p>
@@ -41784,7 +40518,7 @@
                 <a:ea typeface="Calibri" pitchFamily="34" charset="-122"/>
                 <a:cs typeface="Calibri" pitchFamily="34" charset="-120"/>
               </a:rPr>
-              <a:t>The judge carefully listened to both sides before making her final decision.</a:t>
+              <a:t>The judge listened carefully before making a decision.</a:t>
             </a:r>
             <a:endParaRPr lang="en-US" sz="1500" dirty="0"/>
           </a:p>
@@ -41948,7 +40682,7 @@
                 <a:ea typeface="Calibri" pitchFamily="34" charset="-122"/>
                 <a:cs typeface="Calibri" pitchFamily="34" charset="-120"/>
               </a:rPr>
-              <a:t>It is easy to misjudge someone when you do not know their full story.</a:t>
+              <a:t>The teacher judged the poems and picked a winner.</a:t>
             </a:r>
             <a:endParaRPr lang="en-US" sz="1500" dirty="0"/>
           </a:p>
@@ -42112,7 +40846,7 @@
                 <a:ea typeface="Calibri" pitchFamily="34" charset="-122"/>
                 <a:cs typeface="Calibri" pitchFamily="34" charset="-120"/>
               </a:rPr>
-              <a:t>The teacher reminded us not to be judgemental about the way other students learn.</a:t>
+              <a:t>The judges scored each gymnast out of ten.</a:t>
             </a:r>
             <a:endParaRPr lang="en-US" sz="1500" dirty="0"/>
           </a:p>
